--- a/design/templates/mashrabiya-cobalt/template.pptx
+++ b/design/templates/mashrabiya-cobalt/template.pptx
@@ -126,7 +126,7 @@
           <p:cNvPr id="9" name="creative_background">
             <a:extLst>
               <a:ext uri="{FF2B5EF4-FFF2-40B4-BE49-F238E27FC236}">
-                <a16:creationId xmlns:a16="http://schemas.microsoft.com/office/drawing/2014/main" id="{85ABD7AC-FC1D-13FD-F0C0-441BB3376D92}"/>
+                <a16:creationId xmlns:a16="http://schemas.microsoft.com/office/drawing/2014/main" id="{9CCEB1B4-2324-497C-F3EF-3C43BBA101A1}"/>
               </a:ext>
             </a:extLst>
           </p:cNvPr>
@@ -169,8 +169,8 @@
         </p:nvSpPr>
         <p:spPr>
           <a:xfrm>
-            <a:off x="457200" y="4960137"/>
-            <a:ext cx="7772400" cy="1463040"/>
+            <a:off x="2194560" y="4960137"/>
+            <a:ext cx="6032500" cy="1463040"/>
           </a:xfrm>
         </p:spPr>
         <p:txBody>
@@ -281,7 +281,12 @@
             <p:ph type="dt" sz="half" idx="10"/>
           </p:nvPr>
         </p:nvSpPr>
-        <p:spPr/>
+        <p:spPr>
+          <a:xfrm>
+            <a:off x="2194560" y="6470704"/>
+            <a:ext cx="977900" cy="274320"/>
+          </a:xfrm>
+        </p:spPr>
         <p:txBody>
           <a:bodyPr/>
           <a:lstStyle>
@@ -290,7 +295,7 @@
             </a:lvl1pPr>
           </a:lstStyle>
           <a:p>
-            <a:fld id="{5922C19E-7BE7-43A0-B17C-FD6B34B75143}" type="datetimeFigureOut">
+            <a:fld id="{4354DB14-F9AE-4C12-8CFE-33ABF7B568CC}" type="datetimeFigureOut">
               <a:rPr lang="en-US" smtClean="0"/>
               <a:t>10/3/2026</a:t>
             </a:fld>
@@ -332,7 +337,7 @@
           <a:bodyPr/>
           <a:lstStyle/>
           <a:p>
-            <a:fld id="{0DF0A140-DE23-4C37-9945-2DD700FC6B21}" type="slidenum">
+            <a:fld id="{74A457B9-11F0-4EFD-A461-9DC8C80A1D31}" type="slidenum">
               <a:rPr lang="en-US" smtClean="0"/>
               <a:t>‹#›</a:t>
             </a:fld>
@@ -343,7 +348,7 @@
     </p:spTree>
     <p:extLst>
       <p:ext uri="{BB962C8B-B14F-4D97-AF65-F5344CB8AC3E}">
-        <p14:creationId xmlns:p14="http://schemas.microsoft.com/office/powerpoint/2010/main" val="2962823970"/>
+        <p14:creationId xmlns:p14="http://schemas.microsoft.com/office/powerpoint/2010/main" val="3590467076"/>
       </p:ext>
     </p:extLst>
   </p:cSld>
@@ -375,7 +380,7 @@
           <p:cNvPr id="7" name="creative_background">
             <a:extLst>
               <a:ext uri="{FF2B5EF4-FFF2-40B4-BE49-F238E27FC236}">
-                <a16:creationId xmlns:a16="http://schemas.microsoft.com/office/drawing/2014/main" id="{9C4A5C9D-27E6-A40A-F805-8A99271610F6}"/>
+                <a16:creationId xmlns:a16="http://schemas.microsoft.com/office/drawing/2014/main" id="{E2510C8D-4F0C-2059-89B8-219693B30A4A}"/>
               </a:ext>
             </a:extLst>
           </p:cNvPr>
@@ -416,7 +421,12 @@
             <p:ph type="title"/>
           </p:nvPr>
         </p:nvSpPr>
-        <p:spPr/>
+        <p:spPr>
+          <a:xfrm>
+            <a:off x="2194560" y="585216"/>
+            <a:ext cx="8547100" cy="1499616"/>
+          </a:xfrm>
+        </p:spPr>
         <p:txBody>
           <a:bodyPr/>
           <a:lstStyle>
@@ -443,12 +453,17 @@
             <p:ph type="dt" sz="half" idx="10"/>
           </p:nvPr>
         </p:nvSpPr>
-        <p:spPr/>
+        <p:spPr>
+          <a:xfrm>
+            <a:off x="2194560" y="6470704"/>
+            <a:ext cx="977900" cy="274320"/>
+          </a:xfrm>
+        </p:spPr>
         <p:txBody>
           <a:bodyPr/>
           <a:lstStyle/>
           <a:p>
-            <a:fld id="{5922C19E-7BE7-43A0-B17C-FD6B34B75143}" type="datetimeFigureOut">
+            <a:fld id="{4354DB14-F9AE-4C12-8CFE-33ABF7B568CC}" type="datetimeFigureOut">
               <a:rPr lang="en-US" smtClean="0"/>
               <a:t>10/3/2026</a:t>
             </a:fld>
@@ -490,7 +505,7 @@
           <a:bodyPr/>
           <a:lstStyle/>
           <a:p>
-            <a:fld id="{0DF0A140-DE23-4C37-9945-2DD700FC6B21}" type="slidenum">
+            <a:fld id="{74A457B9-11F0-4EFD-A461-9DC8C80A1D31}" type="slidenum">
               <a:rPr lang="en-US" smtClean="0"/>
               <a:t>‹#›</a:t>
             </a:fld>
@@ -503,7 +518,7 @@
           <p:cNvPr id="8" name="body">
             <a:extLst>
               <a:ext uri="{FF2B5EF4-FFF2-40B4-BE49-F238E27FC236}">
-                <a16:creationId xmlns:a16="http://schemas.microsoft.com/office/drawing/2014/main" id="{36ABB1B8-40A2-E981-88A4-5A930B1911FD}"/>
+                <a16:creationId xmlns:a16="http://schemas.microsoft.com/office/drawing/2014/main" id="{9C415C20-8762-F067-EFFA-CC7EED957BAE}"/>
               </a:ext>
             </a:extLst>
           </p:cNvPr>
@@ -516,8 +531,8 @@
         </p:nvSpPr>
         <p:spPr>
           <a:xfrm>
-            <a:off x="1024128" y="2286000"/>
-            <a:ext cx="9720073" cy="3591560"/>
+            <a:off x="2194560" y="2286000"/>
+            <a:ext cx="8549642" cy="3591560"/>
           </a:xfrm>
         </p:spPr>
         <p:txBody>
@@ -543,7 +558,7 @@
           <p:cNvPr id="9" name="source">
             <a:extLst>
               <a:ext uri="{FF2B5EF4-FFF2-40B4-BE49-F238E27FC236}">
-                <a16:creationId xmlns:a16="http://schemas.microsoft.com/office/drawing/2014/main" id="{7EEA2D17-EFB3-4A3E-3F1C-EC71C0F5770F}"/>
+                <a16:creationId xmlns:a16="http://schemas.microsoft.com/office/drawing/2014/main" id="{BFBAFA98-32EB-24C9-C86E-5B20559AC8F6}"/>
               </a:ext>
             </a:extLst>
           </p:cNvPr>
@@ -556,7 +571,7 @@
         </p:nvSpPr>
         <p:spPr>
           <a:xfrm>
-            <a:off x="1024128" y="6004560"/>
+            <a:off x="2194560" y="6004560"/>
             <a:ext cx="1905000" cy="304800"/>
           </a:xfrm>
           <a:prstGeom prst="roundRect">
@@ -598,7 +613,7 @@
     </p:spTree>
     <p:extLst>
       <p:ext uri="{BB962C8B-B14F-4D97-AF65-F5344CB8AC3E}">
-        <p14:creationId xmlns:p14="http://schemas.microsoft.com/office/powerpoint/2010/main" val="1080287272"/>
+        <p14:creationId xmlns:p14="http://schemas.microsoft.com/office/powerpoint/2010/main" val="978110304"/>
       </p:ext>
     </p:extLst>
   </p:cSld>
@@ -630,7 +645,7 @@
           <p:cNvPr id="7" name="creative_background">
             <a:extLst>
               <a:ext uri="{FF2B5EF4-FFF2-40B4-BE49-F238E27FC236}">
-                <a16:creationId xmlns:a16="http://schemas.microsoft.com/office/drawing/2014/main" id="{F32B9F22-48A2-14F3-B183-91773F60B8B6}"/>
+                <a16:creationId xmlns:a16="http://schemas.microsoft.com/office/drawing/2014/main" id="{AE85642D-CD3C-EE03-14FA-4905F6C7CF2E}"/>
               </a:ext>
             </a:extLst>
           </p:cNvPr>
@@ -671,7 +686,12 @@
             <p:ph type="title"/>
           </p:nvPr>
         </p:nvSpPr>
-        <p:spPr/>
+        <p:spPr>
+          <a:xfrm>
+            <a:off x="2194560" y="585216"/>
+            <a:ext cx="8547100" cy="1499616"/>
+          </a:xfrm>
+        </p:spPr>
         <p:txBody>
           <a:bodyPr/>
           <a:lstStyle>
@@ -698,12 +718,17 @@
             <p:ph type="dt" sz="half" idx="10"/>
           </p:nvPr>
         </p:nvSpPr>
-        <p:spPr/>
+        <p:spPr>
+          <a:xfrm>
+            <a:off x="2194560" y="6470704"/>
+            <a:ext cx="977900" cy="274320"/>
+          </a:xfrm>
+        </p:spPr>
         <p:txBody>
           <a:bodyPr/>
           <a:lstStyle/>
           <a:p>
-            <a:fld id="{5922C19E-7BE7-43A0-B17C-FD6B34B75143}" type="datetimeFigureOut">
+            <a:fld id="{4354DB14-F9AE-4C12-8CFE-33ABF7B568CC}" type="datetimeFigureOut">
               <a:rPr lang="en-US" smtClean="0"/>
               <a:t>10/3/2026</a:t>
             </a:fld>
@@ -745,7 +770,7 @@
           <a:bodyPr/>
           <a:lstStyle/>
           <a:p>
-            <a:fld id="{0DF0A140-DE23-4C37-9945-2DD700FC6B21}" type="slidenum">
+            <a:fld id="{74A457B9-11F0-4EFD-A461-9DC8C80A1D31}" type="slidenum">
               <a:rPr lang="en-US" smtClean="0"/>
               <a:t>‹#›</a:t>
             </a:fld>
@@ -758,7 +783,7 @@
           <p:cNvPr id="8" name="body">
             <a:extLst>
               <a:ext uri="{FF2B5EF4-FFF2-40B4-BE49-F238E27FC236}">
-                <a16:creationId xmlns:a16="http://schemas.microsoft.com/office/drawing/2014/main" id="{9E676C08-994C-0201-BD5B-F937F779D9E3}"/>
+                <a16:creationId xmlns:a16="http://schemas.microsoft.com/office/drawing/2014/main" id="{4FA0B4A8-4496-00DA-018D-7280C9310DC7}"/>
               </a:ext>
             </a:extLst>
           </p:cNvPr>
@@ -771,8 +796,8 @@
         </p:nvSpPr>
         <p:spPr>
           <a:xfrm>
-            <a:off x="1024128" y="2286000"/>
-            <a:ext cx="9720073" cy="3591560"/>
+            <a:off x="2194560" y="2286000"/>
+            <a:ext cx="8549642" cy="3591560"/>
           </a:xfrm>
         </p:spPr>
         <p:txBody>
@@ -801,7 +826,7 @@
     </p:spTree>
     <p:extLst>
       <p:ext uri="{BB962C8B-B14F-4D97-AF65-F5344CB8AC3E}">
-        <p14:creationId xmlns:p14="http://schemas.microsoft.com/office/powerpoint/2010/main" val="1162554864"/>
+        <p14:creationId xmlns:p14="http://schemas.microsoft.com/office/powerpoint/2010/main" val="16129508"/>
       </p:ext>
     </p:extLst>
   </p:cSld>
@@ -877,7 +902,7 @@
           <p:cNvPr id="6" name="section_number">
             <a:extLst>
               <a:ext uri="{FF2B5EF4-FFF2-40B4-BE49-F238E27FC236}">
-                <a16:creationId xmlns:a16="http://schemas.microsoft.com/office/drawing/2014/main" id="{4DEA2422-C7C5-5F19-64A1-315E5D8B98AE}"/>
+                <a16:creationId xmlns:a16="http://schemas.microsoft.com/office/drawing/2014/main" id="{CB25494D-7E85-A098-91F5-2C425C12ACD9}"/>
               </a:ext>
             </a:extLst>
           </p:cNvPr>
@@ -930,7 +955,7 @@
           <p:cNvPr id="7" name="subtitle">
             <a:extLst>
               <a:ext uri="{FF2B5EF4-FFF2-40B4-BE49-F238E27FC236}">
-                <a16:creationId xmlns:a16="http://schemas.microsoft.com/office/drawing/2014/main" id="{380E5E16-2F20-40D6-FA42-D9023DB405B9}"/>
+                <a16:creationId xmlns:a16="http://schemas.microsoft.com/office/drawing/2014/main" id="{A6C583CE-1DC6-1297-4A63-7A1F95CA7BD9}"/>
               </a:ext>
             </a:extLst>
           </p:cNvPr>
@@ -982,7 +1007,7 @@
           <p:cNvPr id="8" name="pattern">
             <a:extLst>
               <a:ext uri="{FF2B5EF4-FFF2-40B4-BE49-F238E27FC236}">
-                <a16:creationId xmlns:a16="http://schemas.microsoft.com/office/drawing/2014/main" id="{C7517E46-9273-D9DB-CFF1-9D4C59608C6E}"/>
+                <a16:creationId xmlns:a16="http://schemas.microsoft.com/office/drawing/2014/main" id="{F0956D96-653D-3AF6-A1C6-8D0DCA1F946C}"/>
               </a:ext>
             </a:extLst>
           </p:cNvPr>
@@ -1050,7 +1075,7 @@
           <p:cNvPr id="9" name="pattern">
             <a:extLst>
               <a:ext uri="{FF2B5EF4-FFF2-40B4-BE49-F238E27FC236}">
-                <a16:creationId xmlns:a16="http://schemas.microsoft.com/office/drawing/2014/main" id="{76D6FDA7-A620-C3B0-55A0-C75F70906CFA}"/>
+                <a16:creationId xmlns:a16="http://schemas.microsoft.com/office/drawing/2014/main" id="{7B9C6638-1182-B49C-CF0B-3E25F9392430}"/>
               </a:ext>
             </a:extLst>
           </p:cNvPr>
@@ -1118,7 +1143,7 @@
           <p:cNvPr id="10" name="pattern">
             <a:extLst>
               <a:ext uri="{FF2B5EF4-FFF2-40B4-BE49-F238E27FC236}">
-                <a16:creationId xmlns:a16="http://schemas.microsoft.com/office/drawing/2014/main" id="{69A4AE8D-CE2C-EF4C-3AFF-CD44FB72BCB1}"/>
+                <a16:creationId xmlns:a16="http://schemas.microsoft.com/office/drawing/2014/main" id="{1FF70040-3FC0-BA35-4DB4-1566DE3C8EFB}"/>
               </a:ext>
             </a:extLst>
           </p:cNvPr>
@@ -1186,7 +1211,7 @@
           <p:cNvPr id="11" name="pattern">
             <a:extLst>
               <a:ext uri="{FF2B5EF4-FFF2-40B4-BE49-F238E27FC236}">
-                <a16:creationId xmlns:a16="http://schemas.microsoft.com/office/drawing/2014/main" id="{FA9A25EF-EC97-81BC-7B60-782EFE6D581E}"/>
+                <a16:creationId xmlns:a16="http://schemas.microsoft.com/office/drawing/2014/main" id="{6D2B104E-8B53-EEF3-DE7D-62E2B46FDF01}"/>
               </a:ext>
             </a:extLst>
           </p:cNvPr>
@@ -1254,7 +1279,7 @@
           <p:cNvPr id="12" name="pattern">
             <a:extLst>
               <a:ext uri="{FF2B5EF4-FFF2-40B4-BE49-F238E27FC236}">
-                <a16:creationId xmlns:a16="http://schemas.microsoft.com/office/drawing/2014/main" id="{B468E825-902F-BCA3-3CE2-121B4690531D}"/>
+                <a16:creationId xmlns:a16="http://schemas.microsoft.com/office/drawing/2014/main" id="{B90E3832-CC24-7172-E04D-BA821E0C32BF}"/>
               </a:ext>
             </a:extLst>
           </p:cNvPr>
@@ -1322,7 +1347,7 @@
           <p:cNvPr id="13" name="pattern">
             <a:extLst>
               <a:ext uri="{FF2B5EF4-FFF2-40B4-BE49-F238E27FC236}">
-                <a16:creationId xmlns:a16="http://schemas.microsoft.com/office/drawing/2014/main" id="{CEBC6663-4F9B-CC8A-5BCC-4DA04A0D63B6}"/>
+                <a16:creationId xmlns:a16="http://schemas.microsoft.com/office/drawing/2014/main" id="{AC3CC080-CCCC-F1A4-EEBE-0247EE58985A}"/>
               </a:ext>
             </a:extLst>
           </p:cNvPr>
@@ -1390,7 +1415,7 @@
           <p:cNvPr id="14" name="pattern">
             <a:extLst>
               <a:ext uri="{FF2B5EF4-FFF2-40B4-BE49-F238E27FC236}">
-                <a16:creationId xmlns:a16="http://schemas.microsoft.com/office/drawing/2014/main" id="{DE35E876-AC17-B096-82B7-2E62A4826D2D}"/>
+                <a16:creationId xmlns:a16="http://schemas.microsoft.com/office/drawing/2014/main" id="{317A3644-7B94-C3B4-AFE2-EFB1AF047AB2}"/>
               </a:ext>
             </a:extLst>
           </p:cNvPr>
@@ -1458,7 +1483,7 @@
           <p:cNvPr id="15" name="pattern">
             <a:extLst>
               <a:ext uri="{FF2B5EF4-FFF2-40B4-BE49-F238E27FC236}">
-                <a16:creationId xmlns:a16="http://schemas.microsoft.com/office/drawing/2014/main" id="{CF6775EA-4994-596A-003A-9CF8292FA6CA}"/>
+                <a16:creationId xmlns:a16="http://schemas.microsoft.com/office/drawing/2014/main" id="{B6882B37-22C2-679C-8DA8-2BBA6D535B3E}"/>
               </a:ext>
             </a:extLst>
           </p:cNvPr>
@@ -1526,7 +1551,7 @@
           <p:cNvPr id="16" name="pattern">
             <a:extLst>
               <a:ext uri="{FF2B5EF4-FFF2-40B4-BE49-F238E27FC236}">
-                <a16:creationId xmlns:a16="http://schemas.microsoft.com/office/drawing/2014/main" id="{11BFC489-3DB2-F9C1-6E82-433FC7E6A3D3}"/>
+                <a16:creationId xmlns:a16="http://schemas.microsoft.com/office/drawing/2014/main" id="{E05706B2-2EAB-A1EB-BB07-BEE2E96F302A}"/>
               </a:ext>
             </a:extLst>
           </p:cNvPr>
@@ -1594,7 +1619,7 @@
           <p:cNvPr id="17" name="pattern">
             <a:extLst>
               <a:ext uri="{FF2B5EF4-FFF2-40B4-BE49-F238E27FC236}">
-                <a16:creationId xmlns:a16="http://schemas.microsoft.com/office/drawing/2014/main" id="{897816F1-7C70-A653-25A1-76B955A153F1}"/>
+                <a16:creationId xmlns:a16="http://schemas.microsoft.com/office/drawing/2014/main" id="{75B9C5FA-BB7F-36C2-E627-54A04BF89B3A}"/>
               </a:ext>
             </a:extLst>
           </p:cNvPr>
@@ -1662,7 +1687,7 @@
           <p:cNvPr id="18" name="pattern">
             <a:extLst>
               <a:ext uri="{FF2B5EF4-FFF2-40B4-BE49-F238E27FC236}">
-                <a16:creationId xmlns:a16="http://schemas.microsoft.com/office/drawing/2014/main" id="{10B74765-4AAA-3C1A-C99A-9D896C5618EC}"/>
+                <a16:creationId xmlns:a16="http://schemas.microsoft.com/office/drawing/2014/main" id="{69C1135C-524D-0718-5408-D1672F64377E}"/>
               </a:ext>
             </a:extLst>
           </p:cNvPr>
@@ -1730,7 +1755,7 @@
           <p:cNvPr id="19" name="pattern">
             <a:extLst>
               <a:ext uri="{FF2B5EF4-FFF2-40B4-BE49-F238E27FC236}">
-                <a16:creationId xmlns:a16="http://schemas.microsoft.com/office/drawing/2014/main" id="{EFF83E23-B249-60C9-39BC-3BD0D44FCC69}"/>
+                <a16:creationId xmlns:a16="http://schemas.microsoft.com/office/drawing/2014/main" id="{8659F860-365F-6143-15FF-D1E8ECD85D75}"/>
               </a:ext>
             </a:extLst>
           </p:cNvPr>
@@ -1798,7 +1823,7 @@
           <p:cNvPr id="20" name="pattern">
             <a:extLst>
               <a:ext uri="{FF2B5EF4-FFF2-40B4-BE49-F238E27FC236}">
-                <a16:creationId xmlns:a16="http://schemas.microsoft.com/office/drawing/2014/main" id="{C57C58E2-80D0-6402-C6B2-D81C3D5A514D}"/>
+                <a16:creationId xmlns:a16="http://schemas.microsoft.com/office/drawing/2014/main" id="{0A341DBE-2F1C-28D0-00F0-218559AFEFBE}"/>
               </a:ext>
             </a:extLst>
           </p:cNvPr>
@@ -1866,7 +1891,7 @@
           <p:cNvPr id="21" name="pattern">
             <a:extLst>
               <a:ext uri="{FF2B5EF4-FFF2-40B4-BE49-F238E27FC236}">
-                <a16:creationId xmlns:a16="http://schemas.microsoft.com/office/drawing/2014/main" id="{1F88C7B5-E8E5-D0B4-B00B-A6A14DF1CEA5}"/>
+                <a16:creationId xmlns:a16="http://schemas.microsoft.com/office/drawing/2014/main" id="{597FD2EA-711E-1D2A-7CE0-B8FD8709DB8F}"/>
               </a:ext>
             </a:extLst>
           </p:cNvPr>
@@ -1934,7 +1959,7 @@
           <p:cNvPr id="22" name="pattern">
             <a:extLst>
               <a:ext uri="{FF2B5EF4-FFF2-40B4-BE49-F238E27FC236}">
-                <a16:creationId xmlns:a16="http://schemas.microsoft.com/office/drawing/2014/main" id="{5ECB2DE2-2140-0626-3176-55A0D3F60827}"/>
+                <a16:creationId xmlns:a16="http://schemas.microsoft.com/office/drawing/2014/main" id="{9853987B-DE71-45F2-A7F2-20593CF5F3DA}"/>
               </a:ext>
             </a:extLst>
           </p:cNvPr>
@@ -2002,7 +2027,7 @@
           <p:cNvPr id="23" name="pattern">
             <a:extLst>
               <a:ext uri="{FF2B5EF4-FFF2-40B4-BE49-F238E27FC236}">
-                <a16:creationId xmlns:a16="http://schemas.microsoft.com/office/drawing/2014/main" id="{A511BAB0-3E9F-F9AC-646E-90284D3B8E60}"/>
+                <a16:creationId xmlns:a16="http://schemas.microsoft.com/office/drawing/2014/main" id="{1F649203-84BA-801C-EC14-120E56BF91BA}"/>
               </a:ext>
             </a:extLst>
           </p:cNvPr>
@@ -2070,7 +2095,7 @@
           <p:cNvPr id="24" name="pattern">
             <a:extLst>
               <a:ext uri="{FF2B5EF4-FFF2-40B4-BE49-F238E27FC236}">
-                <a16:creationId xmlns:a16="http://schemas.microsoft.com/office/drawing/2014/main" id="{4DEE65B5-B278-D2D3-EEB6-5FAC7868EE48}"/>
+                <a16:creationId xmlns:a16="http://schemas.microsoft.com/office/drawing/2014/main" id="{02379276-15AC-ACF3-E8C7-B5001948B84A}"/>
               </a:ext>
             </a:extLst>
           </p:cNvPr>
@@ -2138,7 +2163,7 @@
           <p:cNvPr id="25" name="pattern">
             <a:extLst>
               <a:ext uri="{FF2B5EF4-FFF2-40B4-BE49-F238E27FC236}">
-                <a16:creationId xmlns:a16="http://schemas.microsoft.com/office/drawing/2014/main" id="{946AA293-E341-D3DF-C5E2-8146EB738399}"/>
+                <a16:creationId xmlns:a16="http://schemas.microsoft.com/office/drawing/2014/main" id="{7B15ADE6-391A-BCAB-E07E-4EF126C2EDB2}"/>
               </a:ext>
             </a:extLst>
           </p:cNvPr>
@@ -2206,7 +2231,7 @@
           <p:cNvPr id="26" name="pattern">
             <a:extLst>
               <a:ext uri="{FF2B5EF4-FFF2-40B4-BE49-F238E27FC236}">
-                <a16:creationId xmlns:a16="http://schemas.microsoft.com/office/drawing/2014/main" id="{E26166FB-BFA7-0C8F-6F8E-FB8DC761B9A6}"/>
+                <a16:creationId xmlns:a16="http://schemas.microsoft.com/office/drawing/2014/main" id="{ED2A16DB-D498-7C7B-4AD2-1FE125C68D03}"/>
               </a:ext>
             </a:extLst>
           </p:cNvPr>
@@ -2274,7 +2299,7 @@
           <p:cNvPr id="27" name="pattern">
             <a:extLst>
               <a:ext uri="{FF2B5EF4-FFF2-40B4-BE49-F238E27FC236}">
-                <a16:creationId xmlns:a16="http://schemas.microsoft.com/office/drawing/2014/main" id="{A676B391-6707-583E-C7D4-D98E9FBD1A7D}"/>
+                <a16:creationId xmlns:a16="http://schemas.microsoft.com/office/drawing/2014/main" id="{2E9B1E3C-3AAA-BB82-C6D1-ABC308DCA064}"/>
               </a:ext>
             </a:extLst>
           </p:cNvPr>
@@ -2342,7 +2367,7 @@
           <p:cNvPr id="28" name="pattern">
             <a:extLst>
               <a:ext uri="{FF2B5EF4-FFF2-40B4-BE49-F238E27FC236}">
-                <a16:creationId xmlns:a16="http://schemas.microsoft.com/office/drawing/2014/main" id="{25875C70-CCE9-47FF-9750-8ED2AFFEBC9D}"/>
+                <a16:creationId xmlns:a16="http://schemas.microsoft.com/office/drawing/2014/main" id="{10DB8C9D-FC64-1A09-2C50-8197157E7703}"/>
               </a:ext>
             </a:extLst>
           </p:cNvPr>
@@ -2410,7 +2435,7 @@
           <p:cNvPr id="29" name="pattern">
             <a:extLst>
               <a:ext uri="{FF2B5EF4-FFF2-40B4-BE49-F238E27FC236}">
-                <a16:creationId xmlns:a16="http://schemas.microsoft.com/office/drawing/2014/main" id="{83CEE71C-20C1-AA18-7305-90344233A728}"/>
+                <a16:creationId xmlns:a16="http://schemas.microsoft.com/office/drawing/2014/main" id="{D2C8BD4B-CB24-288E-3A1A-AE010C8ADDD9}"/>
               </a:ext>
             </a:extLst>
           </p:cNvPr>
@@ -2478,7 +2503,7 @@
           <p:cNvPr id="30" name="pattern">
             <a:extLst>
               <a:ext uri="{FF2B5EF4-FFF2-40B4-BE49-F238E27FC236}">
-                <a16:creationId xmlns:a16="http://schemas.microsoft.com/office/drawing/2014/main" id="{C8037E7D-C6EA-9EEC-EAC7-F17B33418913}"/>
+                <a16:creationId xmlns:a16="http://schemas.microsoft.com/office/drawing/2014/main" id="{882D84B7-1F84-3803-AD40-544402848034}"/>
               </a:ext>
             </a:extLst>
           </p:cNvPr>
@@ -2546,7 +2571,7 @@
           <p:cNvPr id="31" name="pattern">
             <a:extLst>
               <a:ext uri="{FF2B5EF4-FFF2-40B4-BE49-F238E27FC236}">
-                <a16:creationId xmlns:a16="http://schemas.microsoft.com/office/drawing/2014/main" id="{DAE7EEAC-3293-6942-7291-E2F67446BCBF}"/>
+                <a16:creationId xmlns:a16="http://schemas.microsoft.com/office/drawing/2014/main" id="{8DFD0BE6-70F7-CE9F-45CC-AD7DA0B23673}"/>
               </a:ext>
             </a:extLst>
           </p:cNvPr>
@@ -2614,7 +2639,7 @@
           <p:cNvPr id="32" name="pattern">
             <a:extLst>
               <a:ext uri="{FF2B5EF4-FFF2-40B4-BE49-F238E27FC236}">
-                <a16:creationId xmlns:a16="http://schemas.microsoft.com/office/drawing/2014/main" id="{80209143-2C2D-2FBB-D305-3A96E198039C}"/>
+                <a16:creationId xmlns:a16="http://schemas.microsoft.com/office/drawing/2014/main" id="{1314A10A-2F24-7184-87DA-AAF7CF300D7F}"/>
               </a:ext>
             </a:extLst>
           </p:cNvPr>
@@ -2682,7 +2707,7 @@
           <p:cNvPr id="33" name="pattern">
             <a:extLst>
               <a:ext uri="{FF2B5EF4-FFF2-40B4-BE49-F238E27FC236}">
-                <a16:creationId xmlns:a16="http://schemas.microsoft.com/office/drawing/2014/main" id="{38055A49-DDD4-AB69-107D-762BFCB27867}"/>
+                <a16:creationId xmlns:a16="http://schemas.microsoft.com/office/drawing/2014/main" id="{DB9FDC61-8D44-82A1-4B68-08B13B7A3837}"/>
               </a:ext>
             </a:extLst>
           </p:cNvPr>
@@ -2750,7 +2775,7 @@
           <p:cNvPr id="34" name="pattern">
             <a:extLst>
               <a:ext uri="{FF2B5EF4-FFF2-40B4-BE49-F238E27FC236}">
-                <a16:creationId xmlns:a16="http://schemas.microsoft.com/office/drawing/2014/main" id="{2245F7A5-3F9A-DA19-7317-C80E837C2184}"/>
+                <a16:creationId xmlns:a16="http://schemas.microsoft.com/office/drawing/2014/main" id="{FC8FD30F-5252-4609-2DA5-F44B2A485BD6}"/>
               </a:ext>
             </a:extLst>
           </p:cNvPr>
@@ -2818,7 +2843,7 @@
           <p:cNvPr id="35" name="pattern">
             <a:extLst>
               <a:ext uri="{FF2B5EF4-FFF2-40B4-BE49-F238E27FC236}">
-                <a16:creationId xmlns:a16="http://schemas.microsoft.com/office/drawing/2014/main" id="{5076BA27-F513-7B53-34D5-7CDF990D8613}"/>
+                <a16:creationId xmlns:a16="http://schemas.microsoft.com/office/drawing/2014/main" id="{B7B056A4-657B-8196-A85D-65E791237A50}"/>
               </a:ext>
             </a:extLst>
           </p:cNvPr>
@@ -2886,7 +2911,7 @@
           <p:cNvPr id="36" name="pattern">
             <a:extLst>
               <a:ext uri="{FF2B5EF4-FFF2-40B4-BE49-F238E27FC236}">
-                <a16:creationId xmlns:a16="http://schemas.microsoft.com/office/drawing/2014/main" id="{816FEA15-B258-250A-4290-85A127BA531B}"/>
+                <a16:creationId xmlns:a16="http://schemas.microsoft.com/office/drawing/2014/main" id="{1CE3B993-C3F7-ABC8-303B-A72A4FA044D1}"/>
               </a:ext>
             </a:extLst>
           </p:cNvPr>
@@ -2954,7 +2979,7 @@
           <p:cNvPr id="37" name="pattern">
             <a:extLst>
               <a:ext uri="{FF2B5EF4-FFF2-40B4-BE49-F238E27FC236}">
-                <a16:creationId xmlns:a16="http://schemas.microsoft.com/office/drawing/2014/main" id="{B17BEC69-87D7-374E-98ED-4BEB583C0156}"/>
+                <a16:creationId xmlns:a16="http://schemas.microsoft.com/office/drawing/2014/main" id="{FECB7E7A-E901-0805-1154-97A7BECDE35A}"/>
               </a:ext>
             </a:extLst>
           </p:cNvPr>
@@ -3022,7 +3047,7 @@
           <p:cNvPr id="38" name="pattern">
             <a:extLst>
               <a:ext uri="{FF2B5EF4-FFF2-40B4-BE49-F238E27FC236}">
-                <a16:creationId xmlns:a16="http://schemas.microsoft.com/office/drawing/2014/main" id="{245CB689-35F0-DF88-22CA-16C5DC032FAC}"/>
+                <a16:creationId xmlns:a16="http://schemas.microsoft.com/office/drawing/2014/main" id="{2C05E732-99CE-B025-252E-9450D7DD652A}"/>
               </a:ext>
             </a:extLst>
           </p:cNvPr>
@@ -3090,7 +3115,7 @@
           <p:cNvPr id="39" name="pattern">
             <a:extLst>
               <a:ext uri="{FF2B5EF4-FFF2-40B4-BE49-F238E27FC236}">
-                <a16:creationId xmlns:a16="http://schemas.microsoft.com/office/drawing/2014/main" id="{7FBBB865-9553-AFED-44BB-358021F089C3}"/>
+                <a16:creationId xmlns:a16="http://schemas.microsoft.com/office/drawing/2014/main" id="{EE14381C-7A05-94E7-AFBE-05A858B6FDE5}"/>
               </a:ext>
             </a:extLst>
           </p:cNvPr>
@@ -3158,7 +3183,7 @@
           <p:cNvPr id="40" name="pattern">
             <a:extLst>
               <a:ext uri="{FF2B5EF4-FFF2-40B4-BE49-F238E27FC236}">
-                <a16:creationId xmlns:a16="http://schemas.microsoft.com/office/drawing/2014/main" id="{5A8E4AA0-07A1-9A81-01C1-3A425C0295C5}"/>
+                <a16:creationId xmlns:a16="http://schemas.microsoft.com/office/drawing/2014/main" id="{4120C912-2FDE-C1D0-CBE7-7799FDAA08AB}"/>
               </a:ext>
             </a:extLst>
           </p:cNvPr>
@@ -3226,7 +3251,7 @@
           <p:cNvPr id="41" name="pattern">
             <a:extLst>
               <a:ext uri="{FF2B5EF4-FFF2-40B4-BE49-F238E27FC236}">
-                <a16:creationId xmlns:a16="http://schemas.microsoft.com/office/drawing/2014/main" id="{631AB0E2-E2A1-DCDF-CD39-CF88D717CD4B}"/>
+                <a16:creationId xmlns:a16="http://schemas.microsoft.com/office/drawing/2014/main" id="{52254C1C-5706-020B-E95A-3B0917444709}"/>
               </a:ext>
             </a:extLst>
           </p:cNvPr>
@@ -3294,7 +3319,7 @@
           <p:cNvPr id="42" name="pattern">
             <a:extLst>
               <a:ext uri="{FF2B5EF4-FFF2-40B4-BE49-F238E27FC236}">
-                <a16:creationId xmlns:a16="http://schemas.microsoft.com/office/drawing/2014/main" id="{2C9CEB73-3759-3EDD-B8F7-837F8D6492B3}"/>
+                <a16:creationId xmlns:a16="http://schemas.microsoft.com/office/drawing/2014/main" id="{2CEA1EB9-0CA5-CAE0-3AF2-39D81FA44C8B}"/>
               </a:ext>
             </a:extLst>
           </p:cNvPr>
@@ -3362,7 +3387,7 @@
           <p:cNvPr id="43" name="pattern">
             <a:extLst>
               <a:ext uri="{FF2B5EF4-FFF2-40B4-BE49-F238E27FC236}">
-                <a16:creationId xmlns:a16="http://schemas.microsoft.com/office/drawing/2014/main" id="{EFCF9D68-8FFD-4139-9E0F-2BD516FA0893}"/>
+                <a16:creationId xmlns:a16="http://schemas.microsoft.com/office/drawing/2014/main" id="{18F0B68D-6582-5C58-88D3-DD2B79999EAA}"/>
               </a:ext>
             </a:extLst>
           </p:cNvPr>
@@ -3430,7 +3455,7 @@
           <p:cNvPr id="44" name="pattern">
             <a:extLst>
               <a:ext uri="{FF2B5EF4-FFF2-40B4-BE49-F238E27FC236}">
-                <a16:creationId xmlns:a16="http://schemas.microsoft.com/office/drawing/2014/main" id="{933468B6-D1B9-F414-11F2-083B97942484}"/>
+                <a16:creationId xmlns:a16="http://schemas.microsoft.com/office/drawing/2014/main" id="{F01DBE00-5A6A-BA09-8D20-76C8E32AEA75}"/>
               </a:ext>
             </a:extLst>
           </p:cNvPr>
@@ -3498,7 +3523,7 @@
           <p:cNvPr id="45" name="pattern">
             <a:extLst>
               <a:ext uri="{FF2B5EF4-FFF2-40B4-BE49-F238E27FC236}">
-                <a16:creationId xmlns:a16="http://schemas.microsoft.com/office/drawing/2014/main" id="{5741C3AA-5C11-16E0-A2D1-68B5769B6995}"/>
+                <a16:creationId xmlns:a16="http://schemas.microsoft.com/office/drawing/2014/main" id="{9D8595AE-FB5C-35A2-63A5-20EB65A6EFC5}"/>
               </a:ext>
             </a:extLst>
           </p:cNvPr>
@@ -3566,7 +3591,7 @@
           <p:cNvPr id="46" name="pattern">
             <a:extLst>
               <a:ext uri="{FF2B5EF4-FFF2-40B4-BE49-F238E27FC236}">
-                <a16:creationId xmlns:a16="http://schemas.microsoft.com/office/drawing/2014/main" id="{E51CAFD8-3598-20CB-E14A-0B57981D5F6D}"/>
+                <a16:creationId xmlns:a16="http://schemas.microsoft.com/office/drawing/2014/main" id="{00A5F744-3802-2E25-7579-D958E3A026EA}"/>
               </a:ext>
             </a:extLst>
           </p:cNvPr>
@@ -3634,7 +3659,7 @@
           <p:cNvPr id="47" name="pattern">
             <a:extLst>
               <a:ext uri="{FF2B5EF4-FFF2-40B4-BE49-F238E27FC236}">
-                <a16:creationId xmlns:a16="http://schemas.microsoft.com/office/drawing/2014/main" id="{1860F702-A5B4-652D-1335-97E36D4EF68A}"/>
+                <a16:creationId xmlns:a16="http://schemas.microsoft.com/office/drawing/2014/main" id="{45BC44EE-FDAF-76A6-8B58-682208AC863A}"/>
               </a:ext>
             </a:extLst>
           </p:cNvPr>
@@ -3702,7 +3727,7 @@
           <p:cNvPr id="48" name="pattern">
             <a:extLst>
               <a:ext uri="{FF2B5EF4-FFF2-40B4-BE49-F238E27FC236}">
-                <a16:creationId xmlns:a16="http://schemas.microsoft.com/office/drawing/2014/main" id="{0E24B88F-CA77-35FA-5C38-A2297E8E2923}"/>
+                <a16:creationId xmlns:a16="http://schemas.microsoft.com/office/drawing/2014/main" id="{C3E93FB4-6019-51F0-9B03-0BDE2CB12291}"/>
               </a:ext>
             </a:extLst>
           </p:cNvPr>
@@ -3770,7 +3795,7 @@
           <p:cNvPr id="49" name="pattern">
             <a:extLst>
               <a:ext uri="{FF2B5EF4-FFF2-40B4-BE49-F238E27FC236}">
-                <a16:creationId xmlns:a16="http://schemas.microsoft.com/office/drawing/2014/main" id="{8BD1E0BA-886E-E160-50DA-0C0FDC96CA76}"/>
+                <a16:creationId xmlns:a16="http://schemas.microsoft.com/office/drawing/2014/main" id="{AEB83682-CAF2-D62C-745A-7FADCB72CF26}"/>
               </a:ext>
             </a:extLst>
           </p:cNvPr>
@@ -3838,7 +3863,7 @@
           <p:cNvPr id="50" name="pattern">
             <a:extLst>
               <a:ext uri="{FF2B5EF4-FFF2-40B4-BE49-F238E27FC236}">
-                <a16:creationId xmlns:a16="http://schemas.microsoft.com/office/drawing/2014/main" id="{48265992-998C-6EE2-F35A-C256E9CE8F2E}"/>
+                <a16:creationId xmlns:a16="http://schemas.microsoft.com/office/drawing/2014/main" id="{D93CA70F-82B4-1CB8-05B0-C341145F161E}"/>
               </a:ext>
             </a:extLst>
           </p:cNvPr>
@@ -3906,7 +3931,7 @@
           <p:cNvPr id="51" name="pattern">
             <a:extLst>
               <a:ext uri="{FF2B5EF4-FFF2-40B4-BE49-F238E27FC236}">
-                <a16:creationId xmlns:a16="http://schemas.microsoft.com/office/drawing/2014/main" id="{9A387EBB-489F-B5E7-29D0-CDC368E9AD52}"/>
+                <a16:creationId xmlns:a16="http://schemas.microsoft.com/office/drawing/2014/main" id="{1F7B84C8-888C-CF8A-6DCB-A8E85C767934}"/>
               </a:ext>
             </a:extLst>
           </p:cNvPr>
@@ -3974,7 +3999,7 @@
           <p:cNvPr id="52" name="pattern">
             <a:extLst>
               <a:ext uri="{FF2B5EF4-FFF2-40B4-BE49-F238E27FC236}">
-                <a16:creationId xmlns:a16="http://schemas.microsoft.com/office/drawing/2014/main" id="{5E1E7F93-EED8-D1ED-67FC-8A9A2C060721}"/>
+                <a16:creationId xmlns:a16="http://schemas.microsoft.com/office/drawing/2014/main" id="{29D21380-9A50-A4DB-2071-71808902F529}"/>
               </a:ext>
             </a:extLst>
           </p:cNvPr>
@@ -4042,7 +4067,7 @@
           <p:cNvPr id="53" name="pattern">
             <a:extLst>
               <a:ext uri="{FF2B5EF4-FFF2-40B4-BE49-F238E27FC236}">
-                <a16:creationId xmlns:a16="http://schemas.microsoft.com/office/drawing/2014/main" id="{CC64C327-3C82-0623-190B-C9B5741527AD}"/>
+                <a16:creationId xmlns:a16="http://schemas.microsoft.com/office/drawing/2014/main" id="{F3D43444-1B7C-AA13-12BD-762605E30469}"/>
               </a:ext>
             </a:extLst>
           </p:cNvPr>
@@ -4110,7 +4135,7 @@
           <p:cNvPr id="54" name="pattern">
             <a:extLst>
               <a:ext uri="{FF2B5EF4-FFF2-40B4-BE49-F238E27FC236}">
-                <a16:creationId xmlns:a16="http://schemas.microsoft.com/office/drawing/2014/main" id="{9C12E610-F6A5-08FC-3023-4710B9D5788C}"/>
+                <a16:creationId xmlns:a16="http://schemas.microsoft.com/office/drawing/2014/main" id="{6F06C4B1-D5CB-134F-7292-E176395CE1BE}"/>
               </a:ext>
             </a:extLst>
           </p:cNvPr>
@@ -4178,7 +4203,7 @@
           <p:cNvPr id="55" name="pattern">
             <a:extLst>
               <a:ext uri="{FF2B5EF4-FFF2-40B4-BE49-F238E27FC236}">
-                <a16:creationId xmlns:a16="http://schemas.microsoft.com/office/drawing/2014/main" id="{C0589F87-F371-88B8-2014-B615417C1B0C}"/>
+                <a16:creationId xmlns:a16="http://schemas.microsoft.com/office/drawing/2014/main" id="{24386562-A051-6E91-9C78-905D22412041}"/>
               </a:ext>
             </a:extLst>
           </p:cNvPr>
@@ -4246,7 +4271,7 @@
           <p:cNvPr id="56" name="pattern">
             <a:extLst>
               <a:ext uri="{FF2B5EF4-FFF2-40B4-BE49-F238E27FC236}">
-                <a16:creationId xmlns:a16="http://schemas.microsoft.com/office/drawing/2014/main" id="{71650C5F-1509-2380-04E5-7BAD524334CD}"/>
+                <a16:creationId xmlns:a16="http://schemas.microsoft.com/office/drawing/2014/main" id="{8338B3D1-3373-B5F1-5F3E-989C25F25C34}"/>
               </a:ext>
             </a:extLst>
           </p:cNvPr>
@@ -4314,7 +4339,7 @@
           <p:cNvPr id="57" name="pattern">
             <a:extLst>
               <a:ext uri="{FF2B5EF4-FFF2-40B4-BE49-F238E27FC236}">
-                <a16:creationId xmlns:a16="http://schemas.microsoft.com/office/drawing/2014/main" id="{D0A9C94B-85C7-269A-DB49-574BA015538E}"/>
+                <a16:creationId xmlns:a16="http://schemas.microsoft.com/office/drawing/2014/main" id="{76617938-86D9-BECD-B5BF-F885AC37AED7}"/>
               </a:ext>
             </a:extLst>
           </p:cNvPr>
@@ -4382,7 +4407,7 @@
           <p:cNvPr id="58" name="pattern">
             <a:extLst>
               <a:ext uri="{FF2B5EF4-FFF2-40B4-BE49-F238E27FC236}">
-                <a16:creationId xmlns:a16="http://schemas.microsoft.com/office/drawing/2014/main" id="{5B06E2E3-F39C-BF69-AB89-6DD3EE7CFA55}"/>
+                <a16:creationId xmlns:a16="http://schemas.microsoft.com/office/drawing/2014/main" id="{B4B2FC1D-FD69-704B-54F1-0FD8FEB7F870}"/>
               </a:ext>
             </a:extLst>
           </p:cNvPr>
@@ -4450,7 +4475,7 @@
           <p:cNvPr id="59" name="pattern">
             <a:extLst>
               <a:ext uri="{FF2B5EF4-FFF2-40B4-BE49-F238E27FC236}">
-                <a16:creationId xmlns:a16="http://schemas.microsoft.com/office/drawing/2014/main" id="{AABC0646-952D-393D-D91D-76F1CE5F38ED}"/>
+                <a16:creationId xmlns:a16="http://schemas.microsoft.com/office/drawing/2014/main" id="{28C8E27C-73BD-2A63-243E-FB5BAB1A59BC}"/>
               </a:ext>
             </a:extLst>
           </p:cNvPr>
@@ -4518,7 +4543,7 @@
           <p:cNvPr id="60" name="pattern">
             <a:extLst>
               <a:ext uri="{FF2B5EF4-FFF2-40B4-BE49-F238E27FC236}">
-                <a16:creationId xmlns:a16="http://schemas.microsoft.com/office/drawing/2014/main" id="{0F9EB55B-6730-3F73-B7FF-C820D5636CCE}"/>
+                <a16:creationId xmlns:a16="http://schemas.microsoft.com/office/drawing/2014/main" id="{2715CE56-75FD-ACD9-44BB-44308ABD4594}"/>
               </a:ext>
             </a:extLst>
           </p:cNvPr>
@@ -4586,7 +4611,7 @@
           <p:cNvPr id="61" name="pattern">
             <a:extLst>
               <a:ext uri="{FF2B5EF4-FFF2-40B4-BE49-F238E27FC236}">
-                <a16:creationId xmlns:a16="http://schemas.microsoft.com/office/drawing/2014/main" id="{57249DDA-AAA8-4C51-63CE-AF75C2A7CBC7}"/>
+                <a16:creationId xmlns:a16="http://schemas.microsoft.com/office/drawing/2014/main" id="{C46A6C6D-068E-B468-75E0-B5365D41A014}"/>
               </a:ext>
             </a:extLst>
           </p:cNvPr>
@@ -4654,7 +4679,7 @@
           <p:cNvPr id="62" name="pattern">
             <a:extLst>
               <a:ext uri="{FF2B5EF4-FFF2-40B4-BE49-F238E27FC236}">
-                <a16:creationId xmlns:a16="http://schemas.microsoft.com/office/drawing/2014/main" id="{113F5D44-B988-184C-9E18-8867CF60A336}"/>
+                <a16:creationId xmlns:a16="http://schemas.microsoft.com/office/drawing/2014/main" id="{ABD7232B-8404-2440-AF80-01FF62683A5A}"/>
               </a:ext>
             </a:extLst>
           </p:cNvPr>
@@ -4722,7 +4747,7 @@
           <p:cNvPr id="63" name="pattern">
             <a:extLst>
               <a:ext uri="{FF2B5EF4-FFF2-40B4-BE49-F238E27FC236}">
-                <a16:creationId xmlns:a16="http://schemas.microsoft.com/office/drawing/2014/main" id="{DB8DC858-02E5-C693-4341-BE80052F1743}"/>
+                <a16:creationId xmlns:a16="http://schemas.microsoft.com/office/drawing/2014/main" id="{3E94CEE1-0454-8C68-4013-3DF5F8F5DA85}"/>
               </a:ext>
             </a:extLst>
           </p:cNvPr>
@@ -4790,7 +4815,7 @@
           <p:cNvPr id="64" name="pattern">
             <a:extLst>
               <a:ext uri="{FF2B5EF4-FFF2-40B4-BE49-F238E27FC236}">
-                <a16:creationId xmlns:a16="http://schemas.microsoft.com/office/drawing/2014/main" id="{F25391EF-C2D1-CAAC-6DE3-B51D0A4A0286}"/>
+                <a16:creationId xmlns:a16="http://schemas.microsoft.com/office/drawing/2014/main" id="{37223C5C-6E99-0ED6-0A86-EF15D7EDFDF3}"/>
               </a:ext>
             </a:extLst>
           </p:cNvPr>
@@ -4858,7 +4883,7 @@
           <p:cNvPr id="65" name="pattern">
             <a:extLst>
               <a:ext uri="{FF2B5EF4-FFF2-40B4-BE49-F238E27FC236}">
-                <a16:creationId xmlns:a16="http://schemas.microsoft.com/office/drawing/2014/main" id="{6FCCF12B-F445-6163-CFBC-42A515D16A16}"/>
+                <a16:creationId xmlns:a16="http://schemas.microsoft.com/office/drawing/2014/main" id="{B51E258E-0F83-F779-DFDE-897EFF051795}"/>
               </a:ext>
             </a:extLst>
           </p:cNvPr>
@@ -4926,7 +4951,7 @@
           <p:cNvPr id="66" name="pattern">
             <a:extLst>
               <a:ext uri="{FF2B5EF4-FFF2-40B4-BE49-F238E27FC236}">
-                <a16:creationId xmlns:a16="http://schemas.microsoft.com/office/drawing/2014/main" id="{12A29072-B109-39E5-5090-217F3573CF9D}"/>
+                <a16:creationId xmlns:a16="http://schemas.microsoft.com/office/drawing/2014/main" id="{FFE9C430-AF68-F120-F040-DAC82245CCF6}"/>
               </a:ext>
             </a:extLst>
           </p:cNvPr>
@@ -4994,7 +5019,7 @@
           <p:cNvPr id="67" name="pattern">
             <a:extLst>
               <a:ext uri="{FF2B5EF4-FFF2-40B4-BE49-F238E27FC236}">
-                <a16:creationId xmlns:a16="http://schemas.microsoft.com/office/drawing/2014/main" id="{EBDC61EB-F2F7-4234-52E2-C6BB7AA509F7}"/>
+                <a16:creationId xmlns:a16="http://schemas.microsoft.com/office/drawing/2014/main" id="{B66C3234-927E-38DC-1FEE-FC427536F154}"/>
               </a:ext>
             </a:extLst>
           </p:cNvPr>
@@ -5062,7 +5087,7 @@
           <p:cNvPr id="68" name="pattern">
             <a:extLst>
               <a:ext uri="{FF2B5EF4-FFF2-40B4-BE49-F238E27FC236}">
-                <a16:creationId xmlns:a16="http://schemas.microsoft.com/office/drawing/2014/main" id="{707102DE-8023-EB32-26D6-7A4B3157CB31}"/>
+                <a16:creationId xmlns:a16="http://schemas.microsoft.com/office/drawing/2014/main" id="{3741517F-9055-CAFD-4AB2-1C8AF33E1446}"/>
               </a:ext>
             </a:extLst>
           </p:cNvPr>
@@ -5130,7 +5155,7 @@
           <p:cNvPr id="69" name="pattern">
             <a:extLst>
               <a:ext uri="{FF2B5EF4-FFF2-40B4-BE49-F238E27FC236}">
-                <a16:creationId xmlns:a16="http://schemas.microsoft.com/office/drawing/2014/main" id="{D19B2942-5C41-BC82-40E6-9A2A392FD13C}"/>
+                <a16:creationId xmlns:a16="http://schemas.microsoft.com/office/drawing/2014/main" id="{6F6336E2-C7DD-24C5-F573-0830ACF4F327}"/>
               </a:ext>
             </a:extLst>
           </p:cNvPr>
@@ -5198,7 +5223,7 @@
           <p:cNvPr id="70" name="pattern">
             <a:extLst>
               <a:ext uri="{FF2B5EF4-FFF2-40B4-BE49-F238E27FC236}">
-                <a16:creationId xmlns:a16="http://schemas.microsoft.com/office/drawing/2014/main" id="{794BF976-303A-4496-9899-667D218BA1A0}"/>
+                <a16:creationId xmlns:a16="http://schemas.microsoft.com/office/drawing/2014/main" id="{4E6E2AE4-B7C8-0E40-8026-544B5307E6CA}"/>
               </a:ext>
             </a:extLst>
           </p:cNvPr>
@@ -5266,7 +5291,7 @@
           <p:cNvPr id="71" name="pattern">
             <a:extLst>
               <a:ext uri="{FF2B5EF4-FFF2-40B4-BE49-F238E27FC236}">
-                <a16:creationId xmlns:a16="http://schemas.microsoft.com/office/drawing/2014/main" id="{7513BDCC-263E-28AF-60A3-581128BC6045}"/>
+                <a16:creationId xmlns:a16="http://schemas.microsoft.com/office/drawing/2014/main" id="{11B49B00-2054-99AB-DAE0-AA6FD62A623F}"/>
               </a:ext>
             </a:extLst>
           </p:cNvPr>
@@ -5334,7 +5359,7 @@
           <p:cNvPr id="72" name="pattern">
             <a:extLst>
               <a:ext uri="{FF2B5EF4-FFF2-40B4-BE49-F238E27FC236}">
-                <a16:creationId xmlns:a16="http://schemas.microsoft.com/office/drawing/2014/main" id="{BBB39560-B1DF-C9F5-158C-682F995895CA}"/>
+                <a16:creationId xmlns:a16="http://schemas.microsoft.com/office/drawing/2014/main" id="{13E99E3B-A2FA-49DE-436F-FD9BF5A04DD0}"/>
               </a:ext>
             </a:extLst>
           </p:cNvPr>
@@ -5402,7 +5427,7 @@
           <p:cNvPr id="73" name="pattern">
             <a:extLst>
               <a:ext uri="{FF2B5EF4-FFF2-40B4-BE49-F238E27FC236}">
-                <a16:creationId xmlns:a16="http://schemas.microsoft.com/office/drawing/2014/main" id="{0BCDF3E9-2069-4FD1-B811-0889CE2BC1B0}"/>
+                <a16:creationId xmlns:a16="http://schemas.microsoft.com/office/drawing/2014/main" id="{44722F59-67B1-40AB-6A24-4E9A6CABB723}"/>
               </a:ext>
             </a:extLst>
           </p:cNvPr>
@@ -5470,7 +5495,7 @@
           <p:cNvPr id="74" name="pattern">
             <a:extLst>
               <a:ext uri="{FF2B5EF4-FFF2-40B4-BE49-F238E27FC236}">
-                <a16:creationId xmlns:a16="http://schemas.microsoft.com/office/drawing/2014/main" id="{2F5A373B-9D3D-630B-366D-36814D3BCD3C}"/>
+                <a16:creationId xmlns:a16="http://schemas.microsoft.com/office/drawing/2014/main" id="{8191ACE2-677F-BA9D-6E25-658F3F3188EF}"/>
               </a:ext>
             </a:extLst>
           </p:cNvPr>
@@ -5538,7 +5563,7 @@
           <p:cNvPr id="75" name="pattern">
             <a:extLst>
               <a:ext uri="{FF2B5EF4-FFF2-40B4-BE49-F238E27FC236}">
-                <a16:creationId xmlns:a16="http://schemas.microsoft.com/office/drawing/2014/main" id="{122A97B1-5CFC-2E6B-3B6C-91B1D31C3153}"/>
+                <a16:creationId xmlns:a16="http://schemas.microsoft.com/office/drawing/2014/main" id="{A1C2360B-3584-4FF4-1999-583B9BB46B3B}"/>
               </a:ext>
             </a:extLst>
           </p:cNvPr>
@@ -5606,7 +5631,7 @@
           <p:cNvPr id="76" name="pattern">
             <a:extLst>
               <a:ext uri="{FF2B5EF4-FFF2-40B4-BE49-F238E27FC236}">
-                <a16:creationId xmlns:a16="http://schemas.microsoft.com/office/drawing/2014/main" id="{0086E133-734B-671F-971D-4CA1872D4C2D}"/>
+                <a16:creationId xmlns:a16="http://schemas.microsoft.com/office/drawing/2014/main" id="{BD82F634-61FE-4F5D-F4CB-F8187AD53070}"/>
               </a:ext>
             </a:extLst>
           </p:cNvPr>
@@ -5674,7 +5699,7 @@
           <p:cNvPr id="77" name="pattern">
             <a:extLst>
               <a:ext uri="{FF2B5EF4-FFF2-40B4-BE49-F238E27FC236}">
-                <a16:creationId xmlns:a16="http://schemas.microsoft.com/office/drawing/2014/main" id="{64453092-AA62-A2EF-9911-E8BBB6C3B373}"/>
+                <a16:creationId xmlns:a16="http://schemas.microsoft.com/office/drawing/2014/main" id="{CF2742F8-2CCA-FBB8-7A80-E4EDB83DB330}"/>
               </a:ext>
             </a:extLst>
           </p:cNvPr>
@@ -5742,7 +5767,7 @@
           <p:cNvPr id="78" name="pattern">
             <a:extLst>
               <a:ext uri="{FF2B5EF4-FFF2-40B4-BE49-F238E27FC236}">
-                <a16:creationId xmlns:a16="http://schemas.microsoft.com/office/drawing/2014/main" id="{0113EAB0-C1A1-5DA9-C7B7-2CD811D72B83}"/>
+                <a16:creationId xmlns:a16="http://schemas.microsoft.com/office/drawing/2014/main" id="{530FDD75-9E31-3BDF-099B-9F17C38CDC40}"/>
               </a:ext>
             </a:extLst>
           </p:cNvPr>
@@ -5810,7 +5835,7 @@
           <p:cNvPr id="79" name="pattern">
             <a:extLst>
               <a:ext uri="{FF2B5EF4-FFF2-40B4-BE49-F238E27FC236}">
-                <a16:creationId xmlns:a16="http://schemas.microsoft.com/office/drawing/2014/main" id="{62ED959D-7D5D-0611-FE86-8D7A9AD5A9E8}"/>
+                <a16:creationId xmlns:a16="http://schemas.microsoft.com/office/drawing/2014/main" id="{D500E956-CF98-84D3-7A10-1A7C362E0C40}"/>
               </a:ext>
             </a:extLst>
           </p:cNvPr>
@@ -5878,7 +5903,7 @@
           <p:cNvPr id="80" name="pattern">
             <a:extLst>
               <a:ext uri="{FF2B5EF4-FFF2-40B4-BE49-F238E27FC236}">
-                <a16:creationId xmlns:a16="http://schemas.microsoft.com/office/drawing/2014/main" id="{956E4B95-3977-15B1-0DF9-063BCBA5B162}"/>
+                <a16:creationId xmlns:a16="http://schemas.microsoft.com/office/drawing/2014/main" id="{C8D086D8-BD86-938D-AAB5-EDB42E39A8E3}"/>
               </a:ext>
             </a:extLst>
           </p:cNvPr>
@@ -5946,7 +5971,7 @@
           <p:cNvPr id="81" name="pattern">
             <a:extLst>
               <a:ext uri="{FF2B5EF4-FFF2-40B4-BE49-F238E27FC236}">
-                <a16:creationId xmlns:a16="http://schemas.microsoft.com/office/drawing/2014/main" id="{739A5919-E708-B515-07C6-EA5C20E0242B}"/>
+                <a16:creationId xmlns:a16="http://schemas.microsoft.com/office/drawing/2014/main" id="{CB73445C-37A8-514F-B837-00F0A8BE5586}"/>
               </a:ext>
             </a:extLst>
           </p:cNvPr>
@@ -6014,7 +6039,7 @@
           <p:cNvPr id="82" name="pattern">
             <a:extLst>
               <a:ext uri="{FF2B5EF4-FFF2-40B4-BE49-F238E27FC236}">
-                <a16:creationId xmlns:a16="http://schemas.microsoft.com/office/drawing/2014/main" id="{E2B36642-BF86-5985-7A55-64EC6B339A0F}"/>
+                <a16:creationId xmlns:a16="http://schemas.microsoft.com/office/drawing/2014/main" id="{7F1124CF-6B30-7DB5-9193-71855A8A1293}"/>
               </a:ext>
             </a:extLst>
           </p:cNvPr>
@@ -6082,7 +6107,7 @@
           <p:cNvPr id="83" name="pattern">
             <a:extLst>
               <a:ext uri="{FF2B5EF4-FFF2-40B4-BE49-F238E27FC236}">
-                <a16:creationId xmlns:a16="http://schemas.microsoft.com/office/drawing/2014/main" id="{8B538289-1182-FE2D-6C37-B6D19867FE1E}"/>
+                <a16:creationId xmlns:a16="http://schemas.microsoft.com/office/drawing/2014/main" id="{04A87222-B945-6369-F8E3-E1A9360D3395}"/>
               </a:ext>
             </a:extLst>
           </p:cNvPr>
@@ -6150,7 +6175,7 @@
           <p:cNvPr id="84" name="pattern">
             <a:extLst>
               <a:ext uri="{FF2B5EF4-FFF2-40B4-BE49-F238E27FC236}">
-                <a16:creationId xmlns:a16="http://schemas.microsoft.com/office/drawing/2014/main" id="{5A771803-05C4-059F-745B-D0F8E480DC84}"/>
+                <a16:creationId xmlns:a16="http://schemas.microsoft.com/office/drawing/2014/main" id="{0F61A51F-3265-0151-1DBC-3A7187705CBA}"/>
               </a:ext>
             </a:extLst>
           </p:cNvPr>
@@ -6218,7 +6243,7 @@
           <p:cNvPr id="85" name="pattern">
             <a:extLst>
               <a:ext uri="{FF2B5EF4-FFF2-40B4-BE49-F238E27FC236}">
-                <a16:creationId xmlns:a16="http://schemas.microsoft.com/office/drawing/2014/main" id="{B2FA248D-56C2-3813-B26C-089837DADD47}"/>
+                <a16:creationId xmlns:a16="http://schemas.microsoft.com/office/drawing/2014/main" id="{EB19CD71-F658-1F98-56AC-2B4FE3426D2E}"/>
               </a:ext>
             </a:extLst>
           </p:cNvPr>
@@ -6286,7 +6311,7 @@
           <p:cNvPr id="86" name="pattern">
             <a:extLst>
               <a:ext uri="{FF2B5EF4-FFF2-40B4-BE49-F238E27FC236}">
-                <a16:creationId xmlns:a16="http://schemas.microsoft.com/office/drawing/2014/main" id="{B86759CC-D626-6D20-88D0-64A749889809}"/>
+                <a16:creationId xmlns:a16="http://schemas.microsoft.com/office/drawing/2014/main" id="{061CA265-F1B4-5B6F-257F-3DE3EBB6F12B}"/>
               </a:ext>
             </a:extLst>
           </p:cNvPr>
@@ -6354,7 +6379,7 @@
           <p:cNvPr id="87" name="pattern">
             <a:extLst>
               <a:ext uri="{FF2B5EF4-FFF2-40B4-BE49-F238E27FC236}">
-                <a16:creationId xmlns:a16="http://schemas.microsoft.com/office/drawing/2014/main" id="{B9715B82-5C9F-B8FC-6D12-3240BD6E4CB6}"/>
+                <a16:creationId xmlns:a16="http://schemas.microsoft.com/office/drawing/2014/main" id="{E870F069-7194-EF4E-4C4A-DAC99B25F551}"/>
               </a:ext>
             </a:extLst>
           </p:cNvPr>
@@ -6422,7 +6447,7 @@
           <p:cNvPr id="88" name="pattern">
             <a:extLst>
               <a:ext uri="{FF2B5EF4-FFF2-40B4-BE49-F238E27FC236}">
-                <a16:creationId xmlns:a16="http://schemas.microsoft.com/office/drawing/2014/main" id="{E1137D68-D26F-30F6-9AF5-491079A551E0}"/>
+                <a16:creationId xmlns:a16="http://schemas.microsoft.com/office/drawing/2014/main" id="{053A3E3F-75E4-42A4-976A-4AA76ECF1752}"/>
               </a:ext>
             </a:extLst>
           </p:cNvPr>
@@ -6490,7 +6515,7 @@
           <p:cNvPr id="89" name="pattern">
             <a:extLst>
               <a:ext uri="{FF2B5EF4-FFF2-40B4-BE49-F238E27FC236}">
-                <a16:creationId xmlns:a16="http://schemas.microsoft.com/office/drawing/2014/main" id="{D7ED82AE-1FDD-DD0E-9019-0A5AA9AD64FD}"/>
+                <a16:creationId xmlns:a16="http://schemas.microsoft.com/office/drawing/2014/main" id="{B237D000-B0D5-961E-E2AF-979310A31BAA}"/>
               </a:ext>
             </a:extLst>
           </p:cNvPr>
@@ -6558,7 +6583,7 @@
           <p:cNvPr id="90" name="pattern">
             <a:extLst>
               <a:ext uri="{FF2B5EF4-FFF2-40B4-BE49-F238E27FC236}">
-                <a16:creationId xmlns:a16="http://schemas.microsoft.com/office/drawing/2014/main" id="{1C3BCC59-8836-E3C4-8157-57AB50403DF5}"/>
+                <a16:creationId xmlns:a16="http://schemas.microsoft.com/office/drawing/2014/main" id="{95701CDD-F43A-835A-3D5B-C238AE8F9360}"/>
               </a:ext>
             </a:extLst>
           </p:cNvPr>
@@ -6626,7 +6651,7 @@
           <p:cNvPr id="91" name="pattern">
             <a:extLst>
               <a:ext uri="{FF2B5EF4-FFF2-40B4-BE49-F238E27FC236}">
-                <a16:creationId xmlns:a16="http://schemas.microsoft.com/office/drawing/2014/main" id="{3CE15C91-45EF-BD2F-4283-916881D9866E}"/>
+                <a16:creationId xmlns:a16="http://schemas.microsoft.com/office/drawing/2014/main" id="{46740CFB-DDA3-9768-363B-B77E1A76801B}"/>
               </a:ext>
             </a:extLst>
           </p:cNvPr>
@@ -6694,7 +6719,7 @@
           <p:cNvPr id="92" name="pattern">
             <a:extLst>
               <a:ext uri="{FF2B5EF4-FFF2-40B4-BE49-F238E27FC236}">
-                <a16:creationId xmlns:a16="http://schemas.microsoft.com/office/drawing/2014/main" id="{297B2A67-9B9F-6F15-AD22-0E93792031FF}"/>
+                <a16:creationId xmlns:a16="http://schemas.microsoft.com/office/drawing/2014/main" id="{3E46C41D-FD54-BBEE-2841-C758A4285F84}"/>
               </a:ext>
             </a:extLst>
           </p:cNvPr>
@@ -6762,7 +6787,7 @@
           <p:cNvPr id="93" name="pattern">
             <a:extLst>
               <a:ext uri="{FF2B5EF4-FFF2-40B4-BE49-F238E27FC236}">
-                <a16:creationId xmlns:a16="http://schemas.microsoft.com/office/drawing/2014/main" id="{793A2010-D575-68DE-4C5C-2399FF270CCF}"/>
+                <a16:creationId xmlns:a16="http://schemas.microsoft.com/office/drawing/2014/main" id="{A5BA5891-62D4-59EA-3049-398AC11575BD}"/>
               </a:ext>
             </a:extLst>
           </p:cNvPr>
@@ -6830,7 +6855,7 @@
           <p:cNvPr id="94" name="pattern">
             <a:extLst>
               <a:ext uri="{FF2B5EF4-FFF2-40B4-BE49-F238E27FC236}">
-                <a16:creationId xmlns:a16="http://schemas.microsoft.com/office/drawing/2014/main" id="{4499878A-4869-BF05-357D-CB3E4EC7B366}"/>
+                <a16:creationId xmlns:a16="http://schemas.microsoft.com/office/drawing/2014/main" id="{0CF62566-F2AA-A32D-99A8-83359AB20B93}"/>
               </a:ext>
             </a:extLst>
           </p:cNvPr>
@@ -6898,7 +6923,7 @@
           <p:cNvPr id="95" name="pattern">
             <a:extLst>
               <a:ext uri="{FF2B5EF4-FFF2-40B4-BE49-F238E27FC236}">
-                <a16:creationId xmlns:a16="http://schemas.microsoft.com/office/drawing/2014/main" id="{A49E4780-0DF8-D376-090C-C86A7F9253C8}"/>
+                <a16:creationId xmlns:a16="http://schemas.microsoft.com/office/drawing/2014/main" id="{896283AA-DEEE-E38F-56FA-D20D87D92282}"/>
               </a:ext>
             </a:extLst>
           </p:cNvPr>
@@ -6966,7 +6991,7 @@
           <p:cNvPr id="96" name="pattern">
             <a:extLst>
               <a:ext uri="{FF2B5EF4-FFF2-40B4-BE49-F238E27FC236}">
-                <a16:creationId xmlns:a16="http://schemas.microsoft.com/office/drawing/2014/main" id="{326B254D-6FDB-92D9-0E79-95EC1639A15C}"/>
+                <a16:creationId xmlns:a16="http://schemas.microsoft.com/office/drawing/2014/main" id="{04584CA2-2F18-A710-F666-EF7F413372F4}"/>
               </a:ext>
             </a:extLst>
           </p:cNvPr>
@@ -7034,7 +7059,7 @@
           <p:cNvPr id="97" name="pattern">
             <a:extLst>
               <a:ext uri="{FF2B5EF4-FFF2-40B4-BE49-F238E27FC236}">
-                <a16:creationId xmlns:a16="http://schemas.microsoft.com/office/drawing/2014/main" id="{5A7E1AD5-D922-96E5-53F2-CC3DC0940810}"/>
+                <a16:creationId xmlns:a16="http://schemas.microsoft.com/office/drawing/2014/main" id="{BCACE44A-F953-E4DD-5FFA-0F5906CC2BC7}"/>
               </a:ext>
             </a:extLst>
           </p:cNvPr>
@@ -7102,7 +7127,7 @@
           <p:cNvPr id="98" name="pattern">
             <a:extLst>
               <a:ext uri="{FF2B5EF4-FFF2-40B4-BE49-F238E27FC236}">
-                <a16:creationId xmlns:a16="http://schemas.microsoft.com/office/drawing/2014/main" id="{EBF84E29-61CB-05F6-F245-5FB154D2B2CD}"/>
+                <a16:creationId xmlns:a16="http://schemas.microsoft.com/office/drawing/2014/main" id="{B9B0E567-2599-6069-701D-53664558CF5D}"/>
               </a:ext>
             </a:extLst>
           </p:cNvPr>
@@ -7170,7 +7195,7 @@
           <p:cNvPr id="99" name="pattern">
             <a:extLst>
               <a:ext uri="{FF2B5EF4-FFF2-40B4-BE49-F238E27FC236}">
-                <a16:creationId xmlns:a16="http://schemas.microsoft.com/office/drawing/2014/main" id="{945659D0-0F60-E0F8-943D-8902F3DCD294}"/>
+                <a16:creationId xmlns:a16="http://schemas.microsoft.com/office/drawing/2014/main" id="{26ACA44F-5DF3-68D1-F6AC-29008E80077F}"/>
               </a:ext>
             </a:extLst>
           </p:cNvPr>
@@ -7238,7 +7263,7 @@
           <p:cNvPr id="100" name="pattern">
             <a:extLst>
               <a:ext uri="{FF2B5EF4-FFF2-40B4-BE49-F238E27FC236}">
-                <a16:creationId xmlns:a16="http://schemas.microsoft.com/office/drawing/2014/main" id="{7F71F678-5CCA-74ED-6CE0-857CFB7BE414}"/>
+                <a16:creationId xmlns:a16="http://schemas.microsoft.com/office/drawing/2014/main" id="{11131227-FB45-2E68-C408-27F3A3D7BDA7}"/>
               </a:ext>
             </a:extLst>
           </p:cNvPr>
@@ -7306,7 +7331,7 @@
           <p:cNvPr id="101" name="pattern">
             <a:extLst>
               <a:ext uri="{FF2B5EF4-FFF2-40B4-BE49-F238E27FC236}">
-                <a16:creationId xmlns:a16="http://schemas.microsoft.com/office/drawing/2014/main" id="{10575DDA-0280-07DC-5395-8CA22F78AB54}"/>
+                <a16:creationId xmlns:a16="http://schemas.microsoft.com/office/drawing/2014/main" id="{5A63D828-3CB5-5EE6-D294-B853ED021D1A}"/>
               </a:ext>
             </a:extLst>
           </p:cNvPr>
@@ -7374,7 +7399,7 @@
           <p:cNvPr id="102" name="pattern">
             <a:extLst>
               <a:ext uri="{FF2B5EF4-FFF2-40B4-BE49-F238E27FC236}">
-                <a16:creationId xmlns:a16="http://schemas.microsoft.com/office/drawing/2014/main" id="{C41E68AD-6791-A6E7-5EC5-29E7DA828CC4}"/>
+                <a16:creationId xmlns:a16="http://schemas.microsoft.com/office/drawing/2014/main" id="{EACA41DC-0DF2-241D-CEDA-EE5000C24239}"/>
               </a:ext>
             </a:extLst>
           </p:cNvPr>
@@ -7442,7 +7467,7 @@
           <p:cNvPr id="103" name="pattern">
             <a:extLst>
               <a:ext uri="{FF2B5EF4-FFF2-40B4-BE49-F238E27FC236}">
-                <a16:creationId xmlns:a16="http://schemas.microsoft.com/office/drawing/2014/main" id="{ED221849-00C9-EF5C-B5A1-C1CB0CB993A8}"/>
+                <a16:creationId xmlns:a16="http://schemas.microsoft.com/office/drawing/2014/main" id="{95A86CA9-4DD6-87A7-3C73-A593AB4336A7}"/>
               </a:ext>
             </a:extLst>
           </p:cNvPr>
@@ -7510,7 +7535,7 @@
           <p:cNvPr id="104" name="pattern">
             <a:extLst>
               <a:ext uri="{FF2B5EF4-FFF2-40B4-BE49-F238E27FC236}">
-                <a16:creationId xmlns:a16="http://schemas.microsoft.com/office/drawing/2014/main" id="{37535FBE-264E-E156-2411-4A348C28BB72}"/>
+                <a16:creationId xmlns:a16="http://schemas.microsoft.com/office/drawing/2014/main" id="{AFAFCAC7-25C9-785C-8399-3EA547A330A6}"/>
               </a:ext>
             </a:extLst>
           </p:cNvPr>
@@ -7578,7 +7603,7 @@
           <p:cNvPr id="105" name="pattern">
             <a:extLst>
               <a:ext uri="{FF2B5EF4-FFF2-40B4-BE49-F238E27FC236}">
-                <a16:creationId xmlns:a16="http://schemas.microsoft.com/office/drawing/2014/main" id="{C0C02468-339B-671A-0B3B-2D381760A7E2}"/>
+                <a16:creationId xmlns:a16="http://schemas.microsoft.com/office/drawing/2014/main" id="{85CE553F-010A-C6F4-6A42-F5C101956E5F}"/>
               </a:ext>
             </a:extLst>
           </p:cNvPr>
@@ -7646,7 +7671,7 @@
           <p:cNvPr id="106" name="pattern">
             <a:extLst>
               <a:ext uri="{FF2B5EF4-FFF2-40B4-BE49-F238E27FC236}">
-                <a16:creationId xmlns:a16="http://schemas.microsoft.com/office/drawing/2014/main" id="{AB739486-14A8-846D-7857-639475D65BEB}"/>
+                <a16:creationId xmlns:a16="http://schemas.microsoft.com/office/drawing/2014/main" id="{DBCDFD0C-8757-C314-2F90-309D82BEB9D4}"/>
               </a:ext>
             </a:extLst>
           </p:cNvPr>
@@ -7714,7 +7739,7 @@
           <p:cNvPr id="107" name="pattern">
             <a:extLst>
               <a:ext uri="{FF2B5EF4-FFF2-40B4-BE49-F238E27FC236}">
-                <a16:creationId xmlns:a16="http://schemas.microsoft.com/office/drawing/2014/main" id="{6A58EE7E-F695-6EB3-A4D3-5B66E431E1D2}"/>
+                <a16:creationId xmlns:a16="http://schemas.microsoft.com/office/drawing/2014/main" id="{17EF8D34-4807-0F62-2F61-E9AD88766568}"/>
               </a:ext>
             </a:extLst>
           </p:cNvPr>
@@ -7782,7 +7807,7 @@
           <p:cNvPr id="108" name="pattern">
             <a:extLst>
               <a:ext uri="{FF2B5EF4-FFF2-40B4-BE49-F238E27FC236}">
-                <a16:creationId xmlns:a16="http://schemas.microsoft.com/office/drawing/2014/main" id="{87E0285B-FBA7-47FF-742F-9E03DDB7605A}"/>
+                <a16:creationId xmlns:a16="http://schemas.microsoft.com/office/drawing/2014/main" id="{6A8B7AFC-5FCC-5413-0436-A14A6B601735}"/>
               </a:ext>
             </a:extLst>
           </p:cNvPr>
@@ -7850,7 +7875,7 @@
           <p:cNvPr id="109" name="pattern">
             <a:extLst>
               <a:ext uri="{FF2B5EF4-FFF2-40B4-BE49-F238E27FC236}">
-                <a16:creationId xmlns:a16="http://schemas.microsoft.com/office/drawing/2014/main" id="{2CF0F0CE-F07F-4B53-E3BE-13DAB877CB7F}"/>
+                <a16:creationId xmlns:a16="http://schemas.microsoft.com/office/drawing/2014/main" id="{3C9D52CC-A282-0FE6-54E4-5BB82E9245B0}"/>
               </a:ext>
             </a:extLst>
           </p:cNvPr>
@@ -7918,7 +7943,7 @@
           <p:cNvPr id="110" name="pattern">
             <a:extLst>
               <a:ext uri="{FF2B5EF4-FFF2-40B4-BE49-F238E27FC236}">
-                <a16:creationId xmlns:a16="http://schemas.microsoft.com/office/drawing/2014/main" id="{5D56A12E-F6C0-5F0E-5AF1-482A11D94604}"/>
+                <a16:creationId xmlns:a16="http://schemas.microsoft.com/office/drawing/2014/main" id="{0A03940D-0878-DE52-0CA4-8182A29C60C8}"/>
               </a:ext>
             </a:extLst>
           </p:cNvPr>
@@ -7986,7 +8011,7 @@
           <p:cNvPr id="111" name="pattern">
             <a:extLst>
               <a:ext uri="{FF2B5EF4-FFF2-40B4-BE49-F238E27FC236}">
-                <a16:creationId xmlns:a16="http://schemas.microsoft.com/office/drawing/2014/main" id="{8D62B0D1-E326-73CF-4348-97F32152B98E}"/>
+                <a16:creationId xmlns:a16="http://schemas.microsoft.com/office/drawing/2014/main" id="{1931DAEE-54DA-2F3E-30C8-BED8874ACED2}"/>
               </a:ext>
             </a:extLst>
           </p:cNvPr>
@@ -8054,7 +8079,7 @@
           <p:cNvPr id="112" name="pattern">
             <a:extLst>
               <a:ext uri="{FF2B5EF4-FFF2-40B4-BE49-F238E27FC236}">
-                <a16:creationId xmlns:a16="http://schemas.microsoft.com/office/drawing/2014/main" id="{DA128A90-6FB4-5705-3321-D2762C481951}"/>
+                <a16:creationId xmlns:a16="http://schemas.microsoft.com/office/drawing/2014/main" id="{8CDC7740-6F09-1998-2372-3B7FEF2DD2C8}"/>
               </a:ext>
             </a:extLst>
           </p:cNvPr>
@@ -8122,7 +8147,7 @@
           <p:cNvPr id="113" name="pattern">
             <a:extLst>
               <a:ext uri="{FF2B5EF4-FFF2-40B4-BE49-F238E27FC236}">
-                <a16:creationId xmlns:a16="http://schemas.microsoft.com/office/drawing/2014/main" id="{F5034E50-697E-EEE9-7384-F224C4A76A17}"/>
+                <a16:creationId xmlns:a16="http://schemas.microsoft.com/office/drawing/2014/main" id="{C08CE613-E40B-DDDC-030E-F209F7C3180E}"/>
               </a:ext>
             </a:extLst>
           </p:cNvPr>
@@ -8190,7 +8215,7 @@
           <p:cNvPr id="114" name="pattern">
             <a:extLst>
               <a:ext uri="{FF2B5EF4-FFF2-40B4-BE49-F238E27FC236}">
-                <a16:creationId xmlns:a16="http://schemas.microsoft.com/office/drawing/2014/main" id="{030A0937-6E3E-8CA4-8F26-F771E3700711}"/>
+                <a16:creationId xmlns:a16="http://schemas.microsoft.com/office/drawing/2014/main" id="{E6AC18E0-B25E-40E3-EEDF-BE7B5E0DEB5F}"/>
               </a:ext>
             </a:extLst>
           </p:cNvPr>
@@ -8258,7 +8283,7 @@
           <p:cNvPr id="115" name="pattern">
             <a:extLst>
               <a:ext uri="{FF2B5EF4-FFF2-40B4-BE49-F238E27FC236}">
-                <a16:creationId xmlns:a16="http://schemas.microsoft.com/office/drawing/2014/main" id="{946E2598-C6CE-18E6-3285-D2A37C617738}"/>
+                <a16:creationId xmlns:a16="http://schemas.microsoft.com/office/drawing/2014/main" id="{5CAE0109-B00F-FFF2-1485-5149B6A6C63F}"/>
               </a:ext>
             </a:extLst>
           </p:cNvPr>
@@ -8326,7 +8351,7 @@
           <p:cNvPr id="116" name="pattern">
             <a:extLst>
               <a:ext uri="{FF2B5EF4-FFF2-40B4-BE49-F238E27FC236}">
-                <a16:creationId xmlns:a16="http://schemas.microsoft.com/office/drawing/2014/main" id="{51C70611-0317-C01C-850A-0A1B04D22790}"/>
+                <a16:creationId xmlns:a16="http://schemas.microsoft.com/office/drawing/2014/main" id="{1B2588E2-31A6-F55A-6AB1-A440799A982C}"/>
               </a:ext>
             </a:extLst>
           </p:cNvPr>
@@ -8394,7 +8419,7 @@
           <p:cNvPr id="117" name="pattern">
             <a:extLst>
               <a:ext uri="{FF2B5EF4-FFF2-40B4-BE49-F238E27FC236}">
-                <a16:creationId xmlns:a16="http://schemas.microsoft.com/office/drawing/2014/main" id="{5B6A13DC-B403-4922-E38B-95669856FBBE}"/>
+                <a16:creationId xmlns:a16="http://schemas.microsoft.com/office/drawing/2014/main" id="{B993F8ED-42B4-A35C-3516-489B9DA240D6}"/>
               </a:ext>
             </a:extLst>
           </p:cNvPr>
@@ -8462,7 +8487,7 @@
           <p:cNvPr id="118" name="pattern">
             <a:extLst>
               <a:ext uri="{FF2B5EF4-FFF2-40B4-BE49-F238E27FC236}">
-                <a16:creationId xmlns:a16="http://schemas.microsoft.com/office/drawing/2014/main" id="{6DEEE69E-80F8-9FA6-7848-5138213390E9}"/>
+                <a16:creationId xmlns:a16="http://schemas.microsoft.com/office/drawing/2014/main" id="{651BF5F6-89BD-5FB6-BA43-4FAF60936967}"/>
               </a:ext>
             </a:extLst>
           </p:cNvPr>
@@ -8530,7 +8555,7 @@
           <p:cNvPr id="119" name="pattern">
             <a:extLst>
               <a:ext uri="{FF2B5EF4-FFF2-40B4-BE49-F238E27FC236}">
-                <a16:creationId xmlns:a16="http://schemas.microsoft.com/office/drawing/2014/main" id="{A810CC8C-91A5-1E3E-2416-62623595C8B2}"/>
+                <a16:creationId xmlns:a16="http://schemas.microsoft.com/office/drawing/2014/main" id="{79C07C36-B069-7B13-A7BC-9772DB3F9ED3}"/>
               </a:ext>
             </a:extLst>
           </p:cNvPr>
@@ -8598,7 +8623,7 @@
           <p:cNvPr id="120" name="pattern">
             <a:extLst>
               <a:ext uri="{FF2B5EF4-FFF2-40B4-BE49-F238E27FC236}">
-                <a16:creationId xmlns:a16="http://schemas.microsoft.com/office/drawing/2014/main" id="{7E28DCA5-346C-E385-5920-89229699AC81}"/>
+                <a16:creationId xmlns:a16="http://schemas.microsoft.com/office/drawing/2014/main" id="{D487B95A-DACB-7417-6B90-8B813C45595C}"/>
               </a:ext>
             </a:extLst>
           </p:cNvPr>
@@ -8666,7 +8691,7 @@
           <p:cNvPr id="121" name="pattern">
             <a:extLst>
               <a:ext uri="{FF2B5EF4-FFF2-40B4-BE49-F238E27FC236}">
-                <a16:creationId xmlns:a16="http://schemas.microsoft.com/office/drawing/2014/main" id="{4629DB3B-F552-5AAF-623A-DCD3D1996536}"/>
+                <a16:creationId xmlns:a16="http://schemas.microsoft.com/office/drawing/2014/main" id="{1FCC4E99-4F16-E2D2-BBA9-B3749D4AAD3B}"/>
               </a:ext>
             </a:extLst>
           </p:cNvPr>
@@ -8734,7 +8759,7 @@
           <p:cNvPr id="122" name="pattern">
             <a:extLst>
               <a:ext uri="{FF2B5EF4-FFF2-40B4-BE49-F238E27FC236}">
-                <a16:creationId xmlns:a16="http://schemas.microsoft.com/office/drawing/2014/main" id="{26D2B5A5-DE0C-4F89-04AF-7F6E0416B975}"/>
+                <a16:creationId xmlns:a16="http://schemas.microsoft.com/office/drawing/2014/main" id="{00D00FE8-4AAE-8DDA-FDC5-70B0A4AE80DF}"/>
               </a:ext>
             </a:extLst>
           </p:cNvPr>
@@ -8802,7 +8827,7 @@
           <p:cNvPr id="123" name="pattern">
             <a:extLst>
               <a:ext uri="{FF2B5EF4-FFF2-40B4-BE49-F238E27FC236}">
-                <a16:creationId xmlns:a16="http://schemas.microsoft.com/office/drawing/2014/main" id="{2770542C-9A46-EAB2-174A-D00F94E9B47C}"/>
+                <a16:creationId xmlns:a16="http://schemas.microsoft.com/office/drawing/2014/main" id="{3149C6FF-C828-C227-6AB2-B8C44B6C9AD6}"/>
               </a:ext>
             </a:extLst>
           </p:cNvPr>
@@ -8870,7 +8895,7 @@
           <p:cNvPr id="124" name="pattern">
             <a:extLst>
               <a:ext uri="{FF2B5EF4-FFF2-40B4-BE49-F238E27FC236}">
-                <a16:creationId xmlns:a16="http://schemas.microsoft.com/office/drawing/2014/main" id="{87BD3768-6C1A-E477-8A7D-194F7C5C16A5}"/>
+                <a16:creationId xmlns:a16="http://schemas.microsoft.com/office/drawing/2014/main" id="{DDC54702-A66A-9B63-B585-B1D7482B1F20}"/>
               </a:ext>
             </a:extLst>
           </p:cNvPr>
@@ -8938,7 +8963,7 @@
           <p:cNvPr id="125" name="pattern">
             <a:extLst>
               <a:ext uri="{FF2B5EF4-FFF2-40B4-BE49-F238E27FC236}">
-                <a16:creationId xmlns:a16="http://schemas.microsoft.com/office/drawing/2014/main" id="{135D8236-F74A-5067-0026-66E32BA0FD23}"/>
+                <a16:creationId xmlns:a16="http://schemas.microsoft.com/office/drawing/2014/main" id="{BA15B202-CE6C-B353-8799-52EE89A85A30}"/>
               </a:ext>
             </a:extLst>
           </p:cNvPr>
@@ -9006,7 +9031,7 @@
           <p:cNvPr id="126" name="pattern">
             <a:extLst>
               <a:ext uri="{FF2B5EF4-FFF2-40B4-BE49-F238E27FC236}">
-                <a16:creationId xmlns:a16="http://schemas.microsoft.com/office/drawing/2014/main" id="{095D24A6-50BB-E949-23A2-7E42528F61C8}"/>
+                <a16:creationId xmlns:a16="http://schemas.microsoft.com/office/drawing/2014/main" id="{EBF73029-DBF1-ABD8-279F-ACE81B794084}"/>
               </a:ext>
             </a:extLst>
           </p:cNvPr>
@@ -9074,7 +9099,7 @@
           <p:cNvPr id="127" name="pattern">
             <a:extLst>
               <a:ext uri="{FF2B5EF4-FFF2-40B4-BE49-F238E27FC236}">
-                <a16:creationId xmlns:a16="http://schemas.microsoft.com/office/drawing/2014/main" id="{67B63030-5C8A-2779-CB14-AABEA6AE80A0}"/>
+                <a16:creationId xmlns:a16="http://schemas.microsoft.com/office/drawing/2014/main" id="{52DC70A4-A4E4-9DCF-48BE-D2077F6B06C8}"/>
               </a:ext>
             </a:extLst>
           </p:cNvPr>
@@ -9142,7 +9167,7 @@
           <p:cNvPr id="128" name="pattern">
             <a:extLst>
               <a:ext uri="{FF2B5EF4-FFF2-40B4-BE49-F238E27FC236}">
-                <a16:creationId xmlns:a16="http://schemas.microsoft.com/office/drawing/2014/main" id="{BADA1D1A-7510-4154-80F7-841780957A1E}"/>
+                <a16:creationId xmlns:a16="http://schemas.microsoft.com/office/drawing/2014/main" id="{93EF3EA0-EC91-906C-4913-67864F2289D6}"/>
               </a:ext>
             </a:extLst>
           </p:cNvPr>
@@ -9210,7 +9235,7 @@
           <p:cNvPr id="129" name="pattern">
             <a:extLst>
               <a:ext uri="{FF2B5EF4-FFF2-40B4-BE49-F238E27FC236}">
-                <a16:creationId xmlns:a16="http://schemas.microsoft.com/office/drawing/2014/main" id="{3E5A73AC-72ED-6BE0-9098-ACC2F87F58DA}"/>
+                <a16:creationId xmlns:a16="http://schemas.microsoft.com/office/drawing/2014/main" id="{03BB8DF9-3145-38C1-4F02-526F0DF1ECB9}"/>
               </a:ext>
             </a:extLst>
           </p:cNvPr>
@@ -9278,7 +9303,7 @@
           <p:cNvPr id="130" name="pattern">
             <a:extLst>
               <a:ext uri="{FF2B5EF4-FFF2-40B4-BE49-F238E27FC236}">
-                <a16:creationId xmlns:a16="http://schemas.microsoft.com/office/drawing/2014/main" id="{CEBFB00A-050C-A4EC-C030-FC8037FC4AA7}"/>
+                <a16:creationId xmlns:a16="http://schemas.microsoft.com/office/drawing/2014/main" id="{FC573438-6D1B-B70D-09C5-1382B27DBF0D}"/>
               </a:ext>
             </a:extLst>
           </p:cNvPr>
@@ -9346,7 +9371,7 @@
           <p:cNvPr id="131" name="pattern">
             <a:extLst>
               <a:ext uri="{FF2B5EF4-FFF2-40B4-BE49-F238E27FC236}">
-                <a16:creationId xmlns:a16="http://schemas.microsoft.com/office/drawing/2014/main" id="{1E4DECB5-7F1F-B971-A5CF-68B6905194AD}"/>
+                <a16:creationId xmlns:a16="http://schemas.microsoft.com/office/drawing/2014/main" id="{65D78212-CE0A-F036-7FD7-F327F8A1C829}"/>
               </a:ext>
             </a:extLst>
           </p:cNvPr>
@@ -9414,7 +9439,7 @@
           <p:cNvPr id="132" name="pattern">
             <a:extLst>
               <a:ext uri="{FF2B5EF4-FFF2-40B4-BE49-F238E27FC236}">
-                <a16:creationId xmlns:a16="http://schemas.microsoft.com/office/drawing/2014/main" id="{D2C21920-C05B-AD16-A754-99C4F8F927CB}"/>
+                <a16:creationId xmlns:a16="http://schemas.microsoft.com/office/drawing/2014/main" id="{0782694E-3511-445A-4A30-763B1C2B279E}"/>
               </a:ext>
             </a:extLst>
           </p:cNvPr>
@@ -9482,7 +9507,7 @@
           <p:cNvPr id="133" name="pattern">
             <a:extLst>
               <a:ext uri="{FF2B5EF4-FFF2-40B4-BE49-F238E27FC236}">
-                <a16:creationId xmlns:a16="http://schemas.microsoft.com/office/drawing/2014/main" id="{7AB8172E-F102-5B10-32C5-7EA432B07EBC}"/>
+                <a16:creationId xmlns:a16="http://schemas.microsoft.com/office/drawing/2014/main" id="{82642650-7F74-230C-E9BD-9107C427B953}"/>
               </a:ext>
             </a:extLst>
           </p:cNvPr>
@@ -9550,7 +9575,7 @@
           <p:cNvPr id="134" name="pattern">
             <a:extLst>
               <a:ext uri="{FF2B5EF4-FFF2-40B4-BE49-F238E27FC236}">
-                <a16:creationId xmlns:a16="http://schemas.microsoft.com/office/drawing/2014/main" id="{D439446F-728A-9116-8487-8FD84C93910B}"/>
+                <a16:creationId xmlns:a16="http://schemas.microsoft.com/office/drawing/2014/main" id="{5E0BB524-BD93-312B-2A86-129412B9A0BB}"/>
               </a:ext>
             </a:extLst>
           </p:cNvPr>
@@ -9618,7 +9643,7 @@
           <p:cNvPr id="135" name="pattern">
             <a:extLst>
               <a:ext uri="{FF2B5EF4-FFF2-40B4-BE49-F238E27FC236}">
-                <a16:creationId xmlns:a16="http://schemas.microsoft.com/office/drawing/2014/main" id="{658D4551-C295-D8BF-15C6-10D80180B869}"/>
+                <a16:creationId xmlns:a16="http://schemas.microsoft.com/office/drawing/2014/main" id="{08304906-0056-7961-7EE0-8C1A00F903A0}"/>
               </a:ext>
             </a:extLst>
           </p:cNvPr>
@@ -9684,7 +9709,7 @@
     </p:spTree>
     <p:extLst>
       <p:ext uri="{BB962C8B-B14F-4D97-AF65-F5344CB8AC3E}">
-        <p14:creationId xmlns:p14="http://schemas.microsoft.com/office/powerpoint/2010/main" val="4273619589"/>
+        <p14:creationId xmlns:p14="http://schemas.microsoft.com/office/powerpoint/2010/main" val="2221650419"/>
       </p:ext>
     </p:extLst>
   </p:cSld>
@@ -9716,7 +9741,7 @@
           <p:cNvPr id="7" name="creative_background">
             <a:extLst>
               <a:ext uri="{FF2B5EF4-FFF2-40B4-BE49-F238E27FC236}">
-                <a16:creationId xmlns:a16="http://schemas.microsoft.com/office/drawing/2014/main" id="{E9086D46-E281-FEAE-972C-906A912F91AE}"/>
+                <a16:creationId xmlns:a16="http://schemas.microsoft.com/office/drawing/2014/main" id="{8E5CBF7E-C315-554E-F454-61AF6CCB8149}"/>
               </a:ext>
             </a:extLst>
           </p:cNvPr>
@@ -9757,7 +9782,12 @@
             <p:ph type="title"/>
           </p:nvPr>
         </p:nvSpPr>
-        <p:spPr/>
+        <p:spPr>
+          <a:xfrm>
+            <a:off x="2194560" y="585216"/>
+            <a:ext cx="8547100" cy="1499616"/>
+          </a:xfrm>
+        </p:spPr>
         <p:txBody>
           <a:bodyPr/>
           <a:lstStyle>
@@ -9784,12 +9814,17 @@
             <p:ph type="dt" sz="half" idx="10"/>
           </p:nvPr>
         </p:nvSpPr>
-        <p:spPr/>
+        <p:spPr>
+          <a:xfrm>
+            <a:off x="2194560" y="6470704"/>
+            <a:ext cx="977900" cy="274320"/>
+          </a:xfrm>
+        </p:spPr>
         <p:txBody>
           <a:bodyPr/>
           <a:lstStyle/>
           <a:p>
-            <a:fld id="{5922C19E-7BE7-43A0-B17C-FD6B34B75143}" type="datetimeFigureOut">
+            <a:fld id="{4354DB14-F9AE-4C12-8CFE-33ABF7B568CC}" type="datetimeFigureOut">
               <a:rPr lang="en-US" smtClean="0"/>
               <a:t>10/3/2026</a:t>
             </a:fld>
@@ -9831,7 +9866,7 @@
           <a:bodyPr/>
           <a:lstStyle/>
           <a:p>
-            <a:fld id="{0DF0A140-DE23-4C37-9945-2DD700FC6B21}" type="slidenum">
+            <a:fld id="{74A457B9-11F0-4EFD-A461-9DC8C80A1D31}" type="slidenum">
               <a:rPr lang="en-US" smtClean="0"/>
               <a:t>‹#›</a:t>
             </a:fld>
@@ -9844,7 +9879,7 @@
           <p:cNvPr id="8" name="item_1_title">
             <a:extLst>
               <a:ext uri="{FF2B5EF4-FFF2-40B4-BE49-F238E27FC236}">
-                <a16:creationId xmlns:a16="http://schemas.microsoft.com/office/drawing/2014/main" id="{311DAAD2-1930-F2BF-E89C-DDDA7C116A4F}"/>
+                <a16:creationId xmlns:a16="http://schemas.microsoft.com/office/drawing/2014/main" id="{B55A7DEB-BE55-4A3E-617F-66CC004E0B7C}"/>
               </a:ext>
             </a:extLst>
           </p:cNvPr>
@@ -9857,8 +9892,8 @@
         </p:nvSpPr>
         <p:spPr>
           <a:xfrm>
-            <a:off x="1148744" y="2419022"/>
-            <a:ext cx="2841252" cy="532083"/>
+            <a:off x="2304171" y="2419022"/>
+            <a:ext cx="2499126" cy="532083"/>
           </a:xfrm>
         </p:spPr>
         <p:txBody>
@@ -9894,7 +9929,7 @@
           <p:cNvPr id="9" name="item_1">
             <a:extLst>
               <a:ext uri="{FF2B5EF4-FFF2-40B4-BE49-F238E27FC236}">
-                <a16:creationId xmlns:a16="http://schemas.microsoft.com/office/drawing/2014/main" id="{918BD65E-F6F9-28D2-A928-FF9829C88D13}"/>
+                <a16:creationId xmlns:a16="http://schemas.microsoft.com/office/drawing/2014/main" id="{B972C491-685F-8AA0-C456-FBA1ADDFA2C1}"/>
               </a:ext>
             </a:extLst>
           </p:cNvPr>
@@ -9907,8 +9942,8 @@
         </p:nvSpPr>
         <p:spPr>
           <a:xfrm>
-            <a:off x="4089691" y="2419022"/>
-            <a:ext cx="6529895" cy="532083"/>
+            <a:off x="4890986" y="2419022"/>
+            <a:ext cx="5743605" cy="532083"/>
           </a:xfrm>
           <a:prstGeom prst="rect">
             <a:avLst/>
@@ -9942,7 +9977,7 @@
           <p:cNvPr id="10" name="item_2_title">
             <a:extLst>
               <a:ext uri="{FF2B5EF4-FFF2-40B4-BE49-F238E27FC236}">
-                <a16:creationId xmlns:a16="http://schemas.microsoft.com/office/drawing/2014/main" id="{439AF868-7E81-9C58-5B63-777758AF4B8E}"/>
+                <a16:creationId xmlns:a16="http://schemas.microsoft.com/office/drawing/2014/main" id="{46DA52B1-5908-E6CB-D821-082BBCBE0D5D}"/>
               </a:ext>
             </a:extLst>
           </p:cNvPr>
@@ -9955,8 +9990,8 @@
         </p:nvSpPr>
         <p:spPr>
           <a:xfrm>
-            <a:off x="1148744" y="3350167"/>
-            <a:ext cx="2841252" cy="532083"/>
+            <a:off x="2304171" y="3350167"/>
+            <a:ext cx="2499126" cy="532083"/>
           </a:xfrm>
           <a:prstGeom prst="rect">
             <a:avLst/>
@@ -9995,7 +10030,7 @@
           <p:cNvPr id="11" name="item_2">
             <a:extLst>
               <a:ext uri="{FF2B5EF4-FFF2-40B4-BE49-F238E27FC236}">
-                <a16:creationId xmlns:a16="http://schemas.microsoft.com/office/drawing/2014/main" id="{170227A2-5F95-EA0D-1AB9-C0F9BE7FDE68}"/>
+                <a16:creationId xmlns:a16="http://schemas.microsoft.com/office/drawing/2014/main" id="{752667A3-910B-AEB3-C739-32A2A7B6827D}"/>
               </a:ext>
             </a:extLst>
           </p:cNvPr>
@@ -10008,8 +10043,8 @@
         </p:nvSpPr>
         <p:spPr>
           <a:xfrm>
-            <a:off x="4089691" y="3350167"/>
-            <a:ext cx="6529895" cy="532083"/>
+            <a:off x="4890986" y="3350167"/>
+            <a:ext cx="5743605" cy="532083"/>
           </a:xfrm>
           <a:prstGeom prst="rect">
             <a:avLst/>
@@ -10043,7 +10078,7 @@
           <p:cNvPr id="12" name="item_3_title">
             <a:extLst>
               <a:ext uri="{FF2B5EF4-FFF2-40B4-BE49-F238E27FC236}">
-                <a16:creationId xmlns:a16="http://schemas.microsoft.com/office/drawing/2014/main" id="{B28E0AD8-BBD6-5233-5350-B08406E220C0}"/>
+                <a16:creationId xmlns:a16="http://schemas.microsoft.com/office/drawing/2014/main" id="{96751F8B-7DF8-A428-C504-E9E4C172E5A0}"/>
               </a:ext>
             </a:extLst>
           </p:cNvPr>
@@ -10056,8 +10091,8 @@
         </p:nvSpPr>
         <p:spPr>
           <a:xfrm>
-            <a:off x="1148744" y="4281312"/>
-            <a:ext cx="2841252" cy="532083"/>
+            <a:off x="2304171" y="4281312"/>
+            <a:ext cx="2499126" cy="532083"/>
           </a:xfrm>
           <a:prstGeom prst="rect">
             <a:avLst/>
@@ -10096,7 +10131,7 @@
           <p:cNvPr id="13" name="item_3">
             <a:extLst>
               <a:ext uri="{FF2B5EF4-FFF2-40B4-BE49-F238E27FC236}">
-                <a16:creationId xmlns:a16="http://schemas.microsoft.com/office/drawing/2014/main" id="{4C683631-CCB4-5C72-2537-8E787011FD6B}"/>
+                <a16:creationId xmlns:a16="http://schemas.microsoft.com/office/drawing/2014/main" id="{5B4C01AA-3CF5-5942-F327-07AD964EDA71}"/>
               </a:ext>
             </a:extLst>
           </p:cNvPr>
@@ -10109,8 +10144,8 @@
         </p:nvSpPr>
         <p:spPr>
           <a:xfrm>
-            <a:off x="4089691" y="4281312"/>
-            <a:ext cx="6529895" cy="532083"/>
+            <a:off x="4890986" y="4281312"/>
+            <a:ext cx="5743605" cy="532083"/>
           </a:xfrm>
           <a:prstGeom prst="rect">
             <a:avLst/>
@@ -10144,7 +10179,7 @@
           <p:cNvPr id="14" name="item_4_title">
             <a:extLst>
               <a:ext uri="{FF2B5EF4-FFF2-40B4-BE49-F238E27FC236}">
-                <a16:creationId xmlns:a16="http://schemas.microsoft.com/office/drawing/2014/main" id="{2D2A6714-60EF-CEF1-AC8F-70860592B76B}"/>
+                <a16:creationId xmlns:a16="http://schemas.microsoft.com/office/drawing/2014/main" id="{45568E41-5E85-612C-AF5D-E9E923874643}"/>
               </a:ext>
             </a:extLst>
           </p:cNvPr>
@@ -10157,8 +10192,8 @@
         </p:nvSpPr>
         <p:spPr>
           <a:xfrm>
-            <a:off x="1148744" y="5212457"/>
-            <a:ext cx="2841252" cy="532083"/>
+            <a:off x="2304171" y="5212457"/>
+            <a:ext cx="2499126" cy="532083"/>
           </a:xfrm>
           <a:prstGeom prst="rect">
             <a:avLst/>
@@ -10197,7 +10232,7 @@
           <p:cNvPr id="15" name="item_4">
             <a:extLst>
               <a:ext uri="{FF2B5EF4-FFF2-40B4-BE49-F238E27FC236}">
-                <a16:creationId xmlns:a16="http://schemas.microsoft.com/office/drawing/2014/main" id="{44A33660-BA1D-E461-838E-10E25DE3F1DD}"/>
+                <a16:creationId xmlns:a16="http://schemas.microsoft.com/office/drawing/2014/main" id="{D0068E56-0819-EDDE-A889-CAB642CB3D79}"/>
               </a:ext>
             </a:extLst>
           </p:cNvPr>
@@ -10210,8 +10245,8 @@
         </p:nvSpPr>
         <p:spPr>
           <a:xfrm>
-            <a:off x="4089691" y="5212457"/>
-            <a:ext cx="6529895" cy="532083"/>
+            <a:off x="4890986" y="5212457"/>
+            <a:ext cx="5743605" cy="532083"/>
           </a:xfrm>
           <a:prstGeom prst="rect">
             <a:avLst/>
@@ -10245,7 +10280,7 @@
           <p:cNvPr id="16" name="source">
             <a:extLst>
               <a:ext uri="{FF2B5EF4-FFF2-40B4-BE49-F238E27FC236}">
-                <a16:creationId xmlns:a16="http://schemas.microsoft.com/office/drawing/2014/main" id="{16950B1F-6752-F5FC-1F7E-AC403D0644D5}"/>
+                <a16:creationId xmlns:a16="http://schemas.microsoft.com/office/drawing/2014/main" id="{185CD083-5D5C-B23E-1433-14C4CC54004A}"/>
               </a:ext>
             </a:extLst>
           </p:cNvPr>
@@ -10258,7 +10293,7 @@
         </p:nvSpPr>
         <p:spPr>
           <a:xfrm>
-            <a:off x="1024128" y="6004560"/>
+            <a:off x="2194560" y="6004560"/>
             <a:ext cx="1905000" cy="304800"/>
           </a:xfrm>
           <a:prstGeom prst="roundRect">
@@ -10300,7 +10335,7 @@
     </p:spTree>
     <p:extLst>
       <p:ext uri="{BB962C8B-B14F-4D97-AF65-F5344CB8AC3E}">
-        <p14:creationId xmlns:p14="http://schemas.microsoft.com/office/powerpoint/2010/main" val="1488717345"/>
+        <p14:creationId xmlns:p14="http://schemas.microsoft.com/office/powerpoint/2010/main" val="754532526"/>
       </p:ext>
     </p:extLst>
   </p:cSld>
@@ -10332,7 +10367,7 @@
           <p:cNvPr id="7" name="creative_background">
             <a:extLst>
               <a:ext uri="{FF2B5EF4-FFF2-40B4-BE49-F238E27FC236}">
-                <a16:creationId xmlns:a16="http://schemas.microsoft.com/office/drawing/2014/main" id="{13541432-02A3-C304-265D-4208F9758E50}"/>
+                <a16:creationId xmlns:a16="http://schemas.microsoft.com/office/drawing/2014/main" id="{1899E50C-C1CB-AFBD-1FDA-4709F5690EB3}"/>
               </a:ext>
             </a:extLst>
           </p:cNvPr>
@@ -10373,7 +10408,12 @@
             <p:ph type="title"/>
           </p:nvPr>
         </p:nvSpPr>
-        <p:spPr/>
+        <p:spPr>
+          <a:xfrm>
+            <a:off x="2194560" y="585216"/>
+            <a:ext cx="8547100" cy="1499616"/>
+          </a:xfrm>
+        </p:spPr>
         <p:txBody>
           <a:bodyPr/>
           <a:lstStyle>
@@ -10400,12 +10440,17 @@
             <p:ph type="dt" sz="half" idx="10"/>
           </p:nvPr>
         </p:nvSpPr>
-        <p:spPr/>
+        <p:spPr>
+          <a:xfrm>
+            <a:off x="2194560" y="6470704"/>
+            <a:ext cx="977900" cy="274320"/>
+          </a:xfrm>
+        </p:spPr>
         <p:txBody>
           <a:bodyPr/>
           <a:lstStyle/>
           <a:p>
-            <a:fld id="{5922C19E-7BE7-43A0-B17C-FD6B34B75143}" type="datetimeFigureOut">
+            <a:fld id="{4354DB14-F9AE-4C12-8CFE-33ABF7B568CC}" type="datetimeFigureOut">
               <a:rPr lang="en-US" smtClean="0"/>
               <a:t>10/3/2026</a:t>
             </a:fld>
@@ -10447,7 +10492,7 @@
           <a:bodyPr/>
           <a:lstStyle/>
           <a:p>
-            <a:fld id="{0DF0A140-DE23-4C37-9945-2DD700FC6B21}" type="slidenum">
+            <a:fld id="{74A457B9-11F0-4EFD-A461-9DC8C80A1D31}" type="slidenum">
               <a:rPr lang="en-US" smtClean="0"/>
               <a:t>‹#›</a:t>
             </a:fld>
@@ -10460,7 +10505,7 @@
           <p:cNvPr id="8" name="body">
             <a:extLst>
               <a:ext uri="{FF2B5EF4-FFF2-40B4-BE49-F238E27FC236}">
-                <a16:creationId xmlns:a16="http://schemas.microsoft.com/office/drawing/2014/main" id="{D8235805-E8E8-F15A-E33E-01B196DCC75B}"/>
+                <a16:creationId xmlns:a16="http://schemas.microsoft.com/office/drawing/2014/main" id="{B2F6FA52-7DF2-9751-1A64-587CD6FE503C}"/>
               </a:ext>
             </a:extLst>
           </p:cNvPr>
@@ -10473,8 +10518,8 @@
         </p:nvSpPr>
         <p:spPr>
           <a:xfrm>
-            <a:off x="1024128" y="2286000"/>
-            <a:ext cx="9720073" cy="3591560"/>
+            <a:off x="2194560" y="2286000"/>
+            <a:ext cx="8549642" cy="3591560"/>
           </a:xfrm>
         </p:spPr>
         <p:txBody>
@@ -10505,7 +10550,7 @@
           <p:cNvPr id="9" name="source">
             <a:extLst>
               <a:ext uri="{FF2B5EF4-FFF2-40B4-BE49-F238E27FC236}">
-                <a16:creationId xmlns:a16="http://schemas.microsoft.com/office/drawing/2014/main" id="{94554B87-EAE5-F483-7FE9-4364DE12CC09}"/>
+                <a16:creationId xmlns:a16="http://schemas.microsoft.com/office/drawing/2014/main" id="{0D8271BB-B535-467E-8F16-82ECD77D66F6}"/>
               </a:ext>
             </a:extLst>
           </p:cNvPr>
@@ -10518,7 +10563,7 @@
         </p:nvSpPr>
         <p:spPr>
           <a:xfrm>
-            <a:off x="1024128" y="6004560"/>
+            <a:off x="2194560" y="6004560"/>
             <a:ext cx="1905000" cy="304800"/>
           </a:xfrm>
           <a:prstGeom prst="roundRect">
@@ -10560,7 +10605,7 @@
     </p:spTree>
     <p:extLst>
       <p:ext uri="{BB962C8B-B14F-4D97-AF65-F5344CB8AC3E}">
-        <p14:creationId xmlns:p14="http://schemas.microsoft.com/office/powerpoint/2010/main" val="1953044660"/>
+        <p14:creationId xmlns:p14="http://schemas.microsoft.com/office/powerpoint/2010/main" val="3338348518"/>
       </p:ext>
     </p:extLst>
   </p:cSld>
@@ -10592,7 +10637,7 @@
           <p:cNvPr id="7" name="creative_background">
             <a:extLst>
               <a:ext uri="{FF2B5EF4-FFF2-40B4-BE49-F238E27FC236}">
-                <a16:creationId xmlns:a16="http://schemas.microsoft.com/office/drawing/2014/main" id="{0FCFD83D-F687-F6DE-5ED1-34B30C4C4CBF}"/>
+                <a16:creationId xmlns:a16="http://schemas.microsoft.com/office/drawing/2014/main" id="{93B5E563-29E5-1032-B627-37C9BA7F6D6E}"/>
               </a:ext>
             </a:extLst>
           </p:cNvPr>
@@ -10633,7 +10678,12 @@
             <p:ph type="title"/>
           </p:nvPr>
         </p:nvSpPr>
-        <p:spPr/>
+        <p:spPr>
+          <a:xfrm>
+            <a:off x="2194560" y="585216"/>
+            <a:ext cx="8547100" cy="1499616"/>
+          </a:xfrm>
+        </p:spPr>
         <p:txBody>
           <a:bodyPr/>
           <a:lstStyle>
@@ -10660,12 +10710,17 @@
             <p:ph type="dt" sz="half" idx="10"/>
           </p:nvPr>
         </p:nvSpPr>
-        <p:spPr/>
+        <p:spPr>
+          <a:xfrm>
+            <a:off x="2194560" y="6470704"/>
+            <a:ext cx="977900" cy="274320"/>
+          </a:xfrm>
+        </p:spPr>
         <p:txBody>
           <a:bodyPr/>
           <a:lstStyle/>
           <a:p>
-            <a:fld id="{5922C19E-7BE7-43A0-B17C-FD6B34B75143}" type="datetimeFigureOut">
+            <a:fld id="{4354DB14-F9AE-4C12-8CFE-33ABF7B568CC}" type="datetimeFigureOut">
               <a:rPr lang="en-US" smtClean="0"/>
               <a:t>10/3/2026</a:t>
             </a:fld>
@@ -10707,7 +10762,7 @@
           <a:bodyPr/>
           <a:lstStyle/>
           <a:p>
-            <a:fld id="{0DF0A140-DE23-4C37-9945-2DD700FC6B21}" type="slidenum">
+            <a:fld id="{74A457B9-11F0-4EFD-A461-9DC8C80A1D31}" type="slidenum">
               <a:rPr lang="en-US" smtClean="0"/>
               <a:t>‹#›</a:t>
             </a:fld>
@@ -10720,7 +10775,7 @@
           <p:cNvPr id="8" name="item_1_title">
             <a:extLst>
               <a:ext uri="{FF2B5EF4-FFF2-40B4-BE49-F238E27FC236}">
-                <a16:creationId xmlns:a16="http://schemas.microsoft.com/office/drawing/2014/main" id="{8E3879FA-E5E4-FF2A-A710-3A4E65F28423}"/>
+                <a16:creationId xmlns:a16="http://schemas.microsoft.com/office/drawing/2014/main" id="{236A0303-EED4-8488-81DC-00BEE37547BA}"/>
               </a:ext>
             </a:extLst>
           </p:cNvPr>
@@ -10733,8 +10788,8 @@
         </p:nvSpPr>
         <p:spPr>
           <a:xfrm>
-            <a:off x="1198591" y="2472230"/>
-            <a:ext cx="4411418" cy="387325"/>
+            <a:off x="2348015" y="2472230"/>
+            <a:ext cx="3880222" cy="387325"/>
           </a:xfrm>
         </p:spPr>
         <p:txBody>
@@ -10770,7 +10825,7 @@
           <p:cNvPr id="9" name="item_1">
             <a:extLst>
               <a:ext uri="{FF2B5EF4-FFF2-40B4-BE49-F238E27FC236}">
-                <a16:creationId xmlns:a16="http://schemas.microsoft.com/office/drawing/2014/main" id="{FA52E9F7-13B0-07F2-01C7-2146E4011E17}"/>
+                <a16:creationId xmlns:a16="http://schemas.microsoft.com/office/drawing/2014/main" id="{826AF70F-2AC1-F1F5-BF8A-45B4A5FC58CB}"/>
               </a:ext>
             </a:extLst>
           </p:cNvPr>
@@ -10783,8 +10838,8 @@
         </p:nvSpPr>
         <p:spPr>
           <a:xfrm>
-            <a:off x="1198591" y="2859554"/>
-            <a:ext cx="4411418" cy="929580"/>
+            <a:off x="2348015" y="2859554"/>
+            <a:ext cx="3880222" cy="929580"/>
           </a:xfrm>
           <a:prstGeom prst="rect">
             <a:avLst/>
@@ -10818,7 +10873,7 @@
           <p:cNvPr id="10" name="item_2_title">
             <a:extLst>
               <a:ext uri="{FF2B5EF4-FFF2-40B4-BE49-F238E27FC236}">
-                <a16:creationId xmlns:a16="http://schemas.microsoft.com/office/drawing/2014/main" id="{13B56F5E-9CC9-B834-71CA-34B0DB1D9DC3}"/>
+                <a16:creationId xmlns:a16="http://schemas.microsoft.com/office/drawing/2014/main" id="{9C8FF75B-B5C1-B77E-0582-7FA4A676D53A}"/>
               </a:ext>
             </a:extLst>
           </p:cNvPr>
@@ -10831,8 +10886,8 @@
         </p:nvSpPr>
         <p:spPr>
           <a:xfrm>
-            <a:off x="6158321" y="2472230"/>
-            <a:ext cx="4411418" cy="387325"/>
+            <a:off x="6710525" y="2472230"/>
+            <a:ext cx="3880222" cy="387325"/>
           </a:xfrm>
           <a:prstGeom prst="rect">
             <a:avLst/>
@@ -10871,7 +10926,7 @@
           <p:cNvPr id="11" name="item_2">
             <a:extLst>
               <a:ext uri="{FF2B5EF4-FFF2-40B4-BE49-F238E27FC236}">
-                <a16:creationId xmlns:a16="http://schemas.microsoft.com/office/drawing/2014/main" id="{32541611-1337-817A-66AA-5657191EFFDA}"/>
+                <a16:creationId xmlns:a16="http://schemas.microsoft.com/office/drawing/2014/main" id="{06D2A5E2-F36B-339F-A19A-E3A28E787721}"/>
               </a:ext>
             </a:extLst>
           </p:cNvPr>
@@ -10884,8 +10939,8 @@
         </p:nvSpPr>
         <p:spPr>
           <a:xfrm>
-            <a:off x="6158321" y="2859554"/>
-            <a:ext cx="4411418" cy="929580"/>
+            <a:off x="6710525" y="2859554"/>
+            <a:ext cx="3880222" cy="929580"/>
           </a:xfrm>
           <a:prstGeom prst="rect">
             <a:avLst/>
@@ -10919,7 +10974,7 @@
           <p:cNvPr id="12" name="item_3_title">
             <a:extLst>
               <a:ext uri="{FF2B5EF4-FFF2-40B4-BE49-F238E27FC236}">
-                <a16:creationId xmlns:a16="http://schemas.microsoft.com/office/drawing/2014/main" id="{707053E0-F3FC-A758-06EA-2268B11436E2}"/>
+                <a16:creationId xmlns:a16="http://schemas.microsoft.com/office/drawing/2014/main" id="{E1437A7D-37F5-985D-E8CE-A86538FFBF16}"/>
               </a:ext>
             </a:extLst>
           </p:cNvPr>
@@ -10932,8 +10987,8 @@
         </p:nvSpPr>
         <p:spPr>
           <a:xfrm>
-            <a:off x="1198591" y="4374427"/>
-            <a:ext cx="4411418" cy="387325"/>
+            <a:off x="2348015" y="4374427"/>
+            <a:ext cx="3880222" cy="387325"/>
           </a:xfrm>
           <a:prstGeom prst="rect">
             <a:avLst/>
@@ -10972,7 +11027,7 @@
           <p:cNvPr id="13" name="item_3">
             <a:extLst>
               <a:ext uri="{FF2B5EF4-FFF2-40B4-BE49-F238E27FC236}">
-                <a16:creationId xmlns:a16="http://schemas.microsoft.com/office/drawing/2014/main" id="{1A6E0C27-7829-B736-783D-0E05BBCB4A75}"/>
+                <a16:creationId xmlns:a16="http://schemas.microsoft.com/office/drawing/2014/main" id="{4AAB1A57-9747-EB9E-668A-CAA0844CA5D0}"/>
               </a:ext>
             </a:extLst>
           </p:cNvPr>
@@ -10985,8 +11040,8 @@
         </p:nvSpPr>
         <p:spPr>
           <a:xfrm>
-            <a:off x="1198591" y="4761750"/>
-            <a:ext cx="4411418" cy="929580"/>
+            <a:off x="2348015" y="4761750"/>
+            <a:ext cx="3880222" cy="929580"/>
           </a:xfrm>
           <a:prstGeom prst="rect">
             <a:avLst/>
@@ -11020,7 +11075,7 @@
           <p:cNvPr id="14" name="item_4_title">
             <a:extLst>
               <a:ext uri="{FF2B5EF4-FFF2-40B4-BE49-F238E27FC236}">
-                <a16:creationId xmlns:a16="http://schemas.microsoft.com/office/drawing/2014/main" id="{C01F858A-FAA3-11FC-5B31-344BB248311D}"/>
+                <a16:creationId xmlns:a16="http://schemas.microsoft.com/office/drawing/2014/main" id="{697AAD27-C4A3-DA25-653D-886D48D213D6}"/>
               </a:ext>
             </a:extLst>
           </p:cNvPr>
@@ -11033,8 +11088,8 @@
         </p:nvSpPr>
         <p:spPr>
           <a:xfrm>
-            <a:off x="6158321" y="4374427"/>
-            <a:ext cx="4411418" cy="387325"/>
+            <a:off x="6710525" y="4374427"/>
+            <a:ext cx="3880222" cy="387325"/>
           </a:xfrm>
           <a:prstGeom prst="rect">
             <a:avLst/>
@@ -11073,7 +11128,7 @@
           <p:cNvPr id="15" name="item_4">
             <a:extLst>
               <a:ext uri="{FF2B5EF4-FFF2-40B4-BE49-F238E27FC236}">
-                <a16:creationId xmlns:a16="http://schemas.microsoft.com/office/drawing/2014/main" id="{0D8A60F8-784D-46F0-225A-94149FC3F750}"/>
+                <a16:creationId xmlns:a16="http://schemas.microsoft.com/office/drawing/2014/main" id="{F5CD9EBB-46FE-63D7-7595-B3D45E21BF19}"/>
               </a:ext>
             </a:extLst>
           </p:cNvPr>
@@ -11086,8 +11141,8 @@
         </p:nvSpPr>
         <p:spPr>
           <a:xfrm>
-            <a:off x="6158321" y="4761750"/>
-            <a:ext cx="4411418" cy="929580"/>
+            <a:off x="6710525" y="4761750"/>
+            <a:ext cx="3880222" cy="929580"/>
           </a:xfrm>
           <a:prstGeom prst="rect">
             <a:avLst/>
@@ -11121,7 +11176,7 @@
           <p:cNvPr id="16" name="source">
             <a:extLst>
               <a:ext uri="{FF2B5EF4-FFF2-40B4-BE49-F238E27FC236}">
-                <a16:creationId xmlns:a16="http://schemas.microsoft.com/office/drawing/2014/main" id="{000F5716-E645-0C01-A0B7-4018844D8DCB}"/>
+                <a16:creationId xmlns:a16="http://schemas.microsoft.com/office/drawing/2014/main" id="{51978395-6D32-2C83-2110-8ED50380120D}"/>
               </a:ext>
             </a:extLst>
           </p:cNvPr>
@@ -11134,7 +11189,7 @@
         </p:nvSpPr>
         <p:spPr>
           <a:xfrm>
-            <a:off x="1024128" y="6004560"/>
+            <a:off x="2194560" y="6004560"/>
             <a:ext cx="1905000" cy="304800"/>
           </a:xfrm>
           <a:prstGeom prst="roundRect">
@@ -11176,7 +11231,7 @@
     </p:spTree>
     <p:extLst>
       <p:ext uri="{BB962C8B-B14F-4D97-AF65-F5344CB8AC3E}">
-        <p14:creationId xmlns:p14="http://schemas.microsoft.com/office/powerpoint/2010/main" val="3192191840"/>
+        <p14:creationId xmlns:p14="http://schemas.microsoft.com/office/powerpoint/2010/main" val="3564398987"/>
       </p:ext>
     </p:extLst>
   </p:cSld>
@@ -11208,7 +11263,7 @@
           <p:cNvPr id="7" name="creative_background">
             <a:extLst>
               <a:ext uri="{FF2B5EF4-FFF2-40B4-BE49-F238E27FC236}">
-                <a16:creationId xmlns:a16="http://schemas.microsoft.com/office/drawing/2014/main" id="{E265FA1F-BBF8-6DAB-D129-989ED8A21B11}"/>
+                <a16:creationId xmlns:a16="http://schemas.microsoft.com/office/drawing/2014/main" id="{D4E86E10-57FE-2E32-A1DC-5A435640BC29}"/>
               </a:ext>
             </a:extLst>
           </p:cNvPr>
@@ -11249,7 +11304,12 @@
             <p:ph type="title"/>
           </p:nvPr>
         </p:nvSpPr>
-        <p:spPr/>
+        <p:spPr>
+          <a:xfrm>
+            <a:off x="2194560" y="585216"/>
+            <a:ext cx="8547100" cy="1499616"/>
+          </a:xfrm>
+        </p:spPr>
         <p:txBody>
           <a:bodyPr/>
           <a:lstStyle>
@@ -11276,12 +11336,17 @@
             <p:ph type="dt" sz="half" idx="10"/>
           </p:nvPr>
         </p:nvSpPr>
-        <p:spPr/>
+        <p:spPr>
+          <a:xfrm>
+            <a:off x="2194560" y="6470704"/>
+            <a:ext cx="977900" cy="274320"/>
+          </a:xfrm>
+        </p:spPr>
         <p:txBody>
           <a:bodyPr/>
           <a:lstStyle/>
           <a:p>
-            <a:fld id="{5922C19E-7BE7-43A0-B17C-FD6B34B75143}" type="datetimeFigureOut">
+            <a:fld id="{4354DB14-F9AE-4C12-8CFE-33ABF7B568CC}" type="datetimeFigureOut">
               <a:rPr lang="en-US" smtClean="0"/>
               <a:t>10/3/2026</a:t>
             </a:fld>
@@ -11323,7 +11388,7 @@
           <a:bodyPr/>
           <a:lstStyle/>
           <a:p>
-            <a:fld id="{0DF0A140-DE23-4C37-9945-2DD700FC6B21}" type="slidenum">
+            <a:fld id="{74A457B9-11F0-4EFD-A461-9DC8C80A1D31}" type="slidenum">
               <a:rPr lang="en-US" smtClean="0"/>
               <a:t>‹#›</a:t>
             </a:fld>
@@ -11336,7 +11401,7 @@
           <p:cNvPr id="8" name="body">
             <a:extLst>
               <a:ext uri="{FF2B5EF4-FFF2-40B4-BE49-F238E27FC236}">
-                <a16:creationId xmlns:a16="http://schemas.microsoft.com/office/drawing/2014/main" id="{8F3A082B-1EEC-C913-1D3F-429EACECE34C}"/>
+                <a16:creationId xmlns:a16="http://schemas.microsoft.com/office/drawing/2014/main" id="{396ADC4D-4880-13CD-90E3-7933A4960E8F}"/>
               </a:ext>
             </a:extLst>
           </p:cNvPr>
@@ -11349,8 +11414,8 @@
         </p:nvSpPr>
         <p:spPr>
           <a:xfrm>
-            <a:off x="7244975" y="2824734"/>
-            <a:ext cx="3499226" cy="2514092"/>
+            <a:off x="7666331" y="2824734"/>
+            <a:ext cx="3077871" cy="2514092"/>
           </a:xfrm>
         </p:spPr>
         <p:txBody>
@@ -11376,7 +11441,7 @@
           <p:cNvPr id="9" name="kpi_value_1">
             <a:extLst>
               <a:ext uri="{FF2B5EF4-FFF2-40B4-BE49-F238E27FC236}">
-                <a16:creationId xmlns:a16="http://schemas.microsoft.com/office/drawing/2014/main" id="{DEC47F94-FC46-40B0-1395-4C3818F8743E}"/>
+                <a16:creationId xmlns:a16="http://schemas.microsoft.com/office/drawing/2014/main" id="{485BFF40-B9B4-4FCA-79EF-3A5AD64AF123}"/>
               </a:ext>
             </a:extLst>
           </p:cNvPr>
@@ -11389,8 +11454,8 @@
         </p:nvSpPr>
         <p:spPr>
           <a:xfrm>
-            <a:off x="1024128" y="2286000"/>
-            <a:ext cx="5832044" cy="2308860"/>
+            <a:off x="2194561" y="2286000"/>
+            <a:ext cx="5129785" cy="2308860"/>
           </a:xfrm>
           <a:prstGeom prst="rect">
             <a:avLst/>
@@ -11429,7 +11494,7 @@
           <p:cNvPr id="10" name="kpi_label_1">
             <a:extLst>
               <a:ext uri="{FF2B5EF4-FFF2-40B4-BE49-F238E27FC236}">
-                <a16:creationId xmlns:a16="http://schemas.microsoft.com/office/drawing/2014/main" id="{0B964729-D152-AFC7-70BB-8896C5E4522F}"/>
+                <a16:creationId xmlns:a16="http://schemas.microsoft.com/office/drawing/2014/main" id="{B0CE5E95-5EA8-C898-69FA-2E3790300446}"/>
               </a:ext>
             </a:extLst>
           </p:cNvPr>
@@ -11442,8 +11507,8 @@
         </p:nvSpPr>
         <p:spPr>
           <a:xfrm>
-            <a:off x="1024128" y="4594860"/>
-            <a:ext cx="5832044" cy="1282700"/>
+            <a:off x="2194561" y="4594860"/>
+            <a:ext cx="5129785" cy="1282700"/>
           </a:xfrm>
           <a:prstGeom prst="rect">
             <a:avLst/>
@@ -11477,7 +11542,7 @@
           <p:cNvPr id="11" name="source">
             <a:extLst>
               <a:ext uri="{FF2B5EF4-FFF2-40B4-BE49-F238E27FC236}">
-                <a16:creationId xmlns:a16="http://schemas.microsoft.com/office/drawing/2014/main" id="{C2448067-C2F6-F521-5537-CAFC92BC9518}"/>
+                <a16:creationId xmlns:a16="http://schemas.microsoft.com/office/drawing/2014/main" id="{598253EE-E6AD-499B-3E37-785087016A4E}"/>
               </a:ext>
             </a:extLst>
           </p:cNvPr>
@@ -11490,7 +11555,7 @@
         </p:nvSpPr>
         <p:spPr>
           <a:xfrm>
-            <a:off x="1024128" y="6004560"/>
+            <a:off x="2194560" y="6004560"/>
             <a:ext cx="1905000" cy="304800"/>
           </a:xfrm>
           <a:prstGeom prst="roundRect">
@@ -11532,7 +11597,7 @@
     </p:spTree>
     <p:extLst>
       <p:ext uri="{BB962C8B-B14F-4D97-AF65-F5344CB8AC3E}">
-        <p14:creationId xmlns:p14="http://schemas.microsoft.com/office/powerpoint/2010/main" val="3234951817"/>
+        <p14:creationId xmlns:p14="http://schemas.microsoft.com/office/powerpoint/2010/main" val="2127979328"/>
       </p:ext>
     </p:extLst>
   </p:cSld>
@@ -11564,7 +11629,7 @@
           <p:cNvPr id="7" name="creative_background">
             <a:extLst>
               <a:ext uri="{FF2B5EF4-FFF2-40B4-BE49-F238E27FC236}">
-                <a16:creationId xmlns:a16="http://schemas.microsoft.com/office/drawing/2014/main" id="{A9BF52EC-9074-2B12-9BF8-0BFD3C4C6B40}"/>
+                <a16:creationId xmlns:a16="http://schemas.microsoft.com/office/drawing/2014/main" id="{679588AD-32A9-DF0F-7160-4BE011FC7D4E}"/>
               </a:ext>
             </a:extLst>
           </p:cNvPr>
@@ -11605,7 +11670,12 @@
             <p:ph type="title"/>
           </p:nvPr>
         </p:nvSpPr>
-        <p:spPr/>
+        <p:spPr>
+          <a:xfrm>
+            <a:off x="2194560" y="585216"/>
+            <a:ext cx="8547100" cy="1499616"/>
+          </a:xfrm>
+        </p:spPr>
         <p:txBody>
           <a:bodyPr/>
           <a:lstStyle>
@@ -11632,12 +11702,17 @@
             <p:ph type="dt" sz="half" idx="10"/>
           </p:nvPr>
         </p:nvSpPr>
-        <p:spPr/>
+        <p:spPr>
+          <a:xfrm>
+            <a:off x="2194560" y="6470704"/>
+            <a:ext cx="977900" cy="274320"/>
+          </a:xfrm>
+        </p:spPr>
         <p:txBody>
           <a:bodyPr/>
           <a:lstStyle/>
           <a:p>
-            <a:fld id="{5922C19E-7BE7-43A0-B17C-FD6B34B75143}" type="datetimeFigureOut">
+            <a:fld id="{4354DB14-F9AE-4C12-8CFE-33ABF7B568CC}" type="datetimeFigureOut">
               <a:rPr lang="en-US" smtClean="0"/>
               <a:t>10/3/2026</a:t>
             </a:fld>
@@ -11679,7 +11754,7 @@
           <a:bodyPr/>
           <a:lstStyle/>
           <a:p>
-            <a:fld id="{0DF0A140-DE23-4C37-9945-2DD700FC6B21}" type="slidenum">
+            <a:fld id="{74A457B9-11F0-4EFD-A461-9DC8C80A1D31}" type="slidenum">
               <a:rPr lang="en-US" smtClean="0"/>
               <a:t>‹#›</a:t>
             </a:fld>
@@ -11692,7 +11767,7 @@
           <p:cNvPr id="8" name="body">
             <a:extLst>
               <a:ext uri="{FF2B5EF4-FFF2-40B4-BE49-F238E27FC236}">
-                <a16:creationId xmlns:a16="http://schemas.microsoft.com/office/drawing/2014/main" id="{B14A636D-1EA0-AE66-ABE4-5E0844D000C3}"/>
+                <a16:creationId xmlns:a16="http://schemas.microsoft.com/office/drawing/2014/main" id="{C83B8985-F0C6-0753-8B17-6AC963A0C474}"/>
               </a:ext>
             </a:extLst>
           </p:cNvPr>
@@ -11705,8 +11780,8 @@
         </p:nvSpPr>
         <p:spPr>
           <a:xfrm>
-            <a:off x="1024128" y="5231080"/>
-            <a:ext cx="9720073" cy="646481"/>
+            <a:off x="2194560" y="5231080"/>
+            <a:ext cx="8549642" cy="646481"/>
           </a:xfrm>
         </p:spPr>
         <p:txBody>
@@ -11732,7 +11807,7 @@
           <p:cNvPr id="9" name="kpi_value_1">
             <a:extLst>
               <a:ext uri="{FF2B5EF4-FFF2-40B4-BE49-F238E27FC236}">
-                <a16:creationId xmlns:a16="http://schemas.microsoft.com/office/drawing/2014/main" id="{6FECCD30-9B91-BA85-42DD-6A361597D62B}"/>
+                <a16:creationId xmlns:a16="http://schemas.microsoft.com/office/drawing/2014/main" id="{D798F6E5-70D4-483D-CF6D-F1F28F9A1794}"/>
               </a:ext>
             </a:extLst>
           </p:cNvPr>
@@ -11745,8 +11820,8 @@
         </p:nvSpPr>
         <p:spPr>
           <a:xfrm>
-            <a:off x="1198592" y="2472230"/>
-            <a:ext cx="4511111" cy="1561473"/>
+            <a:off x="2348016" y="2472230"/>
+            <a:ext cx="3967911" cy="1561473"/>
           </a:xfrm>
           <a:prstGeom prst="rect">
             <a:avLst/>
@@ -11785,7 +11860,7 @@
           <p:cNvPr id="10" name="kpi_label_1">
             <a:extLst>
               <a:ext uri="{FF2B5EF4-FFF2-40B4-BE49-F238E27FC236}">
-                <a16:creationId xmlns:a16="http://schemas.microsoft.com/office/drawing/2014/main" id="{FF627D22-6CCC-F659-DFC1-8177CDA1E6BE}"/>
+                <a16:creationId xmlns:a16="http://schemas.microsoft.com/office/drawing/2014/main" id="{F79EAAFF-2075-0893-E39C-7B76FB90F089}"/>
               </a:ext>
             </a:extLst>
           </p:cNvPr>
@@ -11798,8 +11873,8 @@
         </p:nvSpPr>
         <p:spPr>
           <a:xfrm>
-            <a:off x="1198592" y="4033703"/>
-            <a:ext cx="4511111" cy="867485"/>
+            <a:off x="2348016" y="4033703"/>
+            <a:ext cx="3967911" cy="867485"/>
           </a:xfrm>
           <a:prstGeom prst="rect">
             <a:avLst/>
@@ -11833,7 +11908,7 @@
           <p:cNvPr id="11" name="kpi_value_2">
             <a:extLst>
               <a:ext uri="{FF2B5EF4-FFF2-40B4-BE49-F238E27FC236}">
-                <a16:creationId xmlns:a16="http://schemas.microsoft.com/office/drawing/2014/main" id="{22A15608-A676-2917-7B49-A980C939DB59}"/>
+                <a16:creationId xmlns:a16="http://schemas.microsoft.com/office/drawing/2014/main" id="{AC76CE24-49D8-2228-1176-BA09F13A6558}"/>
               </a:ext>
             </a:extLst>
           </p:cNvPr>
@@ -11846,8 +11921,8 @@
         </p:nvSpPr>
         <p:spPr>
           <a:xfrm>
-            <a:off x="6258015" y="2472230"/>
-            <a:ext cx="4311725" cy="592607"/>
+            <a:off x="6798214" y="2472230"/>
+            <a:ext cx="3792533" cy="592607"/>
           </a:xfrm>
           <a:prstGeom prst="rect">
             <a:avLst/>
@@ -11886,7 +11961,7 @@
           <p:cNvPr id="12" name="kpi_label_2">
             <a:extLst>
               <a:ext uri="{FF2B5EF4-FFF2-40B4-BE49-F238E27FC236}">
-                <a16:creationId xmlns:a16="http://schemas.microsoft.com/office/drawing/2014/main" id="{5F18D443-44C0-D55F-90D2-F7AA1EACC0C0}"/>
+                <a16:creationId xmlns:a16="http://schemas.microsoft.com/office/drawing/2014/main" id="{BCB403DD-9807-6DC6-4C86-C5C6AA839916}"/>
               </a:ext>
             </a:extLst>
           </p:cNvPr>
@@ -11899,8 +11974,8 @@
         </p:nvSpPr>
         <p:spPr>
           <a:xfrm>
-            <a:off x="6258015" y="3064836"/>
-            <a:ext cx="4311725" cy="329226"/>
+            <a:off x="6798214" y="3064836"/>
+            <a:ext cx="3792533" cy="329226"/>
           </a:xfrm>
           <a:prstGeom prst="rect">
             <a:avLst/>
@@ -11934,7 +12009,7 @@
           <p:cNvPr id="13" name="kpi_value_3">
             <a:extLst>
               <a:ext uri="{FF2B5EF4-FFF2-40B4-BE49-F238E27FC236}">
-                <a16:creationId xmlns:a16="http://schemas.microsoft.com/office/drawing/2014/main" id="{DA8E0816-C146-4AB0-7CA0-0E2845EE38FA}"/>
+                <a16:creationId xmlns:a16="http://schemas.microsoft.com/office/drawing/2014/main" id="{7D4F318C-F511-9857-1DEC-2CC1DDE8EB2A}"/>
               </a:ext>
             </a:extLst>
           </p:cNvPr>
@@ -11947,8 +12022,8 @@
         </p:nvSpPr>
         <p:spPr>
           <a:xfrm>
-            <a:off x="6258014" y="3979355"/>
-            <a:ext cx="1881706" cy="592607"/>
+            <a:off x="6798214" y="3979355"/>
+            <a:ext cx="1655123" cy="592607"/>
           </a:xfrm>
           <a:prstGeom prst="rect">
             <a:avLst/>
@@ -11987,7 +12062,7 @@
           <p:cNvPr id="14" name="kpi_label_3">
             <a:extLst>
               <a:ext uri="{FF2B5EF4-FFF2-40B4-BE49-F238E27FC236}">
-                <a16:creationId xmlns:a16="http://schemas.microsoft.com/office/drawing/2014/main" id="{E06839B7-E3CE-CD17-D4EC-89738626BCA9}"/>
+                <a16:creationId xmlns:a16="http://schemas.microsoft.com/office/drawing/2014/main" id="{CBEEB858-970D-4525-E748-228A318BADD7}"/>
               </a:ext>
             </a:extLst>
           </p:cNvPr>
@@ -12000,8 +12075,8 @@
         </p:nvSpPr>
         <p:spPr>
           <a:xfrm>
-            <a:off x="6258014" y="4571961"/>
-            <a:ext cx="1881706" cy="329226"/>
+            <a:off x="6798214" y="4571961"/>
+            <a:ext cx="1655123" cy="329226"/>
           </a:xfrm>
           <a:prstGeom prst="rect">
             <a:avLst/>
@@ -12035,7 +12110,7 @@
           <p:cNvPr id="15" name="kpi_value_4">
             <a:extLst>
               <a:ext uri="{FF2B5EF4-FFF2-40B4-BE49-F238E27FC236}">
-                <a16:creationId xmlns:a16="http://schemas.microsoft.com/office/drawing/2014/main" id="{6BC29F2E-711A-0B2B-020D-5BC67846BD2C}"/>
+                <a16:creationId xmlns:a16="http://schemas.microsoft.com/office/drawing/2014/main" id="{C318DE7E-B37A-B4B7-7CA1-105204F52647}"/>
               </a:ext>
             </a:extLst>
           </p:cNvPr>
@@ -12048,8 +12123,8 @@
         </p:nvSpPr>
         <p:spPr>
           <a:xfrm>
-            <a:off x="8688032" y="3979355"/>
-            <a:ext cx="1881706" cy="592607"/>
+            <a:off x="8935625" y="3979355"/>
+            <a:ext cx="1655123" cy="592607"/>
           </a:xfrm>
           <a:prstGeom prst="rect">
             <a:avLst/>
@@ -12088,7 +12163,7 @@
           <p:cNvPr id="16" name="kpi_label_4">
             <a:extLst>
               <a:ext uri="{FF2B5EF4-FFF2-40B4-BE49-F238E27FC236}">
-                <a16:creationId xmlns:a16="http://schemas.microsoft.com/office/drawing/2014/main" id="{1219EFEF-289A-7A61-53E6-54C69C3F2BA2}"/>
+                <a16:creationId xmlns:a16="http://schemas.microsoft.com/office/drawing/2014/main" id="{F6421513-9A82-2E35-958D-D3C3F04E6436}"/>
               </a:ext>
             </a:extLst>
           </p:cNvPr>
@@ -12101,8 +12176,8 @@
         </p:nvSpPr>
         <p:spPr>
           <a:xfrm>
-            <a:off x="8688032" y="4571961"/>
-            <a:ext cx="1881706" cy="329226"/>
+            <a:off x="8935625" y="4571961"/>
+            <a:ext cx="1655123" cy="329226"/>
           </a:xfrm>
           <a:prstGeom prst="rect">
             <a:avLst/>
@@ -12136,7 +12211,7 @@
           <p:cNvPr id="17" name="source">
             <a:extLst>
               <a:ext uri="{FF2B5EF4-FFF2-40B4-BE49-F238E27FC236}">
-                <a16:creationId xmlns:a16="http://schemas.microsoft.com/office/drawing/2014/main" id="{5FA0E090-8674-0A5A-7984-2C0C3739DF2A}"/>
+                <a16:creationId xmlns:a16="http://schemas.microsoft.com/office/drawing/2014/main" id="{410E5B5F-57CC-B6E2-E2EC-D36E74A70451}"/>
               </a:ext>
             </a:extLst>
           </p:cNvPr>
@@ -12149,7 +12224,7 @@
         </p:nvSpPr>
         <p:spPr>
           <a:xfrm>
-            <a:off x="1024128" y="6004560"/>
+            <a:off x="2194560" y="6004560"/>
             <a:ext cx="1905000" cy="304800"/>
           </a:xfrm>
           <a:prstGeom prst="roundRect">
@@ -12191,7 +12266,7 @@
     </p:spTree>
     <p:extLst>
       <p:ext uri="{BB962C8B-B14F-4D97-AF65-F5344CB8AC3E}">
-        <p14:creationId xmlns:p14="http://schemas.microsoft.com/office/powerpoint/2010/main" val="2093773707"/>
+        <p14:creationId xmlns:p14="http://schemas.microsoft.com/office/powerpoint/2010/main" val="218603819"/>
       </p:ext>
     </p:extLst>
   </p:cSld>
@@ -12223,7 +12298,7 @@
           <p:cNvPr id="7" name="creative_background">
             <a:extLst>
               <a:ext uri="{FF2B5EF4-FFF2-40B4-BE49-F238E27FC236}">
-                <a16:creationId xmlns:a16="http://schemas.microsoft.com/office/drawing/2014/main" id="{79169614-5151-D940-C41A-040FF0BAEB6E}"/>
+                <a16:creationId xmlns:a16="http://schemas.microsoft.com/office/drawing/2014/main" id="{95CD7B65-DD56-FD02-BBCE-6EF2B7F3FF1B}"/>
               </a:ext>
             </a:extLst>
           </p:cNvPr>
@@ -12264,7 +12339,12 @@
             <p:ph type="title"/>
           </p:nvPr>
         </p:nvSpPr>
-        <p:spPr/>
+        <p:spPr>
+          <a:xfrm>
+            <a:off x="2194560" y="585216"/>
+            <a:ext cx="8547100" cy="1499616"/>
+          </a:xfrm>
+        </p:spPr>
         <p:txBody>
           <a:bodyPr/>
           <a:lstStyle>
@@ -12291,12 +12371,17 @@
             <p:ph type="dt" sz="half" idx="10"/>
           </p:nvPr>
         </p:nvSpPr>
-        <p:spPr/>
+        <p:spPr>
+          <a:xfrm>
+            <a:off x="2194560" y="6470704"/>
+            <a:ext cx="977900" cy="274320"/>
+          </a:xfrm>
+        </p:spPr>
         <p:txBody>
           <a:bodyPr/>
           <a:lstStyle/>
           <a:p>
-            <a:fld id="{5922C19E-7BE7-43A0-B17C-FD6B34B75143}" type="datetimeFigureOut">
+            <a:fld id="{4354DB14-F9AE-4C12-8CFE-33ABF7B568CC}" type="datetimeFigureOut">
               <a:rPr lang="en-US" smtClean="0"/>
               <a:t>10/3/2026</a:t>
             </a:fld>
@@ -12338,7 +12423,7 @@
           <a:bodyPr/>
           <a:lstStyle/>
           <a:p>
-            <a:fld id="{0DF0A140-DE23-4C37-9945-2DD700FC6B21}" type="slidenum">
+            <a:fld id="{74A457B9-11F0-4EFD-A461-9DC8C80A1D31}" type="slidenum">
               <a:rPr lang="en-US" smtClean="0"/>
               <a:t>‹#›</a:t>
             </a:fld>
@@ -12351,7 +12436,7 @@
           <p:cNvPr id="8" name="body">
             <a:extLst>
               <a:ext uri="{FF2B5EF4-FFF2-40B4-BE49-F238E27FC236}">
-                <a16:creationId xmlns:a16="http://schemas.microsoft.com/office/drawing/2014/main" id="{DD12E4ED-1560-54EB-FD71-8940B5D79BA5}"/>
+                <a16:creationId xmlns:a16="http://schemas.microsoft.com/office/drawing/2014/main" id="{2A5D89F9-C745-48C8-AE30-02AF2765B247}"/>
               </a:ext>
             </a:extLst>
           </p:cNvPr>
@@ -12364,8 +12449,8 @@
         </p:nvSpPr>
         <p:spPr>
           <a:xfrm>
-            <a:off x="1024128" y="5231080"/>
-            <a:ext cx="9720073" cy="646481"/>
+            <a:off x="2194560" y="5231080"/>
+            <a:ext cx="8549642" cy="646481"/>
           </a:xfrm>
         </p:spPr>
         <p:txBody>
@@ -12391,7 +12476,7 @@
           <p:cNvPr id="9" name="kpi_value_1">
             <a:extLst>
               <a:ext uri="{FF2B5EF4-FFF2-40B4-BE49-F238E27FC236}">
-                <a16:creationId xmlns:a16="http://schemas.microsoft.com/office/drawing/2014/main" id="{9608F334-3666-4566-B89C-632CE1567A1A}"/>
+                <a16:creationId xmlns:a16="http://schemas.microsoft.com/office/drawing/2014/main" id="{64D4DEBF-406B-F26F-0DB2-5748AC505C36}"/>
               </a:ext>
             </a:extLst>
           </p:cNvPr>
@@ -12404,8 +12489,8 @@
         </p:nvSpPr>
         <p:spPr>
           <a:xfrm>
-            <a:off x="1198591" y="2472229"/>
-            <a:ext cx="4411418" cy="1181656"/>
+            <a:off x="2348015" y="2472229"/>
+            <a:ext cx="3880222" cy="1181656"/>
           </a:xfrm>
           <a:prstGeom prst="rect">
             <a:avLst/>
@@ -12444,7 +12529,7 @@
           <p:cNvPr id="10" name="kpi_label_1">
             <a:extLst>
               <a:ext uri="{FF2B5EF4-FFF2-40B4-BE49-F238E27FC236}">
-                <a16:creationId xmlns:a16="http://schemas.microsoft.com/office/drawing/2014/main" id="{80D578A3-8DAA-42C7-B287-313280DEFA5E}"/>
+                <a16:creationId xmlns:a16="http://schemas.microsoft.com/office/drawing/2014/main" id="{E56858EB-457C-D7FE-5E79-40E7ED50590B}"/>
               </a:ext>
             </a:extLst>
           </p:cNvPr>
@@ -12457,8 +12542,8 @@
         </p:nvSpPr>
         <p:spPr>
           <a:xfrm>
-            <a:off x="1198591" y="3653886"/>
-            <a:ext cx="4411418" cy="656475"/>
+            <a:off x="2348015" y="3653886"/>
+            <a:ext cx="3880222" cy="656475"/>
           </a:xfrm>
           <a:prstGeom prst="rect">
             <a:avLst/>
@@ -12492,7 +12577,7 @@
           <p:cNvPr id="11" name="kpi_value_2">
             <a:extLst>
               <a:ext uri="{FF2B5EF4-FFF2-40B4-BE49-F238E27FC236}">
-                <a16:creationId xmlns:a16="http://schemas.microsoft.com/office/drawing/2014/main" id="{196B2363-675A-2F92-DC48-F6D2A384B1CA}"/>
+                <a16:creationId xmlns:a16="http://schemas.microsoft.com/office/drawing/2014/main" id="{A6A67EF4-7874-D39F-C35B-568DD65856C0}"/>
               </a:ext>
             </a:extLst>
           </p:cNvPr>
@@ -12505,8 +12590,8 @@
         </p:nvSpPr>
         <p:spPr>
           <a:xfrm>
-            <a:off x="6158321" y="2472229"/>
-            <a:ext cx="4411418" cy="1181656"/>
+            <a:off x="6710525" y="2472229"/>
+            <a:ext cx="3880222" cy="1181656"/>
           </a:xfrm>
           <a:prstGeom prst="rect">
             <a:avLst/>
@@ -12545,7 +12630,7 @@
           <p:cNvPr id="12" name="kpi_label_2">
             <a:extLst>
               <a:ext uri="{FF2B5EF4-FFF2-40B4-BE49-F238E27FC236}">
-                <a16:creationId xmlns:a16="http://schemas.microsoft.com/office/drawing/2014/main" id="{4A068988-0653-FCE7-2A15-A9EFC9D4C92E}"/>
+                <a16:creationId xmlns:a16="http://schemas.microsoft.com/office/drawing/2014/main" id="{647CD680-2B07-0446-31DE-5D1C82AD560D}"/>
               </a:ext>
             </a:extLst>
           </p:cNvPr>
@@ -12558,8 +12643,8 @@
         </p:nvSpPr>
         <p:spPr>
           <a:xfrm>
-            <a:off x="6158321" y="3653886"/>
-            <a:ext cx="4411418" cy="656475"/>
+            <a:off x="6710525" y="3653886"/>
+            <a:ext cx="3880222" cy="656475"/>
           </a:xfrm>
           <a:prstGeom prst="rect">
             <a:avLst/>
@@ -12593,7 +12678,7 @@
           <p:cNvPr id="13" name="source">
             <a:extLst>
               <a:ext uri="{FF2B5EF4-FFF2-40B4-BE49-F238E27FC236}">
-                <a16:creationId xmlns:a16="http://schemas.microsoft.com/office/drawing/2014/main" id="{8FD16521-79CD-8BC8-FF60-FCB1E2CC9C04}"/>
+                <a16:creationId xmlns:a16="http://schemas.microsoft.com/office/drawing/2014/main" id="{B3408117-5AEA-9051-1B98-A0902810D8A2}"/>
               </a:ext>
             </a:extLst>
           </p:cNvPr>
@@ -12606,7 +12691,7 @@
         </p:nvSpPr>
         <p:spPr>
           <a:xfrm>
-            <a:off x="1024128" y="6004560"/>
+            <a:off x="2194560" y="6004560"/>
             <a:ext cx="1905000" cy="304800"/>
           </a:xfrm>
           <a:prstGeom prst="roundRect">
@@ -12648,7 +12733,7 @@
     </p:spTree>
     <p:extLst>
       <p:ext uri="{BB962C8B-B14F-4D97-AF65-F5344CB8AC3E}">
-        <p14:creationId xmlns:p14="http://schemas.microsoft.com/office/powerpoint/2010/main" val="3795199377"/>
+        <p14:creationId xmlns:p14="http://schemas.microsoft.com/office/powerpoint/2010/main" val="1817919029"/>
       </p:ext>
     </p:extLst>
   </p:cSld>
@@ -12680,7 +12765,7 @@
           <p:cNvPr id="7" name="creative_background">
             <a:extLst>
               <a:ext uri="{FF2B5EF4-FFF2-40B4-BE49-F238E27FC236}">
-                <a16:creationId xmlns:a16="http://schemas.microsoft.com/office/drawing/2014/main" id="{A4EBC768-B3AF-CDAA-EA83-007AAFB9D6C9}"/>
+                <a16:creationId xmlns:a16="http://schemas.microsoft.com/office/drawing/2014/main" id="{33B56DC2-3C1F-8115-D34F-756505E89124}"/>
               </a:ext>
             </a:extLst>
           </p:cNvPr>
@@ -12721,7 +12806,12 @@
             <p:ph type="title"/>
           </p:nvPr>
         </p:nvSpPr>
-        <p:spPr/>
+        <p:spPr>
+          <a:xfrm>
+            <a:off x="2194560" y="585216"/>
+            <a:ext cx="8547100" cy="1499616"/>
+          </a:xfrm>
+        </p:spPr>
         <p:txBody>
           <a:bodyPr/>
           <a:lstStyle>
@@ -12748,12 +12838,17 @@
             <p:ph type="dt" sz="half" idx="10"/>
           </p:nvPr>
         </p:nvSpPr>
-        <p:spPr/>
+        <p:spPr>
+          <a:xfrm>
+            <a:off x="2194560" y="6470704"/>
+            <a:ext cx="977900" cy="274320"/>
+          </a:xfrm>
+        </p:spPr>
         <p:txBody>
           <a:bodyPr/>
           <a:lstStyle/>
           <a:p>
-            <a:fld id="{5922C19E-7BE7-43A0-B17C-FD6B34B75143}" type="datetimeFigureOut">
+            <a:fld id="{4354DB14-F9AE-4C12-8CFE-33ABF7B568CC}" type="datetimeFigureOut">
               <a:rPr lang="en-US" smtClean="0"/>
               <a:t>10/3/2026</a:t>
             </a:fld>
@@ -12795,7 +12890,7 @@
           <a:bodyPr/>
           <a:lstStyle/>
           <a:p>
-            <a:fld id="{0DF0A140-DE23-4C37-9945-2DD700FC6B21}" type="slidenum">
+            <a:fld id="{74A457B9-11F0-4EFD-A461-9DC8C80A1D31}" type="slidenum">
               <a:rPr lang="en-US" smtClean="0"/>
               <a:t>‹#›</a:t>
             </a:fld>
@@ -12808,7 +12903,7 @@
           <p:cNvPr id="8" name="body">
             <a:extLst>
               <a:ext uri="{FF2B5EF4-FFF2-40B4-BE49-F238E27FC236}">
-                <a16:creationId xmlns:a16="http://schemas.microsoft.com/office/drawing/2014/main" id="{68F439B6-2F89-C788-0197-6AC2B30B67BC}"/>
+                <a16:creationId xmlns:a16="http://schemas.microsoft.com/office/drawing/2014/main" id="{287A6DEF-45D9-AC2C-1063-68EF12974972}"/>
               </a:ext>
             </a:extLst>
           </p:cNvPr>
@@ -12821,8 +12916,8 @@
         </p:nvSpPr>
         <p:spPr>
           <a:xfrm>
-            <a:off x="1024128" y="5231080"/>
-            <a:ext cx="9720073" cy="646481"/>
+            <a:off x="2194560" y="5231080"/>
+            <a:ext cx="8549642" cy="646481"/>
           </a:xfrm>
         </p:spPr>
         <p:txBody>
@@ -12848,7 +12943,7 @@
           <p:cNvPr id="9" name="kpi_value_1">
             <a:extLst>
               <a:ext uri="{FF2B5EF4-FFF2-40B4-BE49-F238E27FC236}">
-                <a16:creationId xmlns:a16="http://schemas.microsoft.com/office/drawing/2014/main" id="{0DE89DCE-5377-7C91-8B95-CABAEF576667}"/>
+                <a16:creationId xmlns:a16="http://schemas.microsoft.com/office/drawing/2014/main" id="{AF334F09-CE67-97B0-734C-38110C21E565}"/>
               </a:ext>
             </a:extLst>
           </p:cNvPr>
@@ -12861,8 +12956,8 @@
         </p:nvSpPr>
         <p:spPr>
           <a:xfrm>
-            <a:off x="1148744" y="2419022"/>
-            <a:ext cx="2462418" cy="334547"/>
+            <a:off x="2304172" y="2419022"/>
+            <a:ext cx="2165909" cy="334547"/>
           </a:xfrm>
           <a:prstGeom prst="rect">
             <a:avLst/>
@@ -12901,7 +12996,7 @@
           <p:cNvPr id="10" name="kpi_label_1">
             <a:extLst>
               <a:ext uri="{FF2B5EF4-FFF2-40B4-BE49-F238E27FC236}">
-                <a16:creationId xmlns:a16="http://schemas.microsoft.com/office/drawing/2014/main" id="{FC878AD4-41F5-FEAB-5593-CFBD6C9292E4}"/>
+                <a16:creationId xmlns:a16="http://schemas.microsoft.com/office/drawing/2014/main" id="{85AA2DE9-9BFC-8825-CFFD-E236F4BBC01E}"/>
               </a:ext>
             </a:extLst>
           </p:cNvPr>
@@ -12914,8 +13009,8 @@
         </p:nvSpPr>
         <p:spPr>
           <a:xfrm>
-            <a:off x="3710857" y="2419022"/>
-            <a:ext cx="6908729" cy="247813"/>
+            <a:off x="4557769" y="2419022"/>
+            <a:ext cx="6076822" cy="247813"/>
           </a:xfrm>
           <a:prstGeom prst="rect">
             <a:avLst/>
@@ -12949,7 +13044,7 @@
           <p:cNvPr id="11" name="kpi_value_2">
             <a:extLst>
               <a:ext uri="{FF2B5EF4-FFF2-40B4-BE49-F238E27FC236}">
-                <a16:creationId xmlns:a16="http://schemas.microsoft.com/office/drawing/2014/main" id="{ABD02252-7CA4-09AC-321C-24AC053041FA}"/>
+                <a16:creationId xmlns:a16="http://schemas.microsoft.com/office/drawing/2014/main" id="{FD04D8DC-74B5-1F20-8F4E-B4EE146AA7FB}"/>
               </a:ext>
             </a:extLst>
           </p:cNvPr>
@@ -12962,8 +13057,8 @@
         </p:nvSpPr>
         <p:spPr>
           <a:xfrm>
-            <a:off x="1148744" y="3152631"/>
-            <a:ext cx="2462418" cy="334547"/>
+            <a:off x="2304172" y="3152631"/>
+            <a:ext cx="2165909" cy="334547"/>
           </a:xfrm>
           <a:prstGeom prst="rect">
             <a:avLst/>
@@ -13002,7 +13097,7 @@
           <p:cNvPr id="12" name="kpi_label_2">
             <a:extLst>
               <a:ext uri="{FF2B5EF4-FFF2-40B4-BE49-F238E27FC236}">
-                <a16:creationId xmlns:a16="http://schemas.microsoft.com/office/drawing/2014/main" id="{B61AAE56-D318-BCD3-B235-EDD26C0E2B69}"/>
+                <a16:creationId xmlns:a16="http://schemas.microsoft.com/office/drawing/2014/main" id="{73EF77D5-0352-9296-A431-027D2CE954BF}"/>
               </a:ext>
             </a:extLst>
           </p:cNvPr>
@@ -13015,8 +13110,8 @@
         </p:nvSpPr>
         <p:spPr>
           <a:xfrm>
-            <a:off x="3710857" y="3152631"/>
-            <a:ext cx="6908729" cy="247813"/>
+            <a:off x="4557769" y="3152631"/>
+            <a:ext cx="6076822" cy="247813"/>
           </a:xfrm>
           <a:prstGeom prst="rect">
             <a:avLst/>
@@ -13050,7 +13145,7 @@
           <p:cNvPr id="13" name="kpi_value_3">
             <a:extLst>
               <a:ext uri="{FF2B5EF4-FFF2-40B4-BE49-F238E27FC236}">
-                <a16:creationId xmlns:a16="http://schemas.microsoft.com/office/drawing/2014/main" id="{45AA4B8D-03A6-BD1C-6287-42E061A01EB5}"/>
+                <a16:creationId xmlns:a16="http://schemas.microsoft.com/office/drawing/2014/main" id="{20920815-AC38-4A8D-A531-BDF2092021FF}"/>
               </a:ext>
             </a:extLst>
           </p:cNvPr>
@@ -13063,8 +13158,8 @@
         </p:nvSpPr>
         <p:spPr>
           <a:xfrm>
-            <a:off x="1148744" y="3886241"/>
-            <a:ext cx="2462418" cy="334547"/>
+            <a:off x="2304172" y="3886241"/>
+            <a:ext cx="2165909" cy="334547"/>
           </a:xfrm>
           <a:prstGeom prst="rect">
             <a:avLst/>
@@ -13103,7 +13198,7 @@
           <p:cNvPr id="14" name="kpi_label_3">
             <a:extLst>
               <a:ext uri="{FF2B5EF4-FFF2-40B4-BE49-F238E27FC236}">
-                <a16:creationId xmlns:a16="http://schemas.microsoft.com/office/drawing/2014/main" id="{781B05AF-D135-F2D1-67BD-0FCBA39AA4B7}"/>
+                <a16:creationId xmlns:a16="http://schemas.microsoft.com/office/drawing/2014/main" id="{8DE214DA-F065-6168-2CFA-710158124D61}"/>
               </a:ext>
             </a:extLst>
           </p:cNvPr>
@@ -13116,8 +13211,8 @@
         </p:nvSpPr>
         <p:spPr>
           <a:xfrm>
-            <a:off x="3710857" y="3886241"/>
-            <a:ext cx="6908729" cy="247813"/>
+            <a:off x="4557769" y="3886241"/>
+            <a:ext cx="6076822" cy="247813"/>
           </a:xfrm>
           <a:prstGeom prst="rect">
             <a:avLst/>
@@ -13151,7 +13246,7 @@
           <p:cNvPr id="15" name="kpi_value_4">
             <a:extLst>
               <a:ext uri="{FF2B5EF4-FFF2-40B4-BE49-F238E27FC236}">
-                <a16:creationId xmlns:a16="http://schemas.microsoft.com/office/drawing/2014/main" id="{1C6C9A64-E7B3-7E89-C1A4-66D66CDF63FA}"/>
+                <a16:creationId xmlns:a16="http://schemas.microsoft.com/office/drawing/2014/main" id="{20AF9AE3-A8D7-2765-C73E-71C6C741EFDA}"/>
               </a:ext>
             </a:extLst>
           </p:cNvPr>
@@ -13164,8 +13259,8 @@
         </p:nvSpPr>
         <p:spPr>
           <a:xfrm>
-            <a:off x="1148744" y="4619850"/>
-            <a:ext cx="2462418" cy="334547"/>
+            <a:off x="2304172" y="4619850"/>
+            <a:ext cx="2165909" cy="334547"/>
           </a:xfrm>
           <a:prstGeom prst="rect">
             <a:avLst/>
@@ -13204,7 +13299,7 @@
           <p:cNvPr id="16" name="kpi_label_4">
             <a:extLst>
               <a:ext uri="{FF2B5EF4-FFF2-40B4-BE49-F238E27FC236}">
-                <a16:creationId xmlns:a16="http://schemas.microsoft.com/office/drawing/2014/main" id="{CF7347BD-ADD0-4143-3408-6655C4EDCAF4}"/>
+                <a16:creationId xmlns:a16="http://schemas.microsoft.com/office/drawing/2014/main" id="{3AB31F76-1858-2566-7CA1-66ADF1DC5346}"/>
               </a:ext>
             </a:extLst>
           </p:cNvPr>
@@ -13217,8 +13312,8 @@
         </p:nvSpPr>
         <p:spPr>
           <a:xfrm>
-            <a:off x="3710857" y="4619850"/>
-            <a:ext cx="6908729" cy="247813"/>
+            <a:off x="4557769" y="4619850"/>
+            <a:ext cx="6076822" cy="247813"/>
           </a:xfrm>
           <a:prstGeom prst="rect">
             <a:avLst/>
@@ -13252,7 +13347,7 @@
           <p:cNvPr id="17" name="source">
             <a:extLst>
               <a:ext uri="{FF2B5EF4-FFF2-40B4-BE49-F238E27FC236}">
-                <a16:creationId xmlns:a16="http://schemas.microsoft.com/office/drawing/2014/main" id="{B238A489-11B7-DE96-FCC6-8A55A8BFD766}"/>
+                <a16:creationId xmlns:a16="http://schemas.microsoft.com/office/drawing/2014/main" id="{21D09CCE-FCD8-FAE3-9A0C-C4A05943A48E}"/>
               </a:ext>
             </a:extLst>
           </p:cNvPr>
@@ -13265,7 +13360,7 @@
         </p:nvSpPr>
         <p:spPr>
           <a:xfrm>
-            <a:off x="1024128" y="6004560"/>
+            <a:off x="2194560" y="6004560"/>
             <a:ext cx="1905000" cy="304800"/>
           </a:xfrm>
           <a:prstGeom prst="roundRect">
@@ -13307,7 +13402,7 @@
     </p:spTree>
     <p:extLst>
       <p:ext uri="{BB962C8B-B14F-4D97-AF65-F5344CB8AC3E}">
-        <p14:creationId xmlns:p14="http://schemas.microsoft.com/office/powerpoint/2010/main" val="3116753703"/>
+        <p14:creationId xmlns:p14="http://schemas.microsoft.com/office/powerpoint/2010/main" val="3357635521"/>
       </p:ext>
     </p:extLst>
   </p:cSld>
@@ -13339,7 +13434,7 @@
           <p:cNvPr id="7" name="creative_background">
             <a:extLst>
               <a:ext uri="{FF2B5EF4-FFF2-40B4-BE49-F238E27FC236}">
-                <a16:creationId xmlns:a16="http://schemas.microsoft.com/office/drawing/2014/main" id="{12B20DC2-4DC6-7F54-BE2F-2DCB8CD44834}"/>
+                <a16:creationId xmlns:a16="http://schemas.microsoft.com/office/drawing/2014/main" id="{84647722-9D43-0ECF-EE7C-CC48D95D54CE}"/>
               </a:ext>
             </a:extLst>
           </p:cNvPr>
@@ -13380,7 +13475,12 @@
             <p:ph type="title"/>
           </p:nvPr>
         </p:nvSpPr>
-        <p:spPr/>
+        <p:spPr>
+          <a:xfrm>
+            <a:off x="2194560" y="585216"/>
+            <a:ext cx="8547100" cy="1499616"/>
+          </a:xfrm>
+        </p:spPr>
         <p:txBody>
           <a:bodyPr/>
           <a:lstStyle>
@@ -13407,12 +13507,17 @@
             <p:ph type="dt" sz="half" idx="10"/>
           </p:nvPr>
         </p:nvSpPr>
-        <p:spPr/>
+        <p:spPr>
+          <a:xfrm>
+            <a:off x="2194560" y="6470704"/>
+            <a:ext cx="977900" cy="274320"/>
+          </a:xfrm>
+        </p:spPr>
         <p:txBody>
           <a:bodyPr/>
           <a:lstStyle/>
           <a:p>
-            <a:fld id="{5922C19E-7BE7-43A0-B17C-FD6B34B75143}" type="datetimeFigureOut">
+            <a:fld id="{4354DB14-F9AE-4C12-8CFE-33ABF7B568CC}" type="datetimeFigureOut">
               <a:rPr lang="en-US" smtClean="0"/>
               <a:t>10/3/2026</a:t>
             </a:fld>
@@ -13454,7 +13559,7 @@
           <a:bodyPr/>
           <a:lstStyle/>
           <a:p>
-            <a:fld id="{0DF0A140-DE23-4C37-9945-2DD700FC6B21}" type="slidenum">
+            <a:fld id="{74A457B9-11F0-4EFD-A461-9DC8C80A1D31}" type="slidenum">
               <a:rPr lang="en-US" smtClean="0"/>
               <a:t>‹#›</a:t>
             </a:fld>
@@ -13467,7 +13572,7 @@
           <p:cNvPr id="8" name="item_1_title">
             <a:extLst>
               <a:ext uri="{FF2B5EF4-FFF2-40B4-BE49-F238E27FC236}">
-                <a16:creationId xmlns:a16="http://schemas.microsoft.com/office/drawing/2014/main" id="{432C7E26-29E4-7050-F6EF-3444AB12D19C}"/>
+                <a16:creationId xmlns:a16="http://schemas.microsoft.com/office/drawing/2014/main" id="{8908365D-F7B8-F5C2-B2CB-0C84A358A587}"/>
               </a:ext>
             </a:extLst>
           </p:cNvPr>
@@ -13480,8 +13585,8 @@
         </p:nvSpPr>
         <p:spPr>
           <a:xfrm>
-            <a:off x="1148744" y="2419022"/>
-            <a:ext cx="2841252" cy="532083"/>
+            <a:off x="2304171" y="2419022"/>
+            <a:ext cx="2499126" cy="532083"/>
           </a:xfrm>
         </p:spPr>
         <p:txBody>
@@ -13517,7 +13622,7 @@
           <p:cNvPr id="9" name="item_1">
             <a:extLst>
               <a:ext uri="{FF2B5EF4-FFF2-40B4-BE49-F238E27FC236}">
-                <a16:creationId xmlns:a16="http://schemas.microsoft.com/office/drawing/2014/main" id="{AF39788D-DA24-9695-4682-AF492CA1494C}"/>
+                <a16:creationId xmlns:a16="http://schemas.microsoft.com/office/drawing/2014/main" id="{05A75C1C-C133-92FD-B928-0214070E4B2F}"/>
               </a:ext>
             </a:extLst>
           </p:cNvPr>
@@ -13530,8 +13635,8 @@
         </p:nvSpPr>
         <p:spPr>
           <a:xfrm>
-            <a:off x="4089691" y="2419022"/>
-            <a:ext cx="6529895" cy="532083"/>
+            <a:off x="4890986" y="2419022"/>
+            <a:ext cx="5743605" cy="532083"/>
           </a:xfrm>
           <a:prstGeom prst="rect">
             <a:avLst/>
@@ -13565,7 +13670,7 @@
           <p:cNvPr id="10" name="item_2_title">
             <a:extLst>
               <a:ext uri="{FF2B5EF4-FFF2-40B4-BE49-F238E27FC236}">
-                <a16:creationId xmlns:a16="http://schemas.microsoft.com/office/drawing/2014/main" id="{EB070191-349B-43DA-527B-21AF6DB16B84}"/>
+                <a16:creationId xmlns:a16="http://schemas.microsoft.com/office/drawing/2014/main" id="{8FB53D15-453B-9DE0-1208-2FA03EE78065}"/>
               </a:ext>
             </a:extLst>
           </p:cNvPr>
@@ -13578,8 +13683,8 @@
         </p:nvSpPr>
         <p:spPr>
           <a:xfrm>
-            <a:off x="1148744" y="3350167"/>
-            <a:ext cx="2841252" cy="532083"/>
+            <a:off x="2304171" y="3350167"/>
+            <a:ext cx="2499126" cy="532083"/>
           </a:xfrm>
           <a:prstGeom prst="rect">
             <a:avLst/>
@@ -13618,7 +13723,7 @@
           <p:cNvPr id="11" name="item_2">
             <a:extLst>
               <a:ext uri="{FF2B5EF4-FFF2-40B4-BE49-F238E27FC236}">
-                <a16:creationId xmlns:a16="http://schemas.microsoft.com/office/drawing/2014/main" id="{7483C32B-39FC-747A-C389-5C1BB12658E8}"/>
+                <a16:creationId xmlns:a16="http://schemas.microsoft.com/office/drawing/2014/main" id="{D09573AF-5FB7-F9D2-C49C-A773F429DE6F}"/>
               </a:ext>
             </a:extLst>
           </p:cNvPr>
@@ -13631,8 +13736,8 @@
         </p:nvSpPr>
         <p:spPr>
           <a:xfrm>
-            <a:off x="4089691" y="3350167"/>
-            <a:ext cx="6529895" cy="532083"/>
+            <a:off x="4890986" y="3350167"/>
+            <a:ext cx="5743605" cy="532083"/>
           </a:xfrm>
           <a:prstGeom prst="rect">
             <a:avLst/>
@@ -13666,7 +13771,7 @@
           <p:cNvPr id="12" name="item_3_title">
             <a:extLst>
               <a:ext uri="{FF2B5EF4-FFF2-40B4-BE49-F238E27FC236}">
-                <a16:creationId xmlns:a16="http://schemas.microsoft.com/office/drawing/2014/main" id="{1A22B76E-BA32-CBFE-F787-64FF73B17517}"/>
+                <a16:creationId xmlns:a16="http://schemas.microsoft.com/office/drawing/2014/main" id="{F5003E55-40E9-CA77-8CD3-69CC3BF2F828}"/>
               </a:ext>
             </a:extLst>
           </p:cNvPr>
@@ -13679,8 +13784,8 @@
         </p:nvSpPr>
         <p:spPr>
           <a:xfrm>
-            <a:off x="1148744" y="4281312"/>
-            <a:ext cx="2841252" cy="532083"/>
+            <a:off x="2304171" y="4281312"/>
+            <a:ext cx="2499126" cy="532083"/>
           </a:xfrm>
           <a:prstGeom prst="rect">
             <a:avLst/>
@@ -13719,7 +13824,7 @@
           <p:cNvPr id="13" name="item_3">
             <a:extLst>
               <a:ext uri="{FF2B5EF4-FFF2-40B4-BE49-F238E27FC236}">
-                <a16:creationId xmlns:a16="http://schemas.microsoft.com/office/drawing/2014/main" id="{0F0F82A4-D63B-C5B9-89F7-14BDB37323E3}"/>
+                <a16:creationId xmlns:a16="http://schemas.microsoft.com/office/drawing/2014/main" id="{DDF0079B-98FB-AAC9-E352-1E8B375CDA63}"/>
               </a:ext>
             </a:extLst>
           </p:cNvPr>
@@ -13732,8 +13837,8 @@
         </p:nvSpPr>
         <p:spPr>
           <a:xfrm>
-            <a:off x="4089691" y="4281312"/>
-            <a:ext cx="6529895" cy="532083"/>
+            <a:off x="4890986" y="4281312"/>
+            <a:ext cx="5743605" cy="532083"/>
           </a:xfrm>
           <a:prstGeom prst="rect">
             <a:avLst/>
@@ -13767,7 +13872,7 @@
           <p:cNvPr id="14" name="item_4_title">
             <a:extLst>
               <a:ext uri="{FF2B5EF4-FFF2-40B4-BE49-F238E27FC236}">
-                <a16:creationId xmlns:a16="http://schemas.microsoft.com/office/drawing/2014/main" id="{AA1A1D65-9539-FF46-28C7-83468AA49D77}"/>
+                <a16:creationId xmlns:a16="http://schemas.microsoft.com/office/drawing/2014/main" id="{79C221AB-02B8-8EBF-AF60-32D9AA8DC42A}"/>
               </a:ext>
             </a:extLst>
           </p:cNvPr>
@@ -13780,8 +13885,8 @@
         </p:nvSpPr>
         <p:spPr>
           <a:xfrm>
-            <a:off x="1148744" y="5212457"/>
-            <a:ext cx="2841252" cy="532083"/>
+            <a:off x="2304171" y="5212457"/>
+            <a:ext cx="2499126" cy="532083"/>
           </a:xfrm>
           <a:prstGeom prst="rect">
             <a:avLst/>
@@ -13820,7 +13925,7 @@
           <p:cNvPr id="15" name="item_4">
             <a:extLst>
               <a:ext uri="{FF2B5EF4-FFF2-40B4-BE49-F238E27FC236}">
-                <a16:creationId xmlns:a16="http://schemas.microsoft.com/office/drawing/2014/main" id="{6E8F4C00-CE40-901B-0409-CDC9047AE9A4}"/>
+                <a16:creationId xmlns:a16="http://schemas.microsoft.com/office/drawing/2014/main" id="{2330AB04-B32A-E287-3D51-85884FCD4F66}"/>
               </a:ext>
             </a:extLst>
           </p:cNvPr>
@@ -13833,8 +13938,8 @@
         </p:nvSpPr>
         <p:spPr>
           <a:xfrm>
-            <a:off x="4089691" y="5212457"/>
-            <a:ext cx="6529895" cy="532083"/>
+            <a:off x="4890986" y="5212457"/>
+            <a:ext cx="5743605" cy="532083"/>
           </a:xfrm>
           <a:prstGeom prst="rect">
             <a:avLst/>
@@ -13868,7 +13973,7 @@
           <p:cNvPr id="16" name="source">
             <a:extLst>
               <a:ext uri="{FF2B5EF4-FFF2-40B4-BE49-F238E27FC236}">
-                <a16:creationId xmlns:a16="http://schemas.microsoft.com/office/drawing/2014/main" id="{D080C102-5FE6-167B-0A46-1CA069FFA131}"/>
+                <a16:creationId xmlns:a16="http://schemas.microsoft.com/office/drawing/2014/main" id="{0B649E16-0A6B-8C87-7680-2E3F68C9D870}"/>
               </a:ext>
             </a:extLst>
           </p:cNvPr>
@@ -13881,7 +13986,7 @@
         </p:nvSpPr>
         <p:spPr>
           <a:xfrm>
-            <a:off x="1024128" y="6004560"/>
+            <a:off x="2194560" y="6004560"/>
             <a:ext cx="1905000" cy="304800"/>
           </a:xfrm>
           <a:prstGeom prst="roundRect">
@@ -13923,7 +14028,7 @@
     </p:spTree>
     <p:extLst>
       <p:ext uri="{BB962C8B-B14F-4D97-AF65-F5344CB8AC3E}">
-        <p14:creationId xmlns:p14="http://schemas.microsoft.com/office/powerpoint/2010/main" val="2235958698"/>
+        <p14:creationId xmlns:p14="http://schemas.microsoft.com/office/powerpoint/2010/main" val="2957780282"/>
       </p:ext>
     </p:extLst>
   </p:cSld>
@@ -13955,7 +14060,7 @@
           <p:cNvPr id="7" name="creative_background">
             <a:extLst>
               <a:ext uri="{FF2B5EF4-FFF2-40B4-BE49-F238E27FC236}">
-                <a16:creationId xmlns:a16="http://schemas.microsoft.com/office/drawing/2014/main" id="{296AE22D-7810-CF23-1E17-63C805979BDF}"/>
+                <a16:creationId xmlns:a16="http://schemas.microsoft.com/office/drawing/2014/main" id="{304B8878-5D47-F0E0-28DD-4994DD033875}"/>
               </a:ext>
             </a:extLst>
           </p:cNvPr>
@@ -13996,7 +14101,12 @@
             <p:ph type="title"/>
           </p:nvPr>
         </p:nvSpPr>
-        <p:spPr/>
+        <p:spPr>
+          <a:xfrm>
+            <a:off x="2194560" y="585216"/>
+            <a:ext cx="8547100" cy="1499616"/>
+          </a:xfrm>
+        </p:spPr>
         <p:txBody>
           <a:bodyPr/>
           <a:lstStyle>
@@ -14023,12 +14133,17 @@
             <p:ph type="dt" sz="half" idx="10"/>
           </p:nvPr>
         </p:nvSpPr>
-        <p:spPr/>
+        <p:spPr>
+          <a:xfrm>
+            <a:off x="2194560" y="6470704"/>
+            <a:ext cx="977900" cy="274320"/>
+          </a:xfrm>
+        </p:spPr>
         <p:txBody>
           <a:bodyPr/>
           <a:lstStyle/>
           <a:p>
-            <a:fld id="{5922C19E-7BE7-43A0-B17C-FD6B34B75143}" type="datetimeFigureOut">
+            <a:fld id="{4354DB14-F9AE-4C12-8CFE-33ABF7B568CC}" type="datetimeFigureOut">
               <a:rPr lang="en-US" smtClean="0"/>
               <a:t>10/3/2026</a:t>
             </a:fld>
@@ -14070,7 +14185,7 @@
           <a:bodyPr/>
           <a:lstStyle/>
           <a:p>
-            <a:fld id="{0DF0A140-DE23-4C37-9945-2DD700FC6B21}" type="slidenum">
+            <a:fld id="{74A457B9-11F0-4EFD-A461-9DC8C80A1D31}" type="slidenum">
               <a:rPr lang="en-US" smtClean="0"/>
               <a:t>‹#›</a:t>
             </a:fld>
@@ -14083,7 +14198,7 @@
           <p:cNvPr id="8" name="marker_1">
             <a:extLst>
               <a:ext uri="{FF2B5EF4-FFF2-40B4-BE49-F238E27FC236}">
-                <a16:creationId xmlns:a16="http://schemas.microsoft.com/office/drawing/2014/main" id="{CECE151D-5C22-D11B-F173-7164B2F122F2}"/>
+                <a16:creationId xmlns:a16="http://schemas.microsoft.com/office/drawing/2014/main" id="{4D471533-FC41-B06F-A886-E542C2EB9965}"/>
               </a:ext>
             </a:extLst>
           </p:cNvPr>
@@ -14096,8 +14211,8 @@
         </p:nvSpPr>
         <p:spPr>
           <a:xfrm>
-            <a:off x="1198591" y="2472230"/>
-            <a:ext cx="548312" cy="585291"/>
+            <a:off x="2348015" y="2472230"/>
+            <a:ext cx="482287" cy="585291"/>
           </a:xfrm>
           <a:prstGeom prst="ellipse">
             <a:avLst/>
@@ -14139,7 +14254,7 @@
           <p:cNvPr id="9" name="item_1_title">
             <a:extLst>
               <a:ext uri="{FF2B5EF4-FFF2-40B4-BE49-F238E27FC236}">
-                <a16:creationId xmlns:a16="http://schemas.microsoft.com/office/drawing/2014/main" id="{511E532D-035D-6D29-CFC6-E743172ACA56}"/>
+                <a16:creationId xmlns:a16="http://schemas.microsoft.com/office/drawing/2014/main" id="{0D2C41C1-AC9A-F879-D786-47AD2A4923BA}"/>
               </a:ext>
             </a:extLst>
           </p:cNvPr>
@@ -14152,8 +14267,8 @@
         </p:nvSpPr>
         <p:spPr>
           <a:xfrm>
-            <a:off x="1846597" y="2472230"/>
-            <a:ext cx="8723143" cy="387325"/>
+            <a:off x="2917992" y="2472230"/>
+            <a:ext cx="7672755" cy="387325"/>
           </a:xfrm>
           <a:prstGeom prst="rect">
             <a:avLst/>
@@ -14192,7 +14307,7 @@
           <p:cNvPr id="10" name="item_1">
             <a:extLst>
               <a:ext uri="{FF2B5EF4-FFF2-40B4-BE49-F238E27FC236}">
-                <a16:creationId xmlns:a16="http://schemas.microsoft.com/office/drawing/2014/main" id="{17AE9189-4931-879D-CEE3-854615BE144A}"/>
+                <a16:creationId xmlns:a16="http://schemas.microsoft.com/office/drawing/2014/main" id="{1B0B91E8-A75F-48CA-FD70-AB54A0127F9E}"/>
               </a:ext>
             </a:extLst>
           </p:cNvPr>
@@ -14205,8 +14320,8 @@
         </p:nvSpPr>
         <p:spPr>
           <a:xfrm>
-            <a:off x="1846597" y="2859554"/>
-            <a:ext cx="8723143" cy="929580"/>
+            <a:off x="2917992" y="2859554"/>
+            <a:ext cx="7672755" cy="929580"/>
           </a:xfrm>
           <a:prstGeom prst="rect">
             <a:avLst/>
@@ -14240,7 +14355,7 @@
           <p:cNvPr id="11" name="marker_2">
             <a:extLst>
               <a:ext uri="{FF2B5EF4-FFF2-40B4-BE49-F238E27FC236}">
-                <a16:creationId xmlns:a16="http://schemas.microsoft.com/office/drawing/2014/main" id="{A3E90A54-D4FB-A8C1-B726-8F8A3A743502}"/>
+                <a16:creationId xmlns:a16="http://schemas.microsoft.com/office/drawing/2014/main" id="{0E9654A5-474A-2676-053B-508C1402F19B}"/>
               </a:ext>
             </a:extLst>
           </p:cNvPr>
@@ -14253,8 +14368,8 @@
         </p:nvSpPr>
         <p:spPr>
           <a:xfrm>
-            <a:off x="1198591" y="4374427"/>
-            <a:ext cx="548312" cy="585291"/>
+            <a:off x="2348016" y="4374427"/>
+            <a:ext cx="482287" cy="585291"/>
           </a:xfrm>
           <a:prstGeom prst="ellipse">
             <a:avLst/>
@@ -14296,7 +14411,7 @@
           <p:cNvPr id="12" name="item_2_title">
             <a:extLst>
               <a:ext uri="{FF2B5EF4-FFF2-40B4-BE49-F238E27FC236}">
-                <a16:creationId xmlns:a16="http://schemas.microsoft.com/office/drawing/2014/main" id="{7281C2A5-FDF0-28C8-2050-710D099DE0DB}"/>
+                <a16:creationId xmlns:a16="http://schemas.microsoft.com/office/drawing/2014/main" id="{562C4F0A-40EB-BEA4-C632-C8D8BEDD464A}"/>
               </a:ext>
             </a:extLst>
           </p:cNvPr>
@@ -14309,8 +14424,8 @@
         </p:nvSpPr>
         <p:spPr>
           <a:xfrm>
-            <a:off x="1846597" y="4374427"/>
-            <a:ext cx="8723143" cy="387325"/>
+            <a:off x="2917992" y="4374427"/>
+            <a:ext cx="7672755" cy="387325"/>
           </a:xfrm>
           <a:prstGeom prst="rect">
             <a:avLst/>
@@ -14349,7 +14464,7 @@
           <p:cNvPr id="13" name="item_2">
             <a:extLst>
               <a:ext uri="{FF2B5EF4-FFF2-40B4-BE49-F238E27FC236}">
-                <a16:creationId xmlns:a16="http://schemas.microsoft.com/office/drawing/2014/main" id="{1EEFE76E-28EC-6E41-3078-5C42E6F1FD1A}"/>
+                <a16:creationId xmlns:a16="http://schemas.microsoft.com/office/drawing/2014/main" id="{3A43C65E-C75A-5F08-306E-F87B156B7FCD}"/>
               </a:ext>
             </a:extLst>
           </p:cNvPr>
@@ -14362,8 +14477,8 @@
         </p:nvSpPr>
         <p:spPr>
           <a:xfrm>
-            <a:off x="1846597" y="4761750"/>
-            <a:ext cx="8723143" cy="929580"/>
+            <a:off x="2917992" y="4761750"/>
+            <a:ext cx="7672755" cy="929580"/>
           </a:xfrm>
           <a:prstGeom prst="rect">
             <a:avLst/>
@@ -14397,7 +14512,7 @@
           <p:cNvPr id="14" name="source">
             <a:extLst>
               <a:ext uri="{FF2B5EF4-FFF2-40B4-BE49-F238E27FC236}">
-                <a16:creationId xmlns:a16="http://schemas.microsoft.com/office/drawing/2014/main" id="{E3E4CAF3-B915-2A73-250C-B28F590A432B}"/>
+                <a16:creationId xmlns:a16="http://schemas.microsoft.com/office/drawing/2014/main" id="{9FA24EAA-C8AB-3432-6F49-1FB294ECBD8C}"/>
               </a:ext>
             </a:extLst>
           </p:cNvPr>
@@ -14410,7 +14525,7 @@
         </p:nvSpPr>
         <p:spPr>
           <a:xfrm>
-            <a:off x="1024128" y="6004560"/>
+            <a:off x="2194560" y="6004560"/>
             <a:ext cx="1905000" cy="304800"/>
           </a:xfrm>
           <a:prstGeom prst="roundRect">
@@ -14452,7 +14567,7 @@
     </p:spTree>
     <p:extLst>
       <p:ext uri="{BB962C8B-B14F-4D97-AF65-F5344CB8AC3E}">
-        <p14:creationId xmlns:p14="http://schemas.microsoft.com/office/powerpoint/2010/main" val="602284294"/>
+        <p14:creationId xmlns:p14="http://schemas.microsoft.com/office/powerpoint/2010/main" val="487503908"/>
       </p:ext>
     </p:extLst>
   </p:cSld>
@@ -14484,7 +14599,7 @@
           <p:cNvPr id="7" name="creative_background">
             <a:extLst>
               <a:ext uri="{FF2B5EF4-FFF2-40B4-BE49-F238E27FC236}">
-                <a16:creationId xmlns:a16="http://schemas.microsoft.com/office/drawing/2014/main" id="{6C7DA0A1-2D0E-3D34-1024-F58BC123D1EB}"/>
+                <a16:creationId xmlns:a16="http://schemas.microsoft.com/office/drawing/2014/main" id="{8E26DD2B-4892-3299-DFBF-F14EADEAB017}"/>
               </a:ext>
             </a:extLst>
           </p:cNvPr>
@@ -14525,7 +14640,12 @@
             <p:ph type="title"/>
           </p:nvPr>
         </p:nvSpPr>
-        <p:spPr/>
+        <p:spPr>
+          <a:xfrm>
+            <a:off x="2194560" y="585216"/>
+            <a:ext cx="8547100" cy="1499616"/>
+          </a:xfrm>
+        </p:spPr>
         <p:txBody>
           <a:bodyPr/>
           <a:lstStyle>
@@ -14552,12 +14672,17 @@
             <p:ph type="dt" sz="half" idx="10"/>
           </p:nvPr>
         </p:nvSpPr>
-        <p:spPr/>
+        <p:spPr>
+          <a:xfrm>
+            <a:off x="2194560" y="6470704"/>
+            <a:ext cx="977900" cy="274320"/>
+          </a:xfrm>
+        </p:spPr>
         <p:txBody>
           <a:bodyPr/>
           <a:lstStyle/>
           <a:p>
-            <a:fld id="{5922C19E-7BE7-43A0-B17C-FD6B34B75143}" type="datetimeFigureOut">
+            <a:fld id="{4354DB14-F9AE-4C12-8CFE-33ABF7B568CC}" type="datetimeFigureOut">
               <a:rPr lang="en-US" smtClean="0"/>
               <a:t>10/3/2026</a:t>
             </a:fld>
@@ -14599,7 +14724,7 @@
           <a:bodyPr/>
           <a:lstStyle/>
           <a:p>
-            <a:fld id="{0DF0A140-DE23-4C37-9945-2DD700FC6B21}" type="slidenum">
+            <a:fld id="{74A457B9-11F0-4EFD-A461-9DC8C80A1D31}" type="slidenum">
               <a:rPr lang="en-US" smtClean="0"/>
               <a:t>‹#›</a:t>
             </a:fld>
@@ -14612,7 +14737,7 @@
           <p:cNvPr id="8" name="item_1_title">
             <a:extLst>
               <a:ext uri="{FF2B5EF4-FFF2-40B4-BE49-F238E27FC236}">
-                <a16:creationId xmlns:a16="http://schemas.microsoft.com/office/drawing/2014/main" id="{125DB516-EF37-40CC-A4C1-6545DC624395}"/>
+                <a16:creationId xmlns:a16="http://schemas.microsoft.com/office/drawing/2014/main" id="{A927C2E6-6D21-3E67-4432-D3A9EA7C02D5}"/>
               </a:ext>
             </a:extLst>
           </p:cNvPr>
@@ -14625,8 +14750,8 @@
         </p:nvSpPr>
         <p:spPr>
           <a:xfrm>
-            <a:off x="1198591" y="2472230"/>
-            <a:ext cx="4411418" cy="387325"/>
+            <a:off x="2348015" y="2472230"/>
+            <a:ext cx="3880222" cy="387325"/>
           </a:xfrm>
         </p:spPr>
         <p:txBody>
@@ -14662,7 +14787,7 @@
           <p:cNvPr id="9" name="item_1">
             <a:extLst>
               <a:ext uri="{FF2B5EF4-FFF2-40B4-BE49-F238E27FC236}">
-                <a16:creationId xmlns:a16="http://schemas.microsoft.com/office/drawing/2014/main" id="{2E2F3054-FB42-D392-0ED6-800A980C25BF}"/>
+                <a16:creationId xmlns:a16="http://schemas.microsoft.com/office/drawing/2014/main" id="{F6F8174A-47BC-BB1C-3307-0CC9363FF23A}"/>
               </a:ext>
             </a:extLst>
           </p:cNvPr>
@@ -14675,8 +14800,8 @@
         </p:nvSpPr>
         <p:spPr>
           <a:xfrm>
-            <a:off x="1198591" y="2859554"/>
-            <a:ext cx="4411418" cy="929580"/>
+            <a:off x="2348015" y="2859554"/>
+            <a:ext cx="3880222" cy="929580"/>
           </a:xfrm>
           <a:prstGeom prst="rect">
             <a:avLst/>
@@ -14710,7 +14835,7 @@
           <p:cNvPr id="10" name="item_2_title">
             <a:extLst>
               <a:ext uri="{FF2B5EF4-FFF2-40B4-BE49-F238E27FC236}">
-                <a16:creationId xmlns:a16="http://schemas.microsoft.com/office/drawing/2014/main" id="{7D9EBF46-028D-9604-6AEA-5F34EE8E1586}"/>
+                <a16:creationId xmlns:a16="http://schemas.microsoft.com/office/drawing/2014/main" id="{C82F2736-1FEB-3675-FB1E-6FF21B5EFAE6}"/>
               </a:ext>
             </a:extLst>
           </p:cNvPr>
@@ -14723,8 +14848,8 @@
         </p:nvSpPr>
         <p:spPr>
           <a:xfrm>
-            <a:off x="6158321" y="2472230"/>
-            <a:ext cx="4411418" cy="387325"/>
+            <a:off x="6710525" y="2472230"/>
+            <a:ext cx="3880222" cy="387325"/>
           </a:xfrm>
           <a:prstGeom prst="rect">
             <a:avLst/>
@@ -14763,7 +14888,7 @@
           <p:cNvPr id="11" name="item_2">
             <a:extLst>
               <a:ext uri="{FF2B5EF4-FFF2-40B4-BE49-F238E27FC236}">
-                <a16:creationId xmlns:a16="http://schemas.microsoft.com/office/drawing/2014/main" id="{6753EA65-3116-2E39-1F15-A67EB38BE115}"/>
+                <a16:creationId xmlns:a16="http://schemas.microsoft.com/office/drawing/2014/main" id="{E76B029A-D802-B4D7-DC33-2E64EC285347}"/>
               </a:ext>
             </a:extLst>
           </p:cNvPr>
@@ -14776,8 +14901,8 @@
         </p:nvSpPr>
         <p:spPr>
           <a:xfrm>
-            <a:off x="6158321" y="2859554"/>
-            <a:ext cx="4411418" cy="929580"/>
+            <a:off x="6710525" y="2859554"/>
+            <a:ext cx="3880222" cy="929580"/>
           </a:xfrm>
           <a:prstGeom prst="rect">
             <a:avLst/>
@@ -14811,7 +14936,7 @@
           <p:cNvPr id="12" name="item_3_title">
             <a:extLst>
               <a:ext uri="{FF2B5EF4-FFF2-40B4-BE49-F238E27FC236}">
-                <a16:creationId xmlns:a16="http://schemas.microsoft.com/office/drawing/2014/main" id="{0AF31710-7E29-B5C8-69F0-84152174CAD0}"/>
+                <a16:creationId xmlns:a16="http://schemas.microsoft.com/office/drawing/2014/main" id="{6386EF3F-453C-C41E-12F7-7D71F40B25AE}"/>
               </a:ext>
             </a:extLst>
           </p:cNvPr>
@@ -14824,8 +14949,8 @@
         </p:nvSpPr>
         <p:spPr>
           <a:xfrm>
-            <a:off x="1198591" y="4374427"/>
-            <a:ext cx="4411418" cy="387325"/>
+            <a:off x="2348015" y="4374427"/>
+            <a:ext cx="3880222" cy="387325"/>
           </a:xfrm>
           <a:prstGeom prst="rect">
             <a:avLst/>
@@ -14864,7 +14989,7 @@
           <p:cNvPr id="13" name="item_3">
             <a:extLst>
               <a:ext uri="{FF2B5EF4-FFF2-40B4-BE49-F238E27FC236}">
-                <a16:creationId xmlns:a16="http://schemas.microsoft.com/office/drawing/2014/main" id="{6B73DA1A-75FB-2A90-5FE8-10E9F4AF2511}"/>
+                <a16:creationId xmlns:a16="http://schemas.microsoft.com/office/drawing/2014/main" id="{6184E99D-B2CE-D207-B924-4EC48766E993}"/>
               </a:ext>
             </a:extLst>
           </p:cNvPr>
@@ -14877,8 +15002,8 @@
         </p:nvSpPr>
         <p:spPr>
           <a:xfrm>
-            <a:off x="1198591" y="4761750"/>
-            <a:ext cx="4411418" cy="929580"/>
+            <a:off x="2348015" y="4761750"/>
+            <a:ext cx="3880222" cy="929580"/>
           </a:xfrm>
           <a:prstGeom prst="rect">
             <a:avLst/>
@@ -14912,7 +15037,7 @@
           <p:cNvPr id="14" name="item_4_title">
             <a:extLst>
               <a:ext uri="{FF2B5EF4-FFF2-40B4-BE49-F238E27FC236}">
-                <a16:creationId xmlns:a16="http://schemas.microsoft.com/office/drawing/2014/main" id="{5B472AE6-899C-AA16-7E7E-59499AFC7E1A}"/>
+                <a16:creationId xmlns:a16="http://schemas.microsoft.com/office/drawing/2014/main" id="{DAFFD9C4-21AE-3AA4-0699-62E4557707C4}"/>
               </a:ext>
             </a:extLst>
           </p:cNvPr>
@@ -14925,8 +15050,8 @@
         </p:nvSpPr>
         <p:spPr>
           <a:xfrm>
-            <a:off x="6158321" y="4374427"/>
-            <a:ext cx="4411418" cy="387325"/>
+            <a:off x="6710525" y="4374427"/>
+            <a:ext cx="3880222" cy="387325"/>
           </a:xfrm>
           <a:prstGeom prst="rect">
             <a:avLst/>
@@ -14965,7 +15090,7 @@
           <p:cNvPr id="15" name="item_4">
             <a:extLst>
               <a:ext uri="{FF2B5EF4-FFF2-40B4-BE49-F238E27FC236}">
-                <a16:creationId xmlns:a16="http://schemas.microsoft.com/office/drawing/2014/main" id="{6852F94C-341E-0D42-E412-E6FCEEA8287A}"/>
+                <a16:creationId xmlns:a16="http://schemas.microsoft.com/office/drawing/2014/main" id="{353BE45E-740E-B605-1AD1-3011B4F2863B}"/>
               </a:ext>
             </a:extLst>
           </p:cNvPr>
@@ -14978,8 +15103,8 @@
         </p:nvSpPr>
         <p:spPr>
           <a:xfrm>
-            <a:off x="6158321" y="4761750"/>
-            <a:ext cx="4411418" cy="929580"/>
+            <a:off x="6710525" y="4761750"/>
+            <a:ext cx="3880222" cy="929580"/>
           </a:xfrm>
           <a:prstGeom prst="rect">
             <a:avLst/>
@@ -15013,7 +15138,7 @@
           <p:cNvPr id="16" name="source">
             <a:extLst>
               <a:ext uri="{FF2B5EF4-FFF2-40B4-BE49-F238E27FC236}">
-                <a16:creationId xmlns:a16="http://schemas.microsoft.com/office/drawing/2014/main" id="{F97A77FB-A59D-8936-0813-EF0756C26749}"/>
+                <a16:creationId xmlns:a16="http://schemas.microsoft.com/office/drawing/2014/main" id="{BECC8CD4-957F-3DBE-7A1C-85982BC1AA3E}"/>
               </a:ext>
             </a:extLst>
           </p:cNvPr>
@@ -15026,7 +15151,7 @@
         </p:nvSpPr>
         <p:spPr>
           <a:xfrm>
-            <a:off x="1024128" y="6004560"/>
+            <a:off x="2194560" y="6004560"/>
             <a:ext cx="1905000" cy="304800"/>
           </a:xfrm>
           <a:prstGeom prst="roundRect">
@@ -15068,7 +15193,7 @@
     </p:spTree>
     <p:extLst>
       <p:ext uri="{BB962C8B-B14F-4D97-AF65-F5344CB8AC3E}">
-        <p14:creationId xmlns:p14="http://schemas.microsoft.com/office/powerpoint/2010/main" val="522432301"/>
+        <p14:creationId xmlns:p14="http://schemas.microsoft.com/office/powerpoint/2010/main" val="3958644133"/>
       </p:ext>
     </p:extLst>
   </p:cSld>
@@ -15100,7 +15225,7 @@
           <p:cNvPr id="7" name="creative_background">
             <a:extLst>
               <a:ext uri="{FF2B5EF4-FFF2-40B4-BE49-F238E27FC236}">
-                <a16:creationId xmlns:a16="http://schemas.microsoft.com/office/drawing/2014/main" id="{41182DED-29EB-C0F4-12BF-AC40D90CFE0A}"/>
+                <a16:creationId xmlns:a16="http://schemas.microsoft.com/office/drawing/2014/main" id="{C7C0C41B-E370-5010-6753-99ECD7EBF50C}"/>
               </a:ext>
             </a:extLst>
           </p:cNvPr>
@@ -15141,7 +15266,12 @@
             <p:ph type="title"/>
           </p:nvPr>
         </p:nvSpPr>
-        <p:spPr/>
+        <p:spPr>
+          <a:xfrm>
+            <a:off x="2194560" y="585216"/>
+            <a:ext cx="8547100" cy="1499616"/>
+          </a:xfrm>
+        </p:spPr>
         <p:txBody>
           <a:bodyPr/>
           <a:lstStyle>
@@ -15168,12 +15298,17 @@
             <p:ph type="dt" sz="half" idx="10"/>
           </p:nvPr>
         </p:nvSpPr>
-        <p:spPr/>
+        <p:spPr>
+          <a:xfrm>
+            <a:off x="2194560" y="6470704"/>
+            <a:ext cx="977900" cy="274320"/>
+          </a:xfrm>
+        </p:spPr>
         <p:txBody>
           <a:bodyPr/>
           <a:lstStyle/>
           <a:p>
-            <a:fld id="{5922C19E-7BE7-43A0-B17C-FD6B34B75143}" type="datetimeFigureOut">
+            <a:fld id="{4354DB14-F9AE-4C12-8CFE-33ABF7B568CC}" type="datetimeFigureOut">
               <a:rPr lang="en-US" smtClean="0"/>
               <a:t>10/3/2026</a:t>
             </a:fld>
@@ -15215,7 +15350,7 @@
           <a:bodyPr/>
           <a:lstStyle/>
           <a:p>
-            <a:fld id="{0DF0A140-DE23-4C37-9945-2DD700FC6B21}" type="slidenum">
+            <a:fld id="{74A457B9-11F0-4EFD-A461-9DC8C80A1D31}" type="slidenum">
               <a:rPr lang="en-US" smtClean="0"/>
               <a:t>‹#›</a:t>
             </a:fld>
@@ -15228,7 +15363,7 @@
           <p:cNvPr id="8" name="item_1_title">
             <a:extLst>
               <a:ext uri="{FF2B5EF4-FFF2-40B4-BE49-F238E27FC236}">
-                <a16:creationId xmlns:a16="http://schemas.microsoft.com/office/drawing/2014/main" id="{CB1E1E0F-DD5E-4BBA-C1A1-D0EB3AADE44A}"/>
+                <a16:creationId xmlns:a16="http://schemas.microsoft.com/office/drawing/2014/main" id="{1671401B-47AD-AF0D-A3DA-07B819642AAC}"/>
               </a:ext>
             </a:extLst>
           </p:cNvPr>
@@ -15241,8 +15376,8 @@
         </p:nvSpPr>
         <p:spPr>
           <a:xfrm>
-            <a:off x="1198591" y="2811082"/>
-            <a:ext cx="1931553" cy="847132"/>
+            <a:off x="2348015" y="2811082"/>
+            <a:ext cx="1698967" cy="847132"/>
           </a:xfrm>
         </p:spPr>
         <p:txBody>
@@ -15278,7 +15413,7 @@
           <p:cNvPr id="9" name="item_1">
             <a:extLst>
               <a:ext uri="{FF2B5EF4-FFF2-40B4-BE49-F238E27FC236}">
-                <a16:creationId xmlns:a16="http://schemas.microsoft.com/office/drawing/2014/main" id="{C19F3D23-8DE8-1908-21DA-831B519CADD8}"/>
+                <a16:creationId xmlns:a16="http://schemas.microsoft.com/office/drawing/2014/main" id="{9863F0FF-9456-9436-19EF-A3023971AB2F}"/>
               </a:ext>
             </a:extLst>
           </p:cNvPr>
@@ -15291,8 +15426,8 @@
         </p:nvSpPr>
         <p:spPr>
           <a:xfrm>
-            <a:off x="1198592" y="3658215"/>
-            <a:ext cx="1931553" cy="2033117"/>
+            <a:off x="2348016" y="3658215"/>
+            <a:ext cx="1698967" cy="2033117"/>
           </a:xfrm>
           <a:prstGeom prst="rect">
             <a:avLst/>
@@ -15326,7 +15461,7 @@
           <p:cNvPr id="10" name="item_2_title">
             <a:extLst>
               <a:ext uri="{FF2B5EF4-FFF2-40B4-BE49-F238E27FC236}">
-                <a16:creationId xmlns:a16="http://schemas.microsoft.com/office/drawing/2014/main" id="{E112C3E9-B016-9962-E4E1-D1CDFF9B646D}"/>
+                <a16:creationId xmlns:a16="http://schemas.microsoft.com/office/drawing/2014/main" id="{7138B50D-C705-5BF7-0C74-C9BA535F1EBC}"/>
               </a:ext>
             </a:extLst>
           </p:cNvPr>
@@ -15339,8 +15474,8 @@
         </p:nvSpPr>
         <p:spPr>
           <a:xfrm>
-            <a:off x="3678457" y="2811082"/>
-            <a:ext cx="1931553" cy="847132"/>
+            <a:off x="4529271" y="2811082"/>
+            <a:ext cx="1698967" cy="847132"/>
           </a:xfrm>
           <a:prstGeom prst="rect">
             <a:avLst/>
@@ -15379,7 +15514,7 @@
           <p:cNvPr id="11" name="item_2">
             <a:extLst>
               <a:ext uri="{FF2B5EF4-FFF2-40B4-BE49-F238E27FC236}">
-                <a16:creationId xmlns:a16="http://schemas.microsoft.com/office/drawing/2014/main" id="{67CC6B3A-26D6-69BC-809E-0B966F007541}"/>
+                <a16:creationId xmlns:a16="http://schemas.microsoft.com/office/drawing/2014/main" id="{6C3565CF-57FE-ECB3-3DB1-6A838309FF53}"/>
               </a:ext>
             </a:extLst>
           </p:cNvPr>
@@ -15392,8 +15527,8 @@
         </p:nvSpPr>
         <p:spPr>
           <a:xfrm>
-            <a:off x="3678457" y="3658215"/>
-            <a:ext cx="1931553" cy="2033117"/>
+            <a:off x="4529271" y="3658215"/>
+            <a:ext cx="1698967" cy="2033117"/>
           </a:xfrm>
           <a:prstGeom prst="rect">
             <a:avLst/>
@@ -15427,7 +15562,7 @@
           <p:cNvPr id="12" name="item_3_title">
             <a:extLst>
               <a:ext uri="{FF2B5EF4-FFF2-40B4-BE49-F238E27FC236}">
-                <a16:creationId xmlns:a16="http://schemas.microsoft.com/office/drawing/2014/main" id="{E4EBD0CF-E601-9849-3865-92220C48A93F}"/>
+                <a16:creationId xmlns:a16="http://schemas.microsoft.com/office/drawing/2014/main" id="{13FB3452-105A-A6B1-21E6-6A74DAD57AB1}"/>
               </a:ext>
             </a:extLst>
           </p:cNvPr>
@@ -15440,8 +15575,8 @@
         </p:nvSpPr>
         <p:spPr>
           <a:xfrm>
-            <a:off x="6158322" y="2811082"/>
-            <a:ext cx="1931553" cy="847132"/>
+            <a:off x="6710526" y="2811082"/>
+            <a:ext cx="1698967" cy="847132"/>
           </a:xfrm>
           <a:prstGeom prst="rect">
             <a:avLst/>
@@ -15480,7 +15615,7 @@
           <p:cNvPr id="13" name="item_3">
             <a:extLst>
               <a:ext uri="{FF2B5EF4-FFF2-40B4-BE49-F238E27FC236}">
-                <a16:creationId xmlns:a16="http://schemas.microsoft.com/office/drawing/2014/main" id="{08AD20FD-610E-32DF-C968-F0EA0D030E9C}"/>
+                <a16:creationId xmlns:a16="http://schemas.microsoft.com/office/drawing/2014/main" id="{58C39E84-4303-6F0C-236D-3FDABEA733F2}"/>
               </a:ext>
             </a:extLst>
           </p:cNvPr>
@@ -15493,8 +15628,8 @@
         </p:nvSpPr>
         <p:spPr>
           <a:xfrm>
-            <a:off x="6158322" y="3658215"/>
-            <a:ext cx="1931553" cy="2033117"/>
+            <a:off x="6710526" y="3658215"/>
+            <a:ext cx="1698967" cy="2033117"/>
           </a:xfrm>
           <a:prstGeom prst="rect">
             <a:avLst/>
@@ -15528,7 +15663,7 @@
           <p:cNvPr id="14" name="item_4_title">
             <a:extLst>
               <a:ext uri="{FF2B5EF4-FFF2-40B4-BE49-F238E27FC236}">
-                <a16:creationId xmlns:a16="http://schemas.microsoft.com/office/drawing/2014/main" id="{5C102BFC-6409-00EF-C326-5575A95087E4}"/>
+                <a16:creationId xmlns:a16="http://schemas.microsoft.com/office/drawing/2014/main" id="{1BAFE81B-14AD-3829-32E6-EA4B4BD613F4}"/>
               </a:ext>
             </a:extLst>
           </p:cNvPr>
@@ -15541,8 +15676,8 @@
         </p:nvSpPr>
         <p:spPr>
           <a:xfrm>
-            <a:off x="8638186" y="2811082"/>
-            <a:ext cx="1931553" cy="847132"/>
+            <a:off x="8891780" y="2811082"/>
+            <a:ext cx="1698967" cy="847132"/>
           </a:xfrm>
           <a:prstGeom prst="rect">
             <a:avLst/>
@@ -15581,7 +15716,7 @@
           <p:cNvPr id="15" name="item_4">
             <a:extLst>
               <a:ext uri="{FF2B5EF4-FFF2-40B4-BE49-F238E27FC236}">
-                <a16:creationId xmlns:a16="http://schemas.microsoft.com/office/drawing/2014/main" id="{C71C19EC-C611-97EF-109A-451F7D296EC8}"/>
+                <a16:creationId xmlns:a16="http://schemas.microsoft.com/office/drawing/2014/main" id="{E05174C9-3ED9-A996-3DF0-2A06500D885C}"/>
               </a:ext>
             </a:extLst>
           </p:cNvPr>
@@ -15594,8 +15729,8 @@
         </p:nvSpPr>
         <p:spPr>
           <a:xfrm>
-            <a:off x="8638186" y="3658215"/>
-            <a:ext cx="1931553" cy="2033117"/>
+            <a:off x="8891780" y="3658215"/>
+            <a:ext cx="1698967" cy="2033117"/>
           </a:xfrm>
           <a:prstGeom prst="rect">
             <a:avLst/>
@@ -15629,7 +15764,7 @@
           <p:cNvPr id="16" name="source">
             <a:extLst>
               <a:ext uri="{FF2B5EF4-FFF2-40B4-BE49-F238E27FC236}">
-                <a16:creationId xmlns:a16="http://schemas.microsoft.com/office/drawing/2014/main" id="{CFD9646D-8FC8-E6B9-781D-E5164E9D67AA}"/>
+                <a16:creationId xmlns:a16="http://schemas.microsoft.com/office/drawing/2014/main" id="{53E2CF33-C348-2FD9-9309-EFA8B36FB465}"/>
               </a:ext>
             </a:extLst>
           </p:cNvPr>
@@ -15642,7 +15777,7 @@
         </p:nvSpPr>
         <p:spPr>
           <a:xfrm>
-            <a:off x="1024128" y="6004560"/>
+            <a:off x="2194560" y="6004560"/>
             <a:ext cx="1905000" cy="304800"/>
           </a:xfrm>
           <a:prstGeom prst="roundRect">
@@ -15684,7 +15819,7 @@
     </p:spTree>
     <p:extLst>
       <p:ext uri="{BB962C8B-B14F-4D97-AF65-F5344CB8AC3E}">
-        <p14:creationId xmlns:p14="http://schemas.microsoft.com/office/powerpoint/2010/main" val="2960671762"/>
+        <p14:creationId xmlns:p14="http://schemas.microsoft.com/office/powerpoint/2010/main" val="1226810867"/>
       </p:ext>
     </p:extLst>
   </p:cSld>
@@ -15716,7 +15851,7 @@
           <p:cNvPr id="7" name="creative_background">
             <a:extLst>
               <a:ext uri="{FF2B5EF4-FFF2-40B4-BE49-F238E27FC236}">
-                <a16:creationId xmlns:a16="http://schemas.microsoft.com/office/drawing/2014/main" id="{7CB533C6-3A63-CBEA-8826-0315D5492A87}"/>
+                <a16:creationId xmlns:a16="http://schemas.microsoft.com/office/drawing/2014/main" id="{4DF86414-74E1-2DCE-1944-4B7931071BB4}"/>
               </a:ext>
             </a:extLst>
           </p:cNvPr>
@@ -15757,7 +15892,12 @@
             <p:ph type="title"/>
           </p:nvPr>
         </p:nvSpPr>
-        <p:spPr/>
+        <p:spPr>
+          <a:xfrm>
+            <a:off x="2194560" y="585216"/>
+            <a:ext cx="8547100" cy="1499616"/>
+          </a:xfrm>
+        </p:spPr>
         <p:txBody>
           <a:bodyPr/>
           <a:lstStyle>
@@ -15784,12 +15924,17 @@
             <p:ph type="dt" sz="half" idx="10"/>
           </p:nvPr>
         </p:nvSpPr>
-        <p:spPr/>
+        <p:spPr>
+          <a:xfrm>
+            <a:off x="2194560" y="6470704"/>
+            <a:ext cx="977900" cy="274320"/>
+          </a:xfrm>
+        </p:spPr>
         <p:txBody>
           <a:bodyPr/>
           <a:lstStyle/>
           <a:p>
-            <a:fld id="{5922C19E-7BE7-43A0-B17C-FD6B34B75143}" type="datetimeFigureOut">
+            <a:fld id="{4354DB14-F9AE-4C12-8CFE-33ABF7B568CC}" type="datetimeFigureOut">
               <a:rPr lang="en-US" smtClean="0"/>
               <a:t>10/3/2026</a:t>
             </a:fld>
@@ -15831,7 +15976,7 @@
           <a:bodyPr/>
           <a:lstStyle/>
           <a:p>
-            <a:fld id="{0DF0A140-DE23-4C37-9945-2DD700FC6B21}" type="slidenum">
+            <a:fld id="{74A457B9-11F0-4EFD-A461-9DC8C80A1D31}" type="slidenum">
               <a:rPr lang="en-US" smtClean="0"/>
               <a:t>‹#›</a:t>
             </a:fld>
@@ -15844,7 +15989,7 @@
           <p:cNvPr id="8" name="kpi_value_1">
             <a:extLst>
               <a:ext uri="{FF2B5EF4-FFF2-40B4-BE49-F238E27FC236}">
-                <a16:creationId xmlns:a16="http://schemas.microsoft.com/office/drawing/2014/main" id="{E9D2F4AE-C78C-22A1-29D9-83B9C1D4580A}"/>
+                <a16:creationId xmlns:a16="http://schemas.microsoft.com/office/drawing/2014/main" id="{C56CB1C6-EFC6-7F26-07E8-6B661B80E6BA}"/>
               </a:ext>
             </a:extLst>
           </p:cNvPr>
@@ -15857,8 +16002,8 @@
         </p:nvSpPr>
         <p:spPr>
           <a:xfrm>
-            <a:off x="1198591" y="2472230"/>
-            <a:ext cx="4705512" cy="1995843"/>
+            <a:off x="2348015" y="2472230"/>
+            <a:ext cx="4138903" cy="1995843"/>
           </a:xfrm>
         </p:spPr>
         <p:txBody>
@@ -15894,7 +16039,7 @@
           <p:cNvPr id="9" name="kpi_label_1">
             <a:extLst>
               <a:ext uri="{FF2B5EF4-FFF2-40B4-BE49-F238E27FC236}">
-                <a16:creationId xmlns:a16="http://schemas.microsoft.com/office/drawing/2014/main" id="{6338DBBA-04F7-71A7-64EF-B69351209AA9}"/>
+                <a16:creationId xmlns:a16="http://schemas.microsoft.com/office/drawing/2014/main" id="{4F9D988E-5ABC-35E9-4809-69EBADFF6E99}"/>
               </a:ext>
             </a:extLst>
           </p:cNvPr>
@@ -15907,8 +16052,8 @@
         </p:nvSpPr>
         <p:spPr>
           <a:xfrm>
-            <a:off x="1198591" y="4532455"/>
-            <a:ext cx="4705512" cy="1158877"/>
+            <a:off x="2348016" y="4532455"/>
+            <a:ext cx="4138903" cy="1158877"/>
           </a:xfrm>
           <a:prstGeom prst="rect">
             <a:avLst/>
@@ -15942,7 +16087,7 @@
           <p:cNvPr id="10" name="quote">
             <a:extLst>
               <a:ext uri="{FF2B5EF4-FFF2-40B4-BE49-F238E27FC236}">
-                <a16:creationId xmlns:a16="http://schemas.microsoft.com/office/drawing/2014/main" id="{A9AB5823-E8CB-7DA0-3D87-98CD039714B5}"/>
+                <a16:creationId xmlns:a16="http://schemas.microsoft.com/office/drawing/2014/main" id="{50E7522E-73B9-8435-FC02-DDE773B98859}"/>
               </a:ext>
             </a:extLst>
           </p:cNvPr>
@@ -15955,8 +16100,8 @@
         </p:nvSpPr>
         <p:spPr>
           <a:xfrm>
-            <a:off x="1198591" y="2472230"/>
-            <a:ext cx="4705512" cy="2510899"/>
+            <a:off x="2348016" y="2472230"/>
+            <a:ext cx="4138903" cy="2510899"/>
           </a:xfrm>
           <a:prstGeom prst="rect">
             <a:avLst/>
@@ -15992,7 +16137,7 @@
           <p:cNvPr id="11" name="attribution">
             <a:extLst>
               <a:ext uri="{FF2B5EF4-FFF2-40B4-BE49-F238E27FC236}">
-                <a16:creationId xmlns:a16="http://schemas.microsoft.com/office/drawing/2014/main" id="{800BA744-1CCB-1214-110B-714ED4A00F4B}"/>
+                <a16:creationId xmlns:a16="http://schemas.microsoft.com/office/drawing/2014/main" id="{20A33982-8F7B-2282-6890-0680DCC083C9}"/>
               </a:ext>
             </a:extLst>
           </p:cNvPr>
@@ -16005,8 +16150,8 @@
         </p:nvSpPr>
         <p:spPr>
           <a:xfrm>
-            <a:off x="1198591" y="5047511"/>
-            <a:ext cx="4705512" cy="643820"/>
+            <a:off x="2348016" y="5047511"/>
+            <a:ext cx="4138903" cy="643820"/>
           </a:xfrm>
           <a:prstGeom prst="rect">
             <a:avLst/>
@@ -16040,7 +16185,7 @@
           <p:cNvPr id="12" name="item_1_title">
             <a:extLst>
               <a:ext uri="{FF2B5EF4-FFF2-40B4-BE49-F238E27FC236}">
-                <a16:creationId xmlns:a16="http://schemas.microsoft.com/office/drawing/2014/main" id="{4D9324B0-E9D5-45A0-F09D-FCDC1A5E7FB8}"/>
+                <a16:creationId xmlns:a16="http://schemas.microsoft.com/office/drawing/2014/main" id="{AC423525-9A0C-2B45-3923-C52F060ACC2F}"/>
               </a:ext>
             </a:extLst>
           </p:cNvPr>
@@ -16053,8 +16198,8 @@
         </p:nvSpPr>
         <p:spPr>
           <a:xfrm>
-            <a:off x="6467369" y="2286001"/>
-            <a:ext cx="4276832" cy="1056341"/>
+            <a:off x="6982359" y="2286001"/>
+            <a:ext cx="3761842" cy="1056341"/>
           </a:xfrm>
           <a:prstGeom prst="rect">
             <a:avLst/>
@@ -16093,7 +16238,7 @@
           <p:cNvPr id="13" name="item_1">
             <a:extLst>
               <a:ext uri="{FF2B5EF4-FFF2-40B4-BE49-F238E27FC236}">
-                <a16:creationId xmlns:a16="http://schemas.microsoft.com/office/drawing/2014/main" id="{228592A5-6ADA-3A86-E5C7-256C389D3295}"/>
+                <a16:creationId xmlns:a16="http://schemas.microsoft.com/office/drawing/2014/main" id="{5CEEBD9D-2694-404B-0186-7E3779C6CD4B}"/>
               </a:ext>
             </a:extLst>
           </p:cNvPr>
@@ -16106,8 +16251,8 @@
         </p:nvSpPr>
         <p:spPr>
           <a:xfrm>
-            <a:off x="6467369" y="3342342"/>
-            <a:ext cx="4276832" cy="2535219"/>
+            <a:off x="6982359" y="3342342"/>
+            <a:ext cx="3761842" cy="2535219"/>
           </a:xfrm>
           <a:prstGeom prst="rect">
             <a:avLst/>
@@ -16141,7 +16286,7 @@
           <p:cNvPr id="14" name="source">
             <a:extLst>
               <a:ext uri="{FF2B5EF4-FFF2-40B4-BE49-F238E27FC236}">
-                <a16:creationId xmlns:a16="http://schemas.microsoft.com/office/drawing/2014/main" id="{122E0766-E171-825B-52AD-712CF420CCDC}"/>
+                <a16:creationId xmlns:a16="http://schemas.microsoft.com/office/drawing/2014/main" id="{C37AD6A6-BBB6-1385-6C37-56F708D96387}"/>
               </a:ext>
             </a:extLst>
           </p:cNvPr>
@@ -16154,7 +16299,7 @@
         </p:nvSpPr>
         <p:spPr>
           <a:xfrm>
-            <a:off x="1024128" y="6004560"/>
+            <a:off x="2194560" y="6004560"/>
             <a:ext cx="1905000" cy="304800"/>
           </a:xfrm>
           <a:prstGeom prst="roundRect">
@@ -16196,7 +16341,7 @@
     </p:spTree>
     <p:extLst>
       <p:ext uri="{BB962C8B-B14F-4D97-AF65-F5344CB8AC3E}">
-        <p14:creationId xmlns:p14="http://schemas.microsoft.com/office/powerpoint/2010/main" val="2973197572"/>
+        <p14:creationId xmlns:p14="http://schemas.microsoft.com/office/powerpoint/2010/main" val="3087637848"/>
       </p:ext>
     </p:extLst>
   </p:cSld>
@@ -16228,7 +16373,7 @@
           <p:cNvPr id="7" name="creative_background">
             <a:extLst>
               <a:ext uri="{FF2B5EF4-FFF2-40B4-BE49-F238E27FC236}">
-                <a16:creationId xmlns:a16="http://schemas.microsoft.com/office/drawing/2014/main" id="{46F0362F-08B1-2401-21A1-7250BD38E0C4}"/>
+                <a16:creationId xmlns:a16="http://schemas.microsoft.com/office/drawing/2014/main" id="{C97C632D-F59F-0F26-FD29-5ACE9E1CA888}"/>
               </a:ext>
             </a:extLst>
           </p:cNvPr>
@@ -16269,7 +16414,12 @@
             <p:ph type="title"/>
           </p:nvPr>
         </p:nvSpPr>
-        <p:spPr/>
+        <p:spPr>
+          <a:xfrm>
+            <a:off x="2194560" y="585216"/>
+            <a:ext cx="8547100" cy="1499616"/>
+          </a:xfrm>
+        </p:spPr>
         <p:txBody>
           <a:bodyPr/>
           <a:lstStyle>
@@ -16296,12 +16446,17 @@
             <p:ph type="dt" sz="half" idx="10"/>
           </p:nvPr>
         </p:nvSpPr>
-        <p:spPr/>
+        <p:spPr>
+          <a:xfrm>
+            <a:off x="2194560" y="6470704"/>
+            <a:ext cx="977900" cy="274320"/>
+          </a:xfrm>
+        </p:spPr>
         <p:txBody>
           <a:bodyPr/>
           <a:lstStyle/>
           <a:p>
-            <a:fld id="{5922C19E-7BE7-43A0-B17C-FD6B34B75143}" type="datetimeFigureOut">
+            <a:fld id="{4354DB14-F9AE-4C12-8CFE-33ABF7B568CC}" type="datetimeFigureOut">
               <a:rPr lang="en-US" smtClean="0"/>
               <a:t>10/3/2026</a:t>
             </a:fld>
@@ -16343,7 +16498,7 @@
           <a:bodyPr/>
           <a:lstStyle/>
           <a:p>
-            <a:fld id="{0DF0A140-DE23-4C37-9945-2DD700FC6B21}" type="slidenum">
+            <a:fld id="{74A457B9-11F0-4EFD-A461-9DC8C80A1D31}" type="slidenum">
               <a:rPr lang="en-US" smtClean="0"/>
               <a:t>‹#›</a:t>
             </a:fld>
@@ -16356,7 +16511,7 @@
           <p:cNvPr id="8" name="item_1_title">
             <a:extLst>
               <a:ext uri="{FF2B5EF4-FFF2-40B4-BE49-F238E27FC236}">
-                <a16:creationId xmlns:a16="http://schemas.microsoft.com/office/drawing/2014/main" id="{37286A96-00C4-7962-D686-41A62918C958}"/>
+                <a16:creationId xmlns:a16="http://schemas.microsoft.com/office/drawing/2014/main" id="{D1A79952-0BB8-3A36-CB58-25C5B7F1D5B1}"/>
               </a:ext>
             </a:extLst>
           </p:cNvPr>
@@ -16369,8 +16524,8 @@
         </p:nvSpPr>
         <p:spPr>
           <a:xfrm>
-            <a:off x="1198591" y="2472230"/>
-            <a:ext cx="2758175" cy="946795"/>
+            <a:off x="2348015" y="2472230"/>
+            <a:ext cx="2426052" cy="946795"/>
           </a:xfrm>
         </p:spPr>
         <p:txBody>
@@ -16406,7 +16561,7 @@
           <p:cNvPr id="9" name="item_1">
             <a:extLst>
               <a:ext uri="{FF2B5EF4-FFF2-40B4-BE49-F238E27FC236}">
-                <a16:creationId xmlns:a16="http://schemas.microsoft.com/office/drawing/2014/main" id="{B4C161A1-CB6A-1B5F-D907-33E3970C06DC}"/>
+                <a16:creationId xmlns:a16="http://schemas.microsoft.com/office/drawing/2014/main" id="{75DD2AE6-7D12-4162-B2DA-B05DF7097778}"/>
               </a:ext>
             </a:extLst>
           </p:cNvPr>
@@ -16419,8 +16574,8 @@
         </p:nvSpPr>
         <p:spPr>
           <a:xfrm>
-            <a:off x="1198592" y="3419025"/>
-            <a:ext cx="2758175" cy="2272307"/>
+            <a:off x="2348015" y="3419025"/>
+            <a:ext cx="2426052" cy="2272307"/>
           </a:xfrm>
           <a:prstGeom prst="rect">
             <a:avLst/>
@@ -16454,7 +16609,7 @@
           <p:cNvPr id="10" name="item_2_title">
             <a:extLst>
               <a:ext uri="{FF2B5EF4-FFF2-40B4-BE49-F238E27FC236}">
-                <a16:creationId xmlns:a16="http://schemas.microsoft.com/office/drawing/2014/main" id="{147DD36F-2894-ECDA-A215-BFC69F3AE4C8}"/>
+                <a16:creationId xmlns:a16="http://schemas.microsoft.com/office/drawing/2014/main" id="{88EB1F6A-EE03-2F1A-7B63-C75690E6EB7B}"/>
               </a:ext>
             </a:extLst>
           </p:cNvPr>
@@ -16467,8 +16622,8 @@
         </p:nvSpPr>
         <p:spPr>
           <a:xfrm>
-            <a:off x="4505078" y="2472230"/>
-            <a:ext cx="2758175" cy="946795"/>
+            <a:off x="5256355" y="2472230"/>
+            <a:ext cx="2426052" cy="946795"/>
           </a:xfrm>
           <a:prstGeom prst="rect">
             <a:avLst/>
@@ -16507,7 +16662,7 @@
           <p:cNvPr id="11" name="item_2">
             <a:extLst>
               <a:ext uri="{FF2B5EF4-FFF2-40B4-BE49-F238E27FC236}">
-                <a16:creationId xmlns:a16="http://schemas.microsoft.com/office/drawing/2014/main" id="{02FD8608-9974-F2A7-BC80-DAF16EDB8ADA}"/>
+                <a16:creationId xmlns:a16="http://schemas.microsoft.com/office/drawing/2014/main" id="{6F12A783-6D6B-31AD-44F9-05E0B7595799}"/>
               </a:ext>
             </a:extLst>
           </p:cNvPr>
@@ -16520,8 +16675,8 @@
         </p:nvSpPr>
         <p:spPr>
           <a:xfrm>
-            <a:off x="4505078" y="3419025"/>
-            <a:ext cx="2758175" cy="2272307"/>
+            <a:off x="5256355" y="3419025"/>
+            <a:ext cx="2426052" cy="2272307"/>
           </a:xfrm>
           <a:prstGeom prst="rect">
             <a:avLst/>
@@ -16555,7 +16710,7 @@
           <p:cNvPr id="12" name="item_3_title">
             <a:extLst>
               <a:ext uri="{FF2B5EF4-FFF2-40B4-BE49-F238E27FC236}">
-                <a16:creationId xmlns:a16="http://schemas.microsoft.com/office/drawing/2014/main" id="{5374D704-58CB-1D32-1790-F775BBE29DC8}"/>
+                <a16:creationId xmlns:a16="http://schemas.microsoft.com/office/drawing/2014/main" id="{BBB34D49-04ED-7867-39F9-6E715D8B7D2C}"/>
               </a:ext>
             </a:extLst>
           </p:cNvPr>
@@ -16568,8 +16723,8 @@
         </p:nvSpPr>
         <p:spPr>
           <a:xfrm>
-            <a:off x="7811565" y="2472230"/>
-            <a:ext cx="2758175" cy="946795"/>
+            <a:off x="8164694" y="2472230"/>
+            <a:ext cx="2426052" cy="946795"/>
           </a:xfrm>
           <a:prstGeom prst="rect">
             <a:avLst/>
@@ -16608,7 +16763,7 @@
           <p:cNvPr id="13" name="item_3">
             <a:extLst>
               <a:ext uri="{FF2B5EF4-FFF2-40B4-BE49-F238E27FC236}">
-                <a16:creationId xmlns:a16="http://schemas.microsoft.com/office/drawing/2014/main" id="{141A04D3-B153-F5A4-4D8E-1F6A69AB387A}"/>
+                <a16:creationId xmlns:a16="http://schemas.microsoft.com/office/drawing/2014/main" id="{E15C4E56-EDC7-AC7A-4131-1DE5F7E5F072}"/>
               </a:ext>
             </a:extLst>
           </p:cNvPr>
@@ -16621,8 +16776,8 @@
         </p:nvSpPr>
         <p:spPr>
           <a:xfrm>
-            <a:off x="7811565" y="3419025"/>
-            <a:ext cx="2758175" cy="2272307"/>
+            <a:off x="8164694" y="3419025"/>
+            <a:ext cx="2426052" cy="2272307"/>
           </a:xfrm>
           <a:prstGeom prst="rect">
             <a:avLst/>
@@ -16656,7 +16811,7 @@
           <p:cNvPr id="14" name="source">
             <a:extLst>
               <a:ext uri="{FF2B5EF4-FFF2-40B4-BE49-F238E27FC236}">
-                <a16:creationId xmlns:a16="http://schemas.microsoft.com/office/drawing/2014/main" id="{1BAF2497-8A3E-AAD1-6DB6-967A36EEE689}"/>
+                <a16:creationId xmlns:a16="http://schemas.microsoft.com/office/drawing/2014/main" id="{21288281-8EF3-FD98-6C84-7F2EEFD409B1}"/>
               </a:ext>
             </a:extLst>
           </p:cNvPr>
@@ -16669,7 +16824,7 @@
         </p:nvSpPr>
         <p:spPr>
           <a:xfrm>
-            <a:off x="1024128" y="6004560"/>
+            <a:off x="2194560" y="6004560"/>
             <a:ext cx="1905000" cy="304800"/>
           </a:xfrm>
           <a:prstGeom prst="roundRect">
@@ -16711,7 +16866,7 @@
     </p:spTree>
     <p:extLst>
       <p:ext uri="{BB962C8B-B14F-4D97-AF65-F5344CB8AC3E}">
-        <p14:creationId xmlns:p14="http://schemas.microsoft.com/office/powerpoint/2010/main" val="1625487497"/>
+        <p14:creationId xmlns:p14="http://schemas.microsoft.com/office/powerpoint/2010/main" val="3080152989"/>
       </p:ext>
     </p:extLst>
   </p:cSld>
@@ -16743,7 +16898,7 @@
           <p:cNvPr id="7" name="creative_background">
             <a:extLst>
               <a:ext uri="{FF2B5EF4-FFF2-40B4-BE49-F238E27FC236}">
-                <a16:creationId xmlns:a16="http://schemas.microsoft.com/office/drawing/2014/main" id="{4E04F2A4-423D-AFF1-F28F-428D6B05E80D}"/>
+                <a16:creationId xmlns:a16="http://schemas.microsoft.com/office/drawing/2014/main" id="{5FFBEAF0-649E-C106-D32A-21203C57D676}"/>
               </a:ext>
             </a:extLst>
           </p:cNvPr>
@@ -16784,7 +16939,12 @@
             <p:ph type="title"/>
           </p:nvPr>
         </p:nvSpPr>
-        <p:spPr/>
+        <p:spPr>
+          <a:xfrm>
+            <a:off x="2194560" y="585216"/>
+            <a:ext cx="8547100" cy="1499616"/>
+          </a:xfrm>
+        </p:spPr>
         <p:txBody>
           <a:bodyPr/>
           <a:lstStyle>
@@ -16811,12 +16971,17 @@
             <p:ph type="dt" sz="half" idx="10"/>
           </p:nvPr>
         </p:nvSpPr>
-        <p:spPr/>
+        <p:spPr>
+          <a:xfrm>
+            <a:off x="2194560" y="6470704"/>
+            <a:ext cx="977900" cy="274320"/>
+          </a:xfrm>
+        </p:spPr>
         <p:txBody>
           <a:bodyPr/>
           <a:lstStyle/>
           <a:p>
-            <a:fld id="{5922C19E-7BE7-43A0-B17C-FD6B34B75143}" type="datetimeFigureOut">
+            <a:fld id="{4354DB14-F9AE-4C12-8CFE-33ABF7B568CC}" type="datetimeFigureOut">
               <a:rPr lang="en-US" smtClean="0"/>
               <a:t>10/3/2026</a:t>
             </a:fld>
@@ -16858,7 +17023,7 @@
           <a:bodyPr/>
           <a:lstStyle/>
           <a:p>
-            <a:fld id="{0DF0A140-DE23-4C37-9945-2DD700FC6B21}" type="slidenum">
+            <a:fld id="{74A457B9-11F0-4EFD-A461-9DC8C80A1D31}" type="slidenum">
               <a:rPr lang="en-US" smtClean="0"/>
               <a:t>‹#›</a:t>
             </a:fld>
@@ -16871,7 +17036,7 @@
           <p:cNvPr id="8" name="marker_1">
             <a:extLst>
               <a:ext uri="{FF2B5EF4-FFF2-40B4-BE49-F238E27FC236}">
-                <a16:creationId xmlns:a16="http://schemas.microsoft.com/office/drawing/2014/main" id="{D57948C3-5873-2726-8589-DE4A0454649F}"/>
+                <a16:creationId xmlns:a16="http://schemas.microsoft.com/office/drawing/2014/main" id="{5A8C2A9A-102B-B737-FEF9-0AEBFFBCF132}"/>
               </a:ext>
             </a:extLst>
           </p:cNvPr>
@@ -16884,8 +17049,8 @@
         </p:nvSpPr>
         <p:spPr>
           <a:xfrm>
-            <a:off x="1198591" y="2472230"/>
-            <a:ext cx="548312" cy="585291"/>
+            <a:off x="2348015" y="2472230"/>
+            <a:ext cx="482287" cy="585291"/>
           </a:xfrm>
           <a:prstGeom prst="ellipse">
             <a:avLst/>
@@ -16927,7 +17092,7 @@
           <p:cNvPr id="9" name="item_1_title">
             <a:extLst>
               <a:ext uri="{FF2B5EF4-FFF2-40B4-BE49-F238E27FC236}">
-                <a16:creationId xmlns:a16="http://schemas.microsoft.com/office/drawing/2014/main" id="{CFEBF4F1-2F3F-F550-707B-956A4EA3B68D}"/>
+                <a16:creationId xmlns:a16="http://schemas.microsoft.com/office/drawing/2014/main" id="{AE3A7A88-001D-2FAB-6E3A-021E6991BC05}"/>
               </a:ext>
             </a:extLst>
           </p:cNvPr>
@@ -16940,8 +17105,8 @@
         </p:nvSpPr>
         <p:spPr>
           <a:xfrm>
-            <a:off x="1846597" y="2472230"/>
-            <a:ext cx="8723143" cy="387325"/>
+            <a:off x="2917992" y="2472230"/>
+            <a:ext cx="7672755" cy="387325"/>
           </a:xfrm>
           <a:prstGeom prst="rect">
             <a:avLst/>
@@ -16980,7 +17145,7 @@
           <p:cNvPr id="10" name="item_1">
             <a:extLst>
               <a:ext uri="{FF2B5EF4-FFF2-40B4-BE49-F238E27FC236}">
-                <a16:creationId xmlns:a16="http://schemas.microsoft.com/office/drawing/2014/main" id="{E43E9EB7-FC8E-9C09-E3E1-A553B109C8D7}"/>
+                <a16:creationId xmlns:a16="http://schemas.microsoft.com/office/drawing/2014/main" id="{D8929006-876D-1512-F483-461C53A64232}"/>
               </a:ext>
             </a:extLst>
           </p:cNvPr>
@@ -16993,8 +17158,8 @@
         </p:nvSpPr>
         <p:spPr>
           <a:xfrm>
-            <a:off x="1846597" y="2859554"/>
-            <a:ext cx="8723143" cy="929580"/>
+            <a:off x="2917992" y="2859554"/>
+            <a:ext cx="7672755" cy="929580"/>
           </a:xfrm>
           <a:prstGeom prst="rect">
             <a:avLst/>
@@ -17028,7 +17193,7 @@
           <p:cNvPr id="11" name="marker_2">
             <a:extLst>
               <a:ext uri="{FF2B5EF4-FFF2-40B4-BE49-F238E27FC236}">
-                <a16:creationId xmlns:a16="http://schemas.microsoft.com/office/drawing/2014/main" id="{8345E8CF-64AF-334F-B528-7C572929BBE1}"/>
+                <a16:creationId xmlns:a16="http://schemas.microsoft.com/office/drawing/2014/main" id="{1B5A8086-74F0-70EB-46E1-BCCB2E472A69}"/>
               </a:ext>
             </a:extLst>
           </p:cNvPr>
@@ -17041,8 +17206,8 @@
         </p:nvSpPr>
         <p:spPr>
           <a:xfrm>
-            <a:off x="1198591" y="4374427"/>
-            <a:ext cx="548312" cy="585291"/>
+            <a:off x="2348016" y="4374427"/>
+            <a:ext cx="482287" cy="585291"/>
           </a:xfrm>
           <a:prstGeom prst="ellipse">
             <a:avLst/>
@@ -17084,7 +17249,7 @@
           <p:cNvPr id="12" name="item_2_title">
             <a:extLst>
               <a:ext uri="{FF2B5EF4-FFF2-40B4-BE49-F238E27FC236}">
-                <a16:creationId xmlns:a16="http://schemas.microsoft.com/office/drawing/2014/main" id="{89975014-AE96-7690-074F-A5441CC3050C}"/>
+                <a16:creationId xmlns:a16="http://schemas.microsoft.com/office/drawing/2014/main" id="{FB813B2C-60C8-DF58-627C-67ABF851BD1C}"/>
               </a:ext>
             </a:extLst>
           </p:cNvPr>
@@ -17097,8 +17262,8 @@
         </p:nvSpPr>
         <p:spPr>
           <a:xfrm>
-            <a:off x="1846597" y="4374427"/>
-            <a:ext cx="8723143" cy="387325"/>
+            <a:off x="2917992" y="4374427"/>
+            <a:ext cx="7672755" cy="387325"/>
           </a:xfrm>
           <a:prstGeom prst="rect">
             <a:avLst/>
@@ -17137,7 +17302,7 @@
           <p:cNvPr id="13" name="item_2">
             <a:extLst>
               <a:ext uri="{FF2B5EF4-FFF2-40B4-BE49-F238E27FC236}">
-                <a16:creationId xmlns:a16="http://schemas.microsoft.com/office/drawing/2014/main" id="{DE0F97F7-2A87-C223-CF05-D44DC0452C86}"/>
+                <a16:creationId xmlns:a16="http://schemas.microsoft.com/office/drawing/2014/main" id="{0382F791-BEF1-9DB2-CD0C-86AEF9853CFF}"/>
               </a:ext>
             </a:extLst>
           </p:cNvPr>
@@ -17150,8 +17315,8 @@
         </p:nvSpPr>
         <p:spPr>
           <a:xfrm>
-            <a:off x="1846597" y="4761750"/>
-            <a:ext cx="8723143" cy="929580"/>
+            <a:off x="2917992" y="4761750"/>
+            <a:ext cx="7672755" cy="929580"/>
           </a:xfrm>
           <a:prstGeom prst="rect">
             <a:avLst/>
@@ -17185,7 +17350,7 @@
           <p:cNvPr id="14" name="source">
             <a:extLst>
               <a:ext uri="{FF2B5EF4-FFF2-40B4-BE49-F238E27FC236}">
-                <a16:creationId xmlns:a16="http://schemas.microsoft.com/office/drawing/2014/main" id="{B2BC7EA8-D677-945C-7949-8C09376CFCAA}"/>
+                <a16:creationId xmlns:a16="http://schemas.microsoft.com/office/drawing/2014/main" id="{B54DA5B2-CFDA-D388-D881-7EB71CA81A72}"/>
               </a:ext>
             </a:extLst>
           </p:cNvPr>
@@ -17198,7 +17363,7 @@
         </p:nvSpPr>
         <p:spPr>
           <a:xfrm>
-            <a:off x="1024128" y="6004560"/>
+            <a:off x="2194560" y="6004560"/>
             <a:ext cx="1905000" cy="304800"/>
           </a:xfrm>
           <a:prstGeom prst="roundRect">
@@ -17240,7 +17405,7 @@
     </p:spTree>
     <p:extLst>
       <p:ext uri="{BB962C8B-B14F-4D97-AF65-F5344CB8AC3E}">
-        <p14:creationId xmlns:p14="http://schemas.microsoft.com/office/powerpoint/2010/main" val="1116372890"/>
+        <p14:creationId xmlns:p14="http://schemas.microsoft.com/office/powerpoint/2010/main" val="3046247859"/>
       </p:ext>
     </p:extLst>
   </p:cSld>
@@ -17272,7 +17437,7 @@
           <p:cNvPr id="7" name="creative_background">
             <a:extLst>
               <a:ext uri="{FF2B5EF4-FFF2-40B4-BE49-F238E27FC236}">
-                <a16:creationId xmlns:a16="http://schemas.microsoft.com/office/drawing/2014/main" id="{8983BF54-DA30-832C-326E-47E0EF844A06}"/>
+                <a16:creationId xmlns:a16="http://schemas.microsoft.com/office/drawing/2014/main" id="{A4296B9F-17D3-8EC3-767A-A0D41D3FB6C3}"/>
               </a:ext>
             </a:extLst>
           </p:cNvPr>
@@ -17313,7 +17478,12 @@
             <p:ph type="title"/>
           </p:nvPr>
         </p:nvSpPr>
-        <p:spPr/>
+        <p:spPr>
+          <a:xfrm>
+            <a:off x="2194560" y="585216"/>
+            <a:ext cx="8547100" cy="1499616"/>
+          </a:xfrm>
+        </p:spPr>
         <p:txBody>
           <a:bodyPr/>
           <a:lstStyle>
@@ -17340,12 +17510,17 @@
             <p:ph type="dt" sz="half" idx="10"/>
           </p:nvPr>
         </p:nvSpPr>
-        <p:spPr/>
+        <p:spPr>
+          <a:xfrm>
+            <a:off x="2194560" y="6470704"/>
+            <a:ext cx="977900" cy="274320"/>
+          </a:xfrm>
+        </p:spPr>
         <p:txBody>
           <a:bodyPr/>
           <a:lstStyle/>
           <a:p>
-            <a:fld id="{5922C19E-7BE7-43A0-B17C-FD6B34B75143}" type="datetimeFigureOut">
+            <a:fld id="{4354DB14-F9AE-4C12-8CFE-33ABF7B568CC}" type="datetimeFigureOut">
               <a:rPr lang="en-US" smtClean="0"/>
               <a:t>10/3/2026</a:t>
             </a:fld>
@@ -17387,7 +17562,7 @@
           <a:bodyPr/>
           <a:lstStyle/>
           <a:p>
-            <a:fld id="{0DF0A140-DE23-4C37-9945-2DD700FC6B21}" type="slidenum">
+            <a:fld id="{74A457B9-11F0-4EFD-A461-9DC8C80A1D31}" type="slidenum">
               <a:rPr lang="en-US" smtClean="0"/>
               <a:t>‹#›</a:t>
             </a:fld>
@@ -17400,7 +17575,7 @@
           <p:cNvPr id="8" name="kpi_value_1">
             <a:extLst>
               <a:ext uri="{FF2B5EF4-FFF2-40B4-BE49-F238E27FC236}">
-                <a16:creationId xmlns:a16="http://schemas.microsoft.com/office/drawing/2014/main" id="{302C4F8F-F000-5E18-7F34-4129CCE0164E}"/>
+                <a16:creationId xmlns:a16="http://schemas.microsoft.com/office/drawing/2014/main" id="{B9A247BB-9815-6295-02C0-EA898010BEE4}"/>
               </a:ext>
             </a:extLst>
           </p:cNvPr>
@@ -17413,8 +17588,8 @@
         </p:nvSpPr>
         <p:spPr>
           <a:xfrm>
-            <a:off x="1198591" y="2472230"/>
-            <a:ext cx="4705512" cy="1995843"/>
+            <a:off x="2348015" y="2472230"/>
+            <a:ext cx="4138903" cy="1995843"/>
           </a:xfrm>
         </p:spPr>
         <p:txBody>
@@ -17450,7 +17625,7 @@
           <p:cNvPr id="9" name="kpi_label_1">
             <a:extLst>
               <a:ext uri="{FF2B5EF4-FFF2-40B4-BE49-F238E27FC236}">
-                <a16:creationId xmlns:a16="http://schemas.microsoft.com/office/drawing/2014/main" id="{4AD3F80C-F7BA-44F5-B4E5-1E35D063255C}"/>
+                <a16:creationId xmlns:a16="http://schemas.microsoft.com/office/drawing/2014/main" id="{9B9BF415-5EBD-9C0C-8123-2232CB1C5B2D}"/>
               </a:ext>
             </a:extLst>
           </p:cNvPr>
@@ -17463,8 +17638,8 @@
         </p:nvSpPr>
         <p:spPr>
           <a:xfrm>
-            <a:off x="1198591" y="4532455"/>
-            <a:ext cx="4705512" cy="1158877"/>
+            <a:off x="2348016" y="4532455"/>
+            <a:ext cx="4138903" cy="1158877"/>
           </a:xfrm>
           <a:prstGeom prst="rect">
             <a:avLst/>
@@ -17498,7 +17673,7 @@
           <p:cNvPr id="10" name="quote">
             <a:extLst>
               <a:ext uri="{FF2B5EF4-FFF2-40B4-BE49-F238E27FC236}">
-                <a16:creationId xmlns:a16="http://schemas.microsoft.com/office/drawing/2014/main" id="{22D32482-4CC6-4280-66D5-A7C0259E911B}"/>
+                <a16:creationId xmlns:a16="http://schemas.microsoft.com/office/drawing/2014/main" id="{A75737CD-1E68-90FB-8F4C-9BE39463D120}"/>
               </a:ext>
             </a:extLst>
           </p:cNvPr>
@@ -17511,8 +17686,8 @@
         </p:nvSpPr>
         <p:spPr>
           <a:xfrm>
-            <a:off x="1198591" y="2472230"/>
-            <a:ext cx="4705512" cy="2510899"/>
+            <a:off x="2348016" y="2472230"/>
+            <a:ext cx="4138903" cy="2510899"/>
           </a:xfrm>
           <a:prstGeom prst="rect">
             <a:avLst/>
@@ -17548,7 +17723,7 @@
           <p:cNvPr id="11" name="attribution">
             <a:extLst>
               <a:ext uri="{FF2B5EF4-FFF2-40B4-BE49-F238E27FC236}">
-                <a16:creationId xmlns:a16="http://schemas.microsoft.com/office/drawing/2014/main" id="{87F64B6A-3A90-147D-77E4-5C94DEC322A9}"/>
+                <a16:creationId xmlns:a16="http://schemas.microsoft.com/office/drawing/2014/main" id="{6DA07F3D-2ED7-A5BF-E0C3-A06259D5BC57}"/>
               </a:ext>
             </a:extLst>
           </p:cNvPr>
@@ -17561,8 +17736,8 @@
         </p:nvSpPr>
         <p:spPr>
           <a:xfrm>
-            <a:off x="1198591" y="5047511"/>
-            <a:ext cx="4705512" cy="643820"/>
+            <a:off x="2348016" y="5047511"/>
+            <a:ext cx="4138903" cy="643820"/>
           </a:xfrm>
           <a:prstGeom prst="rect">
             <a:avLst/>
@@ -17596,7 +17771,7 @@
           <p:cNvPr id="12" name="item_1_title">
             <a:extLst>
               <a:ext uri="{FF2B5EF4-FFF2-40B4-BE49-F238E27FC236}">
-                <a16:creationId xmlns:a16="http://schemas.microsoft.com/office/drawing/2014/main" id="{FCC8AF53-369D-5D18-624C-A817F860000F}"/>
+                <a16:creationId xmlns:a16="http://schemas.microsoft.com/office/drawing/2014/main" id="{B0540D34-BDE1-8F5C-557E-85D5CE62CAFC}"/>
               </a:ext>
             </a:extLst>
           </p:cNvPr>
@@ -17609,8 +17784,8 @@
         </p:nvSpPr>
         <p:spPr>
           <a:xfrm>
-            <a:off x="6467369" y="2286001"/>
-            <a:ext cx="4276832" cy="1056341"/>
+            <a:off x="6982359" y="2286001"/>
+            <a:ext cx="3761842" cy="1056341"/>
           </a:xfrm>
           <a:prstGeom prst="rect">
             <a:avLst/>
@@ -17649,7 +17824,7 @@
           <p:cNvPr id="13" name="item_1">
             <a:extLst>
               <a:ext uri="{FF2B5EF4-FFF2-40B4-BE49-F238E27FC236}">
-                <a16:creationId xmlns:a16="http://schemas.microsoft.com/office/drawing/2014/main" id="{B0409FB3-8EF9-F39E-5730-446D6F2CFC5D}"/>
+                <a16:creationId xmlns:a16="http://schemas.microsoft.com/office/drawing/2014/main" id="{949073EA-093D-9D05-5C4A-BDC133D9B8A3}"/>
               </a:ext>
             </a:extLst>
           </p:cNvPr>
@@ -17662,8 +17837,8 @@
         </p:nvSpPr>
         <p:spPr>
           <a:xfrm>
-            <a:off x="6467369" y="3342342"/>
-            <a:ext cx="4276832" cy="2535219"/>
+            <a:off x="6982359" y="3342342"/>
+            <a:ext cx="3761842" cy="2535219"/>
           </a:xfrm>
           <a:prstGeom prst="rect">
             <a:avLst/>
@@ -17697,7 +17872,7 @@
           <p:cNvPr id="14" name="source">
             <a:extLst>
               <a:ext uri="{FF2B5EF4-FFF2-40B4-BE49-F238E27FC236}">
-                <a16:creationId xmlns:a16="http://schemas.microsoft.com/office/drawing/2014/main" id="{14544576-AB7C-49EC-69B3-33BD85404B74}"/>
+                <a16:creationId xmlns:a16="http://schemas.microsoft.com/office/drawing/2014/main" id="{C56F8CCB-1E5C-AD99-A474-DC10A1197D82}"/>
               </a:ext>
             </a:extLst>
           </p:cNvPr>
@@ -17710,7 +17885,7 @@
         </p:nvSpPr>
         <p:spPr>
           <a:xfrm>
-            <a:off x="1024128" y="6004560"/>
+            <a:off x="2194560" y="6004560"/>
             <a:ext cx="1905000" cy="304800"/>
           </a:xfrm>
           <a:prstGeom prst="roundRect">
@@ -17752,7 +17927,7 @@
     </p:spTree>
     <p:extLst>
       <p:ext uri="{BB962C8B-B14F-4D97-AF65-F5344CB8AC3E}">
-        <p14:creationId xmlns:p14="http://schemas.microsoft.com/office/powerpoint/2010/main" val="3383533153"/>
+        <p14:creationId xmlns:p14="http://schemas.microsoft.com/office/powerpoint/2010/main" val="4158398062"/>
       </p:ext>
     </p:extLst>
   </p:cSld>
@@ -17784,7 +17959,7 @@
           <p:cNvPr id="7" name="creative_background">
             <a:extLst>
               <a:ext uri="{FF2B5EF4-FFF2-40B4-BE49-F238E27FC236}">
-                <a16:creationId xmlns:a16="http://schemas.microsoft.com/office/drawing/2014/main" id="{BE0975A2-3A00-5761-56C8-41A2545418ED}"/>
+                <a16:creationId xmlns:a16="http://schemas.microsoft.com/office/drawing/2014/main" id="{96A8AC14-8D5E-1860-2FBB-B809AB15157E}"/>
               </a:ext>
             </a:extLst>
           </p:cNvPr>
@@ -17825,7 +18000,12 @@
             <p:ph type="title"/>
           </p:nvPr>
         </p:nvSpPr>
-        <p:spPr/>
+        <p:spPr>
+          <a:xfrm>
+            <a:off x="2194560" y="585216"/>
+            <a:ext cx="8547100" cy="1499616"/>
+          </a:xfrm>
+        </p:spPr>
         <p:txBody>
           <a:bodyPr/>
           <a:lstStyle>
@@ -17852,12 +18032,17 @@
             <p:ph type="dt" sz="half" idx="10"/>
           </p:nvPr>
         </p:nvSpPr>
-        <p:spPr/>
+        <p:spPr>
+          <a:xfrm>
+            <a:off x="2194560" y="6470704"/>
+            <a:ext cx="977900" cy="274320"/>
+          </a:xfrm>
+        </p:spPr>
         <p:txBody>
           <a:bodyPr/>
           <a:lstStyle/>
           <a:p>
-            <a:fld id="{5922C19E-7BE7-43A0-B17C-FD6B34B75143}" type="datetimeFigureOut">
+            <a:fld id="{4354DB14-F9AE-4C12-8CFE-33ABF7B568CC}" type="datetimeFigureOut">
               <a:rPr lang="en-US" smtClean="0"/>
               <a:t>10/3/2026</a:t>
             </a:fld>
@@ -17899,7 +18084,7 @@
           <a:bodyPr/>
           <a:lstStyle/>
           <a:p>
-            <a:fld id="{0DF0A140-DE23-4C37-9945-2DD700FC6B21}" type="slidenum">
+            <a:fld id="{74A457B9-11F0-4EFD-A461-9DC8C80A1D31}" type="slidenum">
               <a:rPr lang="en-US" smtClean="0"/>
               <a:t>‹#›</a:t>
             </a:fld>
@@ -17912,7 +18097,7 @@
           <p:cNvPr id="8" name="marker_1">
             <a:extLst>
               <a:ext uri="{FF2B5EF4-FFF2-40B4-BE49-F238E27FC236}">
-                <a16:creationId xmlns:a16="http://schemas.microsoft.com/office/drawing/2014/main" id="{6BC383C3-A9EC-8D4F-C385-3C7299505D5B}"/>
+                <a16:creationId xmlns:a16="http://schemas.microsoft.com/office/drawing/2014/main" id="{E0FFA35F-3CE8-F5D0-D2EE-CB32A0DF7AC9}"/>
               </a:ext>
             </a:extLst>
           </p:cNvPr>
@@ -17925,8 +18110,8 @@
         </p:nvSpPr>
         <p:spPr>
           <a:xfrm>
-            <a:off x="1148744" y="2419022"/>
-            <a:ext cx="548312" cy="585291"/>
+            <a:off x="2304171" y="2419022"/>
+            <a:ext cx="482287" cy="585291"/>
           </a:xfrm>
           <a:prstGeom prst="ellipse">
             <a:avLst/>
@@ -17968,7 +18153,7 @@
           <p:cNvPr id="9" name="item_1">
             <a:extLst>
               <a:ext uri="{FF2B5EF4-FFF2-40B4-BE49-F238E27FC236}">
-                <a16:creationId xmlns:a16="http://schemas.microsoft.com/office/drawing/2014/main" id="{0D725732-58A3-DBD2-9EF5-D85E6A632995}"/>
+                <a16:creationId xmlns:a16="http://schemas.microsoft.com/office/drawing/2014/main" id="{A1F30BBF-B826-AD2C-EDBD-2A24F797A099}"/>
               </a:ext>
             </a:extLst>
           </p:cNvPr>
@@ -17981,8 +18166,8 @@
         </p:nvSpPr>
         <p:spPr>
           <a:xfrm>
-            <a:off x="1796749" y="2419022"/>
-            <a:ext cx="8822836" cy="532083"/>
+            <a:off x="2874148" y="2419022"/>
+            <a:ext cx="7760443" cy="532083"/>
           </a:xfrm>
           <a:prstGeom prst="rect">
             <a:avLst/>
@@ -18016,7 +18201,7 @@
           <p:cNvPr id="10" name="marker_2">
             <a:extLst>
               <a:ext uri="{FF2B5EF4-FFF2-40B4-BE49-F238E27FC236}">
-                <a16:creationId xmlns:a16="http://schemas.microsoft.com/office/drawing/2014/main" id="{7F296458-FECE-5400-AB49-40CAA3B0D6B8}"/>
+                <a16:creationId xmlns:a16="http://schemas.microsoft.com/office/drawing/2014/main" id="{FDF6EE39-60BE-E893-4E52-E77BA47075EF}"/>
               </a:ext>
             </a:extLst>
           </p:cNvPr>
@@ -18029,8 +18214,8 @@
         </p:nvSpPr>
         <p:spPr>
           <a:xfrm>
-            <a:off x="1148744" y="3350167"/>
-            <a:ext cx="548312" cy="585291"/>
+            <a:off x="2304172" y="3350167"/>
+            <a:ext cx="482287" cy="585291"/>
           </a:xfrm>
           <a:prstGeom prst="ellipse">
             <a:avLst/>
@@ -18072,7 +18257,7 @@
           <p:cNvPr id="11" name="item_2">
             <a:extLst>
               <a:ext uri="{FF2B5EF4-FFF2-40B4-BE49-F238E27FC236}">
-                <a16:creationId xmlns:a16="http://schemas.microsoft.com/office/drawing/2014/main" id="{BC4ABE91-3B19-C8C8-9717-609398E39ADF}"/>
+                <a16:creationId xmlns:a16="http://schemas.microsoft.com/office/drawing/2014/main" id="{2CD02C72-FE21-14F1-808B-313AD2C5F0C7}"/>
               </a:ext>
             </a:extLst>
           </p:cNvPr>
@@ -18085,8 +18270,8 @@
         </p:nvSpPr>
         <p:spPr>
           <a:xfrm>
-            <a:off x="1796749" y="3350167"/>
-            <a:ext cx="8822836" cy="532083"/>
+            <a:off x="2874148" y="3350167"/>
+            <a:ext cx="7760443" cy="532083"/>
           </a:xfrm>
           <a:prstGeom prst="rect">
             <a:avLst/>
@@ -18120,7 +18305,7 @@
           <p:cNvPr id="12" name="marker_3">
             <a:extLst>
               <a:ext uri="{FF2B5EF4-FFF2-40B4-BE49-F238E27FC236}">
-                <a16:creationId xmlns:a16="http://schemas.microsoft.com/office/drawing/2014/main" id="{E703E2F5-A7A5-B632-852A-74538DCD8C35}"/>
+                <a16:creationId xmlns:a16="http://schemas.microsoft.com/office/drawing/2014/main" id="{94F4B799-3900-0905-E273-D2613563E2C6}"/>
               </a:ext>
             </a:extLst>
           </p:cNvPr>
@@ -18133,8 +18318,8 @@
         </p:nvSpPr>
         <p:spPr>
           <a:xfrm>
-            <a:off x="1148744" y="4281312"/>
-            <a:ext cx="548312" cy="585291"/>
+            <a:off x="2304172" y="4281312"/>
+            <a:ext cx="482287" cy="585291"/>
           </a:xfrm>
           <a:prstGeom prst="ellipse">
             <a:avLst/>
@@ -18176,7 +18361,7 @@
           <p:cNvPr id="13" name="item_3">
             <a:extLst>
               <a:ext uri="{FF2B5EF4-FFF2-40B4-BE49-F238E27FC236}">
-                <a16:creationId xmlns:a16="http://schemas.microsoft.com/office/drawing/2014/main" id="{A2C81848-6609-1690-FA61-B44BE8B35812}"/>
+                <a16:creationId xmlns:a16="http://schemas.microsoft.com/office/drawing/2014/main" id="{0BB07331-495F-C4F4-8679-47495691CCC6}"/>
               </a:ext>
             </a:extLst>
           </p:cNvPr>
@@ -18189,8 +18374,8 @@
         </p:nvSpPr>
         <p:spPr>
           <a:xfrm>
-            <a:off x="1796749" y="4281312"/>
-            <a:ext cx="8822836" cy="532083"/>
+            <a:off x="2874148" y="4281312"/>
+            <a:ext cx="7760443" cy="532083"/>
           </a:xfrm>
           <a:prstGeom prst="rect">
             <a:avLst/>
@@ -18224,7 +18409,7 @@
           <p:cNvPr id="14" name="marker_4">
             <a:extLst>
               <a:ext uri="{FF2B5EF4-FFF2-40B4-BE49-F238E27FC236}">
-                <a16:creationId xmlns:a16="http://schemas.microsoft.com/office/drawing/2014/main" id="{D5A6B445-579C-F5C3-0A54-7401E04E5F44}"/>
+                <a16:creationId xmlns:a16="http://schemas.microsoft.com/office/drawing/2014/main" id="{756E692C-CDC1-D057-DCD2-8C6B9D8A8634}"/>
               </a:ext>
             </a:extLst>
           </p:cNvPr>
@@ -18237,8 +18422,8 @@
         </p:nvSpPr>
         <p:spPr>
           <a:xfrm>
-            <a:off x="1148744" y="5212457"/>
-            <a:ext cx="548312" cy="585291"/>
+            <a:off x="2304172" y="5212457"/>
+            <a:ext cx="482287" cy="585291"/>
           </a:xfrm>
           <a:prstGeom prst="ellipse">
             <a:avLst/>
@@ -18280,7 +18465,7 @@
           <p:cNvPr id="15" name="item_4">
             <a:extLst>
               <a:ext uri="{FF2B5EF4-FFF2-40B4-BE49-F238E27FC236}">
-                <a16:creationId xmlns:a16="http://schemas.microsoft.com/office/drawing/2014/main" id="{9A83E54D-FD3D-06E2-E867-7B0F78B336FB}"/>
+                <a16:creationId xmlns:a16="http://schemas.microsoft.com/office/drawing/2014/main" id="{181841EB-8E94-A206-E2E6-F0D68E0F4F43}"/>
               </a:ext>
             </a:extLst>
           </p:cNvPr>
@@ -18293,8 +18478,8 @@
         </p:nvSpPr>
         <p:spPr>
           <a:xfrm>
-            <a:off x="1796749" y="5212457"/>
-            <a:ext cx="8822836" cy="532083"/>
+            <a:off x="2874148" y="5212457"/>
+            <a:ext cx="7760443" cy="532083"/>
           </a:xfrm>
           <a:prstGeom prst="rect">
             <a:avLst/>
@@ -18328,7 +18513,7 @@
           <p:cNvPr id="16" name="source">
             <a:extLst>
               <a:ext uri="{FF2B5EF4-FFF2-40B4-BE49-F238E27FC236}">
-                <a16:creationId xmlns:a16="http://schemas.microsoft.com/office/drawing/2014/main" id="{603DF37E-B79B-D9AD-D6BB-53B79894F43D}"/>
+                <a16:creationId xmlns:a16="http://schemas.microsoft.com/office/drawing/2014/main" id="{35CD7487-3302-A70D-53E0-8BBCC9753FDA}"/>
               </a:ext>
             </a:extLst>
           </p:cNvPr>
@@ -18341,7 +18526,7 @@
         </p:nvSpPr>
         <p:spPr>
           <a:xfrm>
-            <a:off x="1024128" y="6004560"/>
+            <a:off x="2194560" y="6004560"/>
             <a:ext cx="1905000" cy="304800"/>
           </a:xfrm>
           <a:prstGeom prst="roundRect">
@@ -18383,7 +18568,7 @@
     </p:spTree>
     <p:extLst>
       <p:ext uri="{BB962C8B-B14F-4D97-AF65-F5344CB8AC3E}">
-        <p14:creationId xmlns:p14="http://schemas.microsoft.com/office/powerpoint/2010/main" val="3475860703"/>
+        <p14:creationId xmlns:p14="http://schemas.microsoft.com/office/powerpoint/2010/main" val="2404616069"/>
       </p:ext>
     </p:extLst>
   </p:cSld>
@@ -18415,7 +18600,7 @@
           <p:cNvPr id="7" name="creative_background">
             <a:extLst>
               <a:ext uri="{FF2B5EF4-FFF2-40B4-BE49-F238E27FC236}">
-                <a16:creationId xmlns:a16="http://schemas.microsoft.com/office/drawing/2014/main" id="{76EF87D7-5DF9-1B13-A562-21CCD9B64B3C}"/>
+                <a16:creationId xmlns:a16="http://schemas.microsoft.com/office/drawing/2014/main" id="{00B1424C-FB5E-1244-08ED-02CA052473D6}"/>
               </a:ext>
             </a:extLst>
           </p:cNvPr>
@@ -18456,7 +18641,12 @@
             <p:ph type="title"/>
           </p:nvPr>
         </p:nvSpPr>
-        <p:spPr/>
+        <p:spPr>
+          <a:xfrm>
+            <a:off x="2194560" y="585216"/>
+            <a:ext cx="8547100" cy="1499616"/>
+          </a:xfrm>
+        </p:spPr>
         <p:txBody>
           <a:bodyPr/>
           <a:lstStyle>
@@ -18483,12 +18673,17 @@
             <p:ph type="dt" sz="half" idx="10"/>
           </p:nvPr>
         </p:nvSpPr>
-        <p:spPr/>
+        <p:spPr>
+          <a:xfrm>
+            <a:off x="2194560" y="6470704"/>
+            <a:ext cx="977900" cy="274320"/>
+          </a:xfrm>
+        </p:spPr>
         <p:txBody>
           <a:bodyPr/>
           <a:lstStyle/>
           <a:p>
-            <a:fld id="{5922C19E-7BE7-43A0-B17C-FD6B34B75143}" type="datetimeFigureOut">
+            <a:fld id="{4354DB14-F9AE-4C12-8CFE-33ABF7B568CC}" type="datetimeFigureOut">
               <a:rPr lang="en-US" smtClean="0"/>
               <a:t>10/3/2026</a:t>
             </a:fld>
@@ -18530,7 +18725,7 @@
           <a:bodyPr/>
           <a:lstStyle/>
           <a:p>
-            <a:fld id="{0DF0A140-DE23-4C37-9945-2DD700FC6B21}" type="slidenum">
+            <a:fld id="{74A457B9-11F0-4EFD-A461-9DC8C80A1D31}" type="slidenum">
               <a:rPr lang="en-US" smtClean="0"/>
               <a:t>‹#›</a:t>
             </a:fld>
@@ -18543,7 +18738,7 @@
           <p:cNvPr id="8" name="decisions_title">
             <a:extLst>
               <a:ext uri="{FF2B5EF4-FFF2-40B4-BE49-F238E27FC236}">
-                <a16:creationId xmlns:a16="http://schemas.microsoft.com/office/drawing/2014/main" id="{3084207F-5443-0997-558D-7F80ECD57322}"/>
+                <a16:creationId xmlns:a16="http://schemas.microsoft.com/office/drawing/2014/main" id="{38DFED30-8BA8-2C21-8E6E-907646FAC8D1}"/>
               </a:ext>
             </a:extLst>
           </p:cNvPr>
@@ -18556,8 +18751,8 @@
         </p:nvSpPr>
         <p:spPr>
           <a:xfrm>
-            <a:off x="1198591" y="4842659"/>
-            <a:ext cx="2352756" cy="848672"/>
+            <a:off x="2348015" y="4842659"/>
+            <a:ext cx="2069452" cy="848672"/>
           </a:xfrm>
         </p:spPr>
         <p:txBody>
@@ -18593,7 +18788,7 @@
           <p:cNvPr id="9" name="decisions">
             <a:extLst>
               <a:ext uri="{FF2B5EF4-FFF2-40B4-BE49-F238E27FC236}">
-                <a16:creationId xmlns:a16="http://schemas.microsoft.com/office/drawing/2014/main" id="{3F466B0C-0741-9E6D-C7B0-AC99068339A7}"/>
+                <a16:creationId xmlns:a16="http://schemas.microsoft.com/office/drawing/2014/main" id="{EE0C5E28-DCF6-B7BF-94AC-BB7EADE5D543}"/>
               </a:ext>
             </a:extLst>
           </p:cNvPr>
@@ -18606,8 +18801,8 @@
         </p:nvSpPr>
         <p:spPr>
           <a:xfrm>
-            <a:off x="3648549" y="4842659"/>
-            <a:ext cx="6921191" cy="848672"/>
+            <a:off x="4502964" y="4842659"/>
+            <a:ext cx="6087783" cy="848672"/>
           </a:xfrm>
           <a:prstGeom prst="rect">
             <a:avLst/>
@@ -18636,7 +18831,7 @@
           <p:cNvPr id="10" name="item_1_title">
             <a:extLst>
               <a:ext uri="{FF2B5EF4-FFF2-40B4-BE49-F238E27FC236}">
-                <a16:creationId xmlns:a16="http://schemas.microsoft.com/office/drawing/2014/main" id="{A7A7C1E3-C102-49A4-72D2-432A51998568}"/>
+                <a16:creationId xmlns:a16="http://schemas.microsoft.com/office/drawing/2014/main" id="{7B6EB532-16D4-9F25-74C4-A83F53C37C5E}"/>
               </a:ext>
             </a:extLst>
           </p:cNvPr>
@@ -18649,8 +18844,8 @@
         </p:nvSpPr>
         <p:spPr>
           <a:xfrm>
-            <a:off x="1198592" y="2472229"/>
-            <a:ext cx="2758175" cy="524258"/>
+            <a:off x="2348015" y="2472229"/>
+            <a:ext cx="2426052" cy="524258"/>
           </a:xfrm>
           <a:prstGeom prst="rect">
             <a:avLst/>
@@ -18689,7 +18884,7 @@
           <p:cNvPr id="11" name="item_1">
             <a:extLst>
               <a:ext uri="{FF2B5EF4-FFF2-40B4-BE49-F238E27FC236}">
-                <a16:creationId xmlns:a16="http://schemas.microsoft.com/office/drawing/2014/main" id="{B8276ECE-0A85-A5B1-1454-255B10C4FA9D}"/>
+                <a16:creationId xmlns:a16="http://schemas.microsoft.com/office/drawing/2014/main" id="{1BCDB63F-FD06-6C98-F201-D15E94E4E5B9}"/>
               </a:ext>
             </a:extLst>
           </p:cNvPr>
@@ -18702,8 +18897,8 @@
         </p:nvSpPr>
         <p:spPr>
           <a:xfrm>
-            <a:off x="1198592" y="2996487"/>
-            <a:ext cx="2758175" cy="1258220"/>
+            <a:off x="2348015" y="2996487"/>
+            <a:ext cx="2426052" cy="1258220"/>
           </a:xfrm>
           <a:prstGeom prst="rect">
             <a:avLst/>
@@ -18737,7 +18932,7 @@
           <p:cNvPr id="12" name="item_2_title">
             <a:extLst>
               <a:ext uri="{FF2B5EF4-FFF2-40B4-BE49-F238E27FC236}">
-                <a16:creationId xmlns:a16="http://schemas.microsoft.com/office/drawing/2014/main" id="{0D166D31-281C-9AFB-937D-1AAE112373ED}"/>
+                <a16:creationId xmlns:a16="http://schemas.microsoft.com/office/drawing/2014/main" id="{60E530E2-70FE-FF6C-8976-A341D4AE3CD8}"/>
               </a:ext>
             </a:extLst>
           </p:cNvPr>
@@ -18750,8 +18945,8 @@
         </p:nvSpPr>
         <p:spPr>
           <a:xfrm>
-            <a:off x="4505078" y="2472229"/>
-            <a:ext cx="2758175" cy="524258"/>
+            <a:off x="5256355" y="2472229"/>
+            <a:ext cx="2426052" cy="524258"/>
           </a:xfrm>
           <a:prstGeom prst="rect">
             <a:avLst/>
@@ -18790,7 +18985,7 @@
           <p:cNvPr id="13" name="item_2">
             <a:extLst>
               <a:ext uri="{FF2B5EF4-FFF2-40B4-BE49-F238E27FC236}">
-                <a16:creationId xmlns:a16="http://schemas.microsoft.com/office/drawing/2014/main" id="{F9DA3712-93A2-1463-0187-6602021F7B81}"/>
+                <a16:creationId xmlns:a16="http://schemas.microsoft.com/office/drawing/2014/main" id="{9578D522-C60C-9BA7-5E98-DF9AC2D872B4}"/>
               </a:ext>
             </a:extLst>
           </p:cNvPr>
@@ -18803,8 +18998,8 @@
         </p:nvSpPr>
         <p:spPr>
           <a:xfrm>
-            <a:off x="4505078" y="2996487"/>
-            <a:ext cx="2758175" cy="1258220"/>
+            <a:off x="5256355" y="2996487"/>
+            <a:ext cx="2426052" cy="1258220"/>
           </a:xfrm>
           <a:prstGeom prst="rect">
             <a:avLst/>
@@ -18838,7 +19033,7 @@
           <p:cNvPr id="14" name="item_3_title">
             <a:extLst>
               <a:ext uri="{FF2B5EF4-FFF2-40B4-BE49-F238E27FC236}">
-                <a16:creationId xmlns:a16="http://schemas.microsoft.com/office/drawing/2014/main" id="{EAD2AF9F-97B1-F3C6-9448-28A7898DEEA6}"/>
+                <a16:creationId xmlns:a16="http://schemas.microsoft.com/office/drawing/2014/main" id="{DBC8ECA3-FA64-DFC4-65C2-87082EF0DC22}"/>
               </a:ext>
             </a:extLst>
           </p:cNvPr>
@@ -18851,8 +19046,8 @@
         </p:nvSpPr>
         <p:spPr>
           <a:xfrm>
-            <a:off x="7811565" y="2472229"/>
-            <a:ext cx="2758175" cy="524258"/>
+            <a:off x="8164694" y="2472229"/>
+            <a:ext cx="2426052" cy="524258"/>
           </a:xfrm>
           <a:prstGeom prst="rect">
             <a:avLst/>
@@ -18891,7 +19086,7 @@
           <p:cNvPr id="15" name="item_3">
             <a:extLst>
               <a:ext uri="{FF2B5EF4-FFF2-40B4-BE49-F238E27FC236}">
-                <a16:creationId xmlns:a16="http://schemas.microsoft.com/office/drawing/2014/main" id="{AFEFCE42-0D45-1902-348B-FC77D6C1AACA}"/>
+                <a16:creationId xmlns:a16="http://schemas.microsoft.com/office/drawing/2014/main" id="{25387378-1A2A-2630-5AD2-E494A3280A06}"/>
               </a:ext>
             </a:extLst>
           </p:cNvPr>
@@ -18904,8 +19099,8 @@
         </p:nvSpPr>
         <p:spPr>
           <a:xfrm>
-            <a:off x="7811565" y="2996487"/>
-            <a:ext cx="2758175" cy="1258220"/>
+            <a:off x="8164694" y="2996487"/>
+            <a:ext cx="2426052" cy="1258220"/>
           </a:xfrm>
           <a:prstGeom prst="rect">
             <a:avLst/>
@@ -18939,7 +19134,7 @@
           <p:cNvPr id="16" name="source">
             <a:extLst>
               <a:ext uri="{FF2B5EF4-FFF2-40B4-BE49-F238E27FC236}">
-                <a16:creationId xmlns:a16="http://schemas.microsoft.com/office/drawing/2014/main" id="{D19356CD-9908-980F-7B75-5A390E3E816F}"/>
+                <a16:creationId xmlns:a16="http://schemas.microsoft.com/office/drawing/2014/main" id="{D968B59E-3E49-D874-7B96-C5C42327DAD1}"/>
               </a:ext>
             </a:extLst>
           </p:cNvPr>
@@ -18952,7 +19147,7 @@
         </p:nvSpPr>
         <p:spPr>
           <a:xfrm>
-            <a:off x="1024128" y="6004560"/>
+            <a:off x="2194560" y="6004560"/>
             <a:ext cx="1905000" cy="304800"/>
           </a:xfrm>
           <a:prstGeom prst="roundRect">
@@ -18994,7 +19189,7 @@
     </p:spTree>
     <p:extLst>
       <p:ext uri="{BB962C8B-B14F-4D97-AF65-F5344CB8AC3E}">
-        <p14:creationId xmlns:p14="http://schemas.microsoft.com/office/powerpoint/2010/main" val="2045322412"/>
+        <p14:creationId xmlns:p14="http://schemas.microsoft.com/office/powerpoint/2010/main" val="1039534599"/>
       </p:ext>
     </p:extLst>
   </p:cSld>
@@ -19026,7 +19221,7 @@
           <p:cNvPr id="7" name="creative_background">
             <a:extLst>
               <a:ext uri="{FF2B5EF4-FFF2-40B4-BE49-F238E27FC236}">
-                <a16:creationId xmlns:a16="http://schemas.microsoft.com/office/drawing/2014/main" id="{6E1F3975-A5A7-5342-0296-DC01FDA33C99}"/>
+                <a16:creationId xmlns:a16="http://schemas.microsoft.com/office/drawing/2014/main" id="{6A6E5DF8-CBBF-5761-A137-F8662A30B8C5}"/>
               </a:ext>
             </a:extLst>
           </p:cNvPr>
@@ -19067,7 +19262,12 @@
             <p:ph type="title"/>
           </p:nvPr>
         </p:nvSpPr>
-        <p:spPr/>
+        <p:spPr>
+          <a:xfrm>
+            <a:off x="2194560" y="585216"/>
+            <a:ext cx="8547100" cy="1499616"/>
+          </a:xfrm>
+        </p:spPr>
         <p:txBody>
           <a:bodyPr/>
           <a:lstStyle>
@@ -19094,12 +19294,17 @@
             <p:ph type="dt" sz="half" idx="10"/>
           </p:nvPr>
         </p:nvSpPr>
-        <p:spPr/>
+        <p:spPr>
+          <a:xfrm>
+            <a:off x="2194560" y="6470704"/>
+            <a:ext cx="977900" cy="274320"/>
+          </a:xfrm>
+        </p:spPr>
         <p:txBody>
           <a:bodyPr/>
           <a:lstStyle/>
           <a:p>
-            <a:fld id="{5922C19E-7BE7-43A0-B17C-FD6B34B75143}" type="datetimeFigureOut">
+            <a:fld id="{4354DB14-F9AE-4C12-8CFE-33ABF7B568CC}" type="datetimeFigureOut">
               <a:rPr lang="en-US" smtClean="0"/>
               <a:t>10/3/2026</a:t>
             </a:fld>
@@ -19141,7 +19346,7 @@
           <a:bodyPr/>
           <a:lstStyle/>
           <a:p>
-            <a:fld id="{0DF0A140-DE23-4C37-9945-2DD700FC6B21}" type="slidenum">
+            <a:fld id="{74A457B9-11F0-4EFD-A461-9DC8C80A1D31}" type="slidenum">
               <a:rPr lang="en-US" smtClean="0"/>
               <a:t>‹#›</a:t>
             </a:fld>
@@ -19154,7 +19359,7 @@
           <p:cNvPr id="8" name="body">
             <a:extLst>
               <a:ext uri="{FF2B5EF4-FFF2-40B4-BE49-F238E27FC236}">
-                <a16:creationId xmlns:a16="http://schemas.microsoft.com/office/drawing/2014/main" id="{554DE937-FC23-C9C9-EA20-73F9C04B851B}"/>
+                <a16:creationId xmlns:a16="http://schemas.microsoft.com/office/drawing/2014/main" id="{8E401829-ABD9-AFE1-0192-81E757F57E46}"/>
               </a:ext>
             </a:extLst>
           </p:cNvPr>
@@ -19167,8 +19372,8 @@
         </p:nvSpPr>
         <p:spPr>
           <a:xfrm>
-            <a:off x="1024128" y="5159248"/>
-            <a:ext cx="9720073" cy="718312"/>
+            <a:off x="2194560" y="5159248"/>
+            <a:ext cx="8549642" cy="718312"/>
           </a:xfrm>
         </p:spPr>
         <p:txBody>
@@ -19194,7 +19399,7 @@
           <p:cNvPr id="9" name="kpi_value_1">
             <a:extLst>
               <a:ext uri="{FF2B5EF4-FFF2-40B4-BE49-F238E27FC236}">
-                <a16:creationId xmlns:a16="http://schemas.microsoft.com/office/drawing/2014/main" id="{01261051-C4BB-6F17-B9A9-5E4497C780F0}"/>
+                <a16:creationId xmlns:a16="http://schemas.microsoft.com/office/drawing/2014/main" id="{AE8CB48D-27DB-8B7D-3AF6-1017836F4843}"/>
               </a:ext>
             </a:extLst>
           </p:cNvPr>
@@ -19207,8 +19412,8 @@
         </p:nvSpPr>
         <p:spPr>
           <a:xfrm>
-            <a:off x="1198591" y="2472229"/>
-            <a:ext cx="4411418" cy="1515296"/>
+            <a:off x="2348015" y="2472229"/>
+            <a:ext cx="3880222" cy="1515296"/>
           </a:xfrm>
           <a:prstGeom prst="rect">
             <a:avLst/>
@@ -19247,7 +19452,7 @@
           <p:cNvPr id="10" name="kpi_label_1">
             <a:extLst>
               <a:ext uri="{FF2B5EF4-FFF2-40B4-BE49-F238E27FC236}">
-                <a16:creationId xmlns:a16="http://schemas.microsoft.com/office/drawing/2014/main" id="{2A9F9FE9-2344-6BB3-BD4A-29F574F7C5C7}"/>
+                <a16:creationId xmlns:a16="http://schemas.microsoft.com/office/drawing/2014/main" id="{B6619627-E504-02A2-40A9-0587F9C32DA9}"/>
               </a:ext>
             </a:extLst>
           </p:cNvPr>
@@ -19260,8 +19465,8 @@
         </p:nvSpPr>
         <p:spPr>
           <a:xfrm>
-            <a:off x="1198591" y="3987526"/>
-            <a:ext cx="4411418" cy="841831"/>
+            <a:off x="2348015" y="3987526"/>
+            <a:ext cx="3880222" cy="841831"/>
           </a:xfrm>
           <a:prstGeom prst="rect">
             <a:avLst/>
@@ -19295,7 +19500,7 @@
           <p:cNvPr id="11" name="kpi_value_2">
             <a:extLst>
               <a:ext uri="{FF2B5EF4-FFF2-40B4-BE49-F238E27FC236}">
-                <a16:creationId xmlns:a16="http://schemas.microsoft.com/office/drawing/2014/main" id="{0A33CEB5-8256-8CF9-EBC5-ED52BE287536}"/>
+                <a16:creationId xmlns:a16="http://schemas.microsoft.com/office/drawing/2014/main" id="{21105B70-53E3-015A-C0A8-771DCA6E3436}"/>
               </a:ext>
             </a:extLst>
           </p:cNvPr>
@@ -19308,8 +19513,8 @@
         </p:nvSpPr>
         <p:spPr>
           <a:xfrm>
-            <a:off x="6158321" y="2472229"/>
-            <a:ext cx="4411418" cy="1515296"/>
+            <a:off x="6710525" y="2472229"/>
+            <a:ext cx="3880222" cy="1515296"/>
           </a:xfrm>
           <a:prstGeom prst="rect">
             <a:avLst/>
@@ -19348,7 +19553,7 @@
           <p:cNvPr id="12" name="kpi_label_2">
             <a:extLst>
               <a:ext uri="{FF2B5EF4-FFF2-40B4-BE49-F238E27FC236}">
-                <a16:creationId xmlns:a16="http://schemas.microsoft.com/office/drawing/2014/main" id="{9E6A7A8A-8734-401E-529E-FE49DDD4F8FE}"/>
+                <a16:creationId xmlns:a16="http://schemas.microsoft.com/office/drawing/2014/main" id="{E4BE7DB4-8458-C5FF-6446-9745E6A60093}"/>
               </a:ext>
             </a:extLst>
           </p:cNvPr>
@@ -19361,8 +19566,8 @@
         </p:nvSpPr>
         <p:spPr>
           <a:xfrm>
-            <a:off x="6158321" y="3987526"/>
-            <a:ext cx="4411418" cy="841831"/>
+            <a:off x="6710525" y="3987526"/>
+            <a:ext cx="3880222" cy="841831"/>
           </a:xfrm>
           <a:prstGeom prst="rect">
             <a:avLst/>
@@ -19396,7 +19601,7 @@
           <p:cNvPr id="13" name="source">
             <a:extLst>
               <a:ext uri="{FF2B5EF4-FFF2-40B4-BE49-F238E27FC236}">
-                <a16:creationId xmlns:a16="http://schemas.microsoft.com/office/drawing/2014/main" id="{B1AD4A79-160C-CEA6-78EB-348A3DA00FA8}"/>
+                <a16:creationId xmlns:a16="http://schemas.microsoft.com/office/drawing/2014/main" id="{6F56E8F0-E2D1-5F16-AF94-1D91C12B59E2}"/>
               </a:ext>
             </a:extLst>
           </p:cNvPr>
@@ -19409,7 +19614,7 @@
         </p:nvSpPr>
         <p:spPr>
           <a:xfrm>
-            <a:off x="1024128" y="6004560"/>
+            <a:off x="2194560" y="6004560"/>
             <a:ext cx="1905000" cy="304800"/>
           </a:xfrm>
           <a:prstGeom prst="roundRect">
@@ -19451,7 +19656,7 @@
     </p:spTree>
     <p:extLst>
       <p:ext uri="{BB962C8B-B14F-4D97-AF65-F5344CB8AC3E}">
-        <p14:creationId xmlns:p14="http://schemas.microsoft.com/office/powerpoint/2010/main" val="1067058568"/>
+        <p14:creationId xmlns:p14="http://schemas.microsoft.com/office/powerpoint/2010/main" val="2027911426"/>
       </p:ext>
     </p:extLst>
   </p:cSld>
@@ -19483,7 +19688,7 @@
           <p:cNvPr id="7" name="creative_background">
             <a:extLst>
               <a:ext uri="{FF2B5EF4-FFF2-40B4-BE49-F238E27FC236}">
-                <a16:creationId xmlns:a16="http://schemas.microsoft.com/office/drawing/2014/main" id="{959F63F6-682A-6CC4-5DFA-67421F8B2BCE}"/>
+                <a16:creationId xmlns:a16="http://schemas.microsoft.com/office/drawing/2014/main" id="{15F0D494-67CC-8188-3346-0472F784969E}"/>
               </a:ext>
             </a:extLst>
           </p:cNvPr>
@@ -19524,7 +19729,12 @@
             <p:ph type="title"/>
           </p:nvPr>
         </p:nvSpPr>
-        <p:spPr/>
+        <p:spPr>
+          <a:xfrm>
+            <a:off x="2194560" y="585216"/>
+            <a:ext cx="8547100" cy="1499616"/>
+          </a:xfrm>
+        </p:spPr>
         <p:txBody>
           <a:bodyPr/>
           <a:lstStyle>
@@ -19551,12 +19761,17 @@
             <p:ph type="dt" sz="half" idx="10"/>
           </p:nvPr>
         </p:nvSpPr>
-        <p:spPr/>
+        <p:spPr>
+          <a:xfrm>
+            <a:off x="2194560" y="6470704"/>
+            <a:ext cx="977900" cy="274320"/>
+          </a:xfrm>
+        </p:spPr>
         <p:txBody>
           <a:bodyPr/>
           <a:lstStyle/>
           <a:p>
-            <a:fld id="{5922C19E-7BE7-43A0-B17C-FD6B34B75143}" type="datetimeFigureOut">
+            <a:fld id="{4354DB14-F9AE-4C12-8CFE-33ABF7B568CC}" type="datetimeFigureOut">
               <a:rPr lang="en-US" smtClean="0"/>
               <a:t>10/3/2026</a:t>
             </a:fld>
@@ -19598,7 +19813,7 @@
           <a:bodyPr/>
           <a:lstStyle/>
           <a:p>
-            <a:fld id="{0DF0A140-DE23-4C37-9945-2DD700FC6B21}" type="slidenum">
+            <a:fld id="{74A457B9-11F0-4EFD-A461-9DC8C80A1D31}" type="slidenum">
               <a:rPr lang="en-US" smtClean="0"/>
               <a:t>‹#›</a:t>
             </a:fld>
@@ -19611,7 +19826,7 @@
           <p:cNvPr id="8" name="body">
             <a:extLst>
               <a:ext uri="{FF2B5EF4-FFF2-40B4-BE49-F238E27FC236}">
-                <a16:creationId xmlns:a16="http://schemas.microsoft.com/office/drawing/2014/main" id="{44ECE65A-ABCE-7165-1091-732550D8E585}"/>
+                <a16:creationId xmlns:a16="http://schemas.microsoft.com/office/drawing/2014/main" id="{CC3BAD97-311E-2E9A-C1B9-6BA9337D79CF}"/>
               </a:ext>
             </a:extLst>
           </p:cNvPr>
@@ -19624,8 +19839,8 @@
         </p:nvSpPr>
         <p:spPr>
           <a:xfrm>
-            <a:off x="1024128" y="5159248"/>
-            <a:ext cx="9720073" cy="718312"/>
+            <a:off x="2194560" y="5159248"/>
+            <a:ext cx="8549642" cy="718312"/>
           </a:xfrm>
         </p:spPr>
         <p:txBody>
@@ -19651,7 +19866,7 @@
           <p:cNvPr id="9" name="kpi_value_1">
             <a:extLst>
               <a:ext uri="{FF2B5EF4-FFF2-40B4-BE49-F238E27FC236}">
-                <a16:creationId xmlns:a16="http://schemas.microsoft.com/office/drawing/2014/main" id="{DA75BB8D-8B03-7C02-88FD-0B6A2F9E4027}"/>
+                <a16:creationId xmlns:a16="http://schemas.microsoft.com/office/drawing/2014/main" id="{8CF376DF-EA5D-1736-E4D2-02592469A2A2}"/>
               </a:ext>
             </a:extLst>
           </p:cNvPr>
@@ -19664,8 +19879,8 @@
         </p:nvSpPr>
         <p:spPr>
           <a:xfrm>
-            <a:off x="1198592" y="2472229"/>
-            <a:ext cx="1931553" cy="1515296"/>
+            <a:off x="2348016" y="2472229"/>
+            <a:ext cx="1698967" cy="1515296"/>
           </a:xfrm>
           <a:prstGeom prst="rect">
             <a:avLst/>
@@ -19704,7 +19919,7 @@
           <p:cNvPr id="10" name="kpi_label_1">
             <a:extLst>
               <a:ext uri="{FF2B5EF4-FFF2-40B4-BE49-F238E27FC236}">
-                <a16:creationId xmlns:a16="http://schemas.microsoft.com/office/drawing/2014/main" id="{56B590D8-0413-ADC1-9AF8-2C7A045599E5}"/>
+                <a16:creationId xmlns:a16="http://schemas.microsoft.com/office/drawing/2014/main" id="{30133F40-F75E-5F54-A8D7-070EB5B3082B}"/>
               </a:ext>
             </a:extLst>
           </p:cNvPr>
@@ -19717,8 +19932,8 @@
         </p:nvSpPr>
         <p:spPr>
           <a:xfrm>
-            <a:off x="1198592" y="3987526"/>
-            <a:ext cx="1931553" cy="841831"/>
+            <a:off x="2348016" y="3987526"/>
+            <a:ext cx="1698967" cy="841831"/>
           </a:xfrm>
           <a:prstGeom prst="rect">
             <a:avLst/>
@@ -19752,7 +19967,7 @@
           <p:cNvPr id="11" name="kpi_value_2">
             <a:extLst>
               <a:ext uri="{FF2B5EF4-FFF2-40B4-BE49-F238E27FC236}">
-                <a16:creationId xmlns:a16="http://schemas.microsoft.com/office/drawing/2014/main" id="{CF68AFCA-670A-2B99-EA22-8F53137E86E7}"/>
+                <a16:creationId xmlns:a16="http://schemas.microsoft.com/office/drawing/2014/main" id="{CE846D78-B4B1-9D59-453F-7828CC1EB45F}"/>
               </a:ext>
             </a:extLst>
           </p:cNvPr>
@@ -19765,8 +19980,8 @@
         </p:nvSpPr>
         <p:spPr>
           <a:xfrm>
-            <a:off x="3678457" y="2472229"/>
-            <a:ext cx="1931553" cy="1515296"/>
+            <a:off x="4529271" y="2472229"/>
+            <a:ext cx="1698967" cy="1515296"/>
           </a:xfrm>
           <a:prstGeom prst="rect">
             <a:avLst/>
@@ -19805,7 +20020,7 @@
           <p:cNvPr id="12" name="kpi_label_2">
             <a:extLst>
               <a:ext uri="{FF2B5EF4-FFF2-40B4-BE49-F238E27FC236}">
-                <a16:creationId xmlns:a16="http://schemas.microsoft.com/office/drawing/2014/main" id="{B03F0550-F278-5102-4A1D-9D88E99CDA21}"/>
+                <a16:creationId xmlns:a16="http://schemas.microsoft.com/office/drawing/2014/main" id="{D23D1DB6-F981-4E3A-2A7B-B2924143E289}"/>
               </a:ext>
             </a:extLst>
           </p:cNvPr>
@@ -19818,8 +20033,8 @@
         </p:nvSpPr>
         <p:spPr>
           <a:xfrm>
-            <a:off x="3678457" y="3987526"/>
-            <a:ext cx="1931553" cy="841831"/>
+            <a:off x="4529271" y="3987526"/>
+            <a:ext cx="1698967" cy="841831"/>
           </a:xfrm>
           <a:prstGeom prst="rect">
             <a:avLst/>
@@ -19853,7 +20068,7 @@
           <p:cNvPr id="13" name="kpi_value_3">
             <a:extLst>
               <a:ext uri="{FF2B5EF4-FFF2-40B4-BE49-F238E27FC236}">
-                <a16:creationId xmlns:a16="http://schemas.microsoft.com/office/drawing/2014/main" id="{D609C15F-87EA-ED4B-23D0-94780F19BB29}"/>
+                <a16:creationId xmlns:a16="http://schemas.microsoft.com/office/drawing/2014/main" id="{C9B12F3D-D71B-C33E-1F5B-6792440DF172}"/>
               </a:ext>
             </a:extLst>
           </p:cNvPr>
@@ -19866,8 +20081,8 @@
         </p:nvSpPr>
         <p:spPr>
           <a:xfrm>
-            <a:off x="6158322" y="2472229"/>
-            <a:ext cx="1931553" cy="1515296"/>
+            <a:off x="6710526" y="2472229"/>
+            <a:ext cx="1698967" cy="1515296"/>
           </a:xfrm>
           <a:prstGeom prst="rect">
             <a:avLst/>
@@ -19906,7 +20121,7 @@
           <p:cNvPr id="14" name="kpi_label_3">
             <a:extLst>
               <a:ext uri="{FF2B5EF4-FFF2-40B4-BE49-F238E27FC236}">
-                <a16:creationId xmlns:a16="http://schemas.microsoft.com/office/drawing/2014/main" id="{2072FA68-7EA6-EA28-FCBA-CDC65D39D1BA}"/>
+                <a16:creationId xmlns:a16="http://schemas.microsoft.com/office/drawing/2014/main" id="{930484CB-4952-4F74-97F6-BA5E604403C1}"/>
               </a:ext>
             </a:extLst>
           </p:cNvPr>
@@ -19919,8 +20134,8 @@
         </p:nvSpPr>
         <p:spPr>
           <a:xfrm>
-            <a:off x="6158322" y="3987526"/>
-            <a:ext cx="1931553" cy="841831"/>
+            <a:off x="6710526" y="3987526"/>
+            <a:ext cx="1698967" cy="841831"/>
           </a:xfrm>
           <a:prstGeom prst="rect">
             <a:avLst/>
@@ -19954,7 +20169,7 @@
           <p:cNvPr id="15" name="kpi_value_4">
             <a:extLst>
               <a:ext uri="{FF2B5EF4-FFF2-40B4-BE49-F238E27FC236}">
-                <a16:creationId xmlns:a16="http://schemas.microsoft.com/office/drawing/2014/main" id="{BD8201E4-B039-3393-DB1B-6A69BEB488D8}"/>
+                <a16:creationId xmlns:a16="http://schemas.microsoft.com/office/drawing/2014/main" id="{EBFB26EF-3866-DC6B-F1E6-79B791E5F1C5}"/>
               </a:ext>
             </a:extLst>
           </p:cNvPr>
@@ -19967,8 +20182,8 @@
         </p:nvSpPr>
         <p:spPr>
           <a:xfrm>
-            <a:off x="8638186" y="2472229"/>
-            <a:ext cx="1931553" cy="1515296"/>
+            <a:off x="8891780" y="2472229"/>
+            <a:ext cx="1698967" cy="1515296"/>
           </a:xfrm>
           <a:prstGeom prst="rect">
             <a:avLst/>
@@ -20007,7 +20222,7 @@
           <p:cNvPr id="16" name="kpi_label_4">
             <a:extLst>
               <a:ext uri="{FF2B5EF4-FFF2-40B4-BE49-F238E27FC236}">
-                <a16:creationId xmlns:a16="http://schemas.microsoft.com/office/drawing/2014/main" id="{B313E422-5A34-A6DF-7711-CF00221AA890}"/>
+                <a16:creationId xmlns:a16="http://schemas.microsoft.com/office/drawing/2014/main" id="{BE29E475-D05F-2E6C-2022-AB233F991BD5}"/>
               </a:ext>
             </a:extLst>
           </p:cNvPr>
@@ -20020,8 +20235,8 @@
         </p:nvSpPr>
         <p:spPr>
           <a:xfrm>
-            <a:off x="8638186" y="3987526"/>
-            <a:ext cx="1931553" cy="841831"/>
+            <a:off x="8891780" y="3987526"/>
+            <a:ext cx="1698967" cy="841831"/>
           </a:xfrm>
           <a:prstGeom prst="rect">
             <a:avLst/>
@@ -20055,7 +20270,7 @@
           <p:cNvPr id="17" name="source">
             <a:extLst>
               <a:ext uri="{FF2B5EF4-FFF2-40B4-BE49-F238E27FC236}">
-                <a16:creationId xmlns:a16="http://schemas.microsoft.com/office/drawing/2014/main" id="{46216A02-2ECE-D666-C421-429CE4862EF6}"/>
+                <a16:creationId xmlns:a16="http://schemas.microsoft.com/office/drawing/2014/main" id="{DCC3E1EE-2ED0-D158-4C0E-5D6940C8774B}"/>
               </a:ext>
             </a:extLst>
           </p:cNvPr>
@@ -20068,7 +20283,7 @@
         </p:nvSpPr>
         <p:spPr>
           <a:xfrm>
-            <a:off x="1024128" y="6004560"/>
+            <a:off x="2194560" y="6004560"/>
             <a:ext cx="1905000" cy="304800"/>
           </a:xfrm>
           <a:prstGeom prst="roundRect">
@@ -20110,7 +20325,7 @@
     </p:spTree>
     <p:extLst>
       <p:ext uri="{BB962C8B-B14F-4D97-AF65-F5344CB8AC3E}">
-        <p14:creationId xmlns:p14="http://schemas.microsoft.com/office/powerpoint/2010/main" val="246553150"/>
+        <p14:creationId xmlns:p14="http://schemas.microsoft.com/office/powerpoint/2010/main" val="3194351015"/>
       </p:ext>
     </p:extLst>
   </p:cSld>
@@ -20142,7 +20357,7 @@
           <p:cNvPr id="7" name="creative_background">
             <a:extLst>
               <a:ext uri="{FF2B5EF4-FFF2-40B4-BE49-F238E27FC236}">
-                <a16:creationId xmlns:a16="http://schemas.microsoft.com/office/drawing/2014/main" id="{65B293AE-25C4-6BAD-BFCF-1A18B755B7B9}"/>
+                <a16:creationId xmlns:a16="http://schemas.microsoft.com/office/drawing/2014/main" id="{68F91874-1EE8-AE0F-9730-7EFE2D3DBF06}"/>
               </a:ext>
             </a:extLst>
           </p:cNvPr>
@@ -20183,7 +20398,12 @@
             <p:ph type="title"/>
           </p:nvPr>
         </p:nvSpPr>
-        <p:spPr/>
+        <p:spPr>
+          <a:xfrm>
+            <a:off x="2194560" y="585216"/>
+            <a:ext cx="8547100" cy="1499616"/>
+          </a:xfrm>
+        </p:spPr>
         <p:txBody>
           <a:bodyPr/>
           <a:lstStyle>
@@ -20210,12 +20430,17 @@
             <p:ph type="dt" sz="half" idx="10"/>
           </p:nvPr>
         </p:nvSpPr>
-        <p:spPr/>
+        <p:spPr>
+          <a:xfrm>
+            <a:off x="2194560" y="6470704"/>
+            <a:ext cx="977900" cy="274320"/>
+          </a:xfrm>
+        </p:spPr>
         <p:txBody>
           <a:bodyPr/>
           <a:lstStyle/>
           <a:p>
-            <a:fld id="{5922C19E-7BE7-43A0-B17C-FD6B34B75143}" type="datetimeFigureOut">
+            <a:fld id="{4354DB14-F9AE-4C12-8CFE-33ABF7B568CC}" type="datetimeFigureOut">
               <a:rPr lang="en-US" smtClean="0"/>
               <a:t>10/3/2026</a:t>
             </a:fld>
@@ -20257,7 +20482,7 @@
           <a:bodyPr/>
           <a:lstStyle/>
           <a:p>
-            <a:fld id="{0DF0A140-DE23-4C37-9945-2DD700FC6B21}" type="slidenum">
+            <a:fld id="{74A457B9-11F0-4EFD-A461-9DC8C80A1D31}" type="slidenum">
               <a:rPr lang="en-US" smtClean="0"/>
               <a:t>‹#›</a:t>
             </a:fld>
@@ -20270,7 +20495,7 @@
           <p:cNvPr id="8" name="body">
             <a:extLst>
               <a:ext uri="{FF2B5EF4-FFF2-40B4-BE49-F238E27FC236}">
-                <a16:creationId xmlns:a16="http://schemas.microsoft.com/office/drawing/2014/main" id="{EAC46A22-3377-AB4B-B3BC-F4D1613CB206}"/>
+                <a16:creationId xmlns:a16="http://schemas.microsoft.com/office/drawing/2014/main" id="{FB1062F2-91D4-C5FC-567B-878962B848B2}"/>
               </a:ext>
             </a:extLst>
           </p:cNvPr>
@@ -20283,8 +20508,8 @@
         </p:nvSpPr>
         <p:spPr>
           <a:xfrm>
-            <a:off x="1024128" y="2286000"/>
-            <a:ext cx="5443241" cy="3591560"/>
+            <a:off x="2194560" y="2286000"/>
+            <a:ext cx="4787799" cy="3591560"/>
           </a:xfrm>
         </p:spPr>
         <p:txBody>
@@ -20310,7 +20535,7 @@
           <p:cNvPr id="9" name="quote">
             <a:extLst>
               <a:ext uri="{FF2B5EF4-FFF2-40B4-BE49-F238E27FC236}">
-                <a16:creationId xmlns:a16="http://schemas.microsoft.com/office/drawing/2014/main" id="{FE7025D2-73AB-F646-EBCB-F4CCC45836C0}"/>
+                <a16:creationId xmlns:a16="http://schemas.microsoft.com/office/drawing/2014/main" id="{BA15F270-0FF4-59CF-D938-48B2634B7961}"/>
               </a:ext>
             </a:extLst>
           </p:cNvPr>
@@ -20323,8 +20548,8 @@
         </p:nvSpPr>
         <p:spPr>
           <a:xfrm>
-            <a:off x="7030635" y="2472230"/>
-            <a:ext cx="3539104" cy="2687019"/>
+            <a:off x="7477800" y="2472230"/>
+            <a:ext cx="3112946" cy="2687019"/>
           </a:xfrm>
           <a:prstGeom prst="rect">
             <a:avLst/>
@@ -20360,7 +20585,7 @@
           <p:cNvPr id="10" name="attribution">
             <a:extLst>
               <a:ext uri="{FF2B5EF4-FFF2-40B4-BE49-F238E27FC236}">
-                <a16:creationId xmlns:a16="http://schemas.microsoft.com/office/drawing/2014/main" id="{205ACFA3-73BD-74CC-FAE6-299F34EC6716}"/>
+                <a16:creationId xmlns:a16="http://schemas.microsoft.com/office/drawing/2014/main" id="{D0C72D01-6D59-CC03-C521-71216C61ED07}"/>
               </a:ext>
             </a:extLst>
           </p:cNvPr>
@@ -20373,8 +20598,8 @@
         </p:nvSpPr>
         <p:spPr>
           <a:xfrm>
-            <a:off x="7030635" y="5159249"/>
-            <a:ext cx="3539104" cy="532083"/>
+            <a:off x="7477800" y="5159249"/>
+            <a:ext cx="3112946" cy="532083"/>
           </a:xfrm>
           <a:prstGeom prst="rect">
             <a:avLst/>
@@ -20408,7 +20633,7 @@
           <p:cNvPr id="11" name="source">
             <a:extLst>
               <a:ext uri="{FF2B5EF4-FFF2-40B4-BE49-F238E27FC236}">
-                <a16:creationId xmlns:a16="http://schemas.microsoft.com/office/drawing/2014/main" id="{28B9755E-10D4-49D1-762E-C0EEFE450130}"/>
+                <a16:creationId xmlns:a16="http://schemas.microsoft.com/office/drawing/2014/main" id="{3A97CCAD-9025-4140-6FE2-130602395244}"/>
               </a:ext>
             </a:extLst>
           </p:cNvPr>
@@ -20421,7 +20646,7 @@
         </p:nvSpPr>
         <p:spPr>
           <a:xfrm>
-            <a:off x="1024128" y="6004560"/>
+            <a:off x="2194560" y="6004560"/>
             <a:ext cx="1905000" cy="304800"/>
           </a:xfrm>
           <a:prstGeom prst="roundRect">
@@ -20463,7 +20688,7 @@
     </p:spTree>
     <p:extLst>
       <p:ext uri="{BB962C8B-B14F-4D97-AF65-F5344CB8AC3E}">
-        <p14:creationId xmlns:p14="http://schemas.microsoft.com/office/powerpoint/2010/main" val="1396047550"/>
+        <p14:creationId xmlns:p14="http://schemas.microsoft.com/office/powerpoint/2010/main" val="180695183"/>
       </p:ext>
     </p:extLst>
   </p:cSld>
@@ -20495,7 +20720,7 @@
           <p:cNvPr id="7" name="creative_background">
             <a:extLst>
               <a:ext uri="{FF2B5EF4-FFF2-40B4-BE49-F238E27FC236}">
-                <a16:creationId xmlns:a16="http://schemas.microsoft.com/office/drawing/2014/main" id="{D27567AE-E00A-C7E5-6008-6026E98324BF}"/>
+                <a16:creationId xmlns:a16="http://schemas.microsoft.com/office/drawing/2014/main" id="{CC987C7C-DC17-26D7-0D0E-2F22DC3765E6}"/>
               </a:ext>
             </a:extLst>
           </p:cNvPr>
@@ -20536,7 +20761,12 @@
             <p:ph type="title"/>
           </p:nvPr>
         </p:nvSpPr>
-        <p:spPr/>
+        <p:spPr>
+          <a:xfrm>
+            <a:off x="2194560" y="585216"/>
+            <a:ext cx="8547100" cy="1499616"/>
+          </a:xfrm>
+        </p:spPr>
         <p:txBody>
           <a:bodyPr/>
           <a:lstStyle>
@@ -20563,12 +20793,17 @@
             <p:ph type="dt" sz="half" idx="10"/>
           </p:nvPr>
         </p:nvSpPr>
-        <p:spPr/>
+        <p:spPr>
+          <a:xfrm>
+            <a:off x="2194560" y="6470704"/>
+            <a:ext cx="977900" cy="274320"/>
+          </a:xfrm>
+        </p:spPr>
         <p:txBody>
           <a:bodyPr/>
           <a:lstStyle/>
           <a:p>
-            <a:fld id="{5922C19E-7BE7-43A0-B17C-FD6B34B75143}" type="datetimeFigureOut">
+            <a:fld id="{4354DB14-F9AE-4C12-8CFE-33ABF7B568CC}" type="datetimeFigureOut">
               <a:rPr lang="en-US" smtClean="0"/>
               <a:t>10/3/2026</a:t>
             </a:fld>
@@ -20610,7 +20845,7 @@
           <a:bodyPr/>
           <a:lstStyle/>
           <a:p>
-            <a:fld id="{0DF0A140-DE23-4C37-9945-2DD700FC6B21}" type="slidenum">
+            <a:fld id="{74A457B9-11F0-4EFD-A461-9DC8C80A1D31}" type="slidenum">
               <a:rPr lang="en-US" smtClean="0"/>
               <a:t>‹#›</a:t>
             </a:fld>
@@ -20623,7 +20858,7 @@
           <p:cNvPr id="8" name="item_1_title">
             <a:extLst>
               <a:ext uri="{FF2B5EF4-FFF2-40B4-BE49-F238E27FC236}">
-                <a16:creationId xmlns:a16="http://schemas.microsoft.com/office/drawing/2014/main" id="{BA2D36BE-1B17-3B5E-17D9-F7F13D5D33F2}"/>
+                <a16:creationId xmlns:a16="http://schemas.microsoft.com/office/drawing/2014/main" id="{97F1100D-6B18-7785-92C4-97FA62CA76E6}"/>
               </a:ext>
             </a:extLst>
           </p:cNvPr>
@@ -20636,8 +20871,8 @@
         </p:nvSpPr>
         <p:spPr>
           <a:xfrm>
-            <a:off x="1198591" y="2472230"/>
-            <a:ext cx="2758175" cy="946795"/>
+            <a:off x="2348015" y="2472230"/>
+            <a:ext cx="2426052" cy="946795"/>
           </a:xfrm>
         </p:spPr>
         <p:txBody>
@@ -20673,7 +20908,7 @@
           <p:cNvPr id="9" name="item_1">
             <a:extLst>
               <a:ext uri="{FF2B5EF4-FFF2-40B4-BE49-F238E27FC236}">
-                <a16:creationId xmlns:a16="http://schemas.microsoft.com/office/drawing/2014/main" id="{E31F8D97-7252-9AFF-5C0B-3E26B53A75DF}"/>
+                <a16:creationId xmlns:a16="http://schemas.microsoft.com/office/drawing/2014/main" id="{4258EA6F-FFAA-8DEA-B1C6-0BA3C245C545}"/>
               </a:ext>
             </a:extLst>
           </p:cNvPr>
@@ -20686,8 +20921,8 @@
         </p:nvSpPr>
         <p:spPr>
           <a:xfrm>
-            <a:off x="1198592" y="3419025"/>
-            <a:ext cx="2758175" cy="2272307"/>
+            <a:off x="2348015" y="3419025"/>
+            <a:ext cx="2426052" cy="2272307"/>
           </a:xfrm>
           <a:prstGeom prst="rect">
             <a:avLst/>
@@ -20721,7 +20956,7 @@
           <p:cNvPr id="10" name="item_2_title">
             <a:extLst>
               <a:ext uri="{FF2B5EF4-FFF2-40B4-BE49-F238E27FC236}">
-                <a16:creationId xmlns:a16="http://schemas.microsoft.com/office/drawing/2014/main" id="{4DEE4A27-EB81-8841-6931-FBFF05FEF0E2}"/>
+                <a16:creationId xmlns:a16="http://schemas.microsoft.com/office/drawing/2014/main" id="{9995D3D1-B88D-F9EF-1ED3-F425916AE495}"/>
               </a:ext>
             </a:extLst>
           </p:cNvPr>
@@ -20734,8 +20969,8 @@
         </p:nvSpPr>
         <p:spPr>
           <a:xfrm>
-            <a:off x="4505078" y="2472230"/>
-            <a:ext cx="2758175" cy="946795"/>
+            <a:off x="5256355" y="2472230"/>
+            <a:ext cx="2426052" cy="946795"/>
           </a:xfrm>
           <a:prstGeom prst="rect">
             <a:avLst/>
@@ -20774,7 +21009,7 @@
           <p:cNvPr id="11" name="item_2">
             <a:extLst>
               <a:ext uri="{FF2B5EF4-FFF2-40B4-BE49-F238E27FC236}">
-                <a16:creationId xmlns:a16="http://schemas.microsoft.com/office/drawing/2014/main" id="{B5F8142D-CA50-5729-4007-6844839F72F5}"/>
+                <a16:creationId xmlns:a16="http://schemas.microsoft.com/office/drawing/2014/main" id="{57A59C9A-CA45-033D-91CF-0A7CDA5BC03B}"/>
               </a:ext>
             </a:extLst>
           </p:cNvPr>
@@ -20787,8 +21022,8 @@
         </p:nvSpPr>
         <p:spPr>
           <a:xfrm>
-            <a:off x="4505078" y="3419025"/>
-            <a:ext cx="2758175" cy="2272307"/>
+            <a:off x="5256355" y="3419025"/>
+            <a:ext cx="2426052" cy="2272307"/>
           </a:xfrm>
           <a:prstGeom prst="rect">
             <a:avLst/>
@@ -20822,7 +21057,7 @@
           <p:cNvPr id="12" name="item_3_title">
             <a:extLst>
               <a:ext uri="{FF2B5EF4-FFF2-40B4-BE49-F238E27FC236}">
-                <a16:creationId xmlns:a16="http://schemas.microsoft.com/office/drawing/2014/main" id="{07777DED-BEA6-5A12-8ECD-EBF199389310}"/>
+                <a16:creationId xmlns:a16="http://schemas.microsoft.com/office/drawing/2014/main" id="{59C4438D-E949-516D-9AEF-5492DE9DC7A9}"/>
               </a:ext>
             </a:extLst>
           </p:cNvPr>
@@ -20835,8 +21070,8 @@
         </p:nvSpPr>
         <p:spPr>
           <a:xfrm>
-            <a:off x="7811565" y="2472230"/>
-            <a:ext cx="2758175" cy="946795"/>
+            <a:off x="8164694" y="2472230"/>
+            <a:ext cx="2426052" cy="946795"/>
           </a:xfrm>
           <a:prstGeom prst="rect">
             <a:avLst/>
@@ -20875,7 +21110,7 @@
           <p:cNvPr id="13" name="item_3">
             <a:extLst>
               <a:ext uri="{FF2B5EF4-FFF2-40B4-BE49-F238E27FC236}">
-                <a16:creationId xmlns:a16="http://schemas.microsoft.com/office/drawing/2014/main" id="{6494DEBD-2B72-DE11-CCA3-A8C1F6DB68A4}"/>
+                <a16:creationId xmlns:a16="http://schemas.microsoft.com/office/drawing/2014/main" id="{C0426524-E52B-9B68-ED94-8533ACA7B81E}"/>
               </a:ext>
             </a:extLst>
           </p:cNvPr>
@@ -20888,8 +21123,8 @@
         </p:nvSpPr>
         <p:spPr>
           <a:xfrm>
-            <a:off x="7811565" y="3419025"/>
-            <a:ext cx="2758175" cy="2272307"/>
+            <a:off x="8164694" y="3419025"/>
+            <a:ext cx="2426052" cy="2272307"/>
           </a:xfrm>
           <a:prstGeom prst="rect">
             <a:avLst/>
@@ -20923,7 +21158,7 @@
           <p:cNvPr id="14" name="source">
             <a:extLst>
               <a:ext uri="{FF2B5EF4-FFF2-40B4-BE49-F238E27FC236}">
-                <a16:creationId xmlns:a16="http://schemas.microsoft.com/office/drawing/2014/main" id="{4A24024B-6583-8B5C-6443-9C9AEB01FA57}"/>
+                <a16:creationId xmlns:a16="http://schemas.microsoft.com/office/drawing/2014/main" id="{3DD54B3B-437E-4E67-3D99-6E99E70B1AC7}"/>
               </a:ext>
             </a:extLst>
           </p:cNvPr>
@@ -20936,7 +21171,7 @@
         </p:nvSpPr>
         <p:spPr>
           <a:xfrm>
-            <a:off x="1024128" y="6004560"/>
+            <a:off x="2194560" y="6004560"/>
             <a:ext cx="1905000" cy="304800"/>
           </a:xfrm>
           <a:prstGeom prst="roundRect">
@@ -20978,7 +21213,7 @@
     </p:spTree>
     <p:extLst>
       <p:ext uri="{BB962C8B-B14F-4D97-AF65-F5344CB8AC3E}">
-        <p14:creationId xmlns:p14="http://schemas.microsoft.com/office/powerpoint/2010/main" val="2939894100"/>
+        <p14:creationId xmlns:p14="http://schemas.microsoft.com/office/powerpoint/2010/main" val="279924822"/>
       </p:ext>
     </p:extLst>
   </p:cSld>
@@ -21010,7 +21245,7 @@
           <p:cNvPr id="7" name="creative_background">
             <a:extLst>
               <a:ext uri="{FF2B5EF4-FFF2-40B4-BE49-F238E27FC236}">
-                <a16:creationId xmlns:a16="http://schemas.microsoft.com/office/drawing/2014/main" id="{03B92824-BA83-5666-3686-61BB03A8C483}"/>
+                <a16:creationId xmlns:a16="http://schemas.microsoft.com/office/drawing/2014/main" id="{AFE953E2-B28F-6E01-677F-7D035A04E7FB}"/>
               </a:ext>
             </a:extLst>
           </p:cNvPr>
@@ -21051,7 +21286,12 @@
             <p:ph type="title"/>
           </p:nvPr>
         </p:nvSpPr>
-        <p:spPr/>
+        <p:spPr>
+          <a:xfrm>
+            <a:off x="2194560" y="585216"/>
+            <a:ext cx="8547100" cy="1499616"/>
+          </a:xfrm>
+        </p:spPr>
         <p:txBody>
           <a:bodyPr/>
           <a:lstStyle>
@@ -21078,12 +21318,17 @@
             <p:ph type="dt" sz="half" idx="10"/>
           </p:nvPr>
         </p:nvSpPr>
-        <p:spPr/>
+        <p:spPr>
+          <a:xfrm>
+            <a:off x="2194560" y="6470704"/>
+            <a:ext cx="977900" cy="274320"/>
+          </a:xfrm>
+        </p:spPr>
         <p:txBody>
           <a:bodyPr/>
           <a:lstStyle/>
           <a:p>
-            <a:fld id="{5922C19E-7BE7-43A0-B17C-FD6B34B75143}" type="datetimeFigureOut">
+            <a:fld id="{4354DB14-F9AE-4C12-8CFE-33ABF7B568CC}" type="datetimeFigureOut">
               <a:rPr lang="en-US" smtClean="0"/>
               <a:t>10/3/2026</a:t>
             </a:fld>
@@ -21125,7 +21370,7 @@
           <a:bodyPr/>
           <a:lstStyle/>
           <a:p>
-            <a:fld id="{0DF0A140-DE23-4C37-9945-2DD700FC6B21}" type="slidenum">
+            <a:fld id="{74A457B9-11F0-4EFD-A461-9DC8C80A1D31}" type="slidenum">
               <a:rPr lang="en-US" smtClean="0"/>
               <a:t>‹#›</a:t>
             </a:fld>
@@ -21138,7 +21383,7 @@
           <p:cNvPr id="8" name="item_1_title">
             <a:extLst>
               <a:ext uri="{FF2B5EF4-FFF2-40B4-BE49-F238E27FC236}">
-                <a16:creationId xmlns:a16="http://schemas.microsoft.com/office/drawing/2014/main" id="{4495A108-2E96-F92C-C60F-7A55E905C79D}"/>
+                <a16:creationId xmlns:a16="http://schemas.microsoft.com/office/drawing/2014/main" id="{A12324F2-1FB6-101B-7372-B130D78F6437}"/>
               </a:ext>
             </a:extLst>
           </p:cNvPr>
@@ -21151,8 +21396,8 @@
         </p:nvSpPr>
         <p:spPr>
           <a:xfrm>
-            <a:off x="1198591" y="2472230"/>
-            <a:ext cx="4411418" cy="946795"/>
+            <a:off x="2348015" y="2472230"/>
+            <a:ext cx="3880222" cy="946795"/>
           </a:xfrm>
         </p:spPr>
         <p:txBody>
@@ -21188,7 +21433,7 @@
           <p:cNvPr id="9" name="item_1">
             <a:extLst>
               <a:ext uri="{FF2B5EF4-FFF2-40B4-BE49-F238E27FC236}">
-                <a16:creationId xmlns:a16="http://schemas.microsoft.com/office/drawing/2014/main" id="{8B9ABE5D-FA98-A49B-C52C-4339773682DB}"/>
+                <a16:creationId xmlns:a16="http://schemas.microsoft.com/office/drawing/2014/main" id="{C23E9021-42E5-C1E2-7657-9B8807BC5A62}"/>
               </a:ext>
             </a:extLst>
           </p:cNvPr>
@@ -21201,8 +21446,8 @@
         </p:nvSpPr>
         <p:spPr>
           <a:xfrm>
-            <a:off x="1198591" y="3419025"/>
-            <a:ext cx="4411418" cy="2272307"/>
+            <a:off x="2348015" y="3419025"/>
+            <a:ext cx="3880222" cy="2272307"/>
           </a:xfrm>
           <a:prstGeom prst="rect">
             <a:avLst/>
@@ -21236,7 +21481,7 @@
           <p:cNvPr id="10" name="item_2_title">
             <a:extLst>
               <a:ext uri="{FF2B5EF4-FFF2-40B4-BE49-F238E27FC236}">
-                <a16:creationId xmlns:a16="http://schemas.microsoft.com/office/drawing/2014/main" id="{F4E2A5ED-5953-94BD-D1BC-CC7455692D1D}"/>
+                <a16:creationId xmlns:a16="http://schemas.microsoft.com/office/drawing/2014/main" id="{CCFB2E86-6F18-F3C2-6286-219FEA7A898B}"/>
               </a:ext>
             </a:extLst>
           </p:cNvPr>
@@ -21249,8 +21494,8 @@
         </p:nvSpPr>
         <p:spPr>
           <a:xfrm>
-            <a:off x="6158321" y="2472230"/>
-            <a:ext cx="4411418" cy="946795"/>
+            <a:off x="6710525" y="2472230"/>
+            <a:ext cx="3880222" cy="946795"/>
           </a:xfrm>
           <a:prstGeom prst="rect">
             <a:avLst/>
@@ -21289,7 +21534,7 @@
           <p:cNvPr id="11" name="item_2">
             <a:extLst>
               <a:ext uri="{FF2B5EF4-FFF2-40B4-BE49-F238E27FC236}">
-                <a16:creationId xmlns:a16="http://schemas.microsoft.com/office/drawing/2014/main" id="{063802AB-78E7-348E-C76C-E67831D64B91}"/>
+                <a16:creationId xmlns:a16="http://schemas.microsoft.com/office/drawing/2014/main" id="{FB5C05CD-C30F-9C17-A40F-06E3A5D4C308}"/>
               </a:ext>
             </a:extLst>
           </p:cNvPr>
@@ -21302,8 +21547,8 @@
         </p:nvSpPr>
         <p:spPr>
           <a:xfrm>
-            <a:off x="6158321" y="3419025"/>
-            <a:ext cx="4411418" cy="2272307"/>
+            <a:off x="6710525" y="3419025"/>
+            <a:ext cx="3880222" cy="2272307"/>
           </a:xfrm>
           <a:prstGeom prst="rect">
             <a:avLst/>
@@ -21337,7 +21582,7 @@
           <p:cNvPr id="12" name="source">
             <a:extLst>
               <a:ext uri="{FF2B5EF4-FFF2-40B4-BE49-F238E27FC236}">
-                <a16:creationId xmlns:a16="http://schemas.microsoft.com/office/drawing/2014/main" id="{C9F85CFA-6946-65CC-E440-2C8A2E1EC537}"/>
+                <a16:creationId xmlns:a16="http://schemas.microsoft.com/office/drawing/2014/main" id="{2F80D207-83B6-D234-1B45-7248E6D89924}"/>
               </a:ext>
             </a:extLst>
           </p:cNvPr>
@@ -21350,7 +21595,7 @@
         </p:nvSpPr>
         <p:spPr>
           <a:xfrm>
-            <a:off x="1024128" y="6004560"/>
+            <a:off x="2194560" y="6004560"/>
             <a:ext cx="1905000" cy="304800"/>
           </a:xfrm>
           <a:prstGeom prst="roundRect">
@@ -21392,7 +21637,7 @@
     </p:spTree>
     <p:extLst>
       <p:ext uri="{BB962C8B-B14F-4D97-AF65-F5344CB8AC3E}">
-        <p14:creationId xmlns:p14="http://schemas.microsoft.com/office/powerpoint/2010/main" val="1196195882"/>
+        <p14:creationId xmlns:p14="http://schemas.microsoft.com/office/powerpoint/2010/main" val="3862557689"/>
       </p:ext>
     </p:extLst>
   </p:cSld>
@@ -21424,7 +21669,7 @@
           <p:cNvPr id="7" name="creative_background">
             <a:extLst>
               <a:ext uri="{FF2B5EF4-FFF2-40B4-BE49-F238E27FC236}">
-                <a16:creationId xmlns:a16="http://schemas.microsoft.com/office/drawing/2014/main" id="{AA0157AE-BB68-89DF-8FD1-EAF6C8B84B6D}"/>
+                <a16:creationId xmlns:a16="http://schemas.microsoft.com/office/drawing/2014/main" id="{5944CC0A-BE2D-0125-D883-D9F468A22601}"/>
               </a:ext>
             </a:extLst>
           </p:cNvPr>
@@ -21465,7 +21710,12 @@
             <p:ph type="title"/>
           </p:nvPr>
         </p:nvSpPr>
-        <p:spPr/>
+        <p:spPr>
+          <a:xfrm>
+            <a:off x="2194560" y="585216"/>
+            <a:ext cx="8547100" cy="1499616"/>
+          </a:xfrm>
+        </p:spPr>
         <p:txBody>
           <a:bodyPr/>
           <a:lstStyle>
@@ -21492,12 +21742,17 @@
             <p:ph type="dt" sz="half" idx="10"/>
           </p:nvPr>
         </p:nvSpPr>
-        <p:spPr/>
+        <p:spPr>
+          <a:xfrm>
+            <a:off x="2194560" y="6470704"/>
+            <a:ext cx="977900" cy="274320"/>
+          </a:xfrm>
+        </p:spPr>
         <p:txBody>
           <a:bodyPr/>
           <a:lstStyle/>
           <a:p>
-            <a:fld id="{5922C19E-7BE7-43A0-B17C-FD6B34B75143}" type="datetimeFigureOut">
+            <a:fld id="{4354DB14-F9AE-4C12-8CFE-33ABF7B568CC}" type="datetimeFigureOut">
               <a:rPr lang="en-US" smtClean="0"/>
               <a:t>10/3/2026</a:t>
             </a:fld>
@@ -21539,7 +21794,7 @@
           <a:bodyPr/>
           <a:lstStyle/>
           <a:p>
-            <a:fld id="{0DF0A140-DE23-4C37-9945-2DD700FC6B21}" type="slidenum">
+            <a:fld id="{74A457B9-11F0-4EFD-A461-9DC8C80A1D31}" type="slidenum">
               <a:rPr lang="en-US" smtClean="0"/>
               <a:t>‹#›</a:t>
             </a:fld>
@@ -21552,7 +21807,7 @@
           <p:cNvPr id="8" name="chart">
             <a:extLst>
               <a:ext uri="{FF2B5EF4-FFF2-40B4-BE49-F238E27FC236}">
-                <a16:creationId xmlns:a16="http://schemas.microsoft.com/office/drawing/2014/main" id="{21DDA81B-49F2-C31F-DF1E-BE580427AAA1}"/>
+                <a16:creationId xmlns:a16="http://schemas.microsoft.com/office/drawing/2014/main" id="{3F5A4ADC-8692-DBD3-A336-DD45254BF883}"/>
               </a:ext>
             </a:extLst>
           </p:cNvPr>
@@ -21565,8 +21820,8 @@
         </p:nvSpPr>
         <p:spPr>
           <a:xfrm>
-            <a:off x="1024128" y="2286000"/>
-            <a:ext cx="6804051" cy="3591560"/>
+            <a:off x="2194560" y="2286000"/>
+            <a:ext cx="5984749" cy="3591560"/>
           </a:xfrm>
         </p:spPr>
         <p:txBody>
@@ -21582,7 +21837,7 @@
           <p:cNvPr id="9" name="body">
             <a:extLst>
               <a:ext uri="{FF2B5EF4-FFF2-40B4-BE49-F238E27FC236}">
-                <a16:creationId xmlns:a16="http://schemas.microsoft.com/office/drawing/2014/main" id="{7FAA41EB-769A-B278-3F95-74CB221D6C23}"/>
+                <a16:creationId xmlns:a16="http://schemas.microsoft.com/office/drawing/2014/main" id="{ECEF18E4-5639-8D72-C5A7-F90351D8AA50}"/>
               </a:ext>
             </a:extLst>
           </p:cNvPr>
@@ -21595,8 +21850,8 @@
         </p:nvSpPr>
         <p:spPr>
           <a:xfrm>
-            <a:off x="8216983" y="2429663"/>
-            <a:ext cx="2527219" cy="3304235"/>
+            <a:off x="8521296" y="2429663"/>
+            <a:ext cx="2222907" cy="3304235"/>
           </a:xfrm>
           <a:prstGeom prst="rect">
             <a:avLst/>
@@ -21625,7 +21880,7 @@
           <p:cNvPr id="10" name="source">
             <a:extLst>
               <a:ext uri="{FF2B5EF4-FFF2-40B4-BE49-F238E27FC236}">
-                <a16:creationId xmlns:a16="http://schemas.microsoft.com/office/drawing/2014/main" id="{148D16E7-47E4-08DC-E178-04D4FB8B45BB}"/>
+                <a16:creationId xmlns:a16="http://schemas.microsoft.com/office/drawing/2014/main" id="{EA04BC84-9AA8-23F2-6310-E152729DD5EE}"/>
               </a:ext>
             </a:extLst>
           </p:cNvPr>
@@ -21638,7 +21893,7 @@
         </p:nvSpPr>
         <p:spPr>
           <a:xfrm>
-            <a:off x="1024128" y="6004560"/>
+            <a:off x="2194560" y="6004560"/>
             <a:ext cx="1905000" cy="304800"/>
           </a:xfrm>
           <a:prstGeom prst="roundRect">
@@ -21680,7 +21935,7 @@
     </p:spTree>
     <p:extLst>
       <p:ext uri="{BB962C8B-B14F-4D97-AF65-F5344CB8AC3E}">
-        <p14:creationId xmlns:p14="http://schemas.microsoft.com/office/powerpoint/2010/main" val="2691165501"/>
+        <p14:creationId xmlns:p14="http://schemas.microsoft.com/office/powerpoint/2010/main" val="2931113903"/>
       </p:ext>
     </p:extLst>
   </p:cSld>
@@ -21712,7 +21967,7 @@
           <p:cNvPr id="7" name="creative_background">
             <a:extLst>
               <a:ext uri="{FF2B5EF4-FFF2-40B4-BE49-F238E27FC236}">
-                <a16:creationId xmlns:a16="http://schemas.microsoft.com/office/drawing/2014/main" id="{68E76577-1BBC-7261-6A01-3A449D7660A3}"/>
+                <a16:creationId xmlns:a16="http://schemas.microsoft.com/office/drawing/2014/main" id="{F4C1BD5F-7D13-DA17-E757-15D91344EFB1}"/>
               </a:ext>
             </a:extLst>
           </p:cNvPr>
@@ -21753,7 +22008,12 @@
             <p:ph type="title"/>
           </p:nvPr>
         </p:nvSpPr>
-        <p:spPr/>
+        <p:spPr>
+          <a:xfrm>
+            <a:off x="2194560" y="585216"/>
+            <a:ext cx="8547100" cy="1499616"/>
+          </a:xfrm>
+        </p:spPr>
         <p:txBody>
           <a:bodyPr/>
           <a:lstStyle>
@@ -21780,12 +22040,17 @@
             <p:ph type="dt" sz="half" idx="10"/>
           </p:nvPr>
         </p:nvSpPr>
-        <p:spPr/>
+        <p:spPr>
+          <a:xfrm>
+            <a:off x="2194560" y="6470704"/>
+            <a:ext cx="977900" cy="274320"/>
+          </a:xfrm>
+        </p:spPr>
         <p:txBody>
           <a:bodyPr/>
           <a:lstStyle/>
           <a:p>
-            <a:fld id="{5922C19E-7BE7-43A0-B17C-FD6B34B75143}" type="datetimeFigureOut">
+            <a:fld id="{4354DB14-F9AE-4C12-8CFE-33ABF7B568CC}" type="datetimeFigureOut">
               <a:rPr lang="en-US" smtClean="0"/>
               <a:t>10/3/2026</a:t>
             </a:fld>
@@ -21827,7 +22092,7 @@
           <a:bodyPr/>
           <a:lstStyle/>
           <a:p>
-            <a:fld id="{0DF0A140-DE23-4C37-9945-2DD700FC6B21}" type="slidenum">
+            <a:fld id="{74A457B9-11F0-4EFD-A461-9DC8C80A1D31}" type="slidenum">
               <a:rPr lang="en-US" smtClean="0"/>
               <a:t>‹#›</a:t>
             </a:fld>
@@ -21840,7 +22105,7 @@
           <p:cNvPr id="8" name="item_1_title">
             <a:extLst>
               <a:ext uri="{FF2B5EF4-FFF2-40B4-BE49-F238E27FC236}">
-                <a16:creationId xmlns:a16="http://schemas.microsoft.com/office/drawing/2014/main" id="{430A7AE6-8D8E-7159-0802-53F17BDE74D2}"/>
+                <a16:creationId xmlns:a16="http://schemas.microsoft.com/office/drawing/2014/main" id="{34122AE7-8360-2C22-9FB8-021AF412A174}"/>
               </a:ext>
             </a:extLst>
           </p:cNvPr>
@@ -21853,8 +22118,8 @@
         </p:nvSpPr>
         <p:spPr>
           <a:xfrm>
-            <a:off x="1198591" y="2472230"/>
-            <a:ext cx="4411418" cy="387325"/>
+            <a:off x="2348015" y="2472230"/>
+            <a:ext cx="3880222" cy="387325"/>
           </a:xfrm>
         </p:spPr>
         <p:txBody>
@@ -21890,7 +22155,7 @@
           <p:cNvPr id="9" name="item_1">
             <a:extLst>
               <a:ext uri="{FF2B5EF4-FFF2-40B4-BE49-F238E27FC236}">
-                <a16:creationId xmlns:a16="http://schemas.microsoft.com/office/drawing/2014/main" id="{0224E3DC-2850-3FB8-3A0B-381C6626ADD5}"/>
+                <a16:creationId xmlns:a16="http://schemas.microsoft.com/office/drawing/2014/main" id="{8FD5EFEB-AD3C-B4CA-C4A3-B3B30895B0D5}"/>
               </a:ext>
             </a:extLst>
           </p:cNvPr>
@@ -21903,8 +22168,8 @@
         </p:nvSpPr>
         <p:spPr>
           <a:xfrm>
-            <a:off x="1198591" y="2859554"/>
-            <a:ext cx="4411418" cy="929580"/>
+            <a:off x="2348015" y="2859554"/>
+            <a:ext cx="3880222" cy="929580"/>
           </a:xfrm>
           <a:prstGeom prst="rect">
             <a:avLst/>
@@ -21938,7 +22203,7 @@
           <p:cNvPr id="10" name="item_2_title">
             <a:extLst>
               <a:ext uri="{FF2B5EF4-FFF2-40B4-BE49-F238E27FC236}">
-                <a16:creationId xmlns:a16="http://schemas.microsoft.com/office/drawing/2014/main" id="{E1DB8A88-FA0D-512A-1C92-06803FE42509}"/>
+                <a16:creationId xmlns:a16="http://schemas.microsoft.com/office/drawing/2014/main" id="{90667074-45DB-404B-2560-4652204E588D}"/>
               </a:ext>
             </a:extLst>
           </p:cNvPr>
@@ -21951,8 +22216,8 @@
         </p:nvSpPr>
         <p:spPr>
           <a:xfrm>
-            <a:off x="6158321" y="2472230"/>
-            <a:ext cx="4411418" cy="387325"/>
+            <a:off x="6710525" y="2472230"/>
+            <a:ext cx="3880222" cy="387325"/>
           </a:xfrm>
           <a:prstGeom prst="rect">
             <a:avLst/>
@@ -21991,7 +22256,7 @@
           <p:cNvPr id="11" name="item_2">
             <a:extLst>
               <a:ext uri="{FF2B5EF4-FFF2-40B4-BE49-F238E27FC236}">
-                <a16:creationId xmlns:a16="http://schemas.microsoft.com/office/drawing/2014/main" id="{4891DD7C-7179-4DD1-7BF9-C8A0CCBECC67}"/>
+                <a16:creationId xmlns:a16="http://schemas.microsoft.com/office/drawing/2014/main" id="{CD51FA82-2A4D-6094-043B-E6C0D1DB0ED2}"/>
               </a:ext>
             </a:extLst>
           </p:cNvPr>
@@ -22004,8 +22269,8 @@
         </p:nvSpPr>
         <p:spPr>
           <a:xfrm>
-            <a:off x="6158321" y="2859554"/>
-            <a:ext cx="4411418" cy="929580"/>
+            <a:off x="6710525" y="2859554"/>
+            <a:ext cx="3880222" cy="929580"/>
           </a:xfrm>
           <a:prstGeom prst="rect">
             <a:avLst/>
@@ -22039,7 +22304,7 @@
           <p:cNvPr id="12" name="item_3_title">
             <a:extLst>
               <a:ext uri="{FF2B5EF4-FFF2-40B4-BE49-F238E27FC236}">
-                <a16:creationId xmlns:a16="http://schemas.microsoft.com/office/drawing/2014/main" id="{B8D1787E-6A71-6691-8347-E6B95FCF8A29}"/>
+                <a16:creationId xmlns:a16="http://schemas.microsoft.com/office/drawing/2014/main" id="{14CFEE38-A269-538D-6067-A0C98D56C73F}"/>
               </a:ext>
             </a:extLst>
           </p:cNvPr>
@@ -22052,8 +22317,8 @@
         </p:nvSpPr>
         <p:spPr>
           <a:xfrm>
-            <a:off x="1198591" y="4374427"/>
-            <a:ext cx="4411418" cy="387325"/>
+            <a:off x="2348015" y="4374427"/>
+            <a:ext cx="3880222" cy="387325"/>
           </a:xfrm>
           <a:prstGeom prst="rect">
             <a:avLst/>
@@ -22092,7 +22357,7 @@
           <p:cNvPr id="13" name="item_3">
             <a:extLst>
               <a:ext uri="{FF2B5EF4-FFF2-40B4-BE49-F238E27FC236}">
-                <a16:creationId xmlns:a16="http://schemas.microsoft.com/office/drawing/2014/main" id="{B58124A2-B8EC-3516-8644-76466409BC5A}"/>
+                <a16:creationId xmlns:a16="http://schemas.microsoft.com/office/drawing/2014/main" id="{DA4BA553-8EF4-A444-1314-6BC3ABDE3125}"/>
               </a:ext>
             </a:extLst>
           </p:cNvPr>
@@ -22105,8 +22370,8 @@
         </p:nvSpPr>
         <p:spPr>
           <a:xfrm>
-            <a:off x="1198591" y="4761750"/>
-            <a:ext cx="4411418" cy="929580"/>
+            <a:off x="2348015" y="4761750"/>
+            <a:ext cx="3880222" cy="929580"/>
           </a:xfrm>
           <a:prstGeom prst="rect">
             <a:avLst/>
@@ -22140,7 +22405,7 @@
           <p:cNvPr id="14" name="item_4_title">
             <a:extLst>
               <a:ext uri="{FF2B5EF4-FFF2-40B4-BE49-F238E27FC236}">
-                <a16:creationId xmlns:a16="http://schemas.microsoft.com/office/drawing/2014/main" id="{7BDB3081-011E-B43D-4FD6-B7C685FA9220}"/>
+                <a16:creationId xmlns:a16="http://schemas.microsoft.com/office/drawing/2014/main" id="{2584A2F2-2411-1E97-989D-7377CA3F1041}"/>
               </a:ext>
             </a:extLst>
           </p:cNvPr>
@@ -22153,8 +22418,8 @@
         </p:nvSpPr>
         <p:spPr>
           <a:xfrm>
-            <a:off x="6158321" y="4374427"/>
-            <a:ext cx="4411418" cy="387325"/>
+            <a:off x="6710525" y="4374427"/>
+            <a:ext cx="3880222" cy="387325"/>
           </a:xfrm>
           <a:prstGeom prst="rect">
             <a:avLst/>
@@ -22193,7 +22458,7 @@
           <p:cNvPr id="15" name="item_4">
             <a:extLst>
               <a:ext uri="{FF2B5EF4-FFF2-40B4-BE49-F238E27FC236}">
-                <a16:creationId xmlns:a16="http://schemas.microsoft.com/office/drawing/2014/main" id="{A3D3C419-AB32-B4E5-4912-27ADD834AB6A}"/>
+                <a16:creationId xmlns:a16="http://schemas.microsoft.com/office/drawing/2014/main" id="{660D87C9-409D-41FC-6F95-03515B718B7B}"/>
               </a:ext>
             </a:extLst>
           </p:cNvPr>
@@ -22206,8 +22471,8 @@
         </p:nvSpPr>
         <p:spPr>
           <a:xfrm>
-            <a:off x="6158321" y="4761750"/>
-            <a:ext cx="4411418" cy="929580"/>
+            <a:off x="6710525" y="4761750"/>
+            <a:ext cx="3880222" cy="929580"/>
           </a:xfrm>
           <a:prstGeom prst="rect">
             <a:avLst/>
@@ -22241,7 +22506,7 @@
           <p:cNvPr id="16" name="source">
             <a:extLst>
               <a:ext uri="{FF2B5EF4-FFF2-40B4-BE49-F238E27FC236}">
-                <a16:creationId xmlns:a16="http://schemas.microsoft.com/office/drawing/2014/main" id="{6393625B-F170-CD5A-99F9-D68F19F576E1}"/>
+                <a16:creationId xmlns:a16="http://schemas.microsoft.com/office/drawing/2014/main" id="{890280A6-3689-0F02-2AAB-8809715EF297}"/>
               </a:ext>
             </a:extLst>
           </p:cNvPr>
@@ -22254,7 +22519,7 @@
         </p:nvSpPr>
         <p:spPr>
           <a:xfrm>
-            <a:off x="1024128" y="6004560"/>
+            <a:off x="2194560" y="6004560"/>
             <a:ext cx="1905000" cy="304800"/>
           </a:xfrm>
           <a:prstGeom prst="roundRect">
@@ -22296,7 +22561,7 @@
     </p:spTree>
     <p:extLst>
       <p:ext uri="{BB962C8B-B14F-4D97-AF65-F5344CB8AC3E}">
-        <p14:creationId xmlns:p14="http://schemas.microsoft.com/office/powerpoint/2010/main" val="1993002924"/>
+        <p14:creationId xmlns:p14="http://schemas.microsoft.com/office/powerpoint/2010/main" val="1771250427"/>
       </p:ext>
     </p:extLst>
   </p:cSld>
@@ -22333,7 +22598,7 @@
           <p:cNvPr id="9" name="creative_background_master">
             <a:extLst>
               <a:ext uri="{FF2B5EF4-FFF2-40B4-BE49-F238E27FC236}">
-                <a16:creationId xmlns:a16="http://schemas.microsoft.com/office/drawing/2014/main" id="{4C0AC486-F7F7-5592-703C-ADFE6AC8B164}"/>
+                <a16:creationId xmlns:a16="http://schemas.microsoft.com/office/drawing/2014/main" id="{C4851DB9-691F-A709-A044-0F355536F06D}"/>
               </a:ext>
             </a:extLst>
           </p:cNvPr>
@@ -22494,7 +22759,7 @@
             </a:lvl1pPr>
           </a:lstStyle>
           <a:p>
-            <a:fld id="{5922C19E-7BE7-43A0-B17C-FD6B34B75143}" type="datetimeFigureOut">
+            <a:fld id="{4354DB14-F9AE-4C12-8CFE-33ABF7B568CC}" type="datetimeFigureOut">
               <a:rPr lang="en-US" smtClean="0"/>
               <a:t>10/3/2026</a:t>
             </a:fld>
@@ -22576,7 +22841,7 @@
             </a:lvl1pPr>
           </a:lstStyle>
           <a:p>
-            <a:fld id="{0DF0A140-DE23-4C37-9945-2DD700FC6B21}" type="slidenum">
+            <a:fld id="{74A457B9-11F0-4EFD-A461-9DC8C80A1D31}" type="slidenum">
               <a:rPr lang="en-US" smtClean="0"/>
               <a:t>‹#›</a:t>
             </a:fld>
@@ -22587,7 +22852,7 @@
     </p:spTree>
     <p:extLst>
       <p:ext uri="{BB962C8B-B14F-4D97-AF65-F5344CB8AC3E}">
-        <p14:creationId xmlns:p14="http://schemas.microsoft.com/office/powerpoint/2010/main" val="3922056461"/>
+        <p14:creationId xmlns:p14="http://schemas.microsoft.com/office/powerpoint/2010/main" val="4108617433"/>
       </p:ext>
     </p:extLst>
   </p:cSld>
@@ -22980,10 +23245,10 @@
         <a:srgbClr val="E7E8E8"/>
       </a:lt2>
       <a:accent1>
-        <a:srgbClr val="976716"/>
+        <a:srgbClr val="1555A2"/>
       </a:accent1>
       <a:accent2>
-        <a:srgbClr val="1555A2"/>
+        <a:srgbClr val="BF810F"/>
       </a:accent2>
       <a:accent3>
         <a:srgbClr val="455161"/>
@@ -22992,7 +23257,7 @@
         <a:srgbClr val="1555A2"/>
       </a:accent4>
       <a:accent5>
-        <a:srgbClr val="976716"/>
+        <a:srgbClr val="1555A2"/>
       </a:accent5>
       <a:accent6>
         <a:srgbClr val="455161"/>

--- a/design/templates/mashrabiya-cobalt/template.pptx
+++ b/design/templates/mashrabiya-cobalt/template.pptx
@@ -126,7 +126,7 @@
           <p:cNvPr id="9" name="creative_background">
             <a:extLst>
               <a:ext uri="{FF2B5EF4-FFF2-40B4-BE49-F238E27FC236}">
-                <a16:creationId xmlns:a16="http://schemas.microsoft.com/office/drawing/2014/main" id="{9CCEB1B4-2324-497C-F3EF-3C43BBA101A1}"/>
+                <a16:creationId xmlns:a16="http://schemas.microsoft.com/office/drawing/2014/main" id="{21B7ADFD-D32C-8F8C-C75E-FB46949A2D7B}"/>
               </a:ext>
             </a:extLst>
           </p:cNvPr>
@@ -295,9 +295,9 @@
             </a:lvl1pPr>
           </a:lstStyle>
           <a:p>
-            <a:fld id="{4354DB14-F9AE-4C12-8CFE-33ABF7B568CC}" type="datetimeFigureOut">
+            <a:fld id="{69C9F4DC-D411-4651-9AAC-29900672A9A6}" type="datetimeFigureOut">
               <a:rPr lang="en-US" smtClean="0"/>
-              <a:t>10/3/2026</a:t>
+              <a:t>10/4/2026</a:t>
             </a:fld>
             <a:endParaRPr lang="en-US"/>
           </a:p>
@@ -337,7 +337,7 @@
           <a:bodyPr/>
           <a:lstStyle/>
           <a:p>
-            <a:fld id="{74A457B9-11F0-4EFD-A461-9DC8C80A1D31}" type="slidenum">
+            <a:fld id="{B2681015-3E44-49AF-A930-B36E5E8634EC}" type="slidenum">
               <a:rPr lang="en-US" smtClean="0"/>
               <a:t>‹#›</a:t>
             </a:fld>
@@ -348,7 +348,7 @@
     </p:spTree>
     <p:extLst>
       <p:ext uri="{BB962C8B-B14F-4D97-AF65-F5344CB8AC3E}">
-        <p14:creationId xmlns:p14="http://schemas.microsoft.com/office/powerpoint/2010/main" val="3590467076"/>
+        <p14:creationId xmlns:p14="http://schemas.microsoft.com/office/powerpoint/2010/main" val="626375373"/>
       </p:ext>
     </p:extLst>
   </p:cSld>
@@ -380,7 +380,7 @@
           <p:cNvPr id="7" name="creative_background">
             <a:extLst>
               <a:ext uri="{FF2B5EF4-FFF2-40B4-BE49-F238E27FC236}">
-                <a16:creationId xmlns:a16="http://schemas.microsoft.com/office/drawing/2014/main" id="{E2510C8D-4F0C-2059-89B8-219693B30A4A}"/>
+                <a16:creationId xmlns:a16="http://schemas.microsoft.com/office/drawing/2014/main" id="{897A2ED8-3FF0-B651-A3BE-6231CC5F47A6}"/>
               </a:ext>
             </a:extLst>
           </p:cNvPr>
@@ -463,9 +463,9 @@
           <a:bodyPr/>
           <a:lstStyle/>
           <a:p>
-            <a:fld id="{4354DB14-F9AE-4C12-8CFE-33ABF7B568CC}" type="datetimeFigureOut">
+            <a:fld id="{69C9F4DC-D411-4651-9AAC-29900672A9A6}" type="datetimeFigureOut">
               <a:rPr lang="en-US" smtClean="0"/>
-              <a:t>10/3/2026</a:t>
+              <a:t>10/4/2026</a:t>
             </a:fld>
             <a:endParaRPr lang="en-US"/>
           </a:p>
@@ -505,7 +505,7 @@
           <a:bodyPr/>
           <a:lstStyle/>
           <a:p>
-            <a:fld id="{74A457B9-11F0-4EFD-A461-9DC8C80A1D31}" type="slidenum">
+            <a:fld id="{B2681015-3E44-49AF-A930-B36E5E8634EC}" type="slidenum">
               <a:rPr lang="en-US" smtClean="0"/>
               <a:t>‹#›</a:t>
             </a:fld>
@@ -518,7 +518,7 @@
           <p:cNvPr id="8" name="body">
             <a:extLst>
               <a:ext uri="{FF2B5EF4-FFF2-40B4-BE49-F238E27FC236}">
-                <a16:creationId xmlns:a16="http://schemas.microsoft.com/office/drawing/2014/main" id="{9C415C20-8762-F067-EFFA-CC7EED957BAE}"/>
+                <a16:creationId xmlns:a16="http://schemas.microsoft.com/office/drawing/2014/main" id="{F762C3CE-BC28-A919-D05F-DAFB7A096BC4}"/>
               </a:ext>
             </a:extLst>
           </p:cNvPr>
@@ -558,7 +558,7 @@
           <p:cNvPr id="9" name="source">
             <a:extLst>
               <a:ext uri="{FF2B5EF4-FFF2-40B4-BE49-F238E27FC236}">
-                <a16:creationId xmlns:a16="http://schemas.microsoft.com/office/drawing/2014/main" id="{BFBAFA98-32EB-24C9-C86E-5B20559AC8F6}"/>
+                <a16:creationId xmlns:a16="http://schemas.microsoft.com/office/drawing/2014/main" id="{ED3909A3-F642-F5A3-77BB-600E79F9851C}"/>
               </a:ext>
             </a:extLst>
           </p:cNvPr>
@@ -613,7 +613,7 @@
     </p:spTree>
     <p:extLst>
       <p:ext uri="{BB962C8B-B14F-4D97-AF65-F5344CB8AC3E}">
-        <p14:creationId xmlns:p14="http://schemas.microsoft.com/office/powerpoint/2010/main" val="978110304"/>
+        <p14:creationId xmlns:p14="http://schemas.microsoft.com/office/powerpoint/2010/main" val="3175013708"/>
       </p:ext>
     </p:extLst>
   </p:cSld>
@@ -645,7 +645,7 @@
           <p:cNvPr id="7" name="creative_background">
             <a:extLst>
               <a:ext uri="{FF2B5EF4-FFF2-40B4-BE49-F238E27FC236}">
-                <a16:creationId xmlns:a16="http://schemas.microsoft.com/office/drawing/2014/main" id="{AE85642D-CD3C-EE03-14FA-4905F6C7CF2E}"/>
+                <a16:creationId xmlns:a16="http://schemas.microsoft.com/office/drawing/2014/main" id="{AB5A65D3-E628-D0D4-50C8-A3F2666809DE}"/>
               </a:ext>
             </a:extLst>
           </p:cNvPr>
@@ -728,9 +728,9 @@
           <a:bodyPr/>
           <a:lstStyle/>
           <a:p>
-            <a:fld id="{4354DB14-F9AE-4C12-8CFE-33ABF7B568CC}" type="datetimeFigureOut">
+            <a:fld id="{69C9F4DC-D411-4651-9AAC-29900672A9A6}" type="datetimeFigureOut">
               <a:rPr lang="en-US" smtClean="0"/>
-              <a:t>10/3/2026</a:t>
+              <a:t>10/4/2026</a:t>
             </a:fld>
             <a:endParaRPr lang="en-US"/>
           </a:p>
@@ -770,7 +770,7 @@
           <a:bodyPr/>
           <a:lstStyle/>
           <a:p>
-            <a:fld id="{74A457B9-11F0-4EFD-A461-9DC8C80A1D31}" type="slidenum">
+            <a:fld id="{B2681015-3E44-49AF-A930-B36E5E8634EC}" type="slidenum">
               <a:rPr lang="en-US" smtClean="0"/>
               <a:t>‹#›</a:t>
             </a:fld>
@@ -783,7 +783,7 @@
           <p:cNvPr id="8" name="body">
             <a:extLst>
               <a:ext uri="{FF2B5EF4-FFF2-40B4-BE49-F238E27FC236}">
-                <a16:creationId xmlns:a16="http://schemas.microsoft.com/office/drawing/2014/main" id="{4FA0B4A8-4496-00DA-018D-7280C9310DC7}"/>
+                <a16:creationId xmlns:a16="http://schemas.microsoft.com/office/drawing/2014/main" id="{196FAAB2-FB6F-A280-CCE7-D866B49B55D1}"/>
               </a:ext>
             </a:extLst>
           </p:cNvPr>
@@ -826,7 +826,7 @@
     </p:spTree>
     <p:extLst>
       <p:ext uri="{BB962C8B-B14F-4D97-AF65-F5344CB8AC3E}">
-        <p14:creationId xmlns:p14="http://schemas.microsoft.com/office/powerpoint/2010/main" val="16129508"/>
+        <p14:creationId xmlns:p14="http://schemas.microsoft.com/office/powerpoint/2010/main" val="1450645801"/>
       </p:ext>
     </p:extLst>
   </p:cSld>
@@ -902,7 +902,7 @@
           <p:cNvPr id="6" name="section_number">
             <a:extLst>
               <a:ext uri="{FF2B5EF4-FFF2-40B4-BE49-F238E27FC236}">
-                <a16:creationId xmlns:a16="http://schemas.microsoft.com/office/drawing/2014/main" id="{CB25494D-7E85-A098-91F5-2C425C12ACD9}"/>
+                <a16:creationId xmlns:a16="http://schemas.microsoft.com/office/drawing/2014/main" id="{C4DCCE7E-5283-D886-DF95-EDEAD7A23E2E}"/>
               </a:ext>
             </a:extLst>
           </p:cNvPr>
@@ -955,7 +955,7 @@
           <p:cNvPr id="7" name="subtitle">
             <a:extLst>
               <a:ext uri="{FF2B5EF4-FFF2-40B4-BE49-F238E27FC236}">
-                <a16:creationId xmlns:a16="http://schemas.microsoft.com/office/drawing/2014/main" id="{A6C583CE-1DC6-1297-4A63-7A1F95CA7BD9}"/>
+                <a16:creationId xmlns:a16="http://schemas.microsoft.com/office/drawing/2014/main" id="{35E6A0FB-CCD9-351B-8230-8F980E8B0CCF}"/>
               </a:ext>
             </a:extLst>
           </p:cNvPr>
@@ -1007,7 +1007,7 @@
           <p:cNvPr id="8" name="pattern">
             <a:extLst>
               <a:ext uri="{FF2B5EF4-FFF2-40B4-BE49-F238E27FC236}">
-                <a16:creationId xmlns:a16="http://schemas.microsoft.com/office/drawing/2014/main" id="{F0956D96-653D-3AF6-A1C6-8D0DCA1F946C}"/>
+                <a16:creationId xmlns:a16="http://schemas.microsoft.com/office/drawing/2014/main" id="{1A3244B4-D31F-0236-74E9-5E8A5834E587}"/>
               </a:ext>
             </a:extLst>
           </p:cNvPr>
@@ -1075,7 +1075,7 @@
           <p:cNvPr id="9" name="pattern">
             <a:extLst>
               <a:ext uri="{FF2B5EF4-FFF2-40B4-BE49-F238E27FC236}">
-                <a16:creationId xmlns:a16="http://schemas.microsoft.com/office/drawing/2014/main" id="{7B9C6638-1182-B49C-CF0B-3E25F9392430}"/>
+                <a16:creationId xmlns:a16="http://schemas.microsoft.com/office/drawing/2014/main" id="{F6C3FA96-2E54-13CA-980A-2171AD490A50}"/>
               </a:ext>
             </a:extLst>
           </p:cNvPr>
@@ -1143,7 +1143,7 @@
           <p:cNvPr id="10" name="pattern">
             <a:extLst>
               <a:ext uri="{FF2B5EF4-FFF2-40B4-BE49-F238E27FC236}">
-                <a16:creationId xmlns:a16="http://schemas.microsoft.com/office/drawing/2014/main" id="{1FF70040-3FC0-BA35-4DB4-1566DE3C8EFB}"/>
+                <a16:creationId xmlns:a16="http://schemas.microsoft.com/office/drawing/2014/main" id="{4D271DD1-3DA0-AC04-B7E1-B6C840E5CD91}"/>
               </a:ext>
             </a:extLst>
           </p:cNvPr>
@@ -1211,7 +1211,7 @@
           <p:cNvPr id="11" name="pattern">
             <a:extLst>
               <a:ext uri="{FF2B5EF4-FFF2-40B4-BE49-F238E27FC236}">
-                <a16:creationId xmlns:a16="http://schemas.microsoft.com/office/drawing/2014/main" id="{6D2B104E-8B53-EEF3-DE7D-62E2B46FDF01}"/>
+                <a16:creationId xmlns:a16="http://schemas.microsoft.com/office/drawing/2014/main" id="{2844F128-2F8A-4EA1-61CF-EBF844CF52C5}"/>
               </a:ext>
             </a:extLst>
           </p:cNvPr>
@@ -1279,7 +1279,7 @@
           <p:cNvPr id="12" name="pattern">
             <a:extLst>
               <a:ext uri="{FF2B5EF4-FFF2-40B4-BE49-F238E27FC236}">
-                <a16:creationId xmlns:a16="http://schemas.microsoft.com/office/drawing/2014/main" id="{B90E3832-CC24-7172-E04D-BA821E0C32BF}"/>
+                <a16:creationId xmlns:a16="http://schemas.microsoft.com/office/drawing/2014/main" id="{67F42236-AEE3-7283-A15D-492176828A97}"/>
               </a:ext>
             </a:extLst>
           </p:cNvPr>
@@ -1347,7 +1347,7 @@
           <p:cNvPr id="13" name="pattern">
             <a:extLst>
               <a:ext uri="{FF2B5EF4-FFF2-40B4-BE49-F238E27FC236}">
-                <a16:creationId xmlns:a16="http://schemas.microsoft.com/office/drawing/2014/main" id="{AC3CC080-CCCC-F1A4-EEBE-0247EE58985A}"/>
+                <a16:creationId xmlns:a16="http://schemas.microsoft.com/office/drawing/2014/main" id="{BC338243-D19D-5E9B-2782-7CEF75D65854}"/>
               </a:ext>
             </a:extLst>
           </p:cNvPr>
@@ -1415,7 +1415,7 @@
           <p:cNvPr id="14" name="pattern">
             <a:extLst>
               <a:ext uri="{FF2B5EF4-FFF2-40B4-BE49-F238E27FC236}">
-                <a16:creationId xmlns:a16="http://schemas.microsoft.com/office/drawing/2014/main" id="{317A3644-7B94-C3B4-AFE2-EFB1AF047AB2}"/>
+                <a16:creationId xmlns:a16="http://schemas.microsoft.com/office/drawing/2014/main" id="{728AF099-3D66-88E5-550F-794CAE541574}"/>
               </a:ext>
             </a:extLst>
           </p:cNvPr>
@@ -1483,7 +1483,7 @@
           <p:cNvPr id="15" name="pattern">
             <a:extLst>
               <a:ext uri="{FF2B5EF4-FFF2-40B4-BE49-F238E27FC236}">
-                <a16:creationId xmlns:a16="http://schemas.microsoft.com/office/drawing/2014/main" id="{B6882B37-22C2-679C-8DA8-2BBA6D535B3E}"/>
+                <a16:creationId xmlns:a16="http://schemas.microsoft.com/office/drawing/2014/main" id="{4F61D15D-B4BC-667B-F4CC-2EAA2CB268EC}"/>
               </a:ext>
             </a:extLst>
           </p:cNvPr>
@@ -1551,7 +1551,7 @@
           <p:cNvPr id="16" name="pattern">
             <a:extLst>
               <a:ext uri="{FF2B5EF4-FFF2-40B4-BE49-F238E27FC236}">
-                <a16:creationId xmlns:a16="http://schemas.microsoft.com/office/drawing/2014/main" id="{E05706B2-2EAB-A1EB-BB07-BEE2E96F302A}"/>
+                <a16:creationId xmlns:a16="http://schemas.microsoft.com/office/drawing/2014/main" id="{00A672ED-D58D-5F21-6435-4732DA003A57}"/>
               </a:ext>
             </a:extLst>
           </p:cNvPr>
@@ -1619,7 +1619,7 @@
           <p:cNvPr id="17" name="pattern">
             <a:extLst>
               <a:ext uri="{FF2B5EF4-FFF2-40B4-BE49-F238E27FC236}">
-                <a16:creationId xmlns:a16="http://schemas.microsoft.com/office/drawing/2014/main" id="{75B9C5FA-BB7F-36C2-E627-54A04BF89B3A}"/>
+                <a16:creationId xmlns:a16="http://schemas.microsoft.com/office/drawing/2014/main" id="{A630BE0B-259D-78FA-BA5A-BB5E21F4A19B}"/>
               </a:ext>
             </a:extLst>
           </p:cNvPr>
@@ -1687,7 +1687,7 @@
           <p:cNvPr id="18" name="pattern">
             <a:extLst>
               <a:ext uri="{FF2B5EF4-FFF2-40B4-BE49-F238E27FC236}">
-                <a16:creationId xmlns:a16="http://schemas.microsoft.com/office/drawing/2014/main" id="{69C1135C-524D-0718-5408-D1672F64377E}"/>
+                <a16:creationId xmlns:a16="http://schemas.microsoft.com/office/drawing/2014/main" id="{CC66901D-438C-FFDF-0F1B-81E723411E0D}"/>
               </a:ext>
             </a:extLst>
           </p:cNvPr>
@@ -1755,7 +1755,7 @@
           <p:cNvPr id="19" name="pattern">
             <a:extLst>
               <a:ext uri="{FF2B5EF4-FFF2-40B4-BE49-F238E27FC236}">
-                <a16:creationId xmlns:a16="http://schemas.microsoft.com/office/drawing/2014/main" id="{8659F860-365F-6143-15FF-D1E8ECD85D75}"/>
+                <a16:creationId xmlns:a16="http://schemas.microsoft.com/office/drawing/2014/main" id="{E81171E4-1FF7-F63D-B1E0-1A5116588DA9}"/>
               </a:ext>
             </a:extLst>
           </p:cNvPr>
@@ -1823,7 +1823,7 @@
           <p:cNvPr id="20" name="pattern">
             <a:extLst>
               <a:ext uri="{FF2B5EF4-FFF2-40B4-BE49-F238E27FC236}">
-                <a16:creationId xmlns:a16="http://schemas.microsoft.com/office/drawing/2014/main" id="{0A341DBE-2F1C-28D0-00F0-218559AFEFBE}"/>
+                <a16:creationId xmlns:a16="http://schemas.microsoft.com/office/drawing/2014/main" id="{AEDA6964-38C6-5809-E4F4-721D710155A9}"/>
               </a:ext>
             </a:extLst>
           </p:cNvPr>
@@ -1891,7 +1891,7 @@
           <p:cNvPr id="21" name="pattern">
             <a:extLst>
               <a:ext uri="{FF2B5EF4-FFF2-40B4-BE49-F238E27FC236}">
-                <a16:creationId xmlns:a16="http://schemas.microsoft.com/office/drawing/2014/main" id="{597FD2EA-711E-1D2A-7CE0-B8FD8709DB8F}"/>
+                <a16:creationId xmlns:a16="http://schemas.microsoft.com/office/drawing/2014/main" id="{BDC3AC48-9793-8E3F-FCA5-12C32DA4C696}"/>
               </a:ext>
             </a:extLst>
           </p:cNvPr>
@@ -1959,7 +1959,7 @@
           <p:cNvPr id="22" name="pattern">
             <a:extLst>
               <a:ext uri="{FF2B5EF4-FFF2-40B4-BE49-F238E27FC236}">
-                <a16:creationId xmlns:a16="http://schemas.microsoft.com/office/drawing/2014/main" id="{9853987B-DE71-45F2-A7F2-20593CF5F3DA}"/>
+                <a16:creationId xmlns:a16="http://schemas.microsoft.com/office/drawing/2014/main" id="{1CB68539-A617-03A1-ECBA-03CBC65EF691}"/>
               </a:ext>
             </a:extLst>
           </p:cNvPr>
@@ -2027,7 +2027,7 @@
           <p:cNvPr id="23" name="pattern">
             <a:extLst>
               <a:ext uri="{FF2B5EF4-FFF2-40B4-BE49-F238E27FC236}">
-                <a16:creationId xmlns:a16="http://schemas.microsoft.com/office/drawing/2014/main" id="{1F649203-84BA-801C-EC14-120E56BF91BA}"/>
+                <a16:creationId xmlns:a16="http://schemas.microsoft.com/office/drawing/2014/main" id="{A2A07C8E-94E5-8DD0-42F4-F8BFD8018382}"/>
               </a:ext>
             </a:extLst>
           </p:cNvPr>
@@ -2095,7 +2095,7 @@
           <p:cNvPr id="24" name="pattern">
             <a:extLst>
               <a:ext uri="{FF2B5EF4-FFF2-40B4-BE49-F238E27FC236}">
-                <a16:creationId xmlns:a16="http://schemas.microsoft.com/office/drawing/2014/main" id="{02379276-15AC-ACF3-E8C7-B5001948B84A}"/>
+                <a16:creationId xmlns:a16="http://schemas.microsoft.com/office/drawing/2014/main" id="{7932D0B6-3E3C-6BB7-FFED-346CFB9E173E}"/>
               </a:ext>
             </a:extLst>
           </p:cNvPr>
@@ -2163,7 +2163,7 @@
           <p:cNvPr id="25" name="pattern">
             <a:extLst>
               <a:ext uri="{FF2B5EF4-FFF2-40B4-BE49-F238E27FC236}">
-                <a16:creationId xmlns:a16="http://schemas.microsoft.com/office/drawing/2014/main" id="{7B15ADE6-391A-BCAB-E07E-4EF126C2EDB2}"/>
+                <a16:creationId xmlns:a16="http://schemas.microsoft.com/office/drawing/2014/main" id="{327C437A-AA40-1286-F89E-DA649557F0A9}"/>
               </a:ext>
             </a:extLst>
           </p:cNvPr>
@@ -2231,7 +2231,7 @@
           <p:cNvPr id="26" name="pattern">
             <a:extLst>
               <a:ext uri="{FF2B5EF4-FFF2-40B4-BE49-F238E27FC236}">
-                <a16:creationId xmlns:a16="http://schemas.microsoft.com/office/drawing/2014/main" id="{ED2A16DB-D498-7C7B-4AD2-1FE125C68D03}"/>
+                <a16:creationId xmlns:a16="http://schemas.microsoft.com/office/drawing/2014/main" id="{0AC859CE-526B-8DBA-A1E1-14D1CFBDF9D7}"/>
               </a:ext>
             </a:extLst>
           </p:cNvPr>
@@ -2299,7 +2299,7 @@
           <p:cNvPr id="27" name="pattern">
             <a:extLst>
               <a:ext uri="{FF2B5EF4-FFF2-40B4-BE49-F238E27FC236}">
-                <a16:creationId xmlns:a16="http://schemas.microsoft.com/office/drawing/2014/main" id="{2E9B1E3C-3AAA-BB82-C6D1-ABC308DCA064}"/>
+                <a16:creationId xmlns:a16="http://schemas.microsoft.com/office/drawing/2014/main" id="{3415CC1A-F24E-5898-AA3F-4E75E7305CC1}"/>
               </a:ext>
             </a:extLst>
           </p:cNvPr>
@@ -2367,7 +2367,7 @@
           <p:cNvPr id="28" name="pattern">
             <a:extLst>
               <a:ext uri="{FF2B5EF4-FFF2-40B4-BE49-F238E27FC236}">
-                <a16:creationId xmlns:a16="http://schemas.microsoft.com/office/drawing/2014/main" id="{10DB8C9D-FC64-1A09-2C50-8197157E7703}"/>
+                <a16:creationId xmlns:a16="http://schemas.microsoft.com/office/drawing/2014/main" id="{0485DBEB-C860-4814-1F41-32C033ABAA92}"/>
               </a:ext>
             </a:extLst>
           </p:cNvPr>
@@ -2435,7 +2435,7 @@
           <p:cNvPr id="29" name="pattern">
             <a:extLst>
               <a:ext uri="{FF2B5EF4-FFF2-40B4-BE49-F238E27FC236}">
-                <a16:creationId xmlns:a16="http://schemas.microsoft.com/office/drawing/2014/main" id="{D2C8BD4B-CB24-288E-3A1A-AE010C8ADDD9}"/>
+                <a16:creationId xmlns:a16="http://schemas.microsoft.com/office/drawing/2014/main" id="{DFA83C2A-391D-ACD7-89B5-591E88F2EEC5}"/>
               </a:ext>
             </a:extLst>
           </p:cNvPr>
@@ -2503,7 +2503,7 @@
           <p:cNvPr id="30" name="pattern">
             <a:extLst>
               <a:ext uri="{FF2B5EF4-FFF2-40B4-BE49-F238E27FC236}">
-                <a16:creationId xmlns:a16="http://schemas.microsoft.com/office/drawing/2014/main" id="{882D84B7-1F84-3803-AD40-544402848034}"/>
+                <a16:creationId xmlns:a16="http://schemas.microsoft.com/office/drawing/2014/main" id="{93B18772-9848-5A0E-FC37-449B594A1261}"/>
               </a:ext>
             </a:extLst>
           </p:cNvPr>
@@ -2571,7 +2571,7 @@
           <p:cNvPr id="31" name="pattern">
             <a:extLst>
               <a:ext uri="{FF2B5EF4-FFF2-40B4-BE49-F238E27FC236}">
-                <a16:creationId xmlns:a16="http://schemas.microsoft.com/office/drawing/2014/main" id="{8DFD0BE6-70F7-CE9F-45CC-AD7DA0B23673}"/>
+                <a16:creationId xmlns:a16="http://schemas.microsoft.com/office/drawing/2014/main" id="{32584153-CD66-4DEF-B05B-C1E43740FC16}"/>
               </a:ext>
             </a:extLst>
           </p:cNvPr>
@@ -2639,7 +2639,7 @@
           <p:cNvPr id="32" name="pattern">
             <a:extLst>
               <a:ext uri="{FF2B5EF4-FFF2-40B4-BE49-F238E27FC236}">
-                <a16:creationId xmlns:a16="http://schemas.microsoft.com/office/drawing/2014/main" id="{1314A10A-2F24-7184-87DA-AAF7CF300D7F}"/>
+                <a16:creationId xmlns:a16="http://schemas.microsoft.com/office/drawing/2014/main" id="{9C9A4A2A-AA4E-4347-B868-AD6272937829}"/>
               </a:ext>
             </a:extLst>
           </p:cNvPr>
@@ -2707,7 +2707,7 @@
           <p:cNvPr id="33" name="pattern">
             <a:extLst>
               <a:ext uri="{FF2B5EF4-FFF2-40B4-BE49-F238E27FC236}">
-                <a16:creationId xmlns:a16="http://schemas.microsoft.com/office/drawing/2014/main" id="{DB9FDC61-8D44-82A1-4B68-08B13B7A3837}"/>
+                <a16:creationId xmlns:a16="http://schemas.microsoft.com/office/drawing/2014/main" id="{EACBDE52-342A-EB56-74C8-3128D58990A5}"/>
               </a:ext>
             </a:extLst>
           </p:cNvPr>
@@ -2775,7 +2775,7 @@
           <p:cNvPr id="34" name="pattern">
             <a:extLst>
               <a:ext uri="{FF2B5EF4-FFF2-40B4-BE49-F238E27FC236}">
-                <a16:creationId xmlns:a16="http://schemas.microsoft.com/office/drawing/2014/main" id="{FC8FD30F-5252-4609-2DA5-F44B2A485BD6}"/>
+                <a16:creationId xmlns:a16="http://schemas.microsoft.com/office/drawing/2014/main" id="{7096A76F-16DF-244C-E6B6-6F1F1686246F}"/>
               </a:ext>
             </a:extLst>
           </p:cNvPr>
@@ -2843,7 +2843,7 @@
           <p:cNvPr id="35" name="pattern">
             <a:extLst>
               <a:ext uri="{FF2B5EF4-FFF2-40B4-BE49-F238E27FC236}">
-                <a16:creationId xmlns:a16="http://schemas.microsoft.com/office/drawing/2014/main" id="{B7B056A4-657B-8196-A85D-65E791237A50}"/>
+                <a16:creationId xmlns:a16="http://schemas.microsoft.com/office/drawing/2014/main" id="{6326FD1F-E0CC-4CEC-4E4F-65795109B62F}"/>
               </a:ext>
             </a:extLst>
           </p:cNvPr>
@@ -2911,7 +2911,7 @@
           <p:cNvPr id="36" name="pattern">
             <a:extLst>
               <a:ext uri="{FF2B5EF4-FFF2-40B4-BE49-F238E27FC236}">
-                <a16:creationId xmlns:a16="http://schemas.microsoft.com/office/drawing/2014/main" id="{1CE3B993-C3F7-ABC8-303B-A72A4FA044D1}"/>
+                <a16:creationId xmlns:a16="http://schemas.microsoft.com/office/drawing/2014/main" id="{2858EEB8-BF47-C5A5-1690-C1A27732D731}"/>
               </a:ext>
             </a:extLst>
           </p:cNvPr>
@@ -2979,7 +2979,7 @@
           <p:cNvPr id="37" name="pattern">
             <a:extLst>
               <a:ext uri="{FF2B5EF4-FFF2-40B4-BE49-F238E27FC236}">
-                <a16:creationId xmlns:a16="http://schemas.microsoft.com/office/drawing/2014/main" id="{FECB7E7A-E901-0805-1154-97A7BECDE35A}"/>
+                <a16:creationId xmlns:a16="http://schemas.microsoft.com/office/drawing/2014/main" id="{350D6459-E792-D4AB-4367-B3D54B768A42}"/>
               </a:ext>
             </a:extLst>
           </p:cNvPr>
@@ -3047,7 +3047,7 @@
           <p:cNvPr id="38" name="pattern">
             <a:extLst>
               <a:ext uri="{FF2B5EF4-FFF2-40B4-BE49-F238E27FC236}">
-                <a16:creationId xmlns:a16="http://schemas.microsoft.com/office/drawing/2014/main" id="{2C05E732-99CE-B025-252E-9450D7DD652A}"/>
+                <a16:creationId xmlns:a16="http://schemas.microsoft.com/office/drawing/2014/main" id="{D5BC0CA3-4329-9424-6D4B-A820C5F34124}"/>
               </a:ext>
             </a:extLst>
           </p:cNvPr>
@@ -3115,7 +3115,7 @@
           <p:cNvPr id="39" name="pattern">
             <a:extLst>
               <a:ext uri="{FF2B5EF4-FFF2-40B4-BE49-F238E27FC236}">
-                <a16:creationId xmlns:a16="http://schemas.microsoft.com/office/drawing/2014/main" id="{EE14381C-7A05-94E7-AFBE-05A858B6FDE5}"/>
+                <a16:creationId xmlns:a16="http://schemas.microsoft.com/office/drawing/2014/main" id="{5498A927-180B-8FEB-F0CA-CED99BD8833C}"/>
               </a:ext>
             </a:extLst>
           </p:cNvPr>
@@ -3183,7 +3183,7 @@
           <p:cNvPr id="40" name="pattern">
             <a:extLst>
               <a:ext uri="{FF2B5EF4-FFF2-40B4-BE49-F238E27FC236}">
-                <a16:creationId xmlns:a16="http://schemas.microsoft.com/office/drawing/2014/main" id="{4120C912-2FDE-C1D0-CBE7-7799FDAA08AB}"/>
+                <a16:creationId xmlns:a16="http://schemas.microsoft.com/office/drawing/2014/main" id="{0143802C-C6B6-FE40-98AC-4A9D505BA59C}"/>
               </a:ext>
             </a:extLst>
           </p:cNvPr>
@@ -3251,7 +3251,7 @@
           <p:cNvPr id="41" name="pattern">
             <a:extLst>
               <a:ext uri="{FF2B5EF4-FFF2-40B4-BE49-F238E27FC236}">
-                <a16:creationId xmlns:a16="http://schemas.microsoft.com/office/drawing/2014/main" id="{52254C1C-5706-020B-E95A-3B0917444709}"/>
+                <a16:creationId xmlns:a16="http://schemas.microsoft.com/office/drawing/2014/main" id="{0D5754C9-F0E5-F5AF-FAEA-AD9AE5690A99}"/>
               </a:ext>
             </a:extLst>
           </p:cNvPr>
@@ -3319,7 +3319,7 @@
           <p:cNvPr id="42" name="pattern">
             <a:extLst>
               <a:ext uri="{FF2B5EF4-FFF2-40B4-BE49-F238E27FC236}">
-                <a16:creationId xmlns:a16="http://schemas.microsoft.com/office/drawing/2014/main" id="{2CEA1EB9-0CA5-CAE0-3AF2-39D81FA44C8B}"/>
+                <a16:creationId xmlns:a16="http://schemas.microsoft.com/office/drawing/2014/main" id="{E42D28D3-5637-82E5-B263-D778B56906A1}"/>
               </a:ext>
             </a:extLst>
           </p:cNvPr>
@@ -3387,7 +3387,7 @@
           <p:cNvPr id="43" name="pattern">
             <a:extLst>
               <a:ext uri="{FF2B5EF4-FFF2-40B4-BE49-F238E27FC236}">
-                <a16:creationId xmlns:a16="http://schemas.microsoft.com/office/drawing/2014/main" id="{18F0B68D-6582-5C58-88D3-DD2B79999EAA}"/>
+                <a16:creationId xmlns:a16="http://schemas.microsoft.com/office/drawing/2014/main" id="{DB50A20D-4FFE-A811-8CE3-6E1751949F6F}"/>
               </a:ext>
             </a:extLst>
           </p:cNvPr>
@@ -3455,7 +3455,7 @@
           <p:cNvPr id="44" name="pattern">
             <a:extLst>
               <a:ext uri="{FF2B5EF4-FFF2-40B4-BE49-F238E27FC236}">
-                <a16:creationId xmlns:a16="http://schemas.microsoft.com/office/drawing/2014/main" id="{F01DBE00-5A6A-BA09-8D20-76C8E32AEA75}"/>
+                <a16:creationId xmlns:a16="http://schemas.microsoft.com/office/drawing/2014/main" id="{9B635CCF-917F-DD20-4869-F3F184FA5BCC}"/>
               </a:ext>
             </a:extLst>
           </p:cNvPr>
@@ -3523,7 +3523,7 @@
           <p:cNvPr id="45" name="pattern">
             <a:extLst>
               <a:ext uri="{FF2B5EF4-FFF2-40B4-BE49-F238E27FC236}">
-                <a16:creationId xmlns:a16="http://schemas.microsoft.com/office/drawing/2014/main" id="{9D8595AE-FB5C-35A2-63A5-20EB65A6EFC5}"/>
+                <a16:creationId xmlns:a16="http://schemas.microsoft.com/office/drawing/2014/main" id="{24CCEAAF-BCA2-F3D6-A362-4A03CB7C75A9}"/>
               </a:ext>
             </a:extLst>
           </p:cNvPr>
@@ -3591,7 +3591,7 @@
           <p:cNvPr id="46" name="pattern">
             <a:extLst>
               <a:ext uri="{FF2B5EF4-FFF2-40B4-BE49-F238E27FC236}">
-                <a16:creationId xmlns:a16="http://schemas.microsoft.com/office/drawing/2014/main" id="{00A5F744-3802-2E25-7579-D958E3A026EA}"/>
+                <a16:creationId xmlns:a16="http://schemas.microsoft.com/office/drawing/2014/main" id="{5F2188FD-EDEF-0317-977F-055A14AB0EF5}"/>
               </a:ext>
             </a:extLst>
           </p:cNvPr>
@@ -3659,7 +3659,7 @@
           <p:cNvPr id="47" name="pattern">
             <a:extLst>
               <a:ext uri="{FF2B5EF4-FFF2-40B4-BE49-F238E27FC236}">
-                <a16:creationId xmlns:a16="http://schemas.microsoft.com/office/drawing/2014/main" id="{45BC44EE-FDAF-76A6-8B58-682208AC863A}"/>
+                <a16:creationId xmlns:a16="http://schemas.microsoft.com/office/drawing/2014/main" id="{A969BF6F-177E-A592-1D6D-46DFE4F08418}"/>
               </a:ext>
             </a:extLst>
           </p:cNvPr>
@@ -3727,7 +3727,7 @@
           <p:cNvPr id="48" name="pattern">
             <a:extLst>
               <a:ext uri="{FF2B5EF4-FFF2-40B4-BE49-F238E27FC236}">
-                <a16:creationId xmlns:a16="http://schemas.microsoft.com/office/drawing/2014/main" id="{C3E93FB4-6019-51F0-9B03-0BDE2CB12291}"/>
+                <a16:creationId xmlns:a16="http://schemas.microsoft.com/office/drawing/2014/main" id="{9CD022C9-B079-C47D-101F-A8C76F8C5EFD}"/>
               </a:ext>
             </a:extLst>
           </p:cNvPr>
@@ -3795,7 +3795,7 @@
           <p:cNvPr id="49" name="pattern">
             <a:extLst>
               <a:ext uri="{FF2B5EF4-FFF2-40B4-BE49-F238E27FC236}">
-                <a16:creationId xmlns:a16="http://schemas.microsoft.com/office/drawing/2014/main" id="{AEB83682-CAF2-D62C-745A-7FADCB72CF26}"/>
+                <a16:creationId xmlns:a16="http://schemas.microsoft.com/office/drawing/2014/main" id="{CDA8C1E9-95AD-9415-4195-BE6CF59CB3A1}"/>
               </a:ext>
             </a:extLst>
           </p:cNvPr>
@@ -3863,7 +3863,7 @@
           <p:cNvPr id="50" name="pattern">
             <a:extLst>
               <a:ext uri="{FF2B5EF4-FFF2-40B4-BE49-F238E27FC236}">
-                <a16:creationId xmlns:a16="http://schemas.microsoft.com/office/drawing/2014/main" id="{D93CA70F-82B4-1CB8-05B0-C341145F161E}"/>
+                <a16:creationId xmlns:a16="http://schemas.microsoft.com/office/drawing/2014/main" id="{E5438CCE-F5E1-4E51-74A7-D0A36AC6C041}"/>
               </a:ext>
             </a:extLst>
           </p:cNvPr>
@@ -3931,7 +3931,7 @@
           <p:cNvPr id="51" name="pattern">
             <a:extLst>
               <a:ext uri="{FF2B5EF4-FFF2-40B4-BE49-F238E27FC236}">
-                <a16:creationId xmlns:a16="http://schemas.microsoft.com/office/drawing/2014/main" id="{1F7B84C8-888C-CF8A-6DCB-A8E85C767934}"/>
+                <a16:creationId xmlns:a16="http://schemas.microsoft.com/office/drawing/2014/main" id="{637461D7-4055-863A-DDDE-D42228006E1A}"/>
               </a:ext>
             </a:extLst>
           </p:cNvPr>
@@ -3999,7 +3999,7 @@
           <p:cNvPr id="52" name="pattern">
             <a:extLst>
               <a:ext uri="{FF2B5EF4-FFF2-40B4-BE49-F238E27FC236}">
-                <a16:creationId xmlns:a16="http://schemas.microsoft.com/office/drawing/2014/main" id="{29D21380-9A50-A4DB-2071-71808902F529}"/>
+                <a16:creationId xmlns:a16="http://schemas.microsoft.com/office/drawing/2014/main" id="{98630E02-D0D7-2B0F-BB6A-4AB0CFD46488}"/>
               </a:ext>
             </a:extLst>
           </p:cNvPr>
@@ -4067,7 +4067,7 @@
           <p:cNvPr id="53" name="pattern">
             <a:extLst>
               <a:ext uri="{FF2B5EF4-FFF2-40B4-BE49-F238E27FC236}">
-                <a16:creationId xmlns:a16="http://schemas.microsoft.com/office/drawing/2014/main" id="{F3D43444-1B7C-AA13-12BD-762605E30469}"/>
+                <a16:creationId xmlns:a16="http://schemas.microsoft.com/office/drawing/2014/main" id="{817E2743-22D3-CC19-445D-91690391613B}"/>
               </a:ext>
             </a:extLst>
           </p:cNvPr>
@@ -4135,7 +4135,7 @@
           <p:cNvPr id="54" name="pattern">
             <a:extLst>
               <a:ext uri="{FF2B5EF4-FFF2-40B4-BE49-F238E27FC236}">
-                <a16:creationId xmlns:a16="http://schemas.microsoft.com/office/drawing/2014/main" id="{6F06C4B1-D5CB-134F-7292-E176395CE1BE}"/>
+                <a16:creationId xmlns:a16="http://schemas.microsoft.com/office/drawing/2014/main" id="{A6D2FCD4-F2C1-3B9A-A02B-62E896338653}"/>
               </a:ext>
             </a:extLst>
           </p:cNvPr>
@@ -4203,7 +4203,7 @@
           <p:cNvPr id="55" name="pattern">
             <a:extLst>
               <a:ext uri="{FF2B5EF4-FFF2-40B4-BE49-F238E27FC236}">
-                <a16:creationId xmlns:a16="http://schemas.microsoft.com/office/drawing/2014/main" id="{24386562-A051-6E91-9C78-905D22412041}"/>
+                <a16:creationId xmlns:a16="http://schemas.microsoft.com/office/drawing/2014/main" id="{602E68C7-388A-85CB-934C-B633B0E9FB6E}"/>
               </a:ext>
             </a:extLst>
           </p:cNvPr>
@@ -4271,7 +4271,7 @@
           <p:cNvPr id="56" name="pattern">
             <a:extLst>
               <a:ext uri="{FF2B5EF4-FFF2-40B4-BE49-F238E27FC236}">
-                <a16:creationId xmlns:a16="http://schemas.microsoft.com/office/drawing/2014/main" id="{8338B3D1-3373-B5F1-5F3E-989C25F25C34}"/>
+                <a16:creationId xmlns:a16="http://schemas.microsoft.com/office/drawing/2014/main" id="{D2D6E397-1C03-A0AD-5BBA-4C5CFE13EC8D}"/>
               </a:ext>
             </a:extLst>
           </p:cNvPr>
@@ -4339,7 +4339,7 @@
           <p:cNvPr id="57" name="pattern">
             <a:extLst>
               <a:ext uri="{FF2B5EF4-FFF2-40B4-BE49-F238E27FC236}">
-                <a16:creationId xmlns:a16="http://schemas.microsoft.com/office/drawing/2014/main" id="{76617938-86D9-BECD-B5BF-F885AC37AED7}"/>
+                <a16:creationId xmlns:a16="http://schemas.microsoft.com/office/drawing/2014/main" id="{28066273-D1E1-9367-E8A0-07E7E5DB1623}"/>
               </a:ext>
             </a:extLst>
           </p:cNvPr>
@@ -4407,7 +4407,7 @@
           <p:cNvPr id="58" name="pattern">
             <a:extLst>
               <a:ext uri="{FF2B5EF4-FFF2-40B4-BE49-F238E27FC236}">
-                <a16:creationId xmlns:a16="http://schemas.microsoft.com/office/drawing/2014/main" id="{B4B2FC1D-FD69-704B-54F1-0FD8FEB7F870}"/>
+                <a16:creationId xmlns:a16="http://schemas.microsoft.com/office/drawing/2014/main" id="{5D2BA953-AFB8-E591-5AA0-F2F4B0586EBB}"/>
               </a:ext>
             </a:extLst>
           </p:cNvPr>
@@ -4475,7 +4475,7 @@
           <p:cNvPr id="59" name="pattern">
             <a:extLst>
               <a:ext uri="{FF2B5EF4-FFF2-40B4-BE49-F238E27FC236}">
-                <a16:creationId xmlns:a16="http://schemas.microsoft.com/office/drawing/2014/main" id="{28C8E27C-73BD-2A63-243E-FB5BAB1A59BC}"/>
+                <a16:creationId xmlns:a16="http://schemas.microsoft.com/office/drawing/2014/main" id="{5185AEE3-3581-D8EC-1072-5AEB55C15825}"/>
               </a:ext>
             </a:extLst>
           </p:cNvPr>
@@ -4543,7 +4543,7 @@
           <p:cNvPr id="60" name="pattern">
             <a:extLst>
               <a:ext uri="{FF2B5EF4-FFF2-40B4-BE49-F238E27FC236}">
-                <a16:creationId xmlns:a16="http://schemas.microsoft.com/office/drawing/2014/main" id="{2715CE56-75FD-ACD9-44BB-44308ABD4594}"/>
+                <a16:creationId xmlns:a16="http://schemas.microsoft.com/office/drawing/2014/main" id="{623D754D-B388-E575-BAC3-ACEB996FF097}"/>
               </a:ext>
             </a:extLst>
           </p:cNvPr>
@@ -4611,7 +4611,7 @@
           <p:cNvPr id="61" name="pattern">
             <a:extLst>
               <a:ext uri="{FF2B5EF4-FFF2-40B4-BE49-F238E27FC236}">
-                <a16:creationId xmlns:a16="http://schemas.microsoft.com/office/drawing/2014/main" id="{C46A6C6D-068E-B468-75E0-B5365D41A014}"/>
+                <a16:creationId xmlns:a16="http://schemas.microsoft.com/office/drawing/2014/main" id="{C43397E9-77F2-BD45-0E0B-9632E98095A5}"/>
               </a:ext>
             </a:extLst>
           </p:cNvPr>
@@ -4679,7 +4679,7 @@
           <p:cNvPr id="62" name="pattern">
             <a:extLst>
               <a:ext uri="{FF2B5EF4-FFF2-40B4-BE49-F238E27FC236}">
-                <a16:creationId xmlns:a16="http://schemas.microsoft.com/office/drawing/2014/main" id="{ABD7232B-8404-2440-AF80-01FF62683A5A}"/>
+                <a16:creationId xmlns:a16="http://schemas.microsoft.com/office/drawing/2014/main" id="{231E82ED-DB40-1424-238F-1F4ACE00165C}"/>
               </a:ext>
             </a:extLst>
           </p:cNvPr>
@@ -4747,7 +4747,7 @@
           <p:cNvPr id="63" name="pattern">
             <a:extLst>
               <a:ext uri="{FF2B5EF4-FFF2-40B4-BE49-F238E27FC236}">
-                <a16:creationId xmlns:a16="http://schemas.microsoft.com/office/drawing/2014/main" id="{3E94CEE1-0454-8C68-4013-3DF5F8F5DA85}"/>
+                <a16:creationId xmlns:a16="http://schemas.microsoft.com/office/drawing/2014/main" id="{4B26601C-94C7-2BA4-5EF2-4AA818DC72CE}"/>
               </a:ext>
             </a:extLst>
           </p:cNvPr>
@@ -4815,7 +4815,7 @@
           <p:cNvPr id="64" name="pattern">
             <a:extLst>
               <a:ext uri="{FF2B5EF4-FFF2-40B4-BE49-F238E27FC236}">
-                <a16:creationId xmlns:a16="http://schemas.microsoft.com/office/drawing/2014/main" id="{37223C5C-6E99-0ED6-0A86-EF15D7EDFDF3}"/>
+                <a16:creationId xmlns:a16="http://schemas.microsoft.com/office/drawing/2014/main" id="{D8588648-AE0D-E302-AD72-15098071DBC2}"/>
               </a:ext>
             </a:extLst>
           </p:cNvPr>
@@ -4883,7 +4883,7 @@
           <p:cNvPr id="65" name="pattern">
             <a:extLst>
               <a:ext uri="{FF2B5EF4-FFF2-40B4-BE49-F238E27FC236}">
-                <a16:creationId xmlns:a16="http://schemas.microsoft.com/office/drawing/2014/main" id="{B51E258E-0F83-F779-DFDE-897EFF051795}"/>
+                <a16:creationId xmlns:a16="http://schemas.microsoft.com/office/drawing/2014/main" id="{FC830ECF-98AD-2D3C-14CB-9524E3A0ECA8}"/>
               </a:ext>
             </a:extLst>
           </p:cNvPr>
@@ -4951,7 +4951,7 @@
           <p:cNvPr id="66" name="pattern">
             <a:extLst>
               <a:ext uri="{FF2B5EF4-FFF2-40B4-BE49-F238E27FC236}">
-                <a16:creationId xmlns:a16="http://schemas.microsoft.com/office/drawing/2014/main" id="{FFE9C430-AF68-F120-F040-DAC82245CCF6}"/>
+                <a16:creationId xmlns:a16="http://schemas.microsoft.com/office/drawing/2014/main" id="{65BF8DE2-4B73-70A0-656F-4E564CE9B359}"/>
               </a:ext>
             </a:extLst>
           </p:cNvPr>
@@ -5019,7 +5019,7 @@
           <p:cNvPr id="67" name="pattern">
             <a:extLst>
               <a:ext uri="{FF2B5EF4-FFF2-40B4-BE49-F238E27FC236}">
-                <a16:creationId xmlns:a16="http://schemas.microsoft.com/office/drawing/2014/main" id="{B66C3234-927E-38DC-1FEE-FC427536F154}"/>
+                <a16:creationId xmlns:a16="http://schemas.microsoft.com/office/drawing/2014/main" id="{D227D8E1-85E1-F6D8-12A7-81C45FBC58EF}"/>
               </a:ext>
             </a:extLst>
           </p:cNvPr>
@@ -5087,7 +5087,7 @@
           <p:cNvPr id="68" name="pattern">
             <a:extLst>
               <a:ext uri="{FF2B5EF4-FFF2-40B4-BE49-F238E27FC236}">
-                <a16:creationId xmlns:a16="http://schemas.microsoft.com/office/drawing/2014/main" id="{3741517F-9055-CAFD-4AB2-1C8AF33E1446}"/>
+                <a16:creationId xmlns:a16="http://schemas.microsoft.com/office/drawing/2014/main" id="{A92C59C4-18CE-39F7-D2F0-B865244CD4EC}"/>
               </a:ext>
             </a:extLst>
           </p:cNvPr>
@@ -5155,7 +5155,7 @@
           <p:cNvPr id="69" name="pattern">
             <a:extLst>
               <a:ext uri="{FF2B5EF4-FFF2-40B4-BE49-F238E27FC236}">
-                <a16:creationId xmlns:a16="http://schemas.microsoft.com/office/drawing/2014/main" id="{6F6336E2-C7DD-24C5-F573-0830ACF4F327}"/>
+                <a16:creationId xmlns:a16="http://schemas.microsoft.com/office/drawing/2014/main" id="{BE6FE573-20EA-3388-AFA1-4AD5D31D3498}"/>
               </a:ext>
             </a:extLst>
           </p:cNvPr>
@@ -5223,7 +5223,7 @@
           <p:cNvPr id="70" name="pattern">
             <a:extLst>
               <a:ext uri="{FF2B5EF4-FFF2-40B4-BE49-F238E27FC236}">
-                <a16:creationId xmlns:a16="http://schemas.microsoft.com/office/drawing/2014/main" id="{4E6E2AE4-B7C8-0E40-8026-544B5307E6CA}"/>
+                <a16:creationId xmlns:a16="http://schemas.microsoft.com/office/drawing/2014/main" id="{CAE4B185-A8C5-4714-A879-08CAECF21145}"/>
               </a:ext>
             </a:extLst>
           </p:cNvPr>
@@ -5291,7 +5291,7 @@
           <p:cNvPr id="71" name="pattern">
             <a:extLst>
               <a:ext uri="{FF2B5EF4-FFF2-40B4-BE49-F238E27FC236}">
-                <a16:creationId xmlns:a16="http://schemas.microsoft.com/office/drawing/2014/main" id="{11B49B00-2054-99AB-DAE0-AA6FD62A623F}"/>
+                <a16:creationId xmlns:a16="http://schemas.microsoft.com/office/drawing/2014/main" id="{69F5BF0A-EAAD-FAAE-07C5-1BDED97240A8}"/>
               </a:ext>
             </a:extLst>
           </p:cNvPr>
@@ -5359,7 +5359,7 @@
           <p:cNvPr id="72" name="pattern">
             <a:extLst>
               <a:ext uri="{FF2B5EF4-FFF2-40B4-BE49-F238E27FC236}">
-                <a16:creationId xmlns:a16="http://schemas.microsoft.com/office/drawing/2014/main" id="{13E99E3B-A2FA-49DE-436F-FD9BF5A04DD0}"/>
+                <a16:creationId xmlns:a16="http://schemas.microsoft.com/office/drawing/2014/main" id="{32B78EA5-67D5-2CDE-E4B2-8854B0A5E95A}"/>
               </a:ext>
             </a:extLst>
           </p:cNvPr>
@@ -5427,7 +5427,7 @@
           <p:cNvPr id="73" name="pattern">
             <a:extLst>
               <a:ext uri="{FF2B5EF4-FFF2-40B4-BE49-F238E27FC236}">
-                <a16:creationId xmlns:a16="http://schemas.microsoft.com/office/drawing/2014/main" id="{44722F59-67B1-40AB-6A24-4E9A6CABB723}"/>
+                <a16:creationId xmlns:a16="http://schemas.microsoft.com/office/drawing/2014/main" id="{C118AB15-2D7F-1DC0-0588-5AA1B66E3576}"/>
               </a:ext>
             </a:extLst>
           </p:cNvPr>
@@ -5495,7 +5495,7 @@
           <p:cNvPr id="74" name="pattern">
             <a:extLst>
               <a:ext uri="{FF2B5EF4-FFF2-40B4-BE49-F238E27FC236}">
-                <a16:creationId xmlns:a16="http://schemas.microsoft.com/office/drawing/2014/main" id="{8191ACE2-677F-BA9D-6E25-658F3F3188EF}"/>
+                <a16:creationId xmlns:a16="http://schemas.microsoft.com/office/drawing/2014/main" id="{4A8236E4-83C8-DF45-F4D7-4245529A4758}"/>
               </a:ext>
             </a:extLst>
           </p:cNvPr>
@@ -5563,7 +5563,7 @@
           <p:cNvPr id="75" name="pattern">
             <a:extLst>
               <a:ext uri="{FF2B5EF4-FFF2-40B4-BE49-F238E27FC236}">
-                <a16:creationId xmlns:a16="http://schemas.microsoft.com/office/drawing/2014/main" id="{A1C2360B-3584-4FF4-1999-583B9BB46B3B}"/>
+                <a16:creationId xmlns:a16="http://schemas.microsoft.com/office/drawing/2014/main" id="{2CC2CCF1-EA16-8101-4D20-3A5B407F110A}"/>
               </a:ext>
             </a:extLst>
           </p:cNvPr>
@@ -5631,7 +5631,7 @@
           <p:cNvPr id="76" name="pattern">
             <a:extLst>
               <a:ext uri="{FF2B5EF4-FFF2-40B4-BE49-F238E27FC236}">
-                <a16:creationId xmlns:a16="http://schemas.microsoft.com/office/drawing/2014/main" id="{BD82F634-61FE-4F5D-F4CB-F8187AD53070}"/>
+                <a16:creationId xmlns:a16="http://schemas.microsoft.com/office/drawing/2014/main" id="{4CFD7BC5-3177-39A2-FC9A-60248B8EB5FA}"/>
               </a:ext>
             </a:extLst>
           </p:cNvPr>
@@ -5699,7 +5699,7 @@
           <p:cNvPr id="77" name="pattern">
             <a:extLst>
               <a:ext uri="{FF2B5EF4-FFF2-40B4-BE49-F238E27FC236}">
-                <a16:creationId xmlns:a16="http://schemas.microsoft.com/office/drawing/2014/main" id="{CF2742F8-2CCA-FBB8-7A80-E4EDB83DB330}"/>
+                <a16:creationId xmlns:a16="http://schemas.microsoft.com/office/drawing/2014/main" id="{BD585557-79AC-7730-F77D-C2661ABA5981}"/>
               </a:ext>
             </a:extLst>
           </p:cNvPr>
@@ -5767,7 +5767,7 @@
           <p:cNvPr id="78" name="pattern">
             <a:extLst>
               <a:ext uri="{FF2B5EF4-FFF2-40B4-BE49-F238E27FC236}">
-                <a16:creationId xmlns:a16="http://schemas.microsoft.com/office/drawing/2014/main" id="{530FDD75-9E31-3BDF-099B-9F17C38CDC40}"/>
+                <a16:creationId xmlns:a16="http://schemas.microsoft.com/office/drawing/2014/main" id="{E56D60D2-630B-EE67-334C-13A273E1311E}"/>
               </a:ext>
             </a:extLst>
           </p:cNvPr>
@@ -5835,7 +5835,7 @@
           <p:cNvPr id="79" name="pattern">
             <a:extLst>
               <a:ext uri="{FF2B5EF4-FFF2-40B4-BE49-F238E27FC236}">
-                <a16:creationId xmlns:a16="http://schemas.microsoft.com/office/drawing/2014/main" id="{D500E956-CF98-84D3-7A10-1A7C362E0C40}"/>
+                <a16:creationId xmlns:a16="http://schemas.microsoft.com/office/drawing/2014/main" id="{8B85AFE5-B98B-B192-1D61-698A1AF9270D}"/>
               </a:ext>
             </a:extLst>
           </p:cNvPr>
@@ -5903,7 +5903,7 @@
           <p:cNvPr id="80" name="pattern">
             <a:extLst>
               <a:ext uri="{FF2B5EF4-FFF2-40B4-BE49-F238E27FC236}">
-                <a16:creationId xmlns:a16="http://schemas.microsoft.com/office/drawing/2014/main" id="{C8D086D8-BD86-938D-AAB5-EDB42E39A8E3}"/>
+                <a16:creationId xmlns:a16="http://schemas.microsoft.com/office/drawing/2014/main" id="{150FD099-5AB3-CDAF-AD81-B2592E9F10B1}"/>
               </a:ext>
             </a:extLst>
           </p:cNvPr>
@@ -5971,7 +5971,7 @@
           <p:cNvPr id="81" name="pattern">
             <a:extLst>
               <a:ext uri="{FF2B5EF4-FFF2-40B4-BE49-F238E27FC236}">
-                <a16:creationId xmlns:a16="http://schemas.microsoft.com/office/drawing/2014/main" id="{CB73445C-37A8-514F-B837-00F0A8BE5586}"/>
+                <a16:creationId xmlns:a16="http://schemas.microsoft.com/office/drawing/2014/main" id="{932F295A-C400-8221-DD11-1D2A64846924}"/>
               </a:ext>
             </a:extLst>
           </p:cNvPr>
@@ -6039,7 +6039,7 @@
           <p:cNvPr id="82" name="pattern">
             <a:extLst>
               <a:ext uri="{FF2B5EF4-FFF2-40B4-BE49-F238E27FC236}">
-                <a16:creationId xmlns:a16="http://schemas.microsoft.com/office/drawing/2014/main" id="{7F1124CF-6B30-7DB5-9193-71855A8A1293}"/>
+                <a16:creationId xmlns:a16="http://schemas.microsoft.com/office/drawing/2014/main" id="{2FDA4660-5776-B98A-06DD-DE4E87BBD454}"/>
               </a:ext>
             </a:extLst>
           </p:cNvPr>
@@ -6107,7 +6107,7 @@
           <p:cNvPr id="83" name="pattern">
             <a:extLst>
               <a:ext uri="{FF2B5EF4-FFF2-40B4-BE49-F238E27FC236}">
-                <a16:creationId xmlns:a16="http://schemas.microsoft.com/office/drawing/2014/main" id="{04A87222-B945-6369-F8E3-E1A9360D3395}"/>
+                <a16:creationId xmlns:a16="http://schemas.microsoft.com/office/drawing/2014/main" id="{C2487C3C-AF3B-6D23-7EDB-4D77784036FD}"/>
               </a:ext>
             </a:extLst>
           </p:cNvPr>
@@ -6175,7 +6175,7 @@
           <p:cNvPr id="84" name="pattern">
             <a:extLst>
               <a:ext uri="{FF2B5EF4-FFF2-40B4-BE49-F238E27FC236}">
-                <a16:creationId xmlns:a16="http://schemas.microsoft.com/office/drawing/2014/main" id="{0F61A51F-3265-0151-1DBC-3A7187705CBA}"/>
+                <a16:creationId xmlns:a16="http://schemas.microsoft.com/office/drawing/2014/main" id="{862D6D4A-6353-24E5-9B0A-849A85609317}"/>
               </a:ext>
             </a:extLst>
           </p:cNvPr>
@@ -6243,7 +6243,7 @@
           <p:cNvPr id="85" name="pattern">
             <a:extLst>
               <a:ext uri="{FF2B5EF4-FFF2-40B4-BE49-F238E27FC236}">
-                <a16:creationId xmlns:a16="http://schemas.microsoft.com/office/drawing/2014/main" id="{EB19CD71-F658-1F98-56AC-2B4FE3426D2E}"/>
+                <a16:creationId xmlns:a16="http://schemas.microsoft.com/office/drawing/2014/main" id="{BDE0E1F0-AA79-9772-8D99-BD75FFF4D37D}"/>
               </a:ext>
             </a:extLst>
           </p:cNvPr>
@@ -6311,7 +6311,7 @@
           <p:cNvPr id="86" name="pattern">
             <a:extLst>
               <a:ext uri="{FF2B5EF4-FFF2-40B4-BE49-F238E27FC236}">
-                <a16:creationId xmlns:a16="http://schemas.microsoft.com/office/drawing/2014/main" id="{061CA265-F1B4-5B6F-257F-3DE3EBB6F12B}"/>
+                <a16:creationId xmlns:a16="http://schemas.microsoft.com/office/drawing/2014/main" id="{1CB9F99D-6CD8-90D6-AB4C-E6762ADAC3A6}"/>
               </a:ext>
             </a:extLst>
           </p:cNvPr>
@@ -6379,7 +6379,7 @@
           <p:cNvPr id="87" name="pattern">
             <a:extLst>
               <a:ext uri="{FF2B5EF4-FFF2-40B4-BE49-F238E27FC236}">
-                <a16:creationId xmlns:a16="http://schemas.microsoft.com/office/drawing/2014/main" id="{E870F069-7194-EF4E-4C4A-DAC99B25F551}"/>
+                <a16:creationId xmlns:a16="http://schemas.microsoft.com/office/drawing/2014/main" id="{11846CC8-05B8-A01A-2265-27E6F27378F0}"/>
               </a:ext>
             </a:extLst>
           </p:cNvPr>
@@ -6447,7 +6447,7 @@
           <p:cNvPr id="88" name="pattern">
             <a:extLst>
               <a:ext uri="{FF2B5EF4-FFF2-40B4-BE49-F238E27FC236}">
-                <a16:creationId xmlns:a16="http://schemas.microsoft.com/office/drawing/2014/main" id="{053A3E3F-75E4-42A4-976A-4AA76ECF1752}"/>
+                <a16:creationId xmlns:a16="http://schemas.microsoft.com/office/drawing/2014/main" id="{FF46B181-8074-76C0-7982-B579688924A3}"/>
               </a:ext>
             </a:extLst>
           </p:cNvPr>
@@ -6515,7 +6515,7 @@
           <p:cNvPr id="89" name="pattern">
             <a:extLst>
               <a:ext uri="{FF2B5EF4-FFF2-40B4-BE49-F238E27FC236}">
-                <a16:creationId xmlns:a16="http://schemas.microsoft.com/office/drawing/2014/main" id="{B237D000-B0D5-961E-E2AF-979310A31BAA}"/>
+                <a16:creationId xmlns:a16="http://schemas.microsoft.com/office/drawing/2014/main" id="{20E4E6F7-497C-AB32-26BB-DE93FDABFD9A}"/>
               </a:ext>
             </a:extLst>
           </p:cNvPr>
@@ -6583,7 +6583,7 @@
           <p:cNvPr id="90" name="pattern">
             <a:extLst>
               <a:ext uri="{FF2B5EF4-FFF2-40B4-BE49-F238E27FC236}">
-                <a16:creationId xmlns:a16="http://schemas.microsoft.com/office/drawing/2014/main" id="{95701CDD-F43A-835A-3D5B-C238AE8F9360}"/>
+                <a16:creationId xmlns:a16="http://schemas.microsoft.com/office/drawing/2014/main" id="{032DC292-1D0E-3F92-8772-2ABD84EBFA68}"/>
               </a:ext>
             </a:extLst>
           </p:cNvPr>
@@ -6651,7 +6651,7 @@
           <p:cNvPr id="91" name="pattern">
             <a:extLst>
               <a:ext uri="{FF2B5EF4-FFF2-40B4-BE49-F238E27FC236}">
-                <a16:creationId xmlns:a16="http://schemas.microsoft.com/office/drawing/2014/main" id="{46740CFB-DDA3-9768-363B-B77E1A76801B}"/>
+                <a16:creationId xmlns:a16="http://schemas.microsoft.com/office/drawing/2014/main" id="{2CAEE577-1434-B64F-4B5A-331157303DC5}"/>
               </a:ext>
             </a:extLst>
           </p:cNvPr>
@@ -6719,7 +6719,7 @@
           <p:cNvPr id="92" name="pattern">
             <a:extLst>
               <a:ext uri="{FF2B5EF4-FFF2-40B4-BE49-F238E27FC236}">
-                <a16:creationId xmlns:a16="http://schemas.microsoft.com/office/drawing/2014/main" id="{3E46C41D-FD54-BBEE-2841-C758A4285F84}"/>
+                <a16:creationId xmlns:a16="http://schemas.microsoft.com/office/drawing/2014/main" id="{D38B6C22-5AF9-58AD-432F-28D5D12C3C9D}"/>
               </a:ext>
             </a:extLst>
           </p:cNvPr>
@@ -6787,7 +6787,7 @@
           <p:cNvPr id="93" name="pattern">
             <a:extLst>
               <a:ext uri="{FF2B5EF4-FFF2-40B4-BE49-F238E27FC236}">
-                <a16:creationId xmlns:a16="http://schemas.microsoft.com/office/drawing/2014/main" id="{A5BA5891-62D4-59EA-3049-398AC11575BD}"/>
+                <a16:creationId xmlns:a16="http://schemas.microsoft.com/office/drawing/2014/main" id="{D8C26FBE-9BC7-D4CC-DE53-BAE0EAECEB42}"/>
               </a:ext>
             </a:extLst>
           </p:cNvPr>
@@ -6855,7 +6855,7 @@
           <p:cNvPr id="94" name="pattern">
             <a:extLst>
               <a:ext uri="{FF2B5EF4-FFF2-40B4-BE49-F238E27FC236}">
-                <a16:creationId xmlns:a16="http://schemas.microsoft.com/office/drawing/2014/main" id="{0CF62566-F2AA-A32D-99A8-83359AB20B93}"/>
+                <a16:creationId xmlns:a16="http://schemas.microsoft.com/office/drawing/2014/main" id="{636B9337-6360-D8DF-1D71-A7D8635FDDC7}"/>
               </a:ext>
             </a:extLst>
           </p:cNvPr>
@@ -6923,7 +6923,7 @@
           <p:cNvPr id="95" name="pattern">
             <a:extLst>
               <a:ext uri="{FF2B5EF4-FFF2-40B4-BE49-F238E27FC236}">
-                <a16:creationId xmlns:a16="http://schemas.microsoft.com/office/drawing/2014/main" id="{896283AA-DEEE-E38F-56FA-D20D87D92282}"/>
+                <a16:creationId xmlns:a16="http://schemas.microsoft.com/office/drawing/2014/main" id="{D448773E-B702-1667-5153-737B43FE8333}"/>
               </a:ext>
             </a:extLst>
           </p:cNvPr>
@@ -6991,7 +6991,7 @@
           <p:cNvPr id="96" name="pattern">
             <a:extLst>
               <a:ext uri="{FF2B5EF4-FFF2-40B4-BE49-F238E27FC236}">
-                <a16:creationId xmlns:a16="http://schemas.microsoft.com/office/drawing/2014/main" id="{04584CA2-2F18-A710-F666-EF7F413372F4}"/>
+                <a16:creationId xmlns:a16="http://schemas.microsoft.com/office/drawing/2014/main" id="{167C941F-900E-F7EB-124C-065792439A65}"/>
               </a:ext>
             </a:extLst>
           </p:cNvPr>
@@ -7059,7 +7059,7 @@
           <p:cNvPr id="97" name="pattern">
             <a:extLst>
               <a:ext uri="{FF2B5EF4-FFF2-40B4-BE49-F238E27FC236}">
-                <a16:creationId xmlns:a16="http://schemas.microsoft.com/office/drawing/2014/main" id="{BCACE44A-F953-E4DD-5FFA-0F5906CC2BC7}"/>
+                <a16:creationId xmlns:a16="http://schemas.microsoft.com/office/drawing/2014/main" id="{F82C1155-4DE6-B505-B55E-E70ED05D5948}"/>
               </a:ext>
             </a:extLst>
           </p:cNvPr>
@@ -7127,7 +7127,7 @@
           <p:cNvPr id="98" name="pattern">
             <a:extLst>
               <a:ext uri="{FF2B5EF4-FFF2-40B4-BE49-F238E27FC236}">
-                <a16:creationId xmlns:a16="http://schemas.microsoft.com/office/drawing/2014/main" id="{B9B0E567-2599-6069-701D-53664558CF5D}"/>
+                <a16:creationId xmlns:a16="http://schemas.microsoft.com/office/drawing/2014/main" id="{C95AFFEF-E350-F49C-46D6-31DAAE609A98}"/>
               </a:ext>
             </a:extLst>
           </p:cNvPr>
@@ -7195,7 +7195,7 @@
           <p:cNvPr id="99" name="pattern">
             <a:extLst>
               <a:ext uri="{FF2B5EF4-FFF2-40B4-BE49-F238E27FC236}">
-                <a16:creationId xmlns:a16="http://schemas.microsoft.com/office/drawing/2014/main" id="{26ACA44F-5DF3-68D1-F6AC-29008E80077F}"/>
+                <a16:creationId xmlns:a16="http://schemas.microsoft.com/office/drawing/2014/main" id="{8FD79F3E-B162-6935-C476-120BCE38CD0B}"/>
               </a:ext>
             </a:extLst>
           </p:cNvPr>
@@ -7263,7 +7263,7 @@
           <p:cNvPr id="100" name="pattern">
             <a:extLst>
               <a:ext uri="{FF2B5EF4-FFF2-40B4-BE49-F238E27FC236}">
-                <a16:creationId xmlns:a16="http://schemas.microsoft.com/office/drawing/2014/main" id="{11131227-FB45-2E68-C408-27F3A3D7BDA7}"/>
+                <a16:creationId xmlns:a16="http://schemas.microsoft.com/office/drawing/2014/main" id="{E71365FE-CFD2-4E9D-CC97-9F0EFA4470A2}"/>
               </a:ext>
             </a:extLst>
           </p:cNvPr>
@@ -7331,7 +7331,7 @@
           <p:cNvPr id="101" name="pattern">
             <a:extLst>
               <a:ext uri="{FF2B5EF4-FFF2-40B4-BE49-F238E27FC236}">
-                <a16:creationId xmlns:a16="http://schemas.microsoft.com/office/drawing/2014/main" id="{5A63D828-3CB5-5EE6-D294-B853ED021D1A}"/>
+                <a16:creationId xmlns:a16="http://schemas.microsoft.com/office/drawing/2014/main" id="{8CBA3B1B-514C-6F66-054E-7BA0BE391622}"/>
               </a:ext>
             </a:extLst>
           </p:cNvPr>
@@ -7399,7 +7399,7 @@
           <p:cNvPr id="102" name="pattern">
             <a:extLst>
               <a:ext uri="{FF2B5EF4-FFF2-40B4-BE49-F238E27FC236}">
-                <a16:creationId xmlns:a16="http://schemas.microsoft.com/office/drawing/2014/main" id="{EACA41DC-0DF2-241D-CEDA-EE5000C24239}"/>
+                <a16:creationId xmlns:a16="http://schemas.microsoft.com/office/drawing/2014/main" id="{3D1FBD9B-42DD-2341-7D70-4D206781E847}"/>
               </a:ext>
             </a:extLst>
           </p:cNvPr>
@@ -7467,7 +7467,7 @@
           <p:cNvPr id="103" name="pattern">
             <a:extLst>
               <a:ext uri="{FF2B5EF4-FFF2-40B4-BE49-F238E27FC236}">
-                <a16:creationId xmlns:a16="http://schemas.microsoft.com/office/drawing/2014/main" id="{95A86CA9-4DD6-87A7-3C73-A593AB4336A7}"/>
+                <a16:creationId xmlns:a16="http://schemas.microsoft.com/office/drawing/2014/main" id="{AADA1E54-7FE9-9AB1-C4D1-80BE7312CADD}"/>
               </a:ext>
             </a:extLst>
           </p:cNvPr>
@@ -7535,7 +7535,7 @@
           <p:cNvPr id="104" name="pattern">
             <a:extLst>
               <a:ext uri="{FF2B5EF4-FFF2-40B4-BE49-F238E27FC236}">
-                <a16:creationId xmlns:a16="http://schemas.microsoft.com/office/drawing/2014/main" id="{AFAFCAC7-25C9-785C-8399-3EA547A330A6}"/>
+                <a16:creationId xmlns:a16="http://schemas.microsoft.com/office/drawing/2014/main" id="{71D754A8-E2AA-1726-299B-101BE1AAFBE9}"/>
               </a:ext>
             </a:extLst>
           </p:cNvPr>
@@ -7603,7 +7603,7 @@
           <p:cNvPr id="105" name="pattern">
             <a:extLst>
               <a:ext uri="{FF2B5EF4-FFF2-40B4-BE49-F238E27FC236}">
-                <a16:creationId xmlns:a16="http://schemas.microsoft.com/office/drawing/2014/main" id="{85CE553F-010A-C6F4-6A42-F5C101956E5F}"/>
+                <a16:creationId xmlns:a16="http://schemas.microsoft.com/office/drawing/2014/main" id="{97389248-B720-CD8B-355D-34BE5274A14F}"/>
               </a:ext>
             </a:extLst>
           </p:cNvPr>
@@ -7671,7 +7671,7 @@
           <p:cNvPr id="106" name="pattern">
             <a:extLst>
               <a:ext uri="{FF2B5EF4-FFF2-40B4-BE49-F238E27FC236}">
-                <a16:creationId xmlns:a16="http://schemas.microsoft.com/office/drawing/2014/main" id="{DBCDFD0C-8757-C314-2F90-309D82BEB9D4}"/>
+                <a16:creationId xmlns:a16="http://schemas.microsoft.com/office/drawing/2014/main" id="{C06912C2-A3E2-A485-D103-5BF72781F8CF}"/>
               </a:ext>
             </a:extLst>
           </p:cNvPr>
@@ -7739,7 +7739,7 @@
           <p:cNvPr id="107" name="pattern">
             <a:extLst>
               <a:ext uri="{FF2B5EF4-FFF2-40B4-BE49-F238E27FC236}">
-                <a16:creationId xmlns:a16="http://schemas.microsoft.com/office/drawing/2014/main" id="{17EF8D34-4807-0F62-2F61-E9AD88766568}"/>
+                <a16:creationId xmlns:a16="http://schemas.microsoft.com/office/drawing/2014/main" id="{4AEB9DB2-1693-DA4A-72CD-7A396EA34F0E}"/>
               </a:ext>
             </a:extLst>
           </p:cNvPr>
@@ -7807,7 +7807,7 @@
           <p:cNvPr id="108" name="pattern">
             <a:extLst>
               <a:ext uri="{FF2B5EF4-FFF2-40B4-BE49-F238E27FC236}">
-                <a16:creationId xmlns:a16="http://schemas.microsoft.com/office/drawing/2014/main" id="{6A8B7AFC-5FCC-5413-0436-A14A6B601735}"/>
+                <a16:creationId xmlns:a16="http://schemas.microsoft.com/office/drawing/2014/main" id="{D2DF27A7-5BD0-27F0-2CB6-E3218F39B4F4}"/>
               </a:ext>
             </a:extLst>
           </p:cNvPr>
@@ -7875,7 +7875,7 @@
           <p:cNvPr id="109" name="pattern">
             <a:extLst>
               <a:ext uri="{FF2B5EF4-FFF2-40B4-BE49-F238E27FC236}">
-                <a16:creationId xmlns:a16="http://schemas.microsoft.com/office/drawing/2014/main" id="{3C9D52CC-A282-0FE6-54E4-5BB82E9245B0}"/>
+                <a16:creationId xmlns:a16="http://schemas.microsoft.com/office/drawing/2014/main" id="{5DFDA868-0BC1-3419-B025-DD23D985D65F}"/>
               </a:ext>
             </a:extLst>
           </p:cNvPr>
@@ -7943,7 +7943,7 @@
           <p:cNvPr id="110" name="pattern">
             <a:extLst>
               <a:ext uri="{FF2B5EF4-FFF2-40B4-BE49-F238E27FC236}">
-                <a16:creationId xmlns:a16="http://schemas.microsoft.com/office/drawing/2014/main" id="{0A03940D-0878-DE52-0CA4-8182A29C60C8}"/>
+                <a16:creationId xmlns:a16="http://schemas.microsoft.com/office/drawing/2014/main" id="{858FB580-E8B9-74C0-E931-2474A0EAE253}"/>
               </a:ext>
             </a:extLst>
           </p:cNvPr>
@@ -8011,7 +8011,7 @@
           <p:cNvPr id="111" name="pattern">
             <a:extLst>
               <a:ext uri="{FF2B5EF4-FFF2-40B4-BE49-F238E27FC236}">
-                <a16:creationId xmlns:a16="http://schemas.microsoft.com/office/drawing/2014/main" id="{1931DAEE-54DA-2F3E-30C8-BED8874ACED2}"/>
+                <a16:creationId xmlns:a16="http://schemas.microsoft.com/office/drawing/2014/main" id="{4A54C76C-B216-8ED8-921A-85C73432D49A}"/>
               </a:ext>
             </a:extLst>
           </p:cNvPr>
@@ -8079,7 +8079,7 @@
           <p:cNvPr id="112" name="pattern">
             <a:extLst>
               <a:ext uri="{FF2B5EF4-FFF2-40B4-BE49-F238E27FC236}">
-                <a16:creationId xmlns:a16="http://schemas.microsoft.com/office/drawing/2014/main" id="{8CDC7740-6F09-1998-2372-3B7FEF2DD2C8}"/>
+                <a16:creationId xmlns:a16="http://schemas.microsoft.com/office/drawing/2014/main" id="{5D1EA242-2328-F700-E412-322D7F411DB0}"/>
               </a:ext>
             </a:extLst>
           </p:cNvPr>
@@ -8147,7 +8147,7 @@
           <p:cNvPr id="113" name="pattern">
             <a:extLst>
               <a:ext uri="{FF2B5EF4-FFF2-40B4-BE49-F238E27FC236}">
-                <a16:creationId xmlns:a16="http://schemas.microsoft.com/office/drawing/2014/main" id="{C08CE613-E40B-DDDC-030E-F209F7C3180E}"/>
+                <a16:creationId xmlns:a16="http://schemas.microsoft.com/office/drawing/2014/main" id="{2704BBCB-8E15-62C0-B1FD-04FA022CABFD}"/>
               </a:ext>
             </a:extLst>
           </p:cNvPr>
@@ -8215,7 +8215,7 @@
           <p:cNvPr id="114" name="pattern">
             <a:extLst>
               <a:ext uri="{FF2B5EF4-FFF2-40B4-BE49-F238E27FC236}">
-                <a16:creationId xmlns:a16="http://schemas.microsoft.com/office/drawing/2014/main" id="{E6AC18E0-B25E-40E3-EEDF-BE7B5E0DEB5F}"/>
+                <a16:creationId xmlns:a16="http://schemas.microsoft.com/office/drawing/2014/main" id="{EF0EFCEC-749B-47A7-E449-613E1F3E6669}"/>
               </a:ext>
             </a:extLst>
           </p:cNvPr>
@@ -8283,7 +8283,7 @@
           <p:cNvPr id="115" name="pattern">
             <a:extLst>
               <a:ext uri="{FF2B5EF4-FFF2-40B4-BE49-F238E27FC236}">
-                <a16:creationId xmlns:a16="http://schemas.microsoft.com/office/drawing/2014/main" id="{5CAE0109-B00F-FFF2-1485-5149B6A6C63F}"/>
+                <a16:creationId xmlns:a16="http://schemas.microsoft.com/office/drawing/2014/main" id="{BF06EDE9-B535-C1F1-362B-1EC98B2FDD17}"/>
               </a:ext>
             </a:extLst>
           </p:cNvPr>
@@ -8351,7 +8351,7 @@
           <p:cNvPr id="116" name="pattern">
             <a:extLst>
               <a:ext uri="{FF2B5EF4-FFF2-40B4-BE49-F238E27FC236}">
-                <a16:creationId xmlns:a16="http://schemas.microsoft.com/office/drawing/2014/main" id="{1B2588E2-31A6-F55A-6AB1-A440799A982C}"/>
+                <a16:creationId xmlns:a16="http://schemas.microsoft.com/office/drawing/2014/main" id="{3F163119-5FE7-FF63-1C25-56A00EF699A6}"/>
               </a:ext>
             </a:extLst>
           </p:cNvPr>
@@ -8419,7 +8419,7 @@
           <p:cNvPr id="117" name="pattern">
             <a:extLst>
               <a:ext uri="{FF2B5EF4-FFF2-40B4-BE49-F238E27FC236}">
-                <a16:creationId xmlns:a16="http://schemas.microsoft.com/office/drawing/2014/main" id="{B993F8ED-42B4-A35C-3516-489B9DA240D6}"/>
+                <a16:creationId xmlns:a16="http://schemas.microsoft.com/office/drawing/2014/main" id="{64E00300-D914-9672-0A58-E902F0EA52B4}"/>
               </a:ext>
             </a:extLst>
           </p:cNvPr>
@@ -8487,7 +8487,7 @@
           <p:cNvPr id="118" name="pattern">
             <a:extLst>
               <a:ext uri="{FF2B5EF4-FFF2-40B4-BE49-F238E27FC236}">
-                <a16:creationId xmlns:a16="http://schemas.microsoft.com/office/drawing/2014/main" id="{651BF5F6-89BD-5FB6-BA43-4FAF60936967}"/>
+                <a16:creationId xmlns:a16="http://schemas.microsoft.com/office/drawing/2014/main" id="{9C7621F5-448B-F7D4-8854-63B27E102344}"/>
               </a:ext>
             </a:extLst>
           </p:cNvPr>
@@ -8555,7 +8555,7 @@
           <p:cNvPr id="119" name="pattern">
             <a:extLst>
               <a:ext uri="{FF2B5EF4-FFF2-40B4-BE49-F238E27FC236}">
-                <a16:creationId xmlns:a16="http://schemas.microsoft.com/office/drawing/2014/main" id="{79C07C36-B069-7B13-A7BC-9772DB3F9ED3}"/>
+                <a16:creationId xmlns:a16="http://schemas.microsoft.com/office/drawing/2014/main" id="{77C059CD-AD8A-DB4B-D46A-8568AF8B3CD4}"/>
               </a:ext>
             </a:extLst>
           </p:cNvPr>
@@ -8623,7 +8623,7 @@
           <p:cNvPr id="120" name="pattern">
             <a:extLst>
               <a:ext uri="{FF2B5EF4-FFF2-40B4-BE49-F238E27FC236}">
-                <a16:creationId xmlns:a16="http://schemas.microsoft.com/office/drawing/2014/main" id="{D487B95A-DACB-7417-6B90-8B813C45595C}"/>
+                <a16:creationId xmlns:a16="http://schemas.microsoft.com/office/drawing/2014/main" id="{D42069A2-521A-89DE-76E5-034707DB9392}"/>
               </a:ext>
             </a:extLst>
           </p:cNvPr>
@@ -8691,7 +8691,7 @@
           <p:cNvPr id="121" name="pattern">
             <a:extLst>
               <a:ext uri="{FF2B5EF4-FFF2-40B4-BE49-F238E27FC236}">
-                <a16:creationId xmlns:a16="http://schemas.microsoft.com/office/drawing/2014/main" id="{1FCC4E99-4F16-E2D2-BBA9-B3749D4AAD3B}"/>
+                <a16:creationId xmlns:a16="http://schemas.microsoft.com/office/drawing/2014/main" id="{6716FEFC-C598-F549-78DF-4CE0B40ABB11}"/>
               </a:ext>
             </a:extLst>
           </p:cNvPr>
@@ -8759,7 +8759,7 @@
           <p:cNvPr id="122" name="pattern">
             <a:extLst>
               <a:ext uri="{FF2B5EF4-FFF2-40B4-BE49-F238E27FC236}">
-                <a16:creationId xmlns:a16="http://schemas.microsoft.com/office/drawing/2014/main" id="{00D00FE8-4AAE-8DDA-FDC5-70B0A4AE80DF}"/>
+                <a16:creationId xmlns:a16="http://schemas.microsoft.com/office/drawing/2014/main" id="{572D3609-1FA0-0039-B742-F287DEE66CC2}"/>
               </a:ext>
             </a:extLst>
           </p:cNvPr>
@@ -8827,7 +8827,7 @@
           <p:cNvPr id="123" name="pattern">
             <a:extLst>
               <a:ext uri="{FF2B5EF4-FFF2-40B4-BE49-F238E27FC236}">
-                <a16:creationId xmlns:a16="http://schemas.microsoft.com/office/drawing/2014/main" id="{3149C6FF-C828-C227-6AB2-B8C44B6C9AD6}"/>
+                <a16:creationId xmlns:a16="http://schemas.microsoft.com/office/drawing/2014/main" id="{BF2E7FE1-7202-FF30-9721-1777B8F7E613}"/>
               </a:ext>
             </a:extLst>
           </p:cNvPr>
@@ -8895,7 +8895,7 @@
           <p:cNvPr id="124" name="pattern">
             <a:extLst>
               <a:ext uri="{FF2B5EF4-FFF2-40B4-BE49-F238E27FC236}">
-                <a16:creationId xmlns:a16="http://schemas.microsoft.com/office/drawing/2014/main" id="{DDC54702-A66A-9B63-B585-B1D7482B1F20}"/>
+                <a16:creationId xmlns:a16="http://schemas.microsoft.com/office/drawing/2014/main" id="{11170847-A9D8-47E5-3929-DA2742B3DEDA}"/>
               </a:ext>
             </a:extLst>
           </p:cNvPr>
@@ -8963,7 +8963,7 @@
           <p:cNvPr id="125" name="pattern">
             <a:extLst>
               <a:ext uri="{FF2B5EF4-FFF2-40B4-BE49-F238E27FC236}">
-                <a16:creationId xmlns:a16="http://schemas.microsoft.com/office/drawing/2014/main" id="{BA15B202-CE6C-B353-8799-52EE89A85A30}"/>
+                <a16:creationId xmlns:a16="http://schemas.microsoft.com/office/drawing/2014/main" id="{7FE87AC3-4F8D-81BC-E973-299E4455BCC3}"/>
               </a:ext>
             </a:extLst>
           </p:cNvPr>
@@ -9031,7 +9031,7 @@
           <p:cNvPr id="126" name="pattern">
             <a:extLst>
               <a:ext uri="{FF2B5EF4-FFF2-40B4-BE49-F238E27FC236}">
-                <a16:creationId xmlns:a16="http://schemas.microsoft.com/office/drawing/2014/main" id="{EBF73029-DBF1-ABD8-279F-ACE81B794084}"/>
+                <a16:creationId xmlns:a16="http://schemas.microsoft.com/office/drawing/2014/main" id="{A2BA79E4-08D5-0830-CD9C-FD6EAF59DCAB}"/>
               </a:ext>
             </a:extLst>
           </p:cNvPr>
@@ -9099,7 +9099,7 @@
           <p:cNvPr id="127" name="pattern">
             <a:extLst>
               <a:ext uri="{FF2B5EF4-FFF2-40B4-BE49-F238E27FC236}">
-                <a16:creationId xmlns:a16="http://schemas.microsoft.com/office/drawing/2014/main" id="{52DC70A4-A4E4-9DCF-48BE-D2077F6B06C8}"/>
+                <a16:creationId xmlns:a16="http://schemas.microsoft.com/office/drawing/2014/main" id="{0EA040E1-2BD0-B791-880D-F3F976764067}"/>
               </a:ext>
             </a:extLst>
           </p:cNvPr>
@@ -9167,7 +9167,7 @@
           <p:cNvPr id="128" name="pattern">
             <a:extLst>
               <a:ext uri="{FF2B5EF4-FFF2-40B4-BE49-F238E27FC236}">
-                <a16:creationId xmlns:a16="http://schemas.microsoft.com/office/drawing/2014/main" id="{93EF3EA0-EC91-906C-4913-67864F2289D6}"/>
+                <a16:creationId xmlns:a16="http://schemas.microsoft.com/office/drawing/2014/main" id="{A01B7E2D-480D-0678-0ECE-5D378BBB9700}"/>
               </a:ext>
             </a:extLst>
           </p:cNvPr>
@@ -9235,7 +9235,7 @@
           <p:cNvPr id="129" name="pattern">
             <a:extLst>
               <a:ext uri="{FF2B5EF4-FFF2-40B4-BE49-F238E27FC236}">
-                <a16:creationId xmlns:a16="http://schemas.microsoft.com/office/drawing/2014/main" id="{03BB8DF9-3145-38C1-4F02-526F0DF1ECB9}"/>
+                <a16:creationId xmlns:a16="http://schemas.microsoft.com/office/drawing/2014/main" id="{F988B447-1847-2677-DEB1-27E2F0C36290}"/>
               </a:ext>
             </a:extLst>
           </p:cNvPr>
@@ -9303,7 +9303,7 @@
           <p:cNvPr id="130" name="pattern">
             <a:extLst>
               <a:ext uri="{FF2B5EF4-FFF2-40B4-BE49-F238E27FC236}">
-                <a16:creationId xmlns:a16="http://schemas.microsoft.com/office/drawing/2014/main" id="{FC573438-6D1B-B70D-09C5-1382B27DBF0D}"/>
+                <a16:creationId xmlns:a16="http://schemas.microsoft.com/office/drawing/2014/main" id="{E99D41E0-BB11-84B9-9D52-596F73C3F513}"/>
               </a:ext>
             </a:extLst>
           </p:cNvPr>
@@ -9371,7 +9371,7 @@
           <p:cNvPr id="131" name="pattern">
             <a:extLst>
               <a:ext uri="{FF2B5EF4-FFF2-40B4-BE49-F238E27FC236}">
-                <a16:creationId xmlns:a16="http://schemas.microsoft.com/office/drawing/2014/main" id="{65D78212-CE0A-F036-7FD7-F327F8A1C829}"/>
+                <a16:creationId xmlns:a16="http://schemas.microsoft.com/office/drawing/2014/main" id="{6744E2EF-65F8-7F84-F016-347F0FD6102B}"/>
               </a:ext>
             </a:extLst>
           </p:cNvPr>
@@ -9439,7 +9439,7 @@
           <p:cNvPr id="132" name="pattern">
             <a:extLst>
               <a:ext uri="{FF2B5EF4-FFF2-40B4-BE49-F238E27FC236}">
-                <a16:creationId xmlns:a16="http://schemas.microsoft.com/office/drawing/2014/main" id="{0782694E-3511-445A-4A30-763B1C2B279E}"/>
+                <a16:creationId xmlns:a16="http://schemas.microsoft.com/office/drawing/2014/main" id="{91E0D4DF-3C4F-0CF1-3AD5-EB8D1AD2EEFF}"/>
               </a:ext>
             </a:extLst>
           </p:cNvPr>
@@ -9507,7 +9507,7 @@
           <p:cNvPr id="133" name="pattern">
             <a:extLst>
               <a:ext uri="{FF2B5EF4-FFF2-40B4-BE49-F238E27FC236}">
-                <a16:creationId xmlns:a16="http://schemas.microsoft.com/office/drawing/2014/main" id="{82642650-7F74-230C-E9BD-9107C427B953}"/>
+                <a16:creationId xmlns:a16="http://schemas.microsoft.com/office/drawing/2014/main" id="{5D4DA2B1-2C38-1E8C-440A-F156F16DF994}"/>
               </a:ext>
             </a:extLst>
           </p:cNvPr>
@@ -9575,7 +9575,7 @@
           <p:cNvPr id="134" name="pattern">
             <a:extLst>
               <a:ext uri="{FF2B5EF4-FFF2-40B4-BE49-F238E27FC236}">
-                <a16:creationId xmlns:a16="http://schemas.microsoft.com/office/drawing/2014/main" id="{5E0BB524-BD93-312B-2A86-129412B9A0BB}"/>
+                <a16:creationId xmlns:a16="http://schemas.microsoft.com/office/drawing/2014/main" id="{2EFC9EC0-B81C-DC59-ACF9-A92FD2C8E526}"/>
               </a:ext>
             </a:extLst>
           </p:cNvPr>
@@ -9643,7 +9643,7 @@
           <p:cNvPr id="135" name="pattern">
             <a:extLst>
               <a:ext uri="{FF2B5EF4-FFF2-40B4-BE49-F238E27FC236}">
-                <a16:creationId xmlns:a16="http://schemas.microsoft.com/office/drawing/2014/main" id="{08304906-0056-7961-7EE0-8C1A00F903A0}"/>
+                <a16:creationId xmlns:a16="http://schemas.microsoft.com/office/drawing/2014/main" id="{E929E580-C149-60F4-9B11-6E427C8485D3}"/>
               </a:ext>
             </a:extLst>
           </p:cNvPr>
@@ -9709,7 +9709,7 @@
     </p:spTree>
     <p:extLst>
       <p:ext uri="{BB962C8B-B14F-4D97-AF65-F5344CB8AC3E}">
-        <p14:creationId xmlns:p14="http://schemas.microsoft.com/office/powerpoint/2010/main" val="2221650419"/>
+        <p14:creationId xmlns:p14="http://schemas.microsoft.com/office/powerpoint/2010/main" val="2482419392"/>
       </p:ext>
     </p:extLst>
   </p:cSld>
@@ -9741,7 +9741,7 @@
           <p:cNvPr id="7" name="creative_background">
             <a:extLst>
               <a:ext uri="{FF2B5EF4-FFF2-40B4-BE49-F238E27FC236}">
-                <a16:creationId xmlns:a16="http://schemas.microsoft.com/office/drawing/2014/main" id="{8E5CBF7E-C315-554E-F454-61AF6CCB8149}"/>
+                <a16:creationId xmlns:a16="http://schemas.microsoft.com/office/drawing/2014/main" id="{22B3ACFC-3F8C-86B3-1C5A-EB051997E852}"/>
               </a:ext>
             </a:extLst>
           </p:cNvPr>
@@ -9824,9 +9824,9 @@
           <a:bodyPr/>
           <a:lstStyle/>
           <a:p>
-            <a:fld id="{4354DB14-F9AE-4C12-8CFE-33ABF7B568CC}" type="datetimeFigureOut">
+            <a:fld id="{69C9F4DC-D411-4651-9AAC-29900672A9A6}" type="datetimeFigureOut">
               <a:rPr lang="en-US" smtClean="0"/>
-              <a:t>10/3/2026</a:t>
+              <a:t>10/4/2026</a:t>
             </a:fld>
             <a:endParaRPr lang="en-US"/>
           </a:p>
@@ -9866,7 +9866,7 @@
           <a:bodyPr/>
           <a:lstStyle/>
           <a:p>
-            <a:fld id="{74A457B9-11F0-4EFD-A461-9DC8C80A1D31}" type="slidenum">
+            <a:fld id="{B2681015-3E44-49AF-A930-B36E5E8634EC}" type="slidenum">
               <a:rPr lang="en-US" smtClean="0"/>
               <a:t>‹#›</a:t>
             </a:fld>
@@ -9879,7 +9879,7 @@
           <p:cNvPr id="8" name="item_1_title">
             <a:extLst>
               <a:ext uri="{FF2B5EF4-FFF2-40B4-BE49-F238E27FC236}">
-                <a16:creationId xmlns:a16="http://schemas.microsoft.com/office/drawing/2014/main" id="{B55A7DEB-BE55-4A3E-617F-66CC004E0B7C}"/>
+                <a16:creationId xmlns:a16="http://schemas.microsoft.com/office/drawing/2014/main" id="{502E1599-CDA9-18A9-D75C-39E37BEE2202}"/>
               </a:ext>
             </a:extLst>
           </p:cNvPr>
@@ -9929,7 +9929,7 @@
           <p:cNvPr id="9" name="item_1">
             <a:extLst>
               <a:ext uri="{FF2B5EF4-FFF2-40B4-BE49-F238E27FC236}">
-                <a16:creationId xmlns:a16="http://schemas.microsoft.com/office/drawing/2014/main" id="{B972C491-685F-8AA0-C456-FBA1ADDFA2C1}"/>
+                <a16:creationId xmlns:a16="http://schemas.microsoft.com/office/drawing/2014/main" id="{5A26642D-7AF7-5227-E272-9693155A7B22}"/>
               </a:ext>
             </a:extLst>
           </p:cNvPr>
@@ -9977,7 +9977,7 @@
           <p:cNvPr id="10" name="item_2_title">
             <a:extLst>
               <a:ext uri="{FF2B5EF4-FFF2-40B4-BE49-F238E27FC236}">
-                <a16:creationId xmlns:a16="http://schemas.microsoft.com/office/drawing/2014/main" id="{46DA52B1-5908-E6CB-D821-082BBCBE0D5D}"/>
+                <a16:creationId xmlns:a16="http://schemas.microsoft.com/office/drawing/2014/main" id="{1FF45BE1-8B46-0718-061D-830FE8C62DB6}"/>
               </a:ext>
             </a:extLst>
           </p:cNvPr>
@@ -10030,7 +10030,7 @@
           <p:cNvPr id="11" name="item_2">
             <a:extLst>
               <a:ext uri="{FF2B5EF4-FFF2-40B4-BE49-F238E27FC236}">
-                <a16:creationId xmlns:a16="http://schemas.microsoft.com/office/drawing/2014/main" id="{752667A3-910B-AEB3-C739-32A2A7B6827D}"/>
+                <a16:creationId xmlns:a16="http://schemas.microsoft.com/office/drawing/2014/main" id="{9A3CD508-7ACC-531F-81EB-8388EEB2BAF1}"/>
               </a:ext>
             </a:extLst>
           </p:cNvPr>
@@ -10078,7 +10078,7 @@
           <p:cNvPr id="12" name="item_3_title">
             <a:extLst>
               <a:ext uri="{FF2B5EF4-FFF2-40B4-BE49-F238E27FC236}">
-                <a16:creationId xmlns:a16="http://schemas.microsoft.com/office/drawing/2014/main" id="{96751F8B-7DF8-A428-C504-E9E4C172E5A0}"/>
+                <a16:creationId xmlns:a16="http://schemas.microsoft.com/office/drawing/2014/main" id="{5676C660-2AAB-C262-7A33-B7BCD7478134}"/>
               </a:ext>
             </a:extLst>
           </p:cNvPr>
@@ -10131,7 +10131,7 @@
           <p:cNvPr id="13" name="item_3">
             <a:extLst>
               <a:ext uri="{FF2B5EF4-FFF2-40B4-BE49-F238E27FC236}">
-                <a16:creationId xmlns:a16="http://schemas.microsoft.com/office/drawing/2014/main" id="{5B4C01AA-3CF5-5942-F327-07AD964EDA71}"/>
+                <a16:creationId xmlns:a16="http://schemas.microsoft.com/office/drawing/2014/main" id="{25F45645-39D5-007A-ABBB-98DE1D08579A}"/>
               </a:ext>
             </a:extLst>
           </p:cNvPr>
@@ -10179,7 +10179,7 @@
           <p:cNvPr id="14" name="item_4_title">
             <a:extLst>
               <a:ext uri="{FF2B5EF4-FFF2-40B4-BE49-F238E27FC236}">
-                <a16:creationId xmlns:a16="http://schemas.microsoft.com/office/drawing/2014/main" id="{45568E41-5E85-612C-AF5D-E9E923874643}"/>
+                <a16:creationId xmlns:a16="http://schemas.microsoft.com/office/drawing/2014/main" id="{3AEFA24C-F356-FB78-B597-F79EAD7E5798}"/>
               </a:ext>
             </a:extLst>
           </p:cNvPr>
@@ -10232,7 +10232,7 @@
           <p:cNvPr id="15" name="item_4">
             <a:extLst>
               <a:ext uri="{FF2B5EF4-FFF2-40B4-BE49-F238E27FC236}">
-                <a16:creationId xmlns:a16="http://schemas.microsoft.com/office/drawing/2014/main" id="{D0068E56-0819-EDDE-A889-CAB642CB3D79}"/>
+                <a16:creationId xmlns:a16="http://schemas.microsoft.com/office/drawing/2014/main" id="{616F7E8A-8AF2-4A67-45EF-06FA91653AD7}"/>
               </a:ext>
             </a:extLst>
           </p:cNvPr>
@@ -10280,7 +10280,7 @@
           <p:cNvPr id="16" name="source">
             <a:extLst>
               <a:ext uri="{FF2B5EF4-FFF2-40B4-BE49-F238E27FC236}">
-                <a16:creationId xmlns:a16="http://schemas.microsoft.com/office/drawing/2014/main" id="{185CD083-5D5C-B23E-1433-14C4CC54004A}"/>
+                <a16:creationId xmlns:a16="http://schemas.microsoft.com/office/drawing/2014/main" id="{1458E376-AB48-32FE-3415-0C63D2C36C32}"/>
               </a:ext>
             </a:extLst>
           </p:cNvPr>
@@ -10335,7 +10335,7 @@
     </p:spTree>
     <p:extLst>
       <p:ext uri="{BB962C8B-B14F-4D97-AF65-F5344CB8AC3E}">
-        <p14:creationId xmlns:p14="http://schemas.microsoft.com/office/powerpoint/2010/main" val="754532526"/>
+        <p14:creationId xmlns:p14="http://schemas.microsoft.com/office/powerpoint/2010/main" val="2845869218"/>
       </p:ext>
     </p:extLst>
   </p:cSld>
@@ -10367,7 +10367,7 @@
           <p:cNvPr id="7" name="creative_background">
             <a:extLst>
               <a:ext uri="{FF2B5EF4-FFF2-40B4-BE49-F238E27FC236}">
-                <a16:creationId xmlns:a16="http://schemas.microsoft.com/office/drawing/2014/main" id="{1899E50C-C1CB-AFBD-1FDA-4709F5690EB3}"/>
+                <a16:creationId xmlns:a16="http://schemas.microsoft.com/office/drawing/2014/main" id="{C54ADB46-1801-65C9-8566-AAC5B257E9D6}"/>
               </a:ext>
             </a:extLst>
           </p:cNvPr>
@@ -10450,9 +10450,9 @@
           <a:bodyPr/>
           <a:lstStyle/>
           <a:p>
-            <a:fld id="{4354DB14-F9AE-4C12-8CFE-33ABF7B568CC}" type="datetimeFigureOut">
+            <a:fld id="{69C9F4DC-D411-4651-9AAC-29900672A9A6}" type="datetimeFigureOut">
               <a:rPr lang="en-US" smtClean="0"/>
-              <a:t>10/3/2026</a:t>
+              <a:t>10/4/2026</a:t>
             </a:fld>
             <a:endParaRPr lang="en-US"/>
           </a:p>
@@ -10492,7 +10492,7 @@
           <a:bodyPr/>
           <a:lstStyle/>
           <a:p>
-            <a:fld id="{74A457B9-11F0-4EFD-A461-9DC8C80A1D31}" type="slidenum">
+            <a:fld id="{B2681015-3E44-49AF-A930-B36E5E8634EC}" type="slidenum">
               <a:rPr lang="en-US" smtClean="0"/>
               <a:t>‹#›</a:t>
             </a:fld>
@@ -10505,7 +10505,7 @@
           <p:cNvPr id="8" name="body">
             <a:extLst>
               <a:ext uri="{FF2B5EF4-FFF2-40B4-BE49-F238E27FC236}">
-                <a16:creationId xmlns:a16="http://schemas.microsoft.com/office/drawing/2014/main" id="{B2F6FA52-7DF2-9751-1A64-587CD6FE503C}"/>
+                <a16:creationId xmlns:a16="http://schemas.microsoft.com/office/drawing/2014/main" id="{CB962192-F955-2BB9-6762-7F2E3023172F}"/>
               </a:ext>
             </a:extLst>
           </p:cNvPr>
@@ -10550,7 +10550,7 @@
           <p:cNvPr id="9" name="source">
             <a:extLst>
               <a:ext uri="{FF2B5EF4-FFF2-40B4-BE49-F238E27FC236}">
-                <a16:creationId xmlns:a16="http://schemas.microsoft.com/office/drawing/2014/main" id="{0D8271BB-B535-467E-8F16-82ECD77D66F6}"/>
+                <a16:creationId xmlns:a16="http://schemas.microsoft.com/office/drawing/2014/main" id="{1BFAE2CB-4E82-64D4-C9D7-03411A3AADE6}"/>
               </a:ext>
             </a:extLst>
           </p:cNvPr>
@@ -10605,7 +10605,7 @@
     </p:spTree>
     <p:extLst>
       <p:ext uri="{BB962C8B-B14F-4D97-AF65-F5344CB8AC3E}">
-        <p14:creationId xmlns:p14="http://schemas.microsoft.com/office/powerpoint/2010/main" val="3338348518"/>
+        <p14:creationId xmlns:p14="http://schemas.microsoft.com/office/powerpoint/2010/main" val="2190575840"/>
       </p:ext>
     </p:extLst>
   </p:cSld>
@@ -10637,7 +10637,7 @@
           <p:cNvPr id="7" name="creative_background">
             <a:extLst>
               <a:ext uri="{FF2B5EF4-FFF2-40B4-BE49-F238E27FC236}">
-                <a16:creationId xmlns:a16="http://schemas.microsoft.com/office/drawing/2014/main" id="{93B5E563-29E5-1032-B627-37C9BA7F6D6E}"/>
+                <a16:creationId xmlns:a16="http://schemas.microsoft.com/office/drawing/2014/main" id="{37BACC34-0A07-B393-728F-D127EFAB48F3}"/>
               </a:ext>
             </a:extLst>
           </p:cNvPr>
@@ -10720,9 +10720,9 @@
           <a:bodyPr/>
           <a:lstStyle/>
           <a:p>
-            <a:fld id="{4354DB14-F9AE-4C12-8CFE-33ABF7B568CC}" type="datetimeFigureOut">
+            <a:fld id="{69C9F4DC-D411-4651-9AAC-29900672A9A6}" type="datetimeFigureOut">
               <a:rPr lang="en-US" smtClean="0"/>
-              <a:t>10/3/2026</a:t>
+              <a:t>10/4/2026</a:t>
             </a:fld>
             <a:endParaRPr lang="en-US"/>
           </a:p>
@@ -10762,7 +10762,7 @@
           <a:bodyPr/>
           <a:lstStyle/>
           <a:p>
-            <a:fld id="{74A457B9-11F0-4EFD-A461-9DC8C80A1D31}" type="slidenum">
+            <a:fld id="{B2681015-3E44-49AF-A930-B36E5E8634EC}" type="slidenum">
               <a:rPr lang="en-US" smtClean="0"/>
               <a:t>‹#›</a:t>
             </a:fld>
@@ -10775,7 +10775,7 @@
           <p:cNvPr id="8" name="item_1_title">
             <a:extLst>
               <a:ext uri="{FF2B5EF4-FFF2-40B4-BE49-F238E27FC236}">
-                <a16:creationId xmlns:a16="http://schemas.microsoft.com/office/drawing/2014/main" id="{236A0303-EED4-8488-81DC-00BEE37547BA}"/>
+                <a16:creationId xmlns:a16="http://schemas.microsoft.com/office/drawing/2014/main" id="{B5243D71-2D92-ADD8-DA6F-F7F404F46864}"/>
               </a:ext>
             </a:extLst>
           </p:cNvPr>
@@ -10825,7 +10825,7 @@
           <p:cNvPr id="9" name="item_1">
             <a:extLst>
               <a:ext uri="{FF2B5EF4-FFF2-40B4-BE49-F238E27FC236}">
-                <a16:creationId xmlns:a16="http://schemas.microsoft.com/office/drawing/2014/main" id="{826AF70F-2AC1-F1F5-BF8A-45B4A5FC58CB}"/>
+                <a16:creationId xmlns:a16="http://schemas.microsoft.com/office/drawing/2014/main" id="{ED005AD7-7B51-A3C8-AD2F-65A2D5D3D7AB}"/>
               </a:ext>
             </a:extLst>
           </p:cNvPr>
@@ -10873,7 +10873,7 @@
           <p:cNvPr id="10" name="item_2_title">
             <a:extLst>
               <a:ext uri="{FF2B5EF4-FFF2-40B4-BE49-F238E27FC236}">
-                <a16:creationId xmlns:a16="http://schemas.microsoft.com/office/drawing/2014/main" id="{9C8FF75B-B5C1-B77E-0582-7FA4A676D53A}"/>
+                <a16:creationId xmlns:a16="http://schemas.microsoft.com/office/drawing/2014/main" id="{7FB07077-39EE-8B86-8831-935FDEBDBA0A}"/>
               </a:ext>
             </a:extLst>
           </p:cNvPr>
@@ -10926,7 +10926,7 @@
           <p:cNvPr id="11" name="item_2">
             <a:extLst>
               <a:ext uri="{FF2B5EF4-FFF2-40B4-BE49-F238E27FC236}">
-                <a16:creationId xmlns:a16="http://schemas.microsoft.com/office/drawing/2014/main" id="{06D2A5E2-F36B-339F-A19A-E3A28E787721}"/>
+                <a16:creationId xmlns:a16="http://schemas.microsoft.com/office/drawing/2014/main" id="{86727523-FCB1-14C9-4663-2B9B466B8674}"/>
               </a:ext>
             </a:extLst>
           </p:cNvPr>
@@ -10974,7 +10974,7 @@
           <p:cNvPr id="12" name="item_3_title">
             <a:extLst>
               <a:ext uri="{FF2B5EF4-FFF2-40B4-BE49-F238E27FC236}">
-                <a16:creationId xmlns:a16="http://schemas.microsoft.com/office/drawing/2014/main" id="{E1437A7D-37F5-985D-E8CE-A86538FFBF16}"/>
+                <a16:creationId xmlns:a16="http://schemas.microsoft.com/office/drawing/2014/main" id="{EA2E927A-5B33-E9C8-4976-A798F0231C42}"/>
               </a:ext>
             </a:extLst>
           </p:cNvPr>
@@ -11027,7 +11027,7 @@
           <p:cNvPr id="13" name="item_3">
             <a:extLst>
               <a:ext uri="{FF2B5EF4-FFF2-40B4-BE49-F238E27FC236}">
-                <a16:creationId xmlns:a16="http://schemas.microsoft.com/office/drawing/2014/main" id="{4AAB1A57-9747-EB9E-668A-CAA0844CA5D0}"/>
+                <a16:creationId xmlns:a16="http://schemas.microsoft.com/office/drawing/2014/main" id="{E9FDE0D4-E84E-77C9-EDCB-AA7F7FDAEE83}"/>
               </a:ext>
             </a:extLst>
           </p:cNvPr>
@@ -11075,7 +11075,7 @@
           <p:cNvPr id="14" name="item_4_title">
             <a:extLst>
               <a:ext uri="{FF2B5EF4-FFF2-40B4-BE49-F238E27FC236}">
-                <a16:creationId xmlns:a16="http://schemas.microsoft.com/office/drawing/2014/main" id="{697AAD27-C4A3-DA25-653D-886D48D213D6}"/>
+                <a16:creationId xmlns:a16="http://schemas.microsoft.com/office/drawing/2014/main" id="{053CBEA2-1768-BED5-2769-45A388A7CBE3}"/>
               </a:ext>
             </a:extLst>
           </p:cNvPr>
@@ -11128,7 +11128,7 @@
           <p:cNvPr id="15" name="item_4">
             <a:extLst>
               <a:ext uri="{FF2B5EF4-FFF2-40B4-BE49-F238E27FC236}">
-                <a16:creationId xmlns:a16="http://schemas.microsoft.com/office/drawing/2014/main" id="{F5CD9EBB-46FE-63D7-7595-B3D45E21BF19}"/>
+                <a16:creationId xmlns:a16="http://schemas.microsoft.com/office/drawing/2014/main" id="{4716E4FF-ABF0-C2F7-2036-E9D8E032B139}"/>
               </a:ext>
             </a:extLst>
           </p:cNvPr>
@@ -11176,7 +11176,7 @@
           <p:cNvPr id="16" name="source">
             <a:extLst>
               <a:ext uri="{FF2B5EF4-FFF2-40B4-BE49-F238E27FC236}">
-                <a16:creationId xmlns:a16="http://schemas.microsoft.com/office/drawing/2014/main" id="{51978395-6D32-2C83-2110-8ED50380120D}"/>
+                <a16:creationId xmlns:a16="http://schemas.microsoft.com/office/drawing/2014/main" id="{D750A9FC-67B6-A5E9-AAB3-230FA8BB8DF3}"/>
               </a:ext>
             </a:extLst>
           </p:cNvPr>
@@ -11231,7 +11231,7 @@
     </p:spTree>
     <p:extLst>
       <p:ext uri="{BB962C8B-B14F-4D97-AF65-F5344CB8AC3E}">
-        <p14:creationId xmlns:p14="http://schemas.microsoft.com/office/powerpoint/2010/main" val="3564398987"/>
+        <p14:creationId xmlns:p14="http://schemas.microsoft.com/office/powerpoint/2010/main" val="1401315680"/>
       </p:ext>
     </p:extLst>
   </p:cSld>
@@ -11263,7 +11263,7 @@
           <p:cNvPr id="7" name="creative_background">
             <a:extLst>
               <a:ext uri="{FF2B5EF4-FFF2-40B4-BE49-F238E27FC236}">
-                <a16:creationId xmlns:a16="http://schemas.microsoft.com/office/drawing/2014/main" id="{D4E86E10-57FE-2E32-A1DC-5A435640BC29}"/>
+                <a16:creationId xmlns:a16="http://schemas.microsoft.com/office/drawing/2014/main" id="{0530EFBF-601F-1A8D-B414-14963A0E6AFD}"/>
               </a:ext>
             </a:extLst>
           </p:cNvPr>
@@ -11346,9 +11346,9 @@
           <a:bodyPr/>
           <a:lstStyle/>
           <a:p>
-            <a:fld id="{4354DB14-F9AE-4C12-8CFE-33ABF7B568CC}" type="datetimeFigureOut">
+            <a:fld id="{69C9F4DC-D411-4651-9AAC-29900672A9A6}" type="datetimeFigureOut">
               <a:rPr lang="en-US" smtClean="0"/>
-              <a:t>10/3/2026</a:t>
+              <a:t>10/4/2026</a:t>
             </a:fld>
             <a:endParaRPr lang="en-US"/>
           </a:p>
@@ -11388,7 +11388,7 @@
           <a:bodyPr/>
           <a:lstStyle/>
           <a:p>
-            <a:fld id="{74A457B9-11F0-4EFD-A461-9DC8C80A1D31}" type="slidenum">
+            <a:fld id="{B2681015-3E44-49AF-A930-B36E5E8634EC}" type="slidenum">
               <a:rPr lang="en-US" smtClean="0"/>
               <a:t>‹#›</a:t>
             </a:fld>
@@ -11401,7 +11401,7 @@
           <p:cNvPr id="8" name="body">
             <a:extLst>
               <a:ext uri="{FF2B5EF4-FFF2-40B4-BE49-F238E27FC236}">
-                <a16:creationId xmlns:a16="http://schemas.microsoft.com/office/drawing/2014/main" id="{396ADC4D-4880-13CD-90E3-7933A4960E8F}"/>
+                <a16:creationId xmlns:a16="http://schemas.microsoft.com/office/drawing/2014/main" id="{90F43D17-F69A-557B-7183-89F5CF0A0DAF}"/>
               </a:ext>
             </a:extLst>
           </p:cNvPr>
@@ -11441,7 +11441,7 @@
           <p:cNvPr id="9" name="kpi_value_1">
             <a:extLst>
               <a:ext uri="{FF2B5EF4-FFF2-40B4-BE49-F238E27FC236}">
-                <a16:creationId xmlns:a16="http://schemas.microsoft.com/office/drawing/2014/main" id="{485BFF40-B9B4-4FCA-79EF-3A5AD64AF123}"/>
+                <a16:creationId xmlns:a16="http://schemas.microsoft.com/office/drawing/2014/main" id="{C5CF6B89-5EA8-4B59-EEF7-283208F242B1}"/>
               </a:ext>
             </a:extLst>
           </p:cNvPr>
@@ -11494,7 +11494,7 @@
           <p:cNvPr id="10" name="kpi_label_1">
             <a:extLst>
               <a:ext uri="{FF2B5EF4-FFF2-40B4-BE49-F238E27FC236}">
-                <a16:creationId xmlns:a16="http://schemas.microsoft.com/office/drawing/2014/main" id="{B0CE5E95-5EA8-C898-69FA-2E3790300446}"/>
+                <a16:creationId xmlns:a16="http://schemas.microsoft.com/office/drawing/2014/main" id="{829A56C9-5BC7-4113-1B6D-0F3C3CC598DC}"/>
               </a:ext>
             </a:extLst>
           </p:cNvPr>
@@ -11542,7 +11542,7 @@
           <p:cNvPr id="11" name="source">
             <a:extLst>
               <a:ext uri="{FF2B5EF4-FFF2-40B4-BE49-F238E27FC236}">
-                <a16:creationId xmlns:a16="http://schemas.microsoft.com/office/drawing/2014/main" id="{598253EE-E6AD-499B-3E37-785087016A4E}"/>
+                <a16:creationId xmlns:a16="http://schemas.microsoft.com/office/drawing/2014/main" id="{048E4964-6A4F-6836-65AE-014D74758422}"/>
               </a:ext>
             </a:extLst>
           </p:cNvPr>
@@ -11597,7 +11597,7 @@
     </p:spTree>
     <p:extLst>
       <p:ext uri="{BB962C8B-B14F-4D97-AF65-F5344CB8AC3E}">
-        <p14:creationId xmlns:p14="http://schemas.microsoft.com/office/powerpoint/2010/main" val="2127979328"/>
+        <p14:creationId xmlns:p14="http://schemas.microsoft.com/office/powerpoint/2010/main" val="3003791534"/>
       </p:ext>
     </p:extLst>
   </p:cSld>
@@ -11629,7 +11629,7 @@
           <p:cNvPr id="7" name="creative_background">
             <a:extLst>
               <a:ext uri="{FF2B5EF4-FFF2-40B4-BE49-F238E27FC236}">
-                <a16:creationId xmlns:a16="http://schemas.microsoft.com/office/drawing/2014/main" id="{679588AD-32A9-DF0F-7160-4BE011FC7D4E}"/>
+                <a16:creationId xmlns:a16="http://schemas.microsoft.com/office/drawing/2014/main" id="{2A9EC343-837E-6AB8-C6D3-6B69C0843EA1}"/>
               </a:ext>
             </a:extLst>
           </p:cNvPr>
@@ -11712,9 +11712,9 @@
           <a:bodyPr/>
           <a:lstStyle/>
           <a:p>
-            <a:fld id="{4354DB14-F9AE-4C12-8CFE-33ABF7B568CC}" type="datetimeFigureOut">
+            <a:fld id="{69C9F4DC-D411-4651-9AAC-29900672A9A6}" type="datetimeFigureOut">
               <a:rPr lang="en-US" smtClean="0"/>
-              <a:t>10/3/2026</a:t>
+              <a:t>10/4/2026</a:t>
             </a:fld>
             <a:endParaRPr lang="en-US"/>
           </a:p>
@@ -11754,7 +11754,7 @@
           <a:bodyPr/>
           <a:lstStyle/>
           <a:p>
-            <a:fld id="{74A457B9-11F0-4EFD-A461-9DC8C80A1D31}" type="slidenum">
+            <a:fld id="{B2681015-3E44-49AF-A930-B36E5E8634EC}" type="slidenum">
               <a:rPr lang="en-US" smtClean="0"/>
               <a:t>‹#›</a:t>
             </a:fld>
@@ -11767,7 +11767,7 @@
           <p:cNvPr id="8" name="body">
             <a:extLst>
               <a:ext uri="{FF2B5EF4-FFF2-40B4-BE49-F238E27FC236}">
-                <a16:creationId xmlns:a16="http://schemas.microsoft.com/office/drawing/2014/main" id="{C83B8985-F0C6-0753-8B17-6AC963A0C474}"/>
+                <a16:creationId xmlns:a16="http://schemas.microsoft.com/office/drawing/2014/main" id="{B7F9592C-CE70-C2A2-483B-343DF632353E}"/>
               </a:ext>
             </a:extLst>
           </p:cNvPr>
@@ -11807,7 +11807,7 @@
           <p:cNvPr id="9" name="kpi_value_1">
             <a:extLst>
               <a:ext uri="{FF2B5EF4-FFF2-40B4-BE49-F238E27FC236}">
-                <a16:creationId xmlns:a16="http://schemas.microsoft.com/office/drawing/2014/main" id="{D798F6E5-70D4-483D-CF6D-F1F28F9A1794}"/>
+                <a16:creationId xmlns:a16="http://schemas.microsoft.com/office/drawing/2014/main" id="{DE3646B9-7EAB-46F5-EEC6-077FA88B7ADE}"/>
               </a:ext>
             </a:extLst>
           </p:cNvPr>
@@ -11860,7 +11860,7 @@
           <p:cNvPr id="10" name="kpi_label_1">
             <a:extLst>
               <a:ext uri="{FF2B5EF4-FFF2-40B4-BE49-F238E27FC236}">
-                <a16:creationId xmlns:a16="http://schemas.microsoft.com/office/drawing/2014/main" id="{F79EAAFF-2075-0893-E39C-7B76FB90F089}"/>
+                <a16:creationId xmlns:a16="http://schemas.microsoft.com/office/drawing/2014/main" id="{9E3BFB1D-2E96-3511-3F74-3965298208AD}"/>
               </a:ext>
             </a:extLst>
           </p:cNvPr>
@@ -11908,7 +11908,7 @@
           <p:cNvPr id="11" name="kpi_value_2">
             <a:extLst>
               <a:ext uri="{FF2B5EF4-FFF2-40B4-BE49-F238E27FC236}">
-                <a16:creationId xmlns:a16="http://schemas.microsoft.com/office/drawing/2014/main" id="{AC76CE24-49D8-2228-1176-BA09F13A6558}"/>
+                <a16:creationId xmlns:a16="http://schemas.microsoft.com/office/drawing/2014/main" id="{28FEAE7C-9B86-D36D-ECEA-F6BB47014ED9}"/>
               </a:ext>
             </a:extLst>
           </p:cNvPr>
@@ -11961,7 +11961,7 @@
           <p:cNvPr id="12" name="kpi_label_2">
             <a:extLst>
               <a:ext uri="{FF2B5EF4-FFF2-40B4-BE49-F238E27FC236}">
-                <a16:creationId xmlns:a16="http://schemas.microsoft.com/office/drawing/2014/main" id="{BCB403DD-9807-6DC6-4C86-C5C6AA839916}"/>
+                <a16:creationId xmlns:a16="http://schemas.microsoft.com/office/drawing/2014/main" id="{146D2D22-1EB3-AB8B-24C8-E3F118190FCD}"/>
               </a:ext>
             </a:extLst>
           </p:cNvPr>
@@ -12009,7 +12009,7 @@
           <p:cNvPr id="13" name="kpi_value_3">
             <a:extLst>
               <a:ext uri="{FF2B5EF4-FFF2-40B4-BE49-F238E27FC236}">
-                <a16:creationId xmlns:a16="http://schemas.microsoft.com/office/drawing/2014/main" id="{7D4F318C-F511-9857-1DEC-2CC1DDE8EB2A}"/>
+                <a16:creationId xmlns:a16="http://schemas.microsoft.com/office/drawing/2014/main" id="{D72E868F-0256-4DAD-0FE2-DCBE667EB802}"/>
               </a:ext>
             </a:extLst>
           </p:cNvPr>
@@ -12062,7 +12062,7 @@
           <p:cNvPr id="14" name="kpi_label_3">
             <a:extLst>
               <a:ext uri="{FF2B5EF4-FFF2-40B4-BE49-F238E27FC236}">
-                <a16:creationId xmlns:a16="http://schemas.microsoft.com/office/drawing/2014/main" id="{CBEEB858-970D-4525-E748-228A318BADD7}"/>
+                <a16:creationId xmlns:a16="http://schemas.microsoft.com/office/drawing/2014/main" id="{51D2B8C9-4A27-A0E0-60A0-FE77CA1F6AE8}"/>
               </a:ext>
             </a:extLst>
           </p:cNvPr>
@@ -12110,7 +12110,7 @@
           <p:cNvPr id="15" name="kpi_value_4">
             <a:extLst>
               <a:ext uri="{FF2B5EF4-FFF2-40B4-BE49-F238E27FC236}">
-                <a16:creationId xmlns:a16="http://schemas.microsoft.com/office/drawing/2014/main" id="{C318DE7E-B37A-B4B7-7CA1-105204F52647}"/>
+                <a16:creationId xmlns:a16="http://schemas.microsoft.com/office/drawing/2014/main" id="{7B97BFE5-94A0-4795-FEC6-4B246B71ACA7}"/>
               </a:ext>
             </a:extLst>
           </p:cNvPr>
@@ -12163,7 +12163,7 @@
           <p:cNvPr id="16" name="kpi_label_4">
             <a:extLst>
               <a:ext uri="{FF2B5EF4-FFF2-40B4-BE49-F238E27FC236}">
-                <a16:creationId xmlns:a16="http://schemas.microsoft.com/office/drawing/2014/main" id="{F6421513-9A82-2E35-958D-D3C3F04E6436}"/>
+                <a16:creationId xmlns:a16="http://schemas.microsoft.com/office/drawing/2014/main" id="{6C9F02A0-6F98-F203-3940-E7B94B46CF64}"/>
               </a:ext>
             </a:extLst>
           </p:cNvPr>
@@ -12211,7 +12211,7 @@
           <p:cNvPr id="17" name="source">
             <a:extLst>
               <a:ext uri="{FF2B5EF4-FFF2-40B4-BE49-F238E27FC236}">
-                <a16:creationId xmlns:a16="http://schemas.microsoft.com/office/drawing/2014/main" id="{410E5B5F-57CC-B6E2-E2EC-D36E74A70451}"/>
+                <a16:creationId xmlns:a16="http://schemas.microsoft.com/office/drawing/2014/main" id="{F3A14B2B-AFB9-215F-A305-5DECE12FD48F}"/>
               </a:ext>
             </a:extLst>
           </p:cNvPr>
@@ -12266,7 +12266,7 @@
     </p:spTree>
     <p:extLst>
       <p:ext uri="{BB962C8B-B14F-4D97-AF65-F5344CB8AC3E}">
-        <p14:creationId xmlns:p14="http://schemas.microsoft.com/office/powerpoint/2010/main" val="218603819"/>
+        <p14:creationId xmlns:p14="http://schemas.microsoft.com/office/powerpoint/2010/main" val="2963128608"/>
       </p:ext>
     </p:extLst>
   </p:cSld>
@@ -12298,7 +12298,7 @@
           <p:cNvPr id="7" name="creative_background">
             <a:extLst>
               <a:ext uri="{FF2B5EF4-FFF2-40B4-BE49-F238E27FC236}">
-                <a16:creationId xmlns:a16="http://schemas.microsoft.com/office/drawing/2014/main" id="{95CD7B65-DD56-FD02-BBCE-6EF2B7F3FF1B}"/>
+                <a16:creationId xmlns:a16="http://schemas.microsoft.com/office/drawing/2014/main" id="{70DC40BC-5B99-E141-7C48-504D431A2117}"/>
               </a:ext>
             </a:extLst>
           </p:cNvPr>
@@ -12381,9 +12381,9 @@
           <a:bodyPr/>
           <a:lstStyle/>
           <a:p>
-            <a:fld id="{4354DB14-F9AE-4C12-8CFE-33ABF7B568CC}" type="datetimeFigureOut">
+            <a:fld id="{69C9F4DC-D411-4651-9AAC-29900672A9A6}" type="datetimeFigureOut">
               <a:rPr lang="en-US" smtClean="0"/>
-              <a:t>10/3/2026</a:t>
+              <a:t>10/4/2026</a:t>
             </a:fld>
             <a:endParaRPr lang="en-US"/>
           </a:p>
@@ -12423,7 +12423,7 @@
           <a:bodyPr/>
           <a:lstStyle/>
           <a:p>
-            <a:fld id="{74A457B9-11F0-4EFD-A461-9DC8C80A1D31}" type="slidenum">
+            <a:fld id="{B2681015-3E44-49AF-A930-B36E5E8634EC}" type="slidenum">
               <a:rPr lang="en-US" smtClean="0"/>
               <a:t>‹#›</a:t>
             </a:fld>
@@ -12436,7 +12436,7 @@
           <p:cNvPr id="8" name="body">
             <a:extLst>
               <a:ext uri="{FF2B5EF4-FFF2-40B4-BE49-F238E27FC236}">
-                <a16:creationId xmlns:a16="http://schemas.microsoft.com/office/drawing/2014/main" id="{2A5D89F9-C745-48C8-AE30-02AF2765B247}"/>
+                <a16:creationId xmlns:a16="http://schemas.microsoft.com/office/drawing/2014/main" id="{8B69FBB4-A580-0934-80B8-B149BB5314E5}"/>
               </a:ext>
             </a:extLst>
           </p:cNvPr>
@@ -12476,7 +12476,7 @@
           <p:cNvPr id="9" name="kpi_value_1">
             <a:extLst>
               <a:ext uri="{FF2B5EF4-FFF2-40B4-BE49-F238E27FC236}">
-                <a16:creationId xmlns:a16="http://schemas.microsoft.com/office/drawing/2014/main" id="{64D4DEBF-406B-F26F-0DB2-5748AC505C36}"/>
+                <a16:creationId xmlns:a16="http://schemas.microsoft.com/office/drawing/2014/main" id="{95565CE4-D889-AA50-85E6-4E6C7498B3B4}"/>
               </a:ext>
             </a:extLst>
           </p:cNvPr>
@@ -12529,7 +12529,7 @@
           <p:cNvPr id="10" name="kpi_label_1">
             <a:extLst>
               <a:ext uri="{FF2B5EF4-FFF2-40B4-BE49-F238E27FC236}">
-                <a16:creationId xmlns:a16="http://schemas.microsoft.com/office/drawing/2014/main" id="{E56858EB-457C-D7FE-5E79-40E7ED50590B}"/>
+                <a16:creationId xmlns:a16="http://schemas.microsoft.com/office/drawing/2014/main" id="{39BD0C2B-B5D5-725C-C3BD-0A968473B68A}"/>
               </a:ext>
             </a:extLst>
           </p:cNvPr>
@@ -12577,7 +12577,7 @@
           <p:cNvPr id="11" name="kpi_value_2">
             <a:extLst>
               <a:ext uri="{FF2B5EF4-FFF2-40B4-BE49-F238E27FC236}">
-                <a16:creationId xmlns:a16="http://schemas.microsoft.com/office/drawing/2014/main" id="{A6A67EF4-7874-D39F-C35B-568DD65856C0}"/>
+                <a16:creationId xmlns:a16="http://schemas.microsoft.com/office/drawing/2014/main" id="{C581D3B1-874B-E544-C307-7FEDE7970FF9}"/>
               </a:ext>
             </a:extLst>
           </p:cNvPr>
@@ -12630,7 +12630,7 @@
           <p:cNvPr id="12" name="kpi_label_2">
             <a:extLst>
               <a:ext uri="{FF2B5EF4-FFF2-40B4-BE49-F238E27FC236}">
-                <a16:creationId xmlns:a16="http://schemas.microsoft.com/office/drawing/2014/main" id="{647CD680-2B07-0446-31DE-5D1C82AD560D}"/>
+                <a16:creationId xmlns:a16="http://schemas.microsoft.com/office/drawing/2014/main" id="{D9E76976-4B98-6BFB-C300-6B07C01E5EBE}"/>
               </a:ext>
             </a:extLst>
           </p:cNvPr>
@@ -12678,7 +12678,7 @@
           <p:cNvPr id="13" name="source">
             <a:extLst>
               <a:ext uri="{FF2B5EF4-FFF2-40B4-BE49-F238E27FC236}">
-                <a16:creationId xmlns:a16="http://schemas.microsoft.com/office/drawing/2014/main" id="{B3408117-5AEA-9051-1B98-A0902810D8A2}"/>
+                <a16:creationId xmlns:a16="http://schemas.microsoft.com/office/drawing/2014/main" id="{CDAC9D10-EF4F-C76D-C16A-43BD27AC1C78}"/>
               </a:ext>
             </a:extLst>
           </p:cNvPr>
@@ -12733,7 +12733,7 @@
     </p:spTree>
     <p:extLst>
       <p:ext uri="{BB962C8B-B14F-4D97-AF65-F5344CB8AC3E}">
-        <p14:creationId xmlns:p14="http://schemas.microsoft.com/office/powerpoint/2010/main" val="1817919029"/>
+        <p14:creationId xmlns:p14="http://schemas.microsoft.com/office/powerpoint/2010/main" val="21644679"/>
       </p:ext>
     </p:extLst>
   </p:cSld>
@@ -12765,7 +12765,7 @@
           <p:cNvPr id="7" name="creative_background">
             <a:extLst>
               <a:ext uri="{FF2B5EF4-FFF2-40B4-BE49-F238E27FC236}">
-                <a16:creationId xmlns:a16="http://schemas.microsoft.com/office/drawing/2014/main" id="{33B56DC2-3C1F-8115-D34F-756505E89124}"/>
+                <a16:creationId xmlns:a16="http://schemas.microsoft.com/office/drawing/2014/main" id="{75D53AE1-492D-0ADB-7A8A-10212989BD97}"/>
               </a:ext>
             </a:extLst>
           </p:cNvPr>
@@ -12848,9 +12848,9 @@
           <a:bodyPr/>
           <a:lstStyle/>
           <a:p>
-            <a:fld id="{4354DB14-F9AE-4C12-8CFE-33ABF7B568CC}" type="datetimeFigureOut">
+            <a:fld id="{69C9F4DC-D411-4651-9AAC-29900672A9A6}" type="datetimeFigureOut">
               <a:rPr lang="en-US" smtClean="0"/>
-              <a:t>10/3/2026</a:t>
+              <a:t>10/4/2026</a:t>
             </a:fld>
             <a:endParaRPr lang="en-US"/>
           </a:p>
@@ -12890,7 +12890,7 @@
           <a:bodyPr/>
           <a:lstStyle/>
           <a:p>
-            <a:fld id="{74A457B9-11F0-4EFD-A461-9DC8C80A1D31}" type="slidenum">
+            <a:fld id="{B2681015-3E44-49AF-A930-B36E5E8634EC}" type="slidenum">
               <a:rPr lang="en-US" smtClean="0"/>
               <a:t>‹#›</a:t>
             </a:fld>
@@ -12903,7 +12903,7 @@
           <p:cNvPr id="8" name="body">
             <a:extLst>
               <a:ext uri="{FF2B5EF4-FFF2-40B4-BE49-F238E27FC236}">
-                <a16:creationId xmlns:a16="http://schemas.microsoft.com/office/drawing/2014/main" id="{287A6DEF-45D9-AC2C-1063-68EF12974972}"/>
+                <a16:creationId xmlns:a16="http://schemas.microsoft.com/office/drawing/2014/main" id="{F644F742-BE1C-1331-BCA3-576E14A45278}"/>
               </a:ext>
             </a:extLst>
           </p:cNvPr>
@@ -12943,7 +12943,7 @@
           <p:cNvPr id="9" name="kpi_value_1">
             <a:extLst>
               <a:ext uri="{FF2B5EF4-FFF2-40B4-BE49-F238E27FC236}">
-                <a16:creationId xmlns:a16="http://schemas.microsoft.com/office/drawing/2014/main" id="{AF334F09-CE67-97B0-734C-38110C21E565}"/>
+                <a16:creationId xmlns:a16="http://schemas.microsoft.com/office/drawing/2014/main" id="{61FA7B2B-8FD4-AB0A-540E-0F40BDEC7719}"/>
               </a:ext>
             </a:extLst>
           </p:cNvPr>
@@ -12996,7 +12996,7 @@
           <p:cNvPr id="10" name="kpi_label_1">
             <a:extLst>
               <a:ext uri="{FF2B5EF4-FFF2-40B4-BE49-F238E27FC236}">
-                <a16:creationId xmlns:a16="http://schemas.microsoft.com/office/drawing/2014/main" id="{85AA2DE9-9BFC-8825-CFFD-E236F4BBC01E}"/>
+                <a16:creationId xmlns:a16="http://schemas.microsoft.com/office/drawing/2014/main" id="{E3FD171E-23A3-A945-598F-13DDE20AE8C9}"/>
               </a:ext>
             </a:extLst>
           </p:cNvPr>
@@ -13044,7 +13044,7 @@
           <p:cNvPr id="11" name="kpi_value_2">
             <a:extLst>
               <a:ext uri="{FF2B5EF4-FFF2-40B4-BE49-F238E27FC236}">
-                <a16:creationId xmlns:a16="http://schemas.microsoft.com/office/drawing/2014/main" id="{FD04D8DC-74B5-1F20-8F4E-B4EE146AA7FB}"/>
+                <a16:creationId xmlns:a16="http://schemas.microsoft.com/office/drawing/2014/main" id="{CAC2B370-68CC-5865-BC91-4517814F6AFC}"/>
               </a:ext>
             </a:extLst>
           </p:cNvPr>
@@ -13097,7 +13097,7 @@
           <p:cNvPr id="12" name="kpi_label_2">
             <a:extLst>
               <a:ext uri="{FF2B5EF4-FFF2-40B4-BE49-F238E27FC236}">
-                <a16:creationId xmlns:a16="http://schemas.microsoft.com/office/drawing/2014/main" id="{73EF77D5-0352-9296-A431-027D2CE954BF}"/>
+                <a16:creationId xmlns:a16="http://schemas.microsoft.com/office/drawing/2014/main" id="{21B10F7D-355D-3A41-2B90-584FDFAB0637}"/>
               </a:ext>
             </a:extLst>
           </p:cNvPr>
@@ -13145,7 +13145,7 @@
           <p:cNvPr id="13" name="kpi_value_3">
             <a:extLst>
               <a:ext uri="{FF2B5EF4-FFF2-40B4-BE49-F238E27FC236}">
-                <a16:creationId xmlns:a16="http://schemas.microsoft.com/office/drawing/2014/main" id="{20920815-AC38-4A8D-A531-BDF2092021FF}"/>
+                <a16:creationId xmlns:a16="http://schemas.microsoft.com/office/drawing/2014/main" id="{2CB3073C-EDFD-B29E-366C-5D7DD9C97F47}"/>
               </a:ext>
             </a:extLst>
           </p:cNvPr>
@@ -13198,7 +13198,7 @@
           <p:cNvPr id="14" name="kpi_label_3">
             <a:extLst>
               <a:ext uri="{FF2B5EF4-FFF2-40B4-BE49-F238E27FC236}">
-                <a16:creationId xmlns:a16="http://schemas.microsoft.com/office/drawing/2014/main" id="{8DE214DA-F065-6168-2CFA-710158124D61}"/>
+                <a16:creationId xmlns:a16="http://schemas.microsoft.com/office/drawing/2014/main" id="{9AC5246D-8A3E-A995-0E16-55F2439005F5}"/>
               </a:ext>
             </a:extLst>
           </p:cNvPr>
@@ -13246,7 +13246,7 @@
           <p:cNvPr id="15" name="kpi_value_4">
             <a:extLst>
               <a:ext uri="{FF2B5EF4-FFF2-40B4-BE49-F238E27FC236}">
-                <a16:creationId xmlns:a16="http://schemas.microsoft.com/office/drawing/2014/main" id="{20AF9AE3-A8D7-2765-C73E-71C6C741EFDA}"/>
+                <a16:creationId xmlns:a16="http://schemas.microsoft.com/office/drawing/2014/main" id="{105EE407-1A4C-D1F1-9853-3D0D8115CF96}"/>
               </a:ext>
             </a:extLst>
           </p:cNvPr>
@@ -13299,7 +13299,7 @@
           <p:cNvPr id="16" name="kpi_label_4">
             <a:extLst>
               <a:ext uri="{FF2B5EF4-FFF2-40B4-BE49-F238E27FC236}">
-                <a16:creationId xmlns:a16="http://schemas.microsoft.com/office/drawing/2014/main" id="{3AB31F76-1858-2566-7CA1-66ADF1DC5346}"/>
+                <a16:creationId xmlns:a16="http://schemas.microsoft.com/office/drawing/2014/main" id="{F1D4B7AE-54C0-3DDB-EC02-3868E8FC3C51}"/>
               </a:ext>
             </a:extLst>
           </p:cNvPr>
@@ -13347,7 +13347,7 @@
           <p:cNvPr id="17" name="source">
             <a:extLst>
               <a:ext uri="{FF2B5EF4-FFF2-40B4-BE49-F238E27FC236}">
-                <a16:creationId xmlns:a16="http://schemas.microsoft.com/office/drawing/2014/main" id="{21D09CCE-FCD8-FAE3-9A0C-C4A05943A48E}"/>
+                <a16:creationId xmlns:a16="http://schemas.microsoft.com/office/drawing/2014/main" id="{0EBD378F-DFC4-8C56-29DE-5AD291CE7C1A}"/>
               </a:ext>
             </a:extLst>
           </p:cNvPr>
@@ -13402,7 +13402,7 @@
     </p:spTree>
     <p:extLst>
       <p:ext uri="{BB962C8B-B14F-4D97-AF65-F5344CB8AC3E}">
-        <p14:creationId xmlns:p14="http://schemas.microsoft.com/office/powerpoint/2010/main" val="3357635521"/>
+        <p14:creationId xmlns:p14="http://schemas.microsoft.com/office/powerpoint/2010/main" val="2328920478"/>
       </p:ext>
     </p:extLst>
   </p:cSld>
@@ -13434,7 +13434,7 @@
           <p:cNvPr id="7" name="creative_background">
             <a:extLst>
               <a:ext uri="{FF2B5EF4-FFF2-40B4-BE49-F238E27FC236}">
-                <a16:creationId xmlns:a16="http://schemas.microsoft.com/office/drawing/2014/main" id="{84647722-9D43-0ECF-EE7C-CC48D95D54CE}"/>
+                <a16:creationId xmlns:a16="http://schemas.microsoft.com/office/drawing/2014/main" id="{B5D9AF3B-2617-43B7-2F3C-66BF57E2A3EF}"/>
               </a:ext>
             </a:extLst>
           </p:cNvPr>
@@ -13517,9 +13517,9 @@
           <a:bodyPr/>
           <a:lstStyle/>
           <a:p>
-            <a:fld id="{4354DB14-F9AE-4C12-8CFE-33ABF7B568CC}" type="datetimeFigureOut">
+            <a:fld id="{69C9F4DC-D411-4651-9AAC-29900672A9A6}" type="datetimeFigureOut">
               <a:rPr lang="en-US" smtClean="0"/>
-              <a:t>10/3/2026</a:t>
+              <a:t>10/4/2026</a:t>
             </a:fld>
             <a:endParaRPr lang="en-US"/>
           </a:p>
@@ -13559,7 +13559,7 @@
           <a:bodyPr/>
           <a:lstStyle/>
           <a:p>
-            <a:fld id="{74A457B9-11F0-4EFD-A461-9DC8C80A1D31}" type="slidenum">
+            <a:fld id="{B2681015-3E44-49AF-A930-B36E5E8634EC}" type="slidenum">
               <a:rPr lang="en-US" smtClean="0"/>
               <a:t>‹#›</a:t>
             </a:fld>
@@ -13572,7 +13572,7 @@
           <p:cNvPr id="8" name="item_1_title">
             <a:extLst>
               <a:ext uri="{FF2B5EF4-FFF2-40B4-BE49-F238E27FC236}">
-                <a16:creationId xmlns:a16="http://schemas.microsoft.com/office/drawing/2014/main" id="{8908365D-F7B8-F5C2-B2CB-0C84A358A587}"/>
+                <a16:creationId xmlns:a16="http://schemas.microsoft.com/office/drawing/2014/main" id="{66041DE0-D1E7-F23E-AD38-53F32BFBD924}"/>
               </a:ext>
             </a:extLst>
           </p:cNvPr>
@@ -13622,7 +13622,7 @@
           <p:cNvPr id="9" name="item_1">
             <a:extLst>
               <a:ext uri="{FF2B5EF4-FFF2-40B4-BE49-F238E27FC236}">
-                <a16:creationId xmlns:a16="http://schemas.microsoft.com/office/drawing/2014/main" id="{05A75C1C-C133-92FD-B928-0214070E4B2F}"/>
+                <a16:creationId xmlns:a16="http://schemas.microsoft.com/office/drawing/2014/main" id="{930A5317-695E-A673-AA3C-BC9364566F24}"/>
               </a:ext>
             </a:extLst>
           </p:cNvPr>
@@ -13670,7 +13670,7 @@
           <p:cNvPr id="10" name="item_2_title">
             <a:extLst>
               <a:ext uri="{FF2B5EF4-FFF2-40B4-BE49-F238E27FC236}">
-                <a16:creationId xmlns:a16="http://schemas.microsoft.com/office/drawing/2014/main" id="{8FB53D15-453B-9DE0-1208-2FA03EE78065}"/>
+                <a16:creationId xmlns:a16="http://schemas.microsoft.com/office/drawing/2014/main" id="{677F1D93-ADF9-55CC-D701-A18811E00E43}"/>
               </a:ext>
             </a:extLst>
           </p:cNvPr>
@@ -13723,7 +13723,7 @@
           <p:cNvPr id="11" name="item_2">
             <a:extLst>
               <a:ext uri="{FF2B5EF4-FFF2-40B4-BE49-F238E27FC236}">
-                <a16:creationId xmlns:a16="http://schemas.microsoft.com/office/drawing/2014/main" id="{D09573AF-5FB7-F9D2-C49C-A773F429DE6F}"/>
+                <a16:creationId xmlns:a16="http://schemas.microsoft.com/office/drawing/2014/main" id="{1E2290FB-3667-22A0-E18C-DDB89C0C90EF}"/>
               </a:ext>
             </a:extLst>
           </p:cNvPr>
@@ -13771,7 +13771,7 @@
           <p:cNvPr id="12" name="item_3_title">
             <a:extLst>
               <a:ext uri="{FF2B5EF4-FFF2-40B4-BE49-F238E27FC236}">
-                <a16:creationId xmlns:a16="http://schemas.microsoft.com/office/drawing/2014/main" id="{F5003E55-40E9-CA77-8CD3-69CC3BF2F828}"/>
+                <a16:creationId xmlns:a16="http://schemas.microsoft.com/office/drawing/2014/main" id="{D5DC6D2E-1C37-173A-11DA-6A2928FE3085}"/>
               </a:ext>
             </a:extLst>
           </p:cNvPr>
@@ -13824,7 +13824,7 @@
           <p:cNvPr id="13" name="item_3">
             <a:extLst>
               <a:ext uri="{FF2B5EF4-FFF2-40B4-BE49-F238E27FC236}">
-                <a16:creationId xmlns:a16="http://schemas.microsoft.com/office/drawing/2014/main" id="{DDF0079B-98FB-AAC9-E352-1E8B375CDA63}"/>
+                <a16:creationId xmlns:a16="http://schemas.microsoft.com/office/drawing/2014/main" id="{878F8851-9F23-7903-0EEF-A761E539235B}"/>
               </a:ext>
             </a:extLst>
           </p:cNvPr>
@@ -13872,7 +13872,7 @@
           <p:cNvPr id="14" name="item_4_title">
             <a:extLst>
               <a:ext uri="{FF2B5EF4-FFF2-40B4-BE49-F238E27FC236}">
-                <a16:creationId xmlns:a16="http://schemas.microsoft.com/office/drawing/2014/main" id="{79C221AB-02B8-8EBF-AF60-32D9AA8DC42A}"/>
+                <a16:creationId xmlns:a16="http://schemas.microsoft.com/office/drawing/2014/main" id="{2EC011E2-26CA-1C27-59E9-54039430C5AC}"/>
               </a:ext>
             </a:extLst>
           </p:cNvPr>
@@ -13925,7 +13925,7 @@
           <p:cNvPr id="15" name="item_4">
             <a:extLst>
               <a:ext uri="{FF2B5EF4-FFF2-40B4-BE49-F238E27FC236}">
-                <a16:creationId xmlns:a16="http://schemas.microsoft.com/office/drawing/2014/main" id="{2330AB04-B32A-E287-3D51-85884FCD4F66}"/>
+                <a16:creationId xmlns:a16="http://schemas.microsoft.com/office/drawing/2014/main" id="{92316F90-AB93-0744-29F1-2EDC0468FBB9}"/>
               </a:ext>
             </a:extLst>
           </p:cNvPr>
@@ -13973,7 +13973,7 @@
           <p:cNvPr id="16" name="source">
             <a:extLst>
               <a:ext uri="{FF2B5EF4-FFF2-40B4-BE49-F238E27FC236}">
-                <a16:creationId xmlns:a16="http://schemas.microsoft.com/office/drawing/2014/main" id="{0B649E16-0A6B-8C87-7680-2E3F68C9D870}"/>
+                <a16:creationId xmlns:a16="http://schemas.microsoft.com/office/drawing/2014/main" id="{DDE0B61F-4BAC-82A8-6531-84216400A074}"/>
               </a:ext>
             </a:extLst>
           </p:cNvPr>
@@ -14028,7 +14028,7 @@
     </p:spTree>
     <p:extLst>
       <p:ext uri="{BB962C8B-B14F-4D97-AF65-F5344CB8AC3E}">
-        <p14:creationId xmlns:p14="http://schemas.microsoft.com/office/powerpoint/2010/main" val="2957780282"/>
+        <p14:creationId xmlns:p14="http://schemas.microsoft.com/office/powerpoint/2010/main" val="2392070350"/>
       </p:ext>
     </p:extLst>
   </p:cSld>
@@ -14060,7 +14060,7 @@
           <p:cNvPr id="7" name="creative_background">
             <a:extLst>
               <a:ext uri="{FF2B5EF4-FFF2-40B4-BE49-F238E27FC236}">
-                <a16:creationId xmlns:a16="http://schemas.microsoft.com/office/drawing/2014/main" id="{304B8878-5D47-F0E0-28DD-4994DD033875}"/>
+                <a16:creationId xmlns:a16="http://schemas.microsoft.com/office/drawing/2014/main" id="{472DE8A4-FCA9-A57E-1257-E7D33B13CD2C}"/>
               </a:ext>
             </a:extLst>
           </p:cNvPr>
@@ -14143,9 +14143,9 @@
           <a:bodyPr/>
           <a:lstStyle/>
           <a:p>
-            <a:fld id="{4354DB14-F9AE-4C12-8CFE-33ABF7B568CC}" type="datetimeFigureOut">
+            <a:fld id="{69C9F4DC-D411-4651-9AAC-29900672A9A6}" type="datetimeFigureOut">
               <a:rPr lang="en-US" smtClean="0"/>
-              <a:t>10/3/2026</a:t>
+              <a:t>10/4/2026</a:t>
             </a:fld>
             <a:endParaRPr lang="en-US"/>
           </a:p>
@@ -14185,7 +14185,7 @@
           <a:bodyPr/>
           <a:lstStyle/>
           <a:p>
-            <a:fld id="{74A457B9-11F0-4EFD-A461-9DC8C80A1D31}" type="slidenum">
+            <a:fld id="{B2681015-3E44-49AF-A930-B36E5E8634EC}" type="slidenum">
               <a:rPr lang="en-US" smtClean="0"/>
               <a:t>‹#›</a:t>
             </a:fld>
@@ -14198,7 +14198,7 @@
           <p:cNvPr id="8" name="marker_1">
             <a:extLst>
               <a:ext uri="{FF2B5EF4-FFF2-40B4-BE49-F238E27FC236}">
-                <a16:creationId xmlns:a16="http://schemas.microsoft.com/office/drawing/2014/main" id="{4D471533-FC41-B06F-A886-E542C2EB9965}"/>
+                <a16:creationId xmlns:a16="http://schemas.microsoft.com/office/drawing/2014/main" id="{7375D8B0-6217-259C-E656-30B8286FE930}"/>
               </a:ext>
             </a:extLst>
           </p:cNvPr>
@@ -14254,7 +14254,7 @@
           <p:cNvPr id="9" name="item_1_title">
             <a:extLst>
               <a:ext uri="{FF2B5EF4-FFF2-40B4-BE49-F238E27FC236}">
-                <a16:creationId xmlns:a16="http://schemas.microsoft.com/office/drawing/2014/main" id="{0D2C41C1-AC9A-F879-D786-47AD2A4923BA}"/>
+                <a16:creationId xmlns:a16="http://schemas.microsoft.com/office/drawing/2014/main" id="{1A1B58B7-584D-017F-9173-7DE131789325}"/>
               </a:ext>
             </a:extLst>
           </p:cNvPr>
@@ -14307,7 +14307,7 @@
           <p:cNvPr id="10" name="item_1">
             <a:extLst>
               <a:ext uri="{FF2B5EF4-FFF2-40B4-BE49-F238E27FC236}">
-                <a16:creationId xmlns:a16="http://schemas.microsoft.com/office/drawing/2014/main" id="{1B0B91E8-A75F-48CA-FD70-AB54A0127F9E}"/>
+                <a16:creationId xmlns:a16="http://schemas.microsoft.com/office/drawing/2014/main" id="{36EF4B00-BF3F-C00A-4ED6-2E95D6CEB082}"/>
               </a:ext>
             </a:extLst>
           </p:cNvPr>
@@ -14355,7 +14355,7 @@
           <p:cNvPr id="11" name="marker_2">
             <a:extLst>
               <a:ext uri="{FF2B5EF4-FFF2-40B4-BE49-F238E27FC236}">
-                <a16:creationId xmlns:a16="http://schemas.microsoft.com/office/drawing/2014/main" id="{0E9654A5-474A-2676-053B-508C1402F19B}"/>
+                <a16:creationId xmlns:a16="http://schemas.microsoft.com/office/drawing/2014/main" id="{7829196C-680F-2D93-0E2E-B5E16FF1BB2C}"/>
               </a:ext>
             </a:extLst>
           </p:cNvPr>
@@ -14411,7 +14411,7 @@
           <p:cNvPr id="12" name="item_2_title">
             <a:extLst>
               <a:ext uri="{FF2B5EF4-FFF2-40B4-BE49-F238E27FC236}">
-                <a16:creationId xmlns:a16="http://schemas.microsoft.com/office/drawing/2014/main" id="{562C4F0A-40EB-BEA4-C632-C8D8BEDD464A}"/>
+                <a16:creationId xmlns:a16="http://schemas.microsoft.com/office/drawing/2014/main" id="{63F31D3A-8984-1C30-CD68-868C127F453E}"/>
               </a:ext>
             </a:extLst>
           </p:cNvPr>
@@ -14464,7 +14464,7 @@
           <p:cNvPr id="13" name="item_2">
             <a:extLst>
               <a:ext uri="{FF2B5EF4-FFF2-40B4-BE49-F238E27FC236}">
-                <a16:creationId xmlns:a16="http://schemas.microsoft.com/office/drawing/2014/main" id="{3A43C65E-C75A-5F08-306E-F87B156B7FCD}"/>
+                <a16:creationId xmlns:a16="http://schemas.microsoft.com/office/drawing/2014/main" id="{3B19F3E1-860B-AF20-9CF7-A9381943C9C9}"/>
               </a:ext>
             </a:extLst>
           </p:cNvPr>
@@ -14512,7 +14512,7 @@
           <p:cNvPr id="14" name="source">
             <a:extLst>
               <a:ext uri="{FF2B5EF4-FFF2-40B4-BE49-F238E27FC236}">
-                <a16:creationId xmlns:a16="http://schemas.microsoft.com/office/drawing/2014/main" id="{9FA24EAA-C8AB-3432-6F49-1FB294ECBD8C}"/>
+                <a16:creationId xmlns:a16="http://schemas.microsoft.com/office/drawing/2014/main" id="{824F038E-5E09-1C99-7F72-4A6FEF97CD33}"/>
               </a:ext>
             </a:extLst>
           </p:cNvPr>
@@ -14567,7 +14567,7 @@
     </p:spTree>
     <p:extLst>
       <p:ext uri="{BB962C8B-B14F-4D97-AF65-F5344CB8AC3E}">
-        <p14:creationId xmlns:p14="http://schemas.microsoft.com/office/powerpoint/2010/main" val="487503908"/>
+        <p14:creationId xmlns:p14="http://schemas.microsoft.com/office/powerpoint/2010/main" val="2784345586"/>
       </p:ext>
     </p:extLst>
   </p:cSld>
@@ -14599,7 +14599,7 @@
           <p:cNvPr id="7" name="creative_background">
             <a:extLst>
               <a:ext uri="{FF2B5EF4-FFF2-40B4-BE49-F238E27FC236}">
-                <a16:creationId xmlns:a16="http://schemas.microsoft.com/office/drawing/2014/main" id="{8E26DD2B-4892-3299-DFBF-F14EADEAB017}"/>
+                <a16:creationId xmlns:a16="http://schemas.microsoft.com/office/drawing/2014/main" id="{3A837E9A-D930-47FC-7D58-71D7D4699612}"/>
               </a:ext>
             </a:extLst>
           </p:cNvPr>
@@ -14682,9 +14682,9 @@
           <a:bodyPr/>
           <a:lstStyle/>
           <a:p>
-            <a:fld id="{4354DB14-F9AE-4C12-8CFE-33ABF7B568CC}" type="datetimeFigureOut">
+            <a:fld id="{69C9F4DC-D411-4651-9AAC-29900672A9A6}" type="datetimeFigureOut">
               <a:rPr lang="en-US" smtClean="0"/>
-              <a:t>10/3/2026</a:t>
+              <a:t>10/4/2026</a:t>
             </a:fld>
             <a:endParaRPr lang="en-US"/>
           </a:p>
@@ -14724,7 +14724,7 @@
           <a:bodyPr/>
           <a:lstStyle/>
           <a:p>
-            <a:fld id="{74A457B9-11F0-4EFD-A461-9DC8C80A1D31}" type="slidenum">
+            <a:fld id="{B2681015-3E44-49AF-A930-B36E5E8634EC}" type="slidenum">
               <a:rPr lang="en-US" smtClean="0"/>
               <a:t>‹#›</a:t>
             </a:fld>
@@ -14737,7 +14737,7 @@
           <p:cNvPr id="8" name="item_1_title">
             <a:extLst>
               <a:ext uri="{FF2B5EF4-FFF2-40B4-BE49-F238E27FC236}">
-                <a16:creationId xmlns:a16="http://schemas.microsoft.com/office/drawing/2014/main" id="{A927C2E6-6D21-3E67-4432-D3A9EA7C02D5}"/>
+                <a16:creationId xmlns:a16="http://schemas.microsoft.com/office/drawing/2014/main" id="{902F8341-EE63-9BB5-ABFB-56C5C4AF69CB}"/>
               </a:ext>
             </a:extLst>
           </p:cNvPr>
@@ -14787,7 +14787,7 @@
           <p:cNvPr id="9" name="item_1">
             <a:extLst>
               <a:ext uri="{FF2B5EF4-FFF2-40B4-BE49-F238E27FC236}">
-                <a16:creationId xmlns:a16="http://schemas.microsoft.com/office/drawing/2014/main" id="{F6F8174A-47BC-BB1C-3307-0CC9363FF23A}"/>
+                <a16:creationId xmlns:a16="http://schemas.microsoft.com/office/drawing/2014/main" id="{7B91B22B-2485-980D-C28E-233FD54D7044}"/>
               </a:ext>
             </a:extLst>
           </p:cNvPr>
@@ -14835,7 +14835,7 @@
           <p:cNvPr id="10" name="item_2_title">
             <a:extLst>
               <a:ext uri="{FF2B5EF4-FFF2-40B4-BE49-F238E27FC236}">
-                <a16:creationId xmlns:a16="http://schemas.microsoft.com/office/drawing/2014/main" id="{C82F2736-1FEB-3675-FB1E-6FF21B5EFAE6}"/>
+                <a16:creationId xmlns:a16="http://schemas.microsoft.com/office/drawing/2014/main" id="{3EF3B5AD-DB94-C95A-3B5F-AE5E733681E3}"/>
               </a:ext>
             </a:extLst>
           </p:cNvPr>
@@ -14888,7 +14888,7 @@
           <p:cNvPr id="11" name="item_2">
             <a:extLst>
               <a:ext uri="{FF2B5EF4-FFF2-40B4-BE49-F238E27FC236}">
-                <a16:creationId xmlns:a16="http://schemas.microsoft.com/office/drawing/2014/main" id="{E76B029A-D802-B4D7-DC33-2E64EC285347}"/>
+                <a16:creationId xmlns:a16="http://schemas.microsoft.com/office/drawing/2014/main" id="{96192D1D-EDB9-1219-EE4D-5C9D1E49AA0E}"/>
               </a:ext>
             </a:extLst>
           </p:cNvPr>
@@ -14936,7 +14936,7 @@
           <p:cNvPr id="12" name="item_3_title">
             <a:extLst>
               <a:ext uri="{FF2B5EF4-FFF2-40B4-BE49-F238E27FC236}">
-                <a16:creationId xmlns:a16="http://schemas.microsoft.com/office/drawing/2014/main" id="{6386EF3F-453C-C41E-12F7-7D71F40B25AE}"/>
+                <a16:creationId xmlns:a16="http://schemas.microsoft.com/office/drawing/2014/main" id="{2B969407-E910-F143-06D5-382D1D8E9935}"/>
               </a:ext>
             </a:extLst>
           </p:cNvPr>
@@ -14989,7 +14989,7 @@
           <p:cNvPr id="13" name="item_3">
             <a:extLst>
               <a:ext uri="{FF2B5EF4-FFF2-40B4-BE49-F238E27FC236}">
-                <a16:creationId xmlns:a16="http://schemas.microsoft.com/office/drawing/2014/main" id="{6184E99D-B2CE-D207-B924-4EC48766E993}"/>
+                <a16:creationId xmlns:a16="http://schemas.microsoft.com/office/drawing/2014/main" id="{F0F86E79-3324-41E5-8025-DF031679D077}"/>
               </a:ext>
             </a:extLst>
           </p:cNvPr>
@@ -15037,7 +15037,7 @@
           <p:cNvPr id="14" name="item_4_title">
             <a:extLst>
               <a:ext uri="{FF2B5EF4-FFF2-40B4-BE49-F238E27FC236}">
-                <a16:creationId xmlns:a16="http://schemas.microsoft.com/office/drawing/2014/main" id="{DAFFD9C4-21AE-3AA4-0699-62E4557707C4}"/>
+                <a16:creationId xmlns:a16="http://schemas.microsoft.com/office/drawing/2014/main" id="{EDB4870A-1F13-97DB-5D7E-31E82DF046AF}"/>
               </a:ext>
             </a:extLst>
           </p:cNvPr>
@@ -15090,7 +15090,7 @@
           <p:cNvPr id="15" name="item_4">
             <a:extLst>
               <a:ext uri="{FF2B5EF4-FFF2-40B4-BE49-F238E27FC236}">
-                <a16:creationId xmlns:a16="http://schemas.microsoft.com/office/drawing/2014/main" id="{353BE45E-740E-B605-1AD1-3011B4F2863B}"/>
+                <a16:creationId xmlns:a16="http://schemas.microsoft.com/office/drawing/2014/main" id="{660E58C2-DB6F-F0D2-3BC4-132A90DA0FA7}"/>
               </a:ext>
             </a:extLst>
           </p:cNvPr>
@@ -15138,7 +15138,7 @@
           <p:cNvPr id="16" name="source">
             <a:extLst>
               <a:ext uri="{FF2B5EF4-FFF2-40B4-BE49-F238E27FC236}">
-                <a16:creationId xmlns:a16="http://schemas.microsoft.com/office/drawing/2014/main" id="{BECC8CD4-957F-3DBE-7A1C-85982BC1AA3E}"/>
+                <a16:creationId xmlns:a16="http://schemas.microsoft.com/office/drawing/2014/main" id="{F9E0155E-9436-25A5-C9CA-33C9CFBBC98B}"/>
               </a:ext>
             </a:extLst>
           </p:cNvPr>
@@ -15193,7 +15193,7 @@
     </p:spTree>
     <p:extLst>
       <p:ext uri="{BB962C8B-B14F-4D97-AF65-F5344CB8AC3E}">
-        <p14:creationId xmlns:p14="http://schemas.microsoft.com/office/powerpoint/2010/main" val="3958644133"/>
+        <p14:creationId xmlns:p14="http://schemas.microsoft.com/office/powerpoint/2010/main" val="3319487963"/>
       </p:ext>
     </p:extLst>
   </p:cSld>
@@ -15225,7 +15225,7 @@
           <p:cNvPr id="7" name="creative_background">
             <a:extLst>
               <a:ext uri="{FF2B5EF4-FFF2-40B4-BE49-F238E27FC236}">
-                <a16:creationId xmlns:a16="http://schemas.microsoft.com/office/drawing/2014/main" id="{C7C0C41B-E370-5010-6753-99ECD7EBF50C}"/>
+                <a16:creationId xmlns:a16="http://schemas.microsoft.com/office/drawing/2014/main" id="{9FC563A9-87BB-D2AD-7DAE-4F28F079E99C}"/>
               </a:ext>
             </a:extLst>
           </p:cNvPr>
@@ -15308,9 +15308,9 @@
           <a:bodyPr/>
           <a:lstStyle/>
           <a:p>
-            <a:fld id="{4354DB14-F9AE-4C12-8CFE-33ABF7B568CC}" type="datetimeFigureOut">
+            <a:fld id="{69C9F4DC-D411-4651-9AAC-29900672A9A6}" type="datetimeFigureOut">
               <a:rPr lang="en-US" smtClean="0"/>
-              <a:t>10/3/2026</a:t>
+              <a:t>10/4/2026</a:t>
             </a:fld>
             <a:endParaRPr lang="en-US"/>
           </a:p>
@@ -15350,7 +15350,7 @@
           <a:bodyPr/>
           <a:lstStyle/>
           <a:p>
-            <a:fld id="{74A457B9-11F0-4EFD-A461-9DC8C80A1D31}" type="slidenum">
+            <a:fld id="{B2681015-3E44-49AF-A930-B36E5E8634EC}" type="slidenum">
               <a:rPr lang="en-US" smtClean="0"/>
               <a:t>‹#›</a:t>
             </a:fld>
@@ -15363,7 +15363,7 @@
           <p:cNvPr id="8" name="item_1_title">
             <a:extLst>
               <a:ext uri="{FF2B5EF4-FFF2-40B4-BE49-F238E27FC236}">
-                <a16:creationId xmlns:a16="http://schemas.microsoft.com/office/drawing/2014/main" id="{1671401B-47AD-AF0D-A3DA-07B819642AAC}"/>
+                <a16:creationId xmlns:a16="http://schemas.microsoft.com/office/drawing/2014/main" id="{9937044A-8515-938C-E1EF-4611AADCE411}"/>
               </a:ext>
             </a:extLst>
           </p:cNvPr>
@@ -15413,7 +15413,7 @@
           <p:cNvPr id="9" name="item_1">
             <a:extLst>
               <a:ext uri="{FF2B5EF4-FFF2-40B4-BE49-F238E27FC236}">
-                <a16:creationId xmlns:a16="http://schemas.microsoft.com/office/drawing/2014/main" id="{9863F0FF-9456-9436-19EF-A3023971AB2F}"/>
+                <a16:creationId xmlns:a16="http://schemas.microsoft.com/office/drawing/2014/main" id="{A1A9F627-1132-32AE-CE35-BB351A8D8D3D}"/>
               </a:ext>
             </a:extLst>
           </p:cNvPr>
@@ -15461,7 +15461,7 @@
           <p:cNvPr id="10" name="item_2_title">
             <a:extLst>
               <a:ext uri="{FF2B5EF4-FFF2-40B4-BE49-F238E27FC236}">
-                <a16:creationId xmlns:a16="http://schemas.microsoft.com/office/drawing/2014/main" id="{7138B50D-C705-5BF7-0C74-C9BA535F1EBC}"/>
+                <a16:creationId xmlns:a16="http://schemas.microsoft.com/office/drawing/2014/main" id="{F90CA0AF-B186-ECB0-8387-BD48F934451E}"/>
               </a:ext>
             </a:extLst>
           </p:cNvPr>
@@ -15514,7 +15514,7 @@
           <p:cNvPr id="11" name="item_2">
             <a:extLst>
               <a:ext uri="{FF2B5EF4-FFF2-40B4-BE49-F238E27FC236}">
-                <a16:creationId xmlns:a16="http://schemas.microsoft.com/office/drawing/2014/main" id="{6C3565CF-57FE-ECB3-3DB1-6A838309FF53}"/>
+                <a16:creationId xmlns:a16="http://schemas.microsoft.com/office/drawing/2014/main" id="{C86C6E5D-BE2B-94BF-6E67-BD6AA139D619}"/>
               </a:ext>
             </a:extLst>
           </p:cNvPr>
@@ -15562,7 +15562,7 @@
           <p:cNvPr id="12" name="item_3_title">
             <a:extLst>
               <a:ext uri="{FF2B5EF4-FFF2-40B4-BE49-F238E27FC236}">
-                <a16:creationId xmlns:a16="http://schemas.microsoft.com/office/drawing/2014/main" id="{13FB3452-105A-A6B1-21E6-6A74DAD57AB1}"/>
+                <a16:creationId xmlns:a16="http://schemas.microsoft.com/office/drawing/2014/main" id="{D0191CEE-0491-C59F-8E38-13C5E8792682}"/>
               </a:ext>
             </a:extLst>
           </p:cNvPr>
@@ -15615,7 +15615,7 @@
           <p:cNvPr id="13" name="item_3">
             <a:extLst>
               <a:ext uri="{FF2B5EF4-FFF2-40B4-BE49-F238E27FC236}">
-                <a16:creationId xmlns:a16="http://schemas.microsoft.com/office/drawing/2014/main" id="{58C39E84-4303-6F0C-236D-3FDABEA733F2}"/>
+                <a16:creationId xmlns:a16="http://schemas.microsoft.com/office/drawing/2014/main" id="{F2F6844F-B062-12AF-3D92-D25BD449D5BC}"/>
               </a:ext>
             </a:extLst>
           </p:cNvPr>
@@ -15663,7 +15663,7 @@
           <p:cNvPr id="14" name="item_4_title">
             <a:extLst>
               <a:ext uri="{FF2B5EF4-FFF2-40B4-BE49-F238E27FC236}">
-                <a16:creationId xmlns:a16="http://schemas.microsoft.com/office/drawing/2014/main" id="{1BAFE81B-14AD-3829-32E6-EA4B4BD613F4}"/>
+                <a16:creationId xmlns:a16="http://schemas.microsoft.com/office/drawing/2014/main" id="{3CC71B5E-5B7C-587A-C26F-2A58C031E762}"/>
               </a:ext>
             </a:extLst>
           </p:cNvPr>
@@ -15716,7 +15716,7 @@
           <p:cNvPr id="15" name="item_4">
             <a:extLst>
               <a:ext uri="{FF2B5EF4-FFF2-40B4-BE49-F238E27FC236}">
-                <a16:creationId xmlns:a16="http://schemas.microsoft.com/office/drawing/2014/main" id="{E05174C9-3ED9-A996-3DF0-2A06500D885C}"/>
+                <a16:creationId xmlns:a16="http://schemas.microsoft.com/office/drawing/2014/main" id="{B27F6F34-F142-2946-32E0-DF2A0E2F344C}"/>
               </a:ext>
             </a:extLst>
           </p:cNvPr>
@@ -15764,7 +15764,7 @@
           <p:cNvPr id="16" name="source">
             <a:extLst>
               <a:ext uri="{FF2B5EF4-FFF2-40B4-BE49-F238E27FC236}">
-                <a16:creationId xmlns:a16="http://schemas.microsoft.com/office/drawing/2014/main" id="{53E2CF33-C348-2FD9-9309-EFA8B36FB465}"/>
+                <a16:creationId xmlns:a16="http://schemas.microsoft.com/office/drawing/2014/main" id="{8E99AE74-6A77-E930-CB56-037934D32C33}"/>
               </a:ext>
             </a:extLst>
           </p:cNvPr>
@@ -15819,7 +15819,7 @@
     </p:spTree>
     <p:extLst>
       <p:ext uri="{BB962C8B-B14F-4D97-AF65-F5344CB8AC3E}">
-        <p14:creationId xmlns:p14="http://schemas.microsoft.com/office/powerpoint/2010/main" val="1226810867"/>
+        <p14:creationId xmlns:p14="http://schemas.microsoft.com/office/powerpoint/2010/main" val="1896943127"/>
       </p:ext>
     </p:extLst>
   </p:cSld>
@@ -15851,7 +15851,7 @@
           <p:cNvPr id="7" name="creative_background">
             <a:extLst>
               <a:ext uri="{FF2B5EF4-FFF2-40B4-BE49-F238E27FC236}">
-                <a16:creationId xmlns:a16="http://schemas.microsoft.com/office/drawing/2014/main" id="{4DF86414-74E1-2DCE-1944-4B7931071BB4}"/>
+                <a16:creationId xmlns:a16="http://schemas.microsoft.com/office/drawing/2014/main" id="{21CDFBC4-9C1B-896F-1098-00173D5E755A}"/>
               </a:ext>
             </a:extLst>
           </p:cNvPr>
@@ -15934,9 +15934,9 @@
           <a:bodyPr/>
           <a:lstStyle/>
           <a:p>
-            <a:fld id="{4354DB14-F9AE-4C12-8CFE-33ABF7B568CC}" type="datetimeFigureOut">
+            <a:fld id="{69C9F4DC-D411-4651-9AAC-29900672A9A6}" type="datetimeFigureOut">
               <a:rPr lang="en-US" smtClean="0"/>
-              <a:t>10/3/2026</a:t>
+              <a:t>10/4/2026</a:t>
             </a:fld>
             <a:endParaRPr lang="en-US"/>
           </a:p>
@@ -15976,7 +15976,7 @@
           <a:bodyPr/>
           <a:lstStyle/>
           <a:p>
-            <a:fld id="{74A457B9-11F0-4EFD-A461-9DC8C80A1D31}" type="slidenum">
+            <a:fld id="{B2681015-3E44-49AF-A930-B36E5E8634EC}" type="slidenum">
               <a:rPr lang="en-US" smtClean="0"/>
               <a:t>‹#›</a:t>
             </a:fld>
@@ -15989,7 +15989,7 @@
           <p:cNvPr id="8" name="kpi_value_1">
             <a:extLst>
               <a:ext uri="{FF2B5EF4-FFF2-40B4-BE49-F238E27FC236}">
-                <a16:creationId xmlns:a16="http://schemas.microsoft.com/office/drawing/2014/main" id="{C56CB1C6-EFC6-7F26-07E8-6B661B80E6BA}"/>
+                <a16:creationId xmlns:a16="http://schemas.microsoft.com/office/drawing/2014/main" id="{15B3E8AA-76C6-F5A1-3309-FEBAE2F5A69C}"/>
               </a:ext>
             </a:extLst>
           </p:cNvPr>
@@ -16039,7 +16039,7 @@
           <p:cNvPr id="9" name="kpi_label_1">
             <a:extLst>
               <a:ext uri="{FF2B5EF4-FFF2-40B4-BE49-F238E27FC236}">
-                <a16:creationId xmlns:a16="http://schemas.microsoft.com/office/drawing/2014/main" id="{4F9D988E-5ABC-35E9-4809-69EBADFF6E99}"/>
+                <a16:creationId xmlns:a16="http://schemas.microsoft.com/office/drawing/2014/main" id="{AAD9C322-B846-DFF0-05CB-633B74C23B3A}"/>
               </a:ext>
             </a:extLst>
           </p:cNvPr>
@@ -16087,7 +16087,7 @@
           <p:cNvPr id="10" name="quote">
             <a:extLst>
               <a:ext uri="{FF2B5EF4-FFF2-40B4-BE49-F238E27FC236}">
-                <a16:creationId xmlns:a16="http://schemas.microsoft.com/office/drawing/2014/main" id="{50E7522E-73B9-8435-FC02-DDE773B98859}"/>
+                <a16:creationId xmlns:a16="http://schemas.microsoft.com/office/drawing/2014/main" id="{9C533C8E-0841-CB9F-4C14-108079C8FF94}"/>
               </a:ext>
             </a:extLst>
           </p:cNvPr>
@@ -16137,7 +16137,7 @@
           <p:cNvPr id="11" name="attribution">
             <a:extLst>
               <a:ext uri="{FF2B5EF4-FFF2-40B4-BE49-F238E27FC236}">
-                <a16:creationId xmlns:a16="http://schemas.microsoft.com/office/drawing/2014/main" id="{20A33982-8F7B-2282-6890-0680DCC083C9}"/>
+                <a16:creationId xmlns:a16="http://schemas.microsoft.com/office/drawing/2014/main" id="{2FE778C1-E279-12AE-5211-9940F4455A71}"/>
               </a:ext>
             </a:extLst>
           </p:cNvPr>
@@ -16185,7 +16185,7 @@
           <p:cNvPr id="12" name="item_1_title">
             <a:extLst>
               <a:ext uri="{FF2B5EF4-FFF2-40B4-BE49-F238E27FC236}">
-                <a16:creationId xmlns:a16="http://schemas.microsoft.com/office/drawing/2014/main" id="{AC423525-9A0C-2B45-3923-C52F060ACC2F}"/>
+                <a16:creationId xmlns:a16="http://schemas.microsoft.com/office/drawing/2014/main" id="{347910C0-AB59-AD42-0167-4C0ECC0DB502}"/>
               </a:ext>
             </a:extLst>
           </p:cNvPr>
@@ -16238,7 +16238,7 @@
           <p:cNvPr id="13" name="item_1">
             <a:extLst>
               <a:ext uri="{FF2B5EF4-FFF2-40B4-BE49-F238E27FC236}">
-                <a16:creationId xmlns:a16="http://schemas.microsoft.com/office/drawing/2014/main" id="{5CEEBD9D-2694-404B-0186-7E3779C6CD4B}"/>
+                <a16:creationId xmlns:a16="http://schemas.microsoft.com/office/drawing/2014/main" id="{25700284-7C8F-F72D-5843-1E3B4C512F4E}"/>
               </a:ext>
             </a:extLst>
           </p:cNvPr>
@@ -16286,7 +16286,7 @@
           <p:cNvPr id="14" name="source">
             <a:extLst>
               <a:ext uri="{FF2B5EF4-FFF2-40B4-BE49-F238E27FC236}">
-                <a16:creationId xmlns:a16="http://schemas.microsoft.com/office/drawing/2014/main" id="{C37AD6A6-BBB6-1385-6C37-56F708D96387}"/>
+                <a16:creationId xmlns:a16="http://schemas.microsoft.com/office/drawing/2014/main" id="{A1A0A49D-A088-68C5-AC4A-82E2E3C3E58F}"/>
               </a:ext>
             </a:extLst>
           </p:cNvPr>
@@ -16341,7 +16341,7 @@
     </p:spTree>
     <p:extLst>
       <p:ext uri="{BB962C8B-B14F-4D97-AF65-F5344CB8AC3E}">
-        <p14:creationId xmlns:p14="http://schemas.microsoft.com/office/powerpoint/2010/main" val="3087637848"/>
+        <p14:creationId xmlns:p14="http://schemas.microsoft.com/office/powerpoint/2010/main" val="2683672382"/>
       </p:ext>
     </p:extLst>
   </p:cSld>
@@ -16373,7 +16373,7 @@
           <p:cNvPr id="7" name="creative_background">
             <a:extLst>
               <a:ext uri="{FF2B5EF4-FFF2-40B4-BE49-F238E27FC236}">
-                <a16:creationId xmlns:a16="http://schemas.microsoft.com/office/drawing/2014/main" id="{C97C632D-F59F-0F26-FD29-5ACE9E1CA888}"/>
+                <a16:creationId xmlns:a16="http://schemas.microsoft.com/office/drawing/2014/main" id="{BAE10C85-B49B-F6F5-FD75-4F82532F140C}"/>
               </a:ext>
             </a:extLst>
           </p:cNvPr>
@@ -16456,9 +16456,9 @@
           <a:bodyPr/>
           <a:lstStyle/>
           <a:p>
-            <a:fld id="{4354DB14-F9AE-4C12-8CFE-33ABF7B568CC}" type="datetimeFigureOut">
+            <a:fld id="{69C9F4DC-D411-4651-9AAC-29900672A9A6}" type="datetimeFigureOut">
               <a:rPr lang="en-US" smtClean="0"/>
-              <a:t>10/3/2026</a:t>
+              <a:t>10/4/2026</a:t>
             </a:fld>
             <a:endParaRPr lang="en-US"/>
           </a:p>
@@ -16498,7 +16498,7 @@
           <a:bodyPr/>
           <a:lstStyle/>
           <a:p>
-            <a:fld id="{74A457B9-11F0-4EFD-A461-9DC8C80A1D31}" type="slidenum">
+            <a:fld id="{B2681015-3E44-49AF-A930-B36E5E8634EC}" type="slidenum">
               <a:rPr lang="en-US" smtClean="0"/>
               <a:t>‹#›</a:t>
             </a:fld>
@@ -16511,7 +16511,7 @@
           <p:cNvPr id="8" name="item_1_title">
             <a:extLst>
               <a:ext uri="{FF2B5EF4-FFF2-40B4-BE49-F238E27FC236}">
-                <a16:creationId xmlns:a16="http://schemas.microsoft.com/office/drawing/2014/main" id="{D1A79952-0BB8-3A36-CB58-25C5B7F1D5B1}"/>
+                <a16:creationId xmlns:a16="http://schemas.microsoft.com/office/drawing/2014/main" id="{AAAB6EC8-D803-C9AD-D1EC-49F4A5178DEB}"/>
               </a:ext>
             </a:extLst>
           </p:cNvPr>
@@ -16561,7 +16561,7 @@
           <p:cNvPr id="9" name="item_1">
             <a:extLst>
               <a:ext uri="{FF2B5EF4-FFF2-40B4-BE49-F238E27FC236}">
-                <a16:creationId xmlns:a16="http://schemas.microsoft.com/office/drawing/2014/main" id="{75DD2AE6-7D12-4162-B2DA-B05DF7097778}"/>
+                <a16:creationId xmlns:a16="http://schemas.microsoft.com/office/drawing/2014/main" id="{459278D1-2F93-E268-9C58-9A45B33AEE87}"/>
               </a:ext>
             </a:extLst>
           </p:cNvPr>
@@ -16609,7 +16609,7 @@
           <p:cNvPr id="10" name="item_2_title">
             <a:extLst>
               <a:ext uri="{FF2B5EF4-FFF2-40B4-BE49-F238E27FC236}">
-                <a16:creationId xmlns:a16="http://schemas.microsoft.com/office/drawing/2014/main" id="{88EB1F6A-EE03-2F1A-7B63-C75690E6EB7B}"/>
+                <a16:creationId xmlns:a16="http://schemas.microsoft.com/office/drawing/2014/main" id="{8C420F1A-5B31-052F-CE5C-BFF4F266B6EE}"/>
               </a:ext>
             </a:extLst>
           </p:cNvPr>
@@ -16662,7 +16662,7 @@
           <p:cNvPr id="11" name="item_2">
             <a:extLst>
               <a:ext uri="{FF2B5EF4-FFF2-40B4-BE49-F238E27FC236}">
-                <a16:creationId xmlns:a16="http://schemas.microsoft.com/office/drawing/2014/main" id="{6F12A783-6D6B-31AD-44F9-05E0B7595799}"/>
+                <a16:creationId xmlns:a16="http://schemas.microsoft.com/office/drawing/2014/main" id="{722F9303-D24E-77A7-8497-A0B9D1E17FD9}"/>
               </a:ext>
             </a:extLst>
           </p:cNvPr>
@@ -16710,7 +16710,7 @@
           <p:cNvPr id="12" name="item_3_title">
             <a:extLst>
               <a:ext uri="{FF2B5EF4-FFF2-40B4-BE49-F238E27FC236}">
-                <a16:creationId xmlns:a16="http://schemas.microsoft.com/office/drawing/2014/main" id="{BBB34D49-04ED-7867-39F9-6E715D8B7D2C}"/>
+                <a16:creationId xmlns:a16="http://schemas.microsoft.com/office/drawing/2014/main" id="{C8A97A94-20BF-BC86-AB68-7095C64C032C}"/>
               </a:ext>
             </a:extLst>
           </p:cNvPr>
@@ -16763,7 +16763,7 @@
           <p:cNvPr id="13" name="item_3">
             <a:extLst>
               <a:ext uri="{FF2B5EF4-FFF2-40B4-BE49-F238E27FC236}">
-                <a16:creationId xmlns:a16="http://schemas.microsoft.com/office/drawing/2014/main" id="{E15C4E56-EDC7-AC7A-4131-1DE5F7E5F072}"/>
+                <a16:creationId xmlns:a16="http://schemas.microsoft.com/office/drawing/2014/main" id="{AAE68E6D-AAAE-79C5-10DD-BEB8A22C2E42}"/>
               </a:ext>
             </a:extLst>
           </p:cNvPr>
@@ -16811,7 +16811,7 @@
           <p:cNvPr id="14" name="source">
             <a:extLst>
               <a:ext uri="{FF2B5EF4-FFF2-40B4-BE49-F238E27FC236}">
-                <a16:creationId xmlns:a16="http://schemas.microsoft.com/office/drawing/2014/main" id="{21288281-8EF3-FD98-6C84-7F2EEFD409B1}"/>
+                <a16:creationId xmlns:a16="http://schemas.microsoft.com/office/drawing/2014/main" id="{431174F2-D382-A906-92F1-82C77698795F}"/>
               </a:ext>
             </a:extLst>
           </p:cNvPr>
@@ -16866,7 +16866,7 @@
     </p:spTree>
     <p:extLst>
       <p:ext uri="{BB962C8B-B14F-4D97-AF65-F5344CB8AC3E}">
-        <p14:creationId xmlns:p14="http://schemas.microsoft.com/office/powerpoint/2010/main" val="3080152989"/>
+        <p14:creationId xmlns:p14="http://schemas.microsoft.com/office/powerpoint/2010/main" val="677284245"/>
       </p:ext>
     </p:extLst>
   </p:cSld>
@@ -16898,7 +16898,7 @@
           <p:cNvPr id="7" name="creative_background">
             <a:extLst>
               <a:ext uri="{FF2B5EF4-FFF2-40B4-BE49-F238E27FC236}">
-                <a16:creationId xmlns:a16="http://schemas.microsoft.com/office/drawing/2014/main" id="{5FFBEAF0-649E-C106-D32A-21203C57D676}"/>
+                <a16:creationId xmlns:a16="http://schemas.microsoft.com/office/drawing/2014/main" id="{1097F2F9-2C58-3FF2-A5F2-EE70B06EBB84}"/>
               </a:ext>
             </a:extLst>
           </p:cNvPr>
@@ -16981,9 +16981,9 @@
           <a:bodyPr/>
           <a:lstStyle/>
           <a:p>
-            <a:fld id="{4354DB14-F9AE-4C12-8CFE-33ABF7B568CC}" type="datetimeFigureOut">
+            <a:fld id="{69C9F4DC-D411-4651-9AAC-29900672A9A6}" type="datetimeFigureOut">
               <a:rPr lang="en-US" smtClean="0"/>
-              <a:t>10/3/2026</a:t>
+              <a:t>10/4/2026</a:t>
             </a:fld>
             <a:endParaRPr lang="en-US"/>
           </a:p>
@@ -17023,7 +17023,7 @@
           <a:bodyPr/>
           <a:lstStyle/>
           <a:p>
-            <a:fld id="{74A457B9-11F0-4EFD-A461-9DC8C80A1D31}" type="slidenum">
+            <a:fld id="{B2681015-3E44-49AF-A930-B36E5E8634EC}" type="slidenum">
               <a:rPr lang="en-US" smtClean="0"/>
               <a:t>‹#›</a:t>
             </a:fld>
@@ -17036,7 +17036,7 @@
           <p:cNvPr id="8" name="marker_1">
             <a:extLst>
               <a:ext uri="{FF2B5EF4-FFF2-40B4-BE49-F238E27FC236}">
-                <a16:creationId xmlns:a16="http://schemas.microsoft.com/office/drawing/2014/main" id="{5A8C2A9A-102B-B737-FEF9-0AEBFFBCF132}"/>
+                <a16:creationId xmlns:a16="http://schemas.microsoft.com/office/drawing/2014/main" id="{BF29EB1F-1822-D924-9209-76EDAA98C8C7}"/>
               </a:ext>
             </a:extLst>
           </p:cNvPr>
@@ -17092,7 +17092,7 @@
           <p:cNvPr id="9" name="item_1_title">
             <a:extLst>
               <a:ext uri="{FF2B5EF4-FFF2-40B4-BE49-F238E27FC236}">
-                <a16:creationId xmlns:a16="http://schemas.microsoft.com/office/drawing/2014/main" id="{AE3A7A88-001D-2FAB-6E3A-021E6991BC05}"/>
+                <a16:creationId xmlns:a16="http://schemas.microsoft.com/office/drawing/2014/main" id="{68A40E54-8D83-BFBB-E0B0-A49CCE9A4357}"/>
               </a:ext>
             </a:extLst>
           </p:cNvPr>
@@ -17145,7 +17145,7 @@
           <p:cNvPr id="10" name="item_1">
             <a:extLst>
               <a:ext uri="{FF2B5EF4-FFF2-40B4-BE49-F238E27FC236}">
-                <a16:creationId xmlns:a16="http://schemas.microsoft.com/office/drawing/2014/main" id="{D8929006-876D-1512-F483-461C53A64232}"/>
+                <a16:creationId xmlns:a16="http://schemas.microsoft.com/office/drawing/2014/main" id="{9D6D375A-7B1D-F067-DB34-446A365C01E5}"/>
               </a:ext>
             </a:extLst>
           </p:cNvPr>
@@ -17193,7 +17193,7 @@
           <p:cNvPr id="11" name="marker_2">
             <a:extLst>
               <a:ext uri="{FF2B5EF4-FFF2-40B4-BE49-F238E27FC236}">
-                <a16:creationId xmlns:a16="http://schemas.microsoft.com/office/drawing/2014/main" id="{1B5A8086-74F0-70EB-46E1-BCCB2E472A69}"/>
+                <a16:creationId xmlns:a16="http://schemas.microsoft.com/office/drawing/2014/main" id="{11F82786-9032-AB1A-293A-4C3C5D763F0D}"/>
               </a:ext>
             </a:extLst>
           </p:cNvPr>
@@ -17249,7 +17249,7 @@
           <p:cNvPr id="12" name="item_2_title">
             <a:extLst>
               <a:ext uri="{FF2B5EF4-FFF2-40B4-BE49-F238E27FC236}">
-                <a16:creationId xmlns:a16="http://schemas.microsoft.com/office/drawing/2014/main" id="{FB813B2C-60C8-DF58-627C-67ABF851BD1C}"/>
+                <a16:creationId xmlns:a16="http://schemas.microsoft.com/office/drawing/2014/main" id="{8E23DA28-4C29-D0E4-9A29-F225CD1D15C8}"/>
               </a:ext>
             </a:extLst>
           </p:cNvPr>
@@ -17302,7 +17302,7 @@
           <p:cNvPr id="13" name="item_2">
             <a:extLst>
               <a:ext uri="{FF2B5EF4-FFF2-40B4-BE49-F238E27FC236}">
-                <a16:creationId xmlns:a16="http://schemas.microsoft.com/office/drawing/2014/main" id="{0382F791-BEF1-9DB2-CD0C-86AEF9853CFF}"/>
+                <a16:creationId xmlns:a16="http://schemas.microsoft.com/office/drawing/2014/main" id="{75AE1CD8-281B-DD81-CFD1-C773F28BBE61}"/>
               </a:ext>
             </a:extLst>
           </p:cNvPr>
@@ -17350,7 +17350,7 @@
           <p:cNvPr id="14" name="source">
             <a:extLst>
               <a:ext uri="{FF2B5EF4-FFF2-40B4-BE49-F238E27FC236}">
-                <a16:creationId xmlns:a16="http://schemas.microsoft.com/office/drawing/2014/main" id="{B54DA5B2-CFDA-D388-D881-7EB71CA81A72}"/>
+                <a16:creationId xmlns:a16="http://schemas.microsoft.com/office/drawing/2014/main" id="{58A81014-D001-7D81-EC01-C3597CEA0110}"/>
               </a:ext>
             </a:extLst>
           </p:cNvPr>
@@ -17405,7 +17405,7 @@
     </p:spTree>
     <p:extLst>
       <p:ext uri="{BB962C8B-B14F-4D97-AF65-F5344CB8AC3E}">
-        <p14:creationId xmlns:p14="http://schemas.microsoft.com/office/powerpoint/2010/main" val="3046247859"/>
+        <p14:creationId xmlns:p14="http://schemas.microsoft.com/office/powerpoint/2010/main" val="1833834785"/>
       </p:ext>
     </p:extLst>
   </p:cSld>
@@ -17437,7 +17437,7 @@
           <p:cNvPr id="7" name="creative_background">
             <a:extLst>
               <a:ext uri="{FF2B5EF4-FFF2-40B4-BE49-F238E27FC236}">
-                <a16:creationId xmlns:a16="http://schemas.microsoft.com/office/drawing/2014/main" id="{A4296B9F-17D3-8EC3-767A-A0D41D3FB6C3}"/>
+                <a16:creationId xmlns:a16="http://schemas.microsoft.com/office/drawing/2014/main" id="{A10EF303-48A4-201E-7E1C-918C74F4C7B9}"/>
               </a:ext>
             </a:extLst>
           </p:cNvPr>
@@ -17520,9 +17520,9 @@
           <a:bodyPr/>
           <a:lstStyle/>
           <a:p>
-            <a:fld id="{4354DB14-F9AE-4C12-8CFE-33ABF7B568CC}" type="datetimeFigureOut">
+            <a:fld id="{69C9F4DC-D411-4651-9AAC-29900672A9A6}" type="datetimeFigureOut">
               <a:rPr lang="en-US" smtClean="0"/>
-              <a:t>10/3/2026</a:t>
+              <a:t>10/4/2026</a:t>
             </a:fld>
             <a:endParaRPr lang="en-US"/>
           </a:p>
@@ -17562,7 +17562,7 @@
           <a:bodyPr/>
           <a:lstStyle/>
           <a:p>
-            <a:fld id="{74A457B9-11F0-4EFD-A461-9DC8C80A1D31}" type="slidenum">
+            <a:fld id="{B2681015-3E44-49AF-A930-B36E5E8634EC}" type="slidenum">
               <a:rPr lang="en-US" smtClean="0"/>
               <a:t>‹#›</a:t>
             </a:fld>
@@ -17575,7 +17575,7 @@
           <p:cNvPr id="8" name="kpi_value_1">
             <a:extLst>
               <a:ext uri="{FF2B5EF4-FFF2-40B4-BE49-F238E27FC236}">
-                <a16:creationId xmlns:a16="http://schemas.microsoft.com/office/drawing/2014/main" id="{B9A247BB-9815-6295-02C0-EA898010BEE4}"/>
+                <a16:creationId xmlns:a16="http://schemas.microsoft.com/office/drawing/2014/main" id="{83105D9C-8CF4-8D16-8AAF-F943FD00E9F0}"/>
               </a:ext>
             </a:extLst>
           </p:cNvPr>
@@ -17625,7 +17625,7 @@
           <p:cNvPr id="9" name="kpi_label_1">
             <a:extLst>
               <a:ext uri="{FF2B5EF4-FFF2-40B4-BE49-F238E27FC236}">
-                <a16:creationId xmlns:a16="http://schemas.microsoft.com/office/drawing/2014/main" id="{9B9BF415-5EBD-9C0C-8123-2232CB1C5B2D}"/>
+                <a16:creationId xmlns:a16="http://schemas.microsoft.com/office/drawing/2014/main" id="{D62531D8-B67D-5D60-920C-8587D25F8C3F}"/>
               </a:ext>
             </a:extLst>
           </p:cNvPr>
@@ -17673,7 +17673,7 @@
           <p:cNvPr id="10" name="quote">
             <a:extLst>
               <a:ext uri="{FF2B5EF4-FFF2-40B4-BE49-F238E27FC236}">
-                <a16:creationId xmlns:a16="http://schemas.microsoft.com/office/drawing/2014/main" id="{A75737CD-1E68-90FB-8F4C-9BE39463D120}"/>
+                <a16:creationId xmlns:a16="http://schemas.microsoft.com/office/drawing/2014/main" id="{E7DCFE3B-35A0-02C7-CDB0-D336F9B3EB90}"/>
               </a:ext>
             </a:extLst>
           </p:cNvPr>
@@ -17723,7 +17723,7 @@
           <p:cNvPr id="11" name="attribution">
             <a:extLst>
               <a:ext uri="{FF2B5EF4-FFF2-40B4-BE49-F238E27FC236}">
-                <a16:creationId xmlns:a16="http://schemas.microsoft.com/office/drawing/2014/main" id="{6DA07F3D-2ED7-A5BF-E0C3-A06259D5BC57}"/>
+                <a16:creationId xmlns:a16="http://schemas.microsoft.com/office/drawing/2014/main" id="{05E1A6AE-AA58-EF21-1A89-196C6D02AA8F}"/>
               </a:ext>
             </a:extLst>
           </p:cNvPr>
@@ -17771,7 +17771,7 @@
           <p:cNvPr id="12" name="item_1_title">
             <a:extLst>
               <a:ext uri="{FF2B5EF4-FFF2-40B4-BE49-F238E27FC236}">
-                <a16:creationId xmlns:a16="http://schemas.microsoft.com/office/drawing/2014/main" id="{B0540D34-BDE1-8F5C-557E-85D5CE62CAFC}"/>
+                <a16:creationId xmlns:a16="http://schemas.microsoft.com/office/drawing/2014/main" id="{4FB92602-C2D6-6196-4C67-0C2949B0A685}"/>
               </a:ext>
             </a:extLst>
           </p:cNvPr>
@@ -17824,7 +17824,7 @@
           <p:cNvPr id="13" name="item_1">
             <a:extLst>
               <a:ext uri="{FF2B5EF4-FFF2-40B4-BE49-F238E27FC236}">
-                <a16:creationId xmlns:a16="http://schemas.microsoft.com/office/drawing/2014/main" id="{949073EA-093D-9D05-5C4A-BDC133D9B8A3}"/>
+                <a16:creationId xmlns:a16="http://schemas.microsoft.com/office/drawing/2014/main" id="{5E0B9FB1-3369-ED28-9B99-72DDA8864BC7}"/>
               </a:ext>
             </a:extLst>
           </p:cNvPr>
@@ -17872,7 +17872,7 @@
           <p:cNvPr id="14" name="source">
             <a:extLst>
               <a:ext uri="{FF2B5EF4-FFF2-40B4-BE49-F238E27FC236}">
-                <a16:creationId xmlns:a16="http://schemas.microsoft.com/office/drawing/2014/main" id="{C56F8CCB-1E5C-AD99-A474-DC10A1197D82}"/>
+                <a16:creationId xmlns:a16="http://schemas.microsoft.com/office/drawing/2014/main" id="{30957357-BCB6-923E-0993-2A84FA1D8FA6}"/>
               </a:ext>
             </a:extLst>
           </p:cNvPr>
@@ -17927,7 +17927,7 @@
     </p:spTree>
     <p:extLst>
       <p:ext uri="{BB962C8B-B14F-4D97-AF65-F5344CB8AC3E}">
-        <p14:creationId xmlns:p14="http://schemas.microsoft.com/office/powerpoint/2010/main" val="4158398062"/>
+        <p14:creationId xmlns:p14="http://schemas.microsoft.com/office/powerpoint/2010/main" val="3914890003"/>
       </p:ext>
     </p:extLst>
   </p:cSld>
@@ -17959,7 +17959,7 @@
           <p:cNvPr id="7" name="creative_background">
             <a:extLst>
               <a:ext uri="{FF2B5EF4-FFF2-40B4-BE49-F238E27FC236}">
-                <a16:creationId xmlns:a16="http://schemas.microsoft.com/office/drawing/2014/main" id="{96A8AC14-8D5E-1860-2FBB-B809AB15157E}"/>
+                <a16:creationId xmlns:a16="http://schemas.microsoft.com/office/drawing/2014/main" id="{394A756E-6AA1-02F3-4DAB-C54632B27E79}"/>
               </a:ext>
             </a:extLst>
           </p:cNvPr>
@@ -18042,9 +18042,9 @@
           <a:bodyPr/>
           <a:lstStyle/>
           <a:p>
-            <a:fld id="{4354DB14-F9AE-4C12-8CFE-33ABF7B568CC}" type="datetimeFigureOut">
+            <a:fld id="{69C9F4DC-D411-4651-9AAC-29900672A9A6}" type="datetimeFigureOut">
               <a:rPr lang="en-US" smtClean="0"/>
-              <a:t>10/3/2026</a:t>
+              <a:t>10/4/2026</a:t>
             </a:fld>
             <a:endParaRPr lang="en-US"/>
           </a:p>
@@ -18084,7 +18084,7 @@
           <a:bodyPr/>
           <a:lstStyle/>
           <a:p>
-            <a:fld id="{74A457B9-11F0-4EFD-A461-9DC8C80A1D31}" type="slidenum">
+            <a:fld id="{B2681015-3E44-49AF-A930-B36E5E8634EC}" type="slidenum">
               <a:rPr lang="en-US" smtClean="0"/>
               <a:t>‹#›</a:t>
             </a:fld>
@@ -18097,7 +18097,7 @@
           <p:cNvPr id="8" name="marker_1">
             <a:extLst>
               <a:ext uri="{FF2B5EF4-FFF2-40B4-BE49-F238E27FC236}">
-                <a16:creationId xmlns:a16="http://schemas.microsoft.com/office/drawing/2014/main" id="{E0FFA35F-3CE8-F5D0-D2EE-CB32A0DF7AC9}"/>
+                <a16:creationId xmlns:a16="http://schemas.microsoft.com/office/drawing/2014/main" id="{79FA4C4B-7373-8F1D-A4FF-8BE0D54CBF2E}"/>
               </a:ext>
             </a:extLst>
           </p:cNvPr>
@@ -18153,7 +18153,7 @@
           <p:cNvPr id="9" name="item_1">
             <a:extLst>
               <a:ext uri="{FF2B5EF4-FFF2-40B4-BE49-F238E27FC236}">
-                <a16:creationId xmlns:a16="http://schemas.microsoft.com/office/drawing/2014/main" id="{A1F30BBF-B826-AD2C-EDBD-2A24F797A099}"/>
+                <a16:creationId xmlns:a16="http://schemas.microsoft.com/office/drawing/2014/main" id="{17F902F7-DC93-751E-1001-E3E76ECF2812}"/>
               </a:ext>
             </a:extLst>
           </p:cNvPr>
@@ -18201,7 +18201,7 @@
           <p:cNvPr id="10" name="marker_2">
             <a:extLst>
               <a:ext uri="{FF2B5EF4-FFF2-40B4-BE49-F238E27FC236}">
-                <a16:creationId xmlns:a16="http://schemas.microsoft.com/office/drawing/2014/main" id="{FDF6EE39-60BE-E893-4E52-E77BA47075EF}"/>
+                <a16:creationId xmlns:a16="http://schemas.microsoft.com/office/drawing/2014/main" id="{2B1A3770-9AF6-AA93-209A-907C8A566860}"/>
               </a:ext>
             </a:extLst>
           </p:cNvPr>
@@ -18257,7 +18257,7 @@
           <p:cNvPr id="11" name="item_2">
             <a:extLst>
               <a:ext uri="{FF2B5EF4-FFF2-40B4-BE49-F238E27FC236}">
-                <a16:creationId xmlns:a16="http://schemas.microsoft.com/office/drawing/2014/main" id="{2CD02C72-FE21-14F1-808B-313AD2C5F0C7}"/>
+                <a16:creationId xmlns:a16="http://schemas.microsoft.com/office/drawing/2014/main" id="{A0406F40-C513-6962-E7CF-C63E01BB8B7C}"/>
               </a:ext>
             </a:extLst>
           </p:cNvPr>
@@ -18305,7 +18305,7 @@
           <p:cNvPr id="12" name="marker_3">
             <a:extLst>
               <a:ext uri="{FF2B5EF4-FFF2-40B4-BE49-F238E27FC236}">
-                <a16:creationId xmlns:a16="http://schemas.microsoft.com/office/drawing/2014/main" id="{94F4B799-3900-0905-E273-D2613563E2C6}"/>
+                <a16:creationId xmlns:a16="http://schemas.microsoft.com/office/drawing/2014/main" id="{94D7DEDF-E8CF-0C0F-7C24-DD01E841B907}"/>
               </a:ext>
             </a:extLst>
           </p:cNvPr>
@@ -18361,7 +18361,7 @@
           <p:cNvPr id="13" name="item_3">
             <a:extLst>
               <a:ext uri="{FF2B5EF4-FFF2-40B4-BE49-F238E27FC236}">
-                <a16:creationId xmlns:a16="http://schemas.microsoft.com/office/drawing/2014/main" id="{0BB07331-495F-C4F4-8679-47495691CCC6}"/>
+                <a16:creationId xmlns:a16="http://schemas.microsoft.com/office/drawing/2014/main" id="{687CE094-43EC-6F7E-C27D-3E74CEF43838}"/>
               </a:ext>
             </a:extLst>
           </p:cNvPr>
@@ -18409,7 +18409,7 @@
           <p:cNvPr id="14" name="marker_4">
             <a:extLst>
               <a:ext uri="{FF2B5EF4-FFF2-40B4-BE49-F238E27FC236}">
-                <a16:creationId xmlns:a16="http://schemas.microsoft.com/office/drawing/2014/main" id="{756E692C-CDC1-D057-DCD2-8C6B9D8A8634}"/>
+                <a16:creationId xmlns:a16="http://schemas.microsoft.com/office/drawing/2014/main" id="{A0CE1D33-C61B-93C6-9D3E-EE94DA8AA254}"/>
               </a:ext>
             </a:extLst>
           </p:cNvPr>
@@ -18465,7 +18465,7 @@
           <p:cNvPr id="15" name="item_4">
             <a:extLst>
               <a:ext uri="{FF2B5EF4-FFF2-40B4-BE49-F238E27FC236}">
-                <a16:creationId xmlns:a16="http://schemas.microsoft.com/office/drawing/2014/main" id="{181841EB-8E94-A206-E2E6-F0D68E0F4F43}"/>
+                <a16:creationId xmlns:a16="http://schemas.microsoft.com/office/drawing/2014/main" id="{368BE036-8F26-CFFC-DF7A-225F5EF0B60D}"/>
               </a:ext>
             </a:extLst>
           </p:cNvPr>
@@ -18513,7 +18513,7 @@
           <p:cNvPr id="16" name="source">
             <a:extLst>
               <a:ext uri="{FF2B5EF4-FFF2-40B4-BE49-F238E27FC236}">
-                <a16:creationId xmlns:a16="http://schemas.microsoft.com/office/drawing/2014/main" id="{35CD7487-3302-A70D-53E0-8BBCC9753FDA}"/>
+                <a16:creationId xmlns:a16="http://schemas.microsoft.com/office/drawing/2014/main" id="{DFAC811A-9C7B-F6DA-55E8-9982EC5CF8A9}"/>
               </a:ext>
             </a:extLst>
           </p:cNvPr>
@@ -18568,7 +18568,7 @@
     </p:spTree>
     <p:extLst>
       <p:ext uri="{BB962C8B-B14F-4D97-AF65-F5344CB8AC3E}">
-        <p14:creationId xmlns:p14="http://schemas.microsoft.com/office/powerpoint/2010/main" val="2404616069"/>
+        <p14:creationId xmlns:p14="http://schemas.microsoft.com/office/powerpoint/2010/main" val="4171918168"/>
       </p:ext>
     </p:extLst>
   </p:cSld>
@@ -18600,7 +18600,7 @@
           <p:cNvPr id="7" name="creative_background">
             <a:extLst>
               <a:ext uri="{FF2B5EF4-FFF2-40B4-BE49-F238E27FC236}">
-                <a16:creationId xmlns:a16="http://schemas.microsoft.com/office/drawing/2014/main" id="{00B1424C-FB5E-1244-08ED-02CA052473D6}"/>
+                <a16:creationId xmlns:a16="http://schemas.microsoft.com/office/drawing/2014/main" id="{6ED757D8-CDB1-F537-E09F-7D2EA293BC6B}"/>
               </a:ext>
             </a:extLst>
           </p:cNvPr>
@@ -18683,9 +18683,9 @@
           <a:bodyPr/>
           <a:lstStyle/>
           <a:p>
-            <a:fld id="{4354DB14-F9AE-4C12-8CFE-33ABF7B568CC}" type="datetimeFigureOut">
+            <a:fld id="{69C9F4DC-D411-4651-9AAC-29900672A9A6}" type="datetimeFigureOut">
               <a:rPr lang="en-US" smtClean="0"/>
-              <a:t>10/3/2026</a:t>
+              <a:t>10/4/2026</a:t>
             </a:fld>
             <a:endParaRPr lang="en-US"/>
           </a:p>
@@ -18725,7 +18725,7 @@
           <a:bodyPr/>
           <a:lstStyle/>
           <a:p>
-            <a:fld id="{74A457B9-11F0-4EFD-A461-9DC8C80A1D31}" type="slidenum">
+            <a:fld id="{B2681015-3E44-49AF-A930-B36E5E8634EC}" type="slidenum">
               <a:rPr lang="en-US" smtClean="0"/>
               <a:t>‹#›</a:t>
             </a:fld>
@@ -18738,7 +18738,7 @@
           <p:cNvPr id="8" name="decisions_title">
             <a:extLst>
               <a:ext uri="{FF2B5EF4-FFF2-40B4-BE49-F238E27FC236}">
-                <a16:creationId xmlns:a16="http://schemas.microsoft.com/office/drawing/2014/main" id="{38DFED30-8BA8-2C21-8E6E-907646FAC8D1}"/>
+                <a16:creationId xmlns:a16="http://schemas.microsoft.com/office/drawing/2014/main" id="{6E0A3EF9-CF53-45C9-376A-1556BAAE520C}"/>
               </a:ext>
             </a:extLst>
           </p:cNvPr>
@@ -18788,7 +18788,7 @@
           <p:cNvPr id="9" name="decisions">
             <a:extLst>
               <a:ext uri="{FF2B5EF4-FFF2-40B4-BE49-F238E27FC236}">
-                <a16:creationId xmlns:a16="http://schemas.microsoft.com/office/drawing/2014/main" id="{EE0C5E28-DCF6-B7BF-94AC-BB7EADE5D543}"/>
+                <a16:creationId xmlns:a16="http://schemas.microsoft.com/office/drawing/2014/main" id="{A0EAA228-FB07-2627-375A-FAA874EEA3DB}"/>
               </a:ext>
             </a:extLst>
           </p:cNvPr>
@@ -18831,7 +18831,7 @@
           <p:cNvPr id="10" name="item_1_title">
             <a:extLst>
               <a:ext uri="{FF2B5EF4-FFF2-40B4-BE49-F238E27FC236}">
-                <a16:creationId xmlns:a16="http://schemas.microsoft.com/office/drawing/2014/main" id="{7B6EB532-16D4-9F25-74C4-A83F53C37C5E}"/>
+                <a16:creationId xmlns:a16="http://schemas.microsoft.com/office/drawing/2014/main" id="{6EE52E75-DEA6-78C2-F29E-641A96BDF500}"/>
               </a:ext>
             </a:extLst>
           </p:cNvPr>
@@ -18884,7 +18884,7 @@
           <p:cNvPr id="11" name="item_1">
             <a:extLst>
               <a:ext uri="{FF2B5EF4-FFF2-40B4-BE49-F238E27FC236}">
-                <a16:creationId xmlns:a16="http://schemas.microsoft.com/office/drawing/2014/main" id="{1BCDB63F-FD06-6C98-F201-D15E94E4E5B9}"/>
+                <a16:creationId xmlns:a16="http://schemas.microsoft.com/office/drawing/2014/main" id="{8ABECA17-E497-CDFA-41A1-A3D1B76CFE1C}"/>
               </a:ext>
             </a:extLst>
           </p:cNvPr>
@@ -18932,7 +18932,7 @@
           <p:cNvPr id="12" name="item_2_title">
             <a:extLst>
               <a:ext uri="{FF2B5EF4-FFF2-40B4-BE49-F238E27FC236}">
-                <a16:creationId xmlns:a16="http://schemas.microsoft.com/office/drawing/2014/main" id="{60E530E2-70FE-FF6C-8976-A341D4AE3CD8}"/>
+                <a16:creationId xmlns:a16="http://schemas.microsoft.com/office/drawing/2014/main" id="{09941E52-B991-3840-50D3-3EFEA9FD4D9C}"/>
               </a:ext>
             </a:extLst>
           </p:cNvPr>
@@ -18985,7 +18985,7 @@
           <p:cNvPr id="13" name="item_2">
             <a:extLst>
               <a:ext uri="{FF2B5EF4-FFF2-40B4-BE49-F238E27FC236}">
-                <a16:creationId xmlns:a16="http://schemas.microsoft.com/office/drawing/2014/main" id="{9578D522-C60C-9BA7-5E98-DF9AC2D872B4}"/>
+                <a16:creationId xmlns:a16="http://schemas.microsoft.com/office/drawing/2014/main" id="{427C1B63-F9FE-EF6A-58D4-3FE7D1988D5C}"/>
               </a:ext>
             </a:extLst>
           </p:cNvPr>
@@ -19033,7 +19033,7 @@
           <p:cNvPr id="14" name="item_3_title">
             <a:extLst>
               <a:ext uri="{FF2B5EF4-FFF2-40B4-BE49-F238E27FC236}">
-                <a16:creationId xmlns:a16="http://schemas.microsoft.com/office/drawing/2014/main" id="{DBC8ECA3-FA64-DFC4-65C2-87082EF0DC22}"/>
+                <a16:creationId xmlns:a16="http://schemas.microsoft.com/office/drawing/2014/main" id="{53349D09-A0F7-90A5-F4C0-C9EB7B5EE9AA}"/>
               </a:ext>
             </a:extLst>
           </p:cNvPr>
@@ -19086,7 +19086,7 @@
           <p:cNvPr id="15" name="item_3">
             <a:extLst>
               <a:ext uri="{FF2B5EF4-FFF2-40B4-BE49-F238E27FC236}">
-                <a16:creationId xmlns:a16="http://schemas.microsoft.com/office/drawing/2014/main" id="{25387378-1A2A-2630-5AD2-E494A3280A06}"/>
+                <a16:creationId xmlns:a16="http://schemas.microsoft.com/office/drawing/2014/main" id="{302ACDA3-2DAA-2388-882F-728E4E8CCB8B}"/>
               </a:ext>
             </a:extLst>
           </p:cNvPr>
@@ -19134,7 +19134,7 @@
           <p:cNvPr id="16" name="source">
             <a:extLst>
               <a:ext uri="{FF2B5EF4-FFF2-40B4-BE49-F238E27FC236}">
-                <a16:creationId xmlns:a16="http://schemas.microsoft.com/office/drawing/2014/main" id="{D968B59E-3E49-D874-7B96-C5C42327DAD1}"/>
+                <a16:creationId xmlns:a16="http://schemas.microsoft.com/office/drawing/2014/main" id="{1D8514BC-F6F3-0442-C15A-A54FC07B461E}"/>
               </a:ext>
             </a:extLst>
           </p:cNvPr>
@@ -19189,7 +19189,7 @@
     </p:spTree>
     <p:extLst>
       <p:ext uri="{BB962C8B-B14F-4D97-AF65-F5344CB8AC3E}">
-        <p14:creationId xmlns:p14="http://schemas.microsoft.com/office/powerpoint/2010/main" val="1039534599"/>
+        <p14:creationId xmlns:p14="http://schemas.microsoft.com/office/powerpoint/2010/main" val="3141551721"/>
       </p:ext>
     </p:extLst>
   </p:cSld>
@@ -19221,7 +19221,7 @@
           <p:cNvPr id="7" name="creative_background">
             <a:extLst>
               <a:ext uri="{FF2B5EF4-FFF2-40B4-BE49-F238E27FC236}">
-                <a16:creationId xmlns:a16="http://schemas.microsoft.com/office/drawing/2014/main" id="{6A6E5DF8-CBBF-5761-A137-F8662A30B8C5}"/>
+                <a16:creationId xmlns:a16="http://schemas.microsoft.com/office/drawing/2014/main" id="{1D80849E-CE5D-FE8B-6FDE-2B2E2DBC7005}"/>
               </a:ext>
             </a:extLst>
           </p:cNvPr>
@@ -19304,9 +19304,9 @@
           <a:bodyPr/>
           <a:lstStyle/>
           <a:p>
-            <a:fld id="{4354DB14-F9AE-4C12-8CFE-33ABF7B568CC}" type="datetimeFigureOut">
+            <a:fld id="{69C9F4DC-D411-4651-9AAC-29900672A9A6}" type="datetimeFigureOut">
               <a:rPr lang="en-US" smtClean="0"/>
-              <a:t>10/3/2026</a:t>
+              <a:t>10/4/2026</a:t>
             </a:fld>
             <a:endParaRPr lang="en-US"/>
           </a:p>
@@ -19346,7 +19346,7 @@
           <a:bodyPr/>
           <a:lstStyle/>
           <a:p>
-            <a:fld id="{74A457B9-11F0-4EFD-A461-9DC8C80A1D31}" type="slidenum">
+            <a:fld id="{B2681015-3E44-49AF-A930-B36E5E8634EC}" type="slidenum">
               <a:rPr lang="en-US" smtClean="0"/>
               <a:t>‹#›</a:t>
             </a:fld>
@@ -19359,7 +19359,7 @@
           <p:cNvPr id="8" name="body">
             <a:extLst>
               <a:ext uri="{FF2B5EF4-FFF2-40B4-BE49-F238E27FC236}">
-                <a16:creationId xmlns:a16="http://schemas.microsoft.com/office/drawing/2014/main" id="{8E401829-ABD9-AFE1-0192-81E757F57E46}"/>
+                <a16:creationId xmlns:a16="http://schemas.microsoft.com/office/drawing/2014/main" id="{783E907E-DE76-6FF8-1AD0-C2112977894C}"/>
               </a:ext>
             </a:extLst>
           </p:cNvPr>
@@ -19399,7 +19399,7 @@
           <p:cNvPr id="9" name="kpi_value_1">
             <a:extLst>
               <a:ext uri="{FF2B5EF4-FFF2-40B4-BE49-F238E27FC236}">
-                <a16:creationId xmlns:a16="http://schemas.microsoft.com/office/drawing/2014/main" id="{AE8CB48D-27DB-8B7D-3AF6-1017836F4843}"/>
+                <a16:creationId xmlns:a16="http://schemas.microsoft.com/office/drawing/2014/main" id="{6CB74F72-BAE8-BB7A-75F0-32DB38FE4677}"/>
               </a:ext>
             </a:extLst>
           </p:cNvPr>
@@ -19452,7 +19452,7 @@
           <p:cNvPr id="10" name="kpi_label_1">
             <a:extLst>
               <a:ext uri="{FF2B5EF4-FFF2-40B4-BE49-F238E27FC236}">
-                <a16:creationId xmlns:a16="http://schemas.microsoft.com/office/drawing/2014/main" id="{B6619627-E504-02A2-40A9-0587F9C32DA9}"/>
+                <a16:creationId xmlns:a16="http://schemas.microsoft.com/office/drawing/2014/main" id="{ACBA3F38-B19B-7A34-D5FE-E310C51A91D2}"/>
               </a:ext>
             </a:extLst>
           </p:cNvPr>
@@ -19500,7 +19500,7 @@
           <p:cNvPr id="11" name="kpi_value_2">
             <a:extLst>
               <a:ext uri="{FF2B5EF4-FFF2-40B4-BE49-F238E27FC236}">
-                <a16:creationId xmlns:a16="http://schemas.microsoft.com/office/drawing/2014/main" id="{21105B70-53E3-015A-C0A8-771DCA6E3436}"/>
+                <a16:creationId xmlns:a16="http://schemas.microsoft.com/office/drawing/2014/main" id="{48019C77-0C75-EFE5-85E4-98A27F7CA8CF}"/>
               </a:ext>
             </a:extLst>
           </p:cNvPr>
@@ -19553,7 +19553,7 @@
           <p:cNvPr id="12" name="kpi_label_2">
             <a:extLst>
               <a:ext uri="{FF2B5EF4-FFF2-40B4-BE49-F238E27FC236}">
-                <a16:creationId xmlns:a16="http://schemas.microsoft.com/office/drawing/2014/main" id="{E4BE7DB4-8458-C5FF-6446-9745E6A60093}"/>
+                <a16:creationId xmlns:a16="http://schemas.microsoft.com/office/drawing/2014/main" id="{609AF094-FC62-ED37-1AC1-4E895619CCFE}"/>
               </a:ext>
             </a:extLst>
           </p:cNvPr>
@@ -19601,7 +19601,7 @@
           <p:cNvPr id="13" name="source">
             <a:extLst>
               <a:ext uri="{FF2B5EF4-FFF2-40B4-BE49-F238E27FC236}">
-                <a16:creationId xmlns:a16="http://schemas.microsoft.com/office/drawing/2014/main" id="{6F56E8F0-E2D1-5F16-AF94-1D91C12B59E2}"/>
+                <a16:creationId xmlns:a16="http://schemas.microsoft.com/office/drawing/2014/main" id="{1EED54E8-47CB-8538-5FEB-6AB0D7BDCFF5}"/>
               </a:ext>
             </a:extLst>
           </p:cNvPr>
@@ -19656,7 +19656,7 @@
     </p:spTree>
     <p:extLst>
       <p:ext uri="{BB962C8B-B14F-4D97-AF65-F5344CB8AC3E}">
-        <p14:creationId xmlns:p14="http://schemas.microsoft.com/office/powerpoint/2010/main" val="2027911426"/>
+        <p14:creationId xmlns:p14="http://schemas.microsoft.com/office/powerpoint/2010/main" val="669382654"/>
       </p:ext>
     </p:extLst>
   </p:cSld>
@@ -19688,7 +19688,7 @@
           <p:cNvPr id="7" name="creative_background">
             <a:extLst>
               <a:ext uri="{FF2B5EF4-FFF2-40B4-BE49-F238E27FC236}">
-                <a16:creationId xmlns:a16="http://schemas.microsoft.com/office/drawing/2014/main" id="{15F0D494-67CC-8188-3346-0472F784969E}"/>
+                <a16:creationId xmlns:a16="http://schemas.microsoft.com/office/drawing/2014/main" id="{8EC0F744-DB33-A847-DE85-B386B32608E7}"/>
               </a:ext>
             </a:extLst>
           </p:cNvPr>
@@ -19771,9 +19771,9 @@
           <a:bodyPr/>
           <a:lstStyle/>
           <a:p>
-            <a:fld id="{4354DB14-F9AE-4C12-8CFE-33ABF7B568CC}" type="datetimeFigureOut">
+            <a:fld id="{69C9F4DC-D411-4651-9AAC-29900672A9A6}" type="datetimeFigureOut">
               <a:rPr lang="en-US" smtClean="0"/>
-              <a:t>10/3/2026</a:t>
+              <a:t>10/4/2026</a:t>
             </a:fld>
             <a:endParaRPr lang="en-US"/>
           </a:p>
@@ -19813,7 +19813,7 @@
           <a:bodyPr/>
           <a:lstStyle/>
           <a:p>
-            <a:fld id="{74A457B9-11F0-4EFD-A461-9DC8C80A1D31}" type="slidenum">
+            <a:fld id="{B2681015-3E44-49AF-A930-B36E5E8634EC}" type="slidenum">
               <a:rPr lang="en-US" smtClean="0"/>
               <a:t>‹#›</a:t>
             </a:fld>
@@ -19826,7 +19826,7 @@
           <p:cNvPr id="8" name="body">
             <a:extLst>
               <a:ext uri="{FF2B5EF4-FFF2-40B4-BE49-F238E27FC236}">
-                <a16:creationId xmlns:a16="http://schemas.microsoft.com/office/drawing/2014/main" id="{CC3BAD97-311E-2E9A-C1B9-6BA9337D79CF}"/>
+                <a16:creationId xmlns:a16="http://schemas.microsoft.com/office/drawing/2014/main" id="{FC6ED26D-D24E-7A1D-1E73-EC7E54C0EEF5}"/>
               </a:ext>
             </a:extLst>
           </p:cNvPr>
@@ -19866,7 +19866,7 @@
           <p:cNvPr id="9" name="kpi_value_1">
             <a:extLst>
               <a:ext uri="{FF2B5EF4-FFF2-40B4-BE49-F238E27FC236}">
-                <a16:creationId xmlns:a16="http://schemas.microsoft.com/office/drawing/2014/main" id="{8CF376DF-EA5D-1736-E4D2-02592469A2A2}"/>
+                <a16:creationId xmlns:a16="http://schemas.microsoft.com/office/drawing/2014/main" id="{D13DF17B-B2DF-5EA6-EBBF-FE81BF814C31}"/>
               </a:ext>
             </a:extLst>
           </p:cNvPr>
@@ -19919,7 +19919,7 @@
           <p:cNvPr id="10" name="kpi_label_1">
             <a:extLst>
               <a:ext uri="{FF2B5EF4-FFF2-40B4-BE49-F238E27FC236}">
-                <a16:creationId xmlns:a16="http://schemas.microsoft.com/office/drawing/2014/main" id="{30133F40-F75E-5F54-A8D7-070EB5B3082B}"/>
+                <a16:creationId xmlns:a16="http://schemas.microsoft.com/office/drawing/2014/main" id="{0B919FAF-B661-5932-9072-EAA1C6ECCD80}"/>
               </a:ext>
             </a:extLst>
           </p:cNvPr>
@@ -19967,7 +19967,7 @@
           <p:cNvPr id="11" name="kpi_value_2">
             <a:extLst>
               <a:ext uri="{FF2B5EF4-FFF2-40B4-BE49-F238E27FC236}">
-                <a16:creationId xmlns:a16="http://schemas.microsoft.com/office/drawing/2014/main" id="{CE846D78-B4B1-9D59-453F-7828CC1EB45F}"/>
+                <a16:creationId xmlns:a16="http://schemas.microsoft.com/office/drawing/2014/main" id="{C63EF7F4-D239-8534-6966-CDB9168B79A7}"/>
               </a:ext>
             </a:extLst>
           </p:cNvPr>
@@ -20020,7 +20020,7 @@
           <p:cNvPr id="12" name="kpi_label_2">
             <a:extLst>
               <a:ext uri="{FF2B5EF4-FFF2-40B4-BE49-F238E27FC236}">
-                <a16:creationId xmlns:a16="http://schemas.microsoft.com/office/drawing/2014/main" id="{D23D1DB6-F981-4E3A-2A7B-B2924143E289}"/>
+                <a16:creationId xmlns:a16="http://schemas.microsoft.com/office/drawing/2014/main" id="{D3F44B07-7D96-3CB5-9A10-AACBCFCF3FDA}"/>
               </a:ext>
             </a:extLst>
           </p:cNvPr>
@@ -20068,7 +20068,7 @@
           <p:cNvPr id="13" name="kpi_value_3">
             <a:extLst>
               <a:ext uri="{FF2B5EF4-FFF2-40B4-BE49-F238E27FC236}">
-                <a16:creationId xmlns:a16="http://schemas.microsoft.com/office/drawing/2014/main" id="{C9B12F3D-D71B-C33E-1F5B-6792440DF172}"/>
+                <a16:creationId xmlns:a16="http://schemas.microsoft.com/office/drawing/2014/main" id="{A0E65E45-56BD-9959-42DE-23E5103C154D}"/>
               </a:ext>
             </a:extLst>
           </p:cNvPr>
@@ -20121,7 +20121,7 @@
           <p:cNvPr id="14" name="kpi_label_3">
             <a:extLst>
               <a:ext uri="{FF2B5EF4-FFF2-40B4-BE49-F238E27FC236}">
-                <a16:creationId xmlns:a16="http://schemas.microsoft.com/office/drawing/2014/main" id="{930484CB-4952-4F74-97F6-BA5E604403C1}"/>
+                <a16:creationId xmlns:a16="http://schemas.microsoft.com/office/drawing/2014/main" id="{F974B1DE-7EE8-E354-AE1E-B3148215D147}"/>
               </a:ext>
             </a:extLst>
           </p:cNvPr>
@@ -20169,7 +20169,7 @@
           <p:cNvPr id="15" name="kpi_value_4">
             <a:extLst>
               <a:ext uri="{FF2B5EF4-FFF2-40B4-BE49-F238E27FC236}">
-                <a16:creationId xmlns:a16="http://schemas.microsoft.com/office/drawing/2014/main" id="{EBFB26EF-3866-DC6B-F1E6-79B791E5F1C5}"/>
+                <a16:creationId xmlns:a16="http://schemas.microsoft.com/office/drawing/2014/main" id="{16C79F3B-B5BA-E711-8BA7-AF1E104ECE9C}"/>
               </a:ext>
             </a:extLst>
           </p:cNvPr>
@@ -20222,7 +20222,7 @@
           <p:cNvPr id="16" name="kpi_label_4">
             <a:extLst>
               <a:ext uri="{FF2B5EF4-FFF2-40B4-BE49-F238E27FC236}">
-                <a16:creationId xmlns:a16="http://schemas.microsoft.com/office/drawing/2014/main" id="{BE29E475-D05F-2E6C-2022-AB233F991BD5}"/>
+                <a16:creationId xmlns:a16="http://schemas.microsoft.com/office/drawing/2014/main" id="{1AB50EE4-88AA-736D-5B76-F00272494826}"/>
               </a:ext>
             </a:extLst>
           </p:cNvPr>
@@ -20270,7 +20270,7 @@
           <p:cNvPr id="17" name="source">
             <a:extLst>
               <a:ext uri="{FF2B5EF4-FFF2-40B4-BE49-F238E27FC236}">
-                <a16:creationId xmlns:a16="http://schemas.microsoft.com/office/drawing/2014/main" id="{DCC3E1EE-2ED0-D158-4C0E-5D6940C8774B}"/>
+                <a16:creationId xmlns:a16="http://schemas.microsoft.com/office/drawing/2014/main" id="{4E4CA2A1-4234-19C4-AE10-278AFBEB8978}"/>
               </a:ext>
             </a:extLst>
           </p:cNvPr>
@@ -20325,7 +20325,7 @@
     </p:spTree>
     <p:extLst>
       <p:ext uri="{BB962C8B-B14F-4D97-AF65-F5344CB8AC3E}">
-        <p14:creationId xmlns:p14="http://schemas.microsoft.com/office/powerpoint/2010/main" val="3194351015"/>
+        <p14:creationId xmlns:p14="http://schemas.microsoft.com/office/powerpoint/2010/main" val="2513028078"/>
       </p:ext>
     </p:extLst>
   </p:cSld>
@@ -20357,7 +20357,7 @@
           <p:cNvPr id="7" name="creative_background">
             <a:extLst>
               <a:ext uri="{FF2B5EF4-FFF2-40B4-BE49-F238E27FC236}">
-                <a16:creationId xmlns:a16="http://schemas.microsoft.com/office/drawing/2014/main" id="{68F91874-1EE8-AE0F-9730-7EFE2D3DBF06}"/>
+                <a16:creationId xmlns:a16="http://schemas.microsoft.com/office/drawing/2014/main" id="{8EA7ED79-30C3-9AB2-8ACC-1E0F856566FD}"/>
               </a:ext>
             </a:extLst>
           </p:cNvPr>
@@ -20440,9 +20440,9 @@
           <a:bodyPr/>
           <a:lstStyle/>
           <a:p>
-            <a:fld id="{4354DB14-F9AE-4C12-8CFE-33ABF7B568CC}" type="datetimeFigureOut">
+            <a:fld id="{69C9F4DC-D411-4651-9AAC-29900672A9A6}" type="datetimeFigureOut">
               <a:rPr lang="en-US" smtClean="0"/>
-              <a:t>10/3/2026</a:t>
+              <a:t>10/4/2026</a:t>
             </a:fld>
             <a:endParaRPr lang="en-US"/>
           </a:p>
@@ -20482,7 +20482,7 @@
           <a:bodyPr/>
           <a:lstStyle/>
           <a:p>
-            <a:fld id="{74A457B9-11F0-4EFD-A461-9DC8C80A1D31}" type="slidenum">
+            <a:fld id="{B2681015-3E44-49AF-A930-B36E5E8634EC}" type="slidenum">
               <a:rPr lang="en-US" smtClean="0"/>
               <a:t>‹#›</a:t>
             </a:fld>
@@ -20495,7 +20495,7 @@
           <p:cNvPr id="8" name="body">
             <a:extLst>
               <a:ext uri="{FF2B5EF4-FFF2-40B4-BE49-F238E27FC236}">
-                <a16:creationId xmlns:a16="http://schemas.microsoft.com/office/drawing/2014/main" id="{FB1062F2-91D4-C5FC-567B-878962B848B2}"/>
+                <a16:creationId xmlns:a16="http://schemas.microsoft.com/office/drawing/2014/main" id="{690A12A3-12E1-62C2-7DCC-22D2DD01AC18}"/>
               </a:ext>
             </a:extLst>
           </p:cNvPr>
@@ -20535,7 +20535,7 @@
           <p:cNvPr id="9" name="quote">
             <a:extLst>
               <a:ext uri="{FF2B5EF4-FFF2-40B4-BE49-F238E27FC236}">
-                <a16:creationId xmlns:a16="http://schemas.microsoft.com/office/drawing/2014/main" id="{BA15F270-0FF4-59CF-D938-48B2634B7961}"/>
+                <a16:creationId xmlns:a16="http://schemas.microsoft.com/office/drawing/2014/main" id="{203844F4-AF7E-8E05-FFFE-F2AC4B9D5213}"/>
               </a:ext>
             </a:extLst>
           </p:cNvPr>
@@ -20585,7 +20585,7 @@
           <p:cNvPr id="10" name="attribution">
             <a:extLst>
               <a:ext uri="{FF2B5EF4-FFF2-40B4-BE49-F238E27FC236}">
-                <a16:creationId xmlns:a16="http://schemas.microsoft.com/office/drawing/2014/main" id="{D0C72D01-6D59-CC03-C521-71216C61ED07}"/>
+                <a16:creationId xmlns:a16="http://schemas.microsoft.com/office/drawing/2014/main" id="{1C7D359C-AD7F-EDFA-C80C-CE351463472D}"/>
               </a:ext>
             </a:extLst>
           </p:cNvPr>
@@ -20633,7 +20633,7 @@
           <p:cNvPr id="11" name="source">
             <a:extLst>
               <a:ext uri="{FF2B5EF4-FFF2-40B4-BE49-F238E27FC236}">
-                <a16:creationId xmlns:a16="http://schemas.microsoft.com/office/drawing/2014/main" id="{3A97CCAD-9025-4140-6FE2-130602395244}"/>
+                <a16:creationId xmlns:a16="http://schemas.microsoft.com/office/drawing/2014/main" id="{4A5ABFA0-4F2F-A7FC-6CAC-BDC0C58539AB}"/>
               </a:ext>
             </a:extLst>
           </p:cNvPr>
@@ -20688,7 +20688,7 @@
     </p:spTree>
     <p:extLst>
       <p:ext uri="{BB962C8B-B14F-4D97-AF65-F5344CB8AC3E}">
-        <p14:creationId xmlns:p14="http://schemas.microsoft.com/office/powerpoint/2010/main" val="180695183"/>
+        <p14:creationId xmlns:p14="http://schemas.microsoft.com/office/powerpoint/2010/main" val="589871913"/>
       </p:ext>
     </p:extLst>
   </p:cSld>
@@ -20720,7 +20720,7 @@
           <p:cNvPr id="7" name="creative_background">
             <a:extLst>
               <a:ext uri="{FF2B5EF4-FFF2-40B4-BE49-F238E27FC236}">
-                <a16:creationId xmlns:a16="http://schemas.microsoft.com/office/drawing/2014/main" id="{CC987C7C-DC17-26D7-0D0E-2F22DC3765E6}"/>
+                <a16:creationId xmlns:a16="http://schemas.microsoft.com/office/drawing/2014/main" id="{C8E8886E-0948-D88A-1546-7A9591DA8A06}"/>
               </a:ext>
             </a:extLst>
           </p:cNvPr>
@@ -20803,9 +20803,9 @@
           <a:bodyPr/>
           <a:lstStyle/>
           <a:p>
-            <a:fld id="{4354DB14-F9AE-4C12-8CFE-33ABF7B568CC}" type="datetimeFigureOut">
+            <a:fld id="{69C9F4DC-D411-4651-9AAC-29900672A9A6}" type="datetimeFigureOut">
               <a:rPr lang="en-US" smtClean="0"/>
-              <a:t>10/3/2026</a:t>
+              <a:t>10/4/2026</a:t>
             </a:fld>
             <a:endParaRPr lang="en-US"/>
           </a:p>
@@ -20845,7 +20845,7 @@
           <a:bodyPr/>
           <a:lstStyle/>
           <a:p>
-            <a:fld id="{74A457B9-11F0-4EFD-A461-9DC8C80A1D31}" type="slidenum">
+            <a:fld id="{B2681015-3E44-49AF-A930-B36E5E8634EC}" type="slidenum">
               <a:rPr lang="en-US" smtClean="0"/>
               <a:t>‹#›</a:t>
             </a:fld>
@@ -20858,7 +20858,7 @@
           <p:cNvPr id="8" name="item_1_title">
             <a:extLst>
               <a:ext uri="{FF2B5EF4-FFF2-40B4-BE49-F238E27FC236}">
-                <a16:creationId xmlns:a16="http://schemas.microsoft.com/office/drawing/2014/main" id="{97F1100D-6B18-7785-92C4-97FA62CA76E6}"/>
+                <a16:creationId xmlns:a16="http://schemas.microsoft.com/office/drawing/2014/main" id="{F56634E7-2173-E57E-3E0C-34C125597DF6}"/>
               </a:ext>
             </a:extLst>
           </p:cNvPr>
@@ -20908,7 +20908,7 @@
           <p:cNvPr id="9" name="item_1">
             <a:extLst>
               <a:ext uri="{FF2B5EF4-FFF2-40B4-BE49-F238E27FC236}">
-                <a16:creationId xmlns:a16="http://schemas.microsoft.com/office/drawing/2014/main" id="{4258EA6F-FFAA-8DEA-B1C6-0BA3C245C545}"/>
+                <a16:creationId xmlns:a16="http://schemas.microsoft.com/office/drawing/2014/main" id="{573C0158-4DC4-BA70-202E-1FC75C5F4717}"/>
               </a:ext>
             </a:extLst>
           </p:cNvPr>
@@ -20956,7 +20956,7 @@
           <p:cNvPr id="10" name="item_2_title">
             <a:extLst>
               <a:ext uri="{FF2B5EF4-FFF2-40B4-BE49-F238E27FC236}">
-                <a16:creationId xmlns:a16="http://schemas.microsoft.com/office/drawing/2014/main" id="{9995D3D1-B88D-F9EF-1ED3-F425916AE495}"/>
+                <a16:creationId xmlns:a16="http://schemas.microsoft.com/office/drawing/2014/main" id="{E5C28608-7426-4DED-F815-63E868CFDD59}"/>
               </a:ext>
             </a:extLst>
           </p:cNvPr>
@@ -21009,7 +21009,7 @@
           <p:cNvPr id="11" name="item_2">
             <a:extLst>
               <a:ext uri="{FF2B5EF4-FFF2-40B4-BE49-F238E27FC236}">
-                <a16:creationId xmlns:a16="http://schemas.microsoft.com/office/drawing/2014/main" id="{57A59C9A-CA45-033D-91CF-0A7CDA5BC03B}"/>
+                <a16:creationId xmlns:a16="http://schemas.microsoft.com/office/drawing/2014/main" id="{2DE6A4DB-34F9-8DB2-C31F-FFFADAEC0D95}"/>
               </a:ext>
             </a:extLst>
           </p:cNvPr>
@@ -21057,7 +21057,7 @@
           <p:cNvPr id="12" name="item_3_title">
             <a:extLst>
               <a:ext uri="{FF2B5EF4-FFF2-40B4-BE49-F238E27FC236}">
-                <a16:creationId xmlns:a16="http://schemas.microsoft.com/office/drawing/2014/main" id="{59C4438D-E949-516D-9AEF-5492DE9DC7A9}"/>
+                <a16:creationId xmlns:a16="http://schemas.microsoft.com/office/drawing/2014/main" id="{5B499ACB-E71D-39C6-1ADC-A2CF91E8B33F}"/>
               </a:ext>
             </a:extLst>
           </p:cNvPr>
@@ -21110,7 +21110,7 @@
           <p:cNvPr id="13" name="item_3">
             <a:extLst>
               <a:ext uri="{FF2B5EF4-FFF2-40B4-BE49-F238E27FC236}">
-                <a16:creationId xmlns:a16="http://schemas.microsoft.com/office/drawing/2014/main" id="{C0426524-E52B-9B68-ED94-8533ACA7B81E}"/>
+                <a16:creationId xmlns:a16="http://schemas.microsoft.com/office/drawing/2014/main" id="{892ADCEF-CE41-9454-5648-0CB3A205F0FC}"/>
               </a:ext>
             </a:extLst>
           </p:cNvPr>
@@ -21158,7 +21158,7 @@
           <p:cNvPr id="14" name="source">
             <a:extLst>
               <a:ext uri="{FF2B5EF4-FFF2-40B4-BE49-F238E27FC236}">
-                <a16:creationId xmlns:a16="http://schemas.microsoft.com/office/drawing/2014/main" id="{3DD54B3B-437E-4E67-3D99-6E99E70B1AC7}"/>
+                <a16:creationId xmlns:a16="http://schemas.microsoft.com/office/drawing/2014/main" id="{7497F792-A4EE-ECC5-FAD5-9406A9CECBA9}"/>
               </a:ext>
             </a:extLst>
           </p:cNvPr>
@@ -21213,7 +21213,7 @@
     </p:spTree>
     <p:extLst>
       <p:ext uri="{BB962C8B-B14F-4D97-AF65-F5344CB8AC3E}">
-        <p14:creationId xmlns:p14="http://schemas.microsoft.com/office/powerpoint/2010/main" val="279924822"/>
+        <p14:creationId xmlns:p14="http://schemas.microsoft.com/office/powerpoint/2010/main" val="2432483078"/>
       </p:ext>
     </p:extLst>
   </p:cSld>
@@ -21245,7 +21245,7 @@
           <p:cNvPr id="7" name="creative_background">
             <a:extLst>
               <a:ext uri="{FF2B5EF4-FFF2-40B4-BE49-F238E27FC236}">
-                <a16:creationId xmlns:a16="http://schemas.microsoft.com/office/drawing/2014/main" id="{AFE953E2-B28F-6E01-677F-7D035A04E7FB}"/>
+                <a16:creationId xmlns:a16="http://schemas.microsoft.com/office/drawing/2014/main" id="{1B6295D7-5DDB-A8F3-7994-33BDA2FC4863}"/>
               </a:ext>
             </a:extLst>
           </p:cNvPr>
@@ -21328,9 +21328,9 @@
           <a:bodyPr/>
           <a:lstStyle/>
           <a:p>
-            <a:fld id="{4354DB14-F9AE-4C12-8CFE-33ABF7B568CC}" type="datetimeFigureOut">
+            <a:fld id="{69C9F4DC-D411-4651-9AAC-29900672A9A6}" type="datetimeFigureOut">
               <a:rPr lang="en-US" smtClean="0"/>
-              <a:t>10/3/2026</a:t>
+              <a:t>10/4/2026</a:t>
             </a:fld>
             <a:endParaRPr lang="en-US"/>
           </a:p>
@@ -21370,7 +21370,7 @@
           <a:bodyPr/>
           <a:lstStyle/>
           <a:p>
-            <a:fld id="{74A457B9-11F0-4EFD-A461-9DC8C80A1D31}" type="slidenum">
+            <a:fld id="{B2681015-3E44-49AF-A930-B36E5E8634EC}" type="slidenum">
               <a:rPr lang="en-US" smtClean="0"/>
               <a:t>‹#›</a:t>
             </a:fld>
@@ -21383,7 +21383,7 @@
           <p:cNvPr id="8" name="item_1_title">
             <a:extLst>
               <a:ext uri="{FF2B5EF4-FFF2-40B4-BE49-F238E27FC236}">
-                <a16:creationId xmlns:a16="http://schemas.microsoft.com/office/drawing/2014/main" id="{A12324F2-1FB6-101B-7372-B130D78F6437}"/>
+                <a16:creationId xmlns:a16="http://schemas.microsoft.com/office/drawing/2014/main" id="{1A8675F1-3B52-1233-50EA-715CCC78F58A}"/>
               </a:ext>
             </a:extLst>
           </p:cNvPr>
@@ -21433,7 +21433,7 @@
           <p:cNvPr id="9" name="item_1">
             <a:extLst>
               <a:ext uri="{FF2B5EF4-FFF2-40B4-BE49-F238E27FC236}">
-                <a16:creationId xmlns:a16="http://schemas.microsoft.com/office/drawing/2014/main" id="{C23E9021-42E5-C1E2-7657-9B8807BC5A62}"/>
+                <a16:creationId xmlns:a16="http://schemas.microsoft.com/office/drawing/2014/main" id="{413F7400-91FE-E3BC-3014-DB5041B8A17F}"/>
               </a:ext>
             </a:extLst>
           </p:cNvPr>
@@ -21481,7 +21481,7 @@
           <p:cNvPr id="10" name="item_2_title">
             <a:extLst>
               <a:ext uri="{FF2B5EF4-FFF2-40B4-BE49-F238E27FC236}">
-                <a16:creationId xmlns:a16="http://schemas.microsoft.com/office/drawing/2014/main" id="{CCFB2E86-6F18-F3C2-6286-219FEA7A898B}"/>
+                <a16:creationId xmlns:a16="http://schemas.microsoft.com/office/drawing/2014/main" id="{CFFF07C7-AB58-1013-F0EA-DC73F9190220}"/>
               </a:ext>
             </a:extLst>
           </p:cNvPr>
@@ -21534,7 +21534,7 @@
           <p:cNvPr id="11" name="item_2">
             <a:extLst>
               <a:ext uri="{FF2B5EF4-FFF2-40B4-BE49-F238E27FC236}">
-                <a16:creationId xmlns:a16="http://schemas.microsoft.com/office/drawing/2014/main" id="{FB5C05CD-C30F-9C17-A40F-06E3A5D4C308}"/>
+                <a16:creationId xmlns:a16="http://schemas.microsoft.com/office/drawing/2014/main" id="{4D9BAFA5-8566-D583-08A4-E27808CE5C9E}"/>
               </a:ext>
             </a:extLst>
           </p:cNvPr>
@@ -21582,7 +21582,7 @@
           <p:cNvPr id="12" name="source">
             <a:extLst>
               <a:ext uri="{FF2B5EF4-FFF2-40B4-BE49-F238E27FC236}">
-                <a16:creationId xmlns:a16="http://schemas.microsoft.com/office/drawing/2014/main" id="{2F80D207-83B6-D234-1B45-7248E6D89924}"/>
+                <a16:creationId xmlns:a16="http://schemas.microsoft.com/office/drawing/2014/main" id="{F36C44FA-2D89-12AA-4218-4C493C2325E1}"/>
               </a:ext>
             </a:extLst>
           </p:cNvPr>
@@ -21637,7 +21637,7 @@
     </p:spTree>
     <p:extLst>
       <p:ext uri="{BB962C8B-B14F-4D97-AF65-F5344CB8AC3E}">
-        <p14:creationId xmlns:p14="http://schemas.microsoft.com/office/powerpoint/2010/main" val="3862557689"/>
+        <p14:creationId xmlns:p14="http://schemas.microsoft.com/office/powerpoint/2010/main" val="3388441061"/>
       </p:ext>
     </p:extLst>
   </p:cSld>
@@ -21669,7 +21669,7 @@
           <p:cNvPr id="7" name="creative_background">
             <a:extLst>
               <a:ext uri="{FF2B5EF4-FFF2-40B4-BE49-F238E27FC236}">
-                <a16:creationId xmlns:a16="http://schemas.microsoft.com/office/drawing/2014/main" id="{5944CC0A-BE2D-0125-D883-D9F468A22601}"/>
+                <a16:creationId xmlns:a16="http://schemas.microsoft.com/office/drawing/2014/main" id="{FA7F70D9-7359-9221-642F-369C196C278E}"/>
               </a:ext>
             </a:extLst>
           </p:cNvPr>
@@ -21752,9 +21752,9 @@
           <a:bodyPr/>
           <a:lstStyle/>
           <a:p>
-            <a:fld id="{4354DB14-F9AE-4C12-8CFE-33ABF7B568CC}" type="datetimeFigureOut">
+            <a:fld id="{69C9F4DC-D411-4651-9AAC-29900672A9A6}" type="datetimeFigureOut">
               <a:rPr lang="en-US" smtClean="0"/>
-              <a:t>10/3/2026</a:t>
+              <a:t>10/4/2026</a:t>
             </a:fld>
             <a:endParaRPr lang="en-US"/>
           </a:p>
@@ -21794,7 +21794,7 @@
           <a:bodyPr/>
           <a:lstStyle/>
           <a:p>
-            <a:fld id="{74A457B9-11F0-4EFD-A461-9DC8C80A1D31}" type="slidenum">
+            <a:fld id="{B2681015-3E44-49AF-A930-B36E5E8634EC}" type="slidenum">
               <a:rPr lang="en-US" smtClean="0"/>
               <a:t>‹#›</a:t>
             </a:fld>
@@ -21807,7 +21807,7 @@
           <p:cNvPr id="8" name="chart">
             <a:extLst>
               <a:ext uri="{FF2B5EF4-FFF2-40B4-BE49-F238E27FC236}">
-                <a16:creationId xmlns:a16="http://schemas.microsoft.com/office/drawing/2014/main" id="{3F5A4ADC-8692-DBD3-A336-DD45254BF883}"/>
+                <a16:creationId xmlns:a16="http://schemas.microsoft.com/office/drawing/2014/main" id="{BB8056E6-D962-0C5D-17AE-C44C0D0F9538}"/>
               </a:ext>
             </a:extLst>
           </p:cNvPr>
@@ -21837,7 +21837,7 @@
           <p:cNvPr id="9" name="body">
             <a:extLst>
               <a:ext uri="{FF2B5EF4-FFF2-40B4-BE49-F238E27FC236}">
-                <a16:creationId xmlns:a16="http://schemas.microsoft.com/office/drawing/2014/main" id="{ECEF18E4-5639-8D72-C5A7-F90351D8AA50}"/>
+                <a16:creationId xmlns:a16="http://schemas.microsoft.com/office/drawing/2014/main" id="{3EBD20B3-A94C-72D8-1861-87C75FE88CEB}"/>
               </a:ext>
             </a:extLst>
           </p:cNvPr>
@@ -21880,7 +21880,7 @@
           <p:cNvPr id="10" name="source">
             <a:extLst>
               <a:ext uri="{FF2B5EF4-FFF2-40B4-BE49-F238E27FC236}">
-                <a16:creationId xmlns:a16="http://schemas.microsoft.com/office/drawing/2014/main" id="{EA04BC84-9AA8-23F2-6310-E152729DD5EE}"/>
+                <a16:creationId xmlns:a16="http://schemas.microsoft.com/office/drawing/2014/main" id="{565A8DCD-AEDD-918C-D0E1-988A5D98A5BF}"/>
               </a:ext>
             </a:extLst>
           </p:cNvPr>
@@ -21935,7 +21935,7 @@
     </p:spTree>
     <p:extLst>
       <p:ext uri="{BB962C8B-B14F-4D97-AF65-F5344CB8AC3E}">
-        <p14:creationId xmlns:p14="http://schemas.microsoft.com/office/powerpoint/2010/main" val="2931113903"/>
+        <p14:creationId xmlns:p14="http://schemas.microsoft.com/office/powerpoint/2010/main" val="624823549"/>
       </p:ext>
     </p:extLst>
   </p:cSld>
@@ -21967,7 +21967,7 @@
           <p:cNvPr id="7" name="creative_background">
             <a:extLst>
               <a:ext uri="{FF2B5EF4-FFF2-40B4-BE49-F238E27FC236}">
-                <a16:creationId xmlns:a16="http://schemas.microsoft.com/office/drawing/2014/main" id="{F4C1BD5F-7D13-DA17-E757-15D91344EFB1}"/>
+                <a16:creationId xmlns:a16="http://schemas.microsoft.com/office/drawing/2014/main" id="{5435A0E8-BBB9-253C-B24D-844AF282A2D5}"/>
               </a:ext>
             </a:extLst>
           </p:cNvPr>
@@ -22050,9 +22050,9 @@
           <a:bodyPr/>
           <a:lstStyle/>
           <a:p>
-            <a:fld id="{4354DB14-F9AE-4C12-8CFE-33ABF7B568CC}" type="datetimeFigureOut">
+            <a:fld id="{69C9F4DC-D411-4651-9AAC-29900672A9A6}" type="datetimeFigureOut">
               <a:rPr lang="en-US" smtClean="0"/>
-              <a:t>10/3/2026</a:t>
+              <a:t>10/4/2026</a:t>
             </a:fld>
             <a:endParaRPr lang="en-US"/>
           </a:p>
@@ -22092,7 +22092,7 @@
           <a:bodyPr/>
           <a:lstStyle/>
           <a:p>
-            <a:fld id="{74A457B9-11F0-4EFD-A461-9DC8C80A1D31}" type="slidenum">
+            <a:fld id="{B2681015-3E44-49AF-A930-B36E5E8634EC}" type="slidenum">
               <a:rPr lang="en-US" smtClean="0"/>
               <a:t>‹#›</a:t>
             </a:fld>
@@ -22105,7 +22105,7 @@
           <p:cNvPr id="8" name="item_1_title">
             <a:extLst>
               <a:ext uri="{FF2B5EF4-FFF2-40B4-BE49-F238E27FC236}">
-                <a16:creationId xmlns:a16="http://schemas.microsoft.com/office/drawing/2014/main" id="{34122AE7-8360-2C22-9FB8-021AF412A174}"/>
+                <a16:creationId xmlns:a16="http://schemas.microsoft.com/office/drawing/2014/main" id="{739271E2-FDD0-1B56-01CA-99D66631CB2D}"/>
               </a:ext>
             </a:extLst>
           </p:cNvPr>
@@ -22155,7 +22155,7 @@
           <p:cNvPr id="9" name="item_1">
             <a:extLst>
               <a:ext uri="{FF2B5EF4-FFF2-40B4-BE49-F238E27FC236}">
-                <a16:creationId xmlns:a16="http://schemas.microsoft.com/office/drawing/2014/main" id="{8FD5EFEB-AD3C-B4CA-C4A3-B3B30895B0D5}"/>
+                <a16:creationId xmlns:a16="http://schemas.microsoft.com/office/drawing/2014/main" id="{4942B707-561D-4F5A-3C6F-3DD620D4E61A}"/>
               </a:ext>
             </a:extLst>
           </p:cNvPr>
@@ -22203,7 +22203,7 @@
           <p:cNvPr id="10" name="item_2_title">
             <a:extLst>
               <a:ext uri="{FF2B5EF4-FFF2-40B4-BE49-F238E27FC236}">
-                <a16:creationId xmlns:a16="http://schemas.microsoft.com/office/drawing/2014/main" id="{90667074-45DB-404B-2560-4652204E588D}"/>
+                <a16:creationId xmlns:a16="http://schemas.microsoft.com/office/drawing/2014/main" id="{74F45EE0-AFB1-37EF-0B32-8C4E698D1C58}"/>
               </a:ext>
             </a:extLst>
           </p:cNvPr>
@@ -22256,7 +22256,7 @@
           <p:cNvPr id="11" name="item_2">
             <a:extLst>
               <a:ext uri="{FF2B5EF4-FFF2-40B4-BE49-F238E27FC236}">
-                <a16:creationId xmlns:a16="http://schemas.microsoft.com/office/drawing/2014/main" id="{CD51FA82-2A4D-6094-043B-E6C0D1DB0ED2}"/>
+                <a16:creationId xmlns:a16="http://schemas.microsoft.com/office/drawing/2014/main" id="{7E766131-A5C9-5D2E-7204-B96CDE3B97D7}"/>
               </a:ext>
             </a:extLst>
           </p:cNvPr>
@@ -22304,7 +22304,7 @@
           <p:cNvPr id="12" name="item_3_title">
             <a:extLst>
               <a:ext uri="{FF2B5EF4-FFF2-40B4-BE49-F238E27FC236}">
-                <a16:creationId xmlns:a16="http://schemas.microsoft.com/office/drawing/2014/main" id="{14CFEE38-A269-538D-6067-A0C98D56C73F}"/>
+                <a16:creationId xmlns:a16="http://schemas.microsoft.com/office/drawing/2014/main" id="{AF8897B2-FD7A-18A5-6807-5E4285C1E268}"/>
               </a:ext>
             </a:extLst>
           </p:cNvPr>
@@ -22357,7 +22357,7 @@
           <p:cNvPr id="13" name="item_3">
             <a:extLst>
               <a:ext uri="{FF2B5EF4-FFF2-40B4-BE49-F238E27FC236}">
-                <a16:creationId xmlns:a16="http://schemas.microsoft.com/office/drawing/2014/main" id="{DA4BA553-8EF4-A444-1314-6BC3ABDE3125}"/>
+                <a16:creationId xmlns:a16="http://schemas.microsoft.com/office/drawing/2014/main" id="{AE58D9E1-DBF8-AB6C-E20F-2CE66F0FF5C6}"/>
               </a:ext>
             </a:extLst>
           </p:cNvPr>
@@ -22405,7 +22405,7 @@
           <p:cNvPr id="14" name="item_4_title">
             <a:extLst>
               <a:ext uri="{FF2B5EF4-FFF2-40B4-BE49-F238E27FC236}">
-                <a16:creationId xmlns:a16="http://schemas.microsoft.com/office/drawing/2014/main" id="{2584A2F2-2411-1E97-989D-7377CA3F1041}"/>
+                <a16:creationId xmlns:a16="http://schemas.microsoft.com/office/drawing/2014/main" id="{9C2D32DD-294E-246D-2C3E-CC514E9DAB31}"/>
               </a:ext>
             </a:extLst>
           </p:cNvPr>
@@ -22458,7 +22458,7 @@
           <p:cNvPr id="15" name="item_4">
             <a:extLst>
               <a:ext uri="{FF2B5EF4-FFF2-40B4-BE49-F238E27FC236}">
-                <a16:creationId xmlns:a16="http://schemas.microsoft.com/office/drawing/2014/main" id="{660D87C9-409D-41FC-6F95-03515B718B7B}"/>
+                <a16:creationId xmlns:a16="http://schemas.microsoft.com/office/drawing/2014/main" id="{0D2280C2-A673-0006-53FE-58275FD2BD69}"/>
               </a:ext>
             </a:extLst>
           </p:cNvPr>
@@ -22506,7 +22506,7 @@
           <p:cNvPr id="16" name="source">
             <a:extLst>
               <a:ext uri="{FF2B5EF4-FFF2-40B4-BE49-F238E27FC236}">
-                <a16:creationId xmlns:a16="http://schemas.microsoft.com/office/drawing/2014/main" id="{890280A6-3689-0F02-2AAB-8809715EF297}"/>
+                <a16:creationId xmlns:a16="http://schemas.microsoft.com/office/drawing/2014/main" id="{EB1374BB-797E-2794-216C-260E89D4DA22}"/>
               </a:ext>
             </a:extLst>
           </p:cNvPr>
@@ -22561,7 +22561,7 @@
     </p:spTree>
     <p:extLst>
       <p:ext uri="{BB962C8B-B14F-4D97-AF65-F5344CB8AC3E}">
-        <p14:creationId xmlns:p14="http://schemas.microsoft.com/office/powerpoint/2010/main" val="1771250427"/>
+        <p14:creationId xmlns:p14="http://schemas.microsoft.com/office/powerpoint/2010/main" val="4268443817"/>
       </p:ext>
     </p:extLst>
   </p:cSld>
@@ -22598,7 +22598,7 @@
           <p:cNvPr id="9" name="creative_background_master">
             <a:extLst>
               <a:ext uri="{FF2B5EF4-FFF2-40B4-BE49-F238E27FC236}">
-                <a16:creationId xmlns:a16="http://schemas.microsoft.com/office/drawing/2014/main" id="{C4851DB9-691F-A709-A044-0F355536F06D}"/>
+                <a16:creationId xmlns:a16="http://schemas.microsoft.com/office/drawing/2014/main" id="{390F9727-32E0-D674-8FC1-EAC88F85E91F}"/>
               </a:ext>
             </a:extLst>
           </p:cNvPr>
@@ -22759,9 +22759,9 @@
             </a:lvl1pPr>
           </a:lstStyle>
           <a:p>
-            <a:fld id="{4354DB14-F9AE-4C12-8CFE-33ABF7B568CC}" type="datetimeFigureOut">
+            <a:fld id="{69C9F4DC-D411-4651-9AAC-29900672A9A6}" type="datetimeFigureOut">
               <a:rPr lang="en-US" smtClean="0"/>
-              <a:t>10/3/2026</a:t>
+              <a:t>10/4/2026</a:t>
             </a:fld>
             <a:endParaRPr lang="en-US"/>
           </a:p>
@@ -22841,7 +22841,7 @@
             </a:lvl1pPr>
           </a:lstStyle>
           <a:p>
-            <a:fld id="{74A457B9-11F0-4EFD-A461-9DC8C80A1D31}" type="slidenum">
+            <a:fld id="{B2681015-3E44-49AF-A930-B36E5E8634EC}" type="slidenum">
               <a:rPr lang="en-US" smtClean="0"/>
               <a:t>‹#›</a:t>
             </a:fld>
@@ -22852,7 +22852,7 @@
     </p:spTree>
     <p:extLst>
       <p:ext uri="{BB962C8B-B14F-4D97-AF65-F5344CB8AC3E}">
-        <p14:creationId xmlns:p14="http://schemas.microsoft.com/office/powerpoint/2010/main" val="4108617433"/>
+        <p14:creationId xmlns:p14="http://schemas.microsoft.com/office/powerpoint/2010/main" val="710245890"/>
       </p:ext>
     </p:extLst>
   </p:cSld>
